--- a/decks/Molecular_01_Molecular-Methods-for-Residents.pptx
+++ b/decks/Molecular_01_Molecular-Methods-for-Residents.pptx
@@ -26,9 +26,14 @@
     <p:sldId id="274" r:id="rId20"/>
     <p:sldId id="275" r:id="rId21"/>
     <p:sldId id="276" r:id="rId22"/>
+    <p:sldId id="277" r:id="rId23"/>
+    <p:sldId id="278" r:id="rId24"/>
+    <p:sldId id="279" r:id="rId25"/>
+    <p:sldId id="280" r:id="rId26"/>
+    <p:sldId id="281" r:id="rId27"/>
   </p:sldIdLst>
   <p:notesMasterIdLst>
-    <p:notesMasterId r:id="rId23"/>
+    <p:notesMasterId r:id="rId28"/>
   </p:notesMasterIdLst>
   <p:sldSz cx="12191695" cy="6858000"/>
   <p:notesSz cx="6858000" cy="12191695"/>
@@ -1690,6 +1695,446 @@
             <a:fld id="{F7021451-1387-4CA6-816F-3879F97B5CBC}" type="slidenum">
               <a:rPr lang="en-US"/>
               <a:t>21</a:t>
+            </a:fld>
+            <a:endParaRPr lang="en-US"/>
+          </a:p>
+        </p:txBody>
+      </p:sp>
+    </p:spTree>
+    <p:extLst>
+      <p:ext uri="{BB962C8B-B14F-4D97-AF65-F5344CB8AC3E}">
+        <p14:creationId xmlns:p14="http://schemas.microsoft.com/office/powerpoint/2010/main" val="1024086991"/>
+      </p:ext>
+    </p:extLst>
+  </p:cSld>
+  <p:clrMapOvr>
+    <a:masterClrMapping/>
+  </p:clrMapOvr>
+</p:notes>
+</file>
+
+<file path=ppt/notesSlides/notesSlide22.xml><?xml version="1.0" encoding="utf-8"?>
+<p:notes xmlns:a="http://schemas.openxmlformats.org/drawingml/2006/main" xmlns:r="http://schemas.openxmlformats.org/officeDocument/2006/relationships" xmlns:p="http://schemas.openxmlformats.org/presentationml/2006/main">
+  <p:cSld>
+    <p:spTree>
+      <p:nvGrpSpPr>
+        <p:cNvPr id="1" name=""/>
+        <p:cNvGrpSpPr/>
+        <p:nvPr/>
+      </p:nvGrpSpPr>
+      <p:grpSpPr>
+        <a:xfrm>
+          <a:off x="0" y="0"/>
+          <a:ext cx="0" cy="0"/>
+          <a:chOff x="0" y="0"/>
+          <a:chExt cx="0" cy="0"/>
+        </a:xfrm>
+      </p:grpSpPr>
+      <p:sp>
+        <p:nvSpPr>
+          <p:cNvPr id="2" name="Slide Image Placeholder 1"/>
+          <p:cNvSpPr>
+            <a:spLocks noGrp="1" noRot="1" noChangeAspect="1"/>
+          </p:cNvSpPr>
+          <p:nvPr>
+            <p:ph type="sldImg"/>
+          </p:nvPr>
+        </p:nvSpPr>
+        <p:spPr/>
+      </p:sp>
+      <p:sp>
+        <p:nvSpPr>
+          <p:cNvPr id="3" name="Notes Placeholder 2"/>
+          <p:cNvSpPr>
+            <a:spLocks noGrp="1"/>
+          </p:cNvSpPr>
+          <p:nvPr>
+            <p:ph type="body" idx="1"/>
+          </p:nvPr>
+        </p:nvSpPr>
+        <p:spPr/>
+        <p:txBody>
+          <a:bodyPr/>
+          <a:lstStyle/>
+          <a:p>
+            <a:r>
+              <a:rPr lang="en-US" dirty="0"/>
+              <a:t/>
+            </a:r>
+            <a:endParaRPr lang="en-US" dirty="0"/>
+          </a:p>
+        </p:txBody>
+      </p:sp>
+      <p:sp>
+        <p:nvSpPr>
+          <p:cNvPr id="4" name="Slide Number Placeholder 3"/>
+          <p:cNvSpPr>
+            <a:spLocks noGrp="1"/>
+          </p:cNvSpPr>
+          <p:nvPr>
+            <p:ph type="sldNum" sz="quarter" idx="10"/>
+          </p:nvPr>
+        </p:nvSpPr>
+        <p:spPr/>
+        <p:txBody>
+          <a:bodyPr/>
+          <a:lstStyle/>
+          <a:p>
+            <a:fld id="{F7021451-1387-4CA6-816F-3879F97B5CBC}" type="slidenum">
+              <a:rPr lang="en-US"/>
+              <a:t>22</a:t>
+            </a:fld>
+            <a:endParaRPr lang="en-US"/>
+          </a:p>
+        </p:txBody>
+      </p:sp>
+    </p:spTree>
+    <p:extLst>
+      <p:ext uri="{BB962C8B-B14F-4D97-AF65-F5344CB8AC3E}">
+        <p14:creationId xmlns:p14="http://schemas.microsoft.com/office/powerpoint/2010/main" val="1024086991"/>
+      </p:ext>
+    </p:extLst>
+  </p:cSld>
+  <p:clrMapOvr>
+    <a:masterClrMapping/>
+  </p:clrMapOvr>
+</p:notes>
+</file>
+
+<file path=ppt/notesSlides/notesSlide23.xml><?xml version="1.0" encoding="utf-8"?>
+<p:notes xmlns:a="http://schemas.openxmlformats.org/drawingml/2006/main" xmlns:r="http://schemas.openxmlformats.org/officeDocument/2006/relationships" xmlns:p="http://schemas.openxmlformats.org/presentationml/2006/main">
+  <p:cSld>
+    <p:spTree>
+      <p:nvGrpSpPr>
+        <p:cNvPr id="1" name=""/>
+        <p:cNvGrpSpPr/>
+        <p:nvPr/>
+      </p:nvGrpSpPr>
+      <p:grpSpPr>
+        <a:xfrm>
+          <a:off x="0" y="0"/>
+          <a:ext cx="0" cy="0"/>
+          <a:chOff x="0" y="0"/>
+          <a:chExt cx="0" cy="0"/>
+        </a:xfrm>
+      </p:grpSpPr>
+      <p:sp>
+        <p:nvSpPr>
+          <p:cNvPr id="2" name="Slide Image Placeholder 1"/>
+          <p:cNvSpPr>
+            <a:spLocks noGrp="1" noRot="1" noChangeAspect="1"/>
+          </p:cNvSpPr>
+          <p:nvPr>
+            <p:ph type="sldImg"/>
+          </p:nvPr>
+        </p:nvSpPr>
+        <p:spPr/>
+      </p:sp>
+      <p:sp>
+        <p:nvSpPr>
+          <p:cNvPr id="3" name="Notes Placeholder 2"/>
+          <p:cNvSpPr>
+            <a:spLocks noGrp="1"/>
+          </p:cNvSpPr>
+          <p:nvPr>
+            <p:ph type="body" idx="1"/>
+          </p:nvPr>
+        </p:nvSpPr>
+        <p:spPr/>
+        <p:txBody>
+          <a:bodyPr/>
+          <a:lstStyle/>
+          <a:p>
+            <a:r>
+              <a:rPr lang="en-US" dirty="0"/>
+              <a:t/>
+            </a:r>
+            <a:endParaRPr lang="en-US" dirty="0"/>
+          </a:p>
+        </p:txBody>
+      </p:sp>
+      <p:sp>
+        <p:nvSpPr>
+          <p:cNvPr id="4" name="Slide Number Placeholder 3"/>
+          <p:cNvSpPr>
+            <a:spLocks noGrp="1"/>
+          </p:cNvSpPr>
+          <p:nvPr>
+            <p:ph type="sldNum" sz="quarter" idx="10"/>
+          </p:nvPr>
+        </p:nvSpPr>
+        <p:spPr/>
+        <p:txBody>
+          <a:bodyPr/>
+          <a:lstStyle/>
+          <a:p>
+            <a:fld id="{F7021451-1387-4CA6-816F-3879F97B5CBC}" type="slidenum">
+              <a:rPr lang="en-US"/>
+              <a:t>23</a:t>
+            </a:fld>
+            <a:endParaRPr lang="en-US"/>
+          </a:p>
+        </p:txBody>
+      </p:sp>
+    </p:spTree>
+    <p:extLst>
+      <p:ext uri="{BB962C8B-B14F-4D97-AF65-F5344CB8AC3E}">
+        <p14:creationId xmlns:p14="http://schemas.microsoft.com/office/powerpoint/2010/main" val="1024086991"/>
+      </p:ext>
+    </p:extLst>
+  </p:cSld>
+  <p:clrMapOvr>
+    <a:masterClrMapping/>
+  </p:clrMapOvr>
+</p:notes>
+</file>
+
+<file path=ppt/notesSlides/notesSlide24.xml><?xml version="1.0" encoding="utf-8"?>
+<p:notes xmlns:a="http://schemas.openxmlformats.org/drawingml/2006/main" xmlns:r="http://schemas.openxmlformats.org/officeDocument/2006/relationships" xmlns:p="http://schemas.openxmlformats.org/presentationml/2006/main">
+  <p:cSld>
+    <p:spTree>
+      <p:nvGrpSpPr>
+        <p:cNvPr id="1" name=""/>
+        <p:cNvGrpSpPr/>
+        <p:nvPr/>
+      </p:nvGrpSpPr>
+      <p:grpSpPr>
+        <a:xfrm>
+          <a:off x="0" y="0"/>
+          <a:ext cx="0" cy="0"/>
+          <a:chOff x="0" y="0"/>
+          <a:chExt cx="0" cy="0"/>
+        </a:xfrm>
+      </p:grpSpPr>
+      <p:sp>
+        <p:nvSpPr>
+          <p:cNvPr id="2" name="Slide Image Placeholder 1"/>
+          <p:cNvSpPr>
+            <a:spLocks noGrp="1" noRot="1" noChangeAspect="1"/>
+          </p:cNvSpPr>
+          <p:nvPr>
+            <p:ph type="sldImg"/>
+          </p:nvPr>
+        </p:nvSpPr>
+        <p:spPr/>
+      </p:sp>
+      <p:sp>
+        <p:nvSpPr>
+          <p:cNvPr id="3" name="Notes Placeholder 2"/>
+          <p:cNvSpPr>
+            <a:spLocks noGrp="1"/>
+          </p:cNvSpPr>
+          <p:nvPr>
+            <p:ph type="body" idx="1"/>
+          </p:nvPr>
+        </p:nvSpPr>
+        <p:spPr/>
+        <p:txBody>
+          <a:bodyPr/>
+          <a:lstStyle/>
+          <a:p>
+            <a:r>
+              <a:rPr lang="en-US" dirty="0"/>
+              <a:t/>
+            </a:r>
+            <a:endParaRPr lang="en-US" dirty="0"/>
+          </a:p>
+        </p:txBody>
+      </p:sp>
+      <p:sp>
+        <p:nvSpPr>
+          <p:cNvPr id="4" name="Slide Number Placeholder 3"/>
+          <p:cNvSpPr>
+            <a:spLocks noGrp="1"/>
+          </p:cNvSpPr>
+          <p:nvPr>
+            <p:ph type="sldNum" sz="quarter" idx="10"/>
+          </p:nvPr>
+        </p:nvSpPr>
+        <p:spPr/>
+        <p:txBody>
+          <a:bodyPr/>
+          <a:lstStyle/>
+          <a:p>
+            <a:fld id="{F7021451-1387-4CA6-816F-3879F97B5CBC}" type="slidenum">
+              <a:rPr lang="en-US"/>
+              <a:t>24</a:t>
+            </a:fld>
+            <a:endParaRPr lang="en-US"/>
+          </a:p>
+        </p:txBody>
+      </p:sp>
+    </p:spTree>
+    <p:extLst>
+      <p:ext uri="{BB962C8B-B14F-4D97-AF65-F5344CB8AC3E}">
+        <p14:creationId xmlns:p14="http://schemas.microsoft.com/office/powerpoint/2010/main" val="1024086991"/>
+      </p:ext>
+    </p:extLst>
+  </p:cSld>
+  <p:clrMapOvr>
+    <a:masterClrMapping/>
+  </p:clrMapOvr>
+</p:notes>
+</file>
+
+<file path=ppt/notesSlides/notesSlide25.xml><?xml version="1.0" encoding="utf-8"?>
+<p:notes xmlns:a="http://schemas.openxmlformats.org/drawingml/2006/main" xmlns:r="http://schemas.openxmlformats.org/officeDocument/2006/relationships" xmlns:p="http://schemas.openxmlformats.org/presentationml/2006/main">
+  <p:cSld>
+    <p:spTree>
+      <p:nvGrpSpPr>
+        <p:cNvPr id="1" name=""/>
+        <p:cNvGrpSpPr/>
+        <p:nvPr/>
+      </p:nvGrpSpPr>
+      <p:grpSpPr>
+        <a:xfrm>
+          <a:off x="0" y="0"/>
+          <a:ext cx="0" cy="0"/>
+          <a:chOff x="0" y="0"/>
+          <a:chExt cx="0" cy="0"/>
+        </a:xfrm>
+      </p:grpSpPr>
+      <p:sp>
+        <p:nvSpPr>
+          <p:cNvPr id="2" name="Slide Image Placeholder 1"/>
+          <p:cNvSpPr>
+            <a:spLocks noGrp="1" noRot="1" noChangeAspect="1"/>
+          </p:cNvSpPr>
+          <p:nvPr>
+            <p:ph type="sldImg"/>
+          </p:nvPr>
+        </p:nvSpPr>
+        <p:spPr/>
+      </p:sp>
+      <p:sp>
+        <p:nvSpPr>
+          <p:cNvPr id="3" name="Notes Placeholder 2"/>
+          <p:cNvSpPr>
+            <a:spLocks noGrp="1"/>
+          </p:cNvSpPr>
+          <p:nvPr>
+            <p:ph type="body" idx="1"/>
+          </p:nvPr>
+        </p:nvSpPr>
+        <p:spPr/>
+        <p:txBody>
+          <a:bodyPr/>
+          <a:lstStyle/>
+          <a:p>
+            <a:r>
+              <a:rPr lang="en-US" dirty="0"/>
+              <a:t/>
+            </a:r>
+            <a:endParaRPr lang="en-US" dirty="0"/>
+          </a:p>
+        </p:txBody>
+      </p:sp>
+      <p:sp>
+        <p:nvSpPr>
+          <p:cNvPr id="4" name="Slide Number Placeholder 3"/>
+          <p:cNvSpPr>
+            <a:spLocks noGrp="1"/>
+          </p:cNvSpPr>
+          <p:nvPr>
+            <p:ph type="sldNum" sz="quarter" idx="10"/>
+          </p:nvPr>
+        </p:nvSpPr>
+        <p:spPr/>
+        <p:txBody>
+          <a:bodyPr/>
+          <a:lstStyle/>
+          <a:p>
+            <a:fld id="{F7021451-1387-4CA6-816F-3879F97B5CBC}" type="slidenum">
+              <a:rPr lang="en-US"/>
+              <a:t>25</a:t>
+            </a:fld>
+            <a:endParaRPr lang="en-US"/>
+          </a:p>
+        </p:txBody>
+      </p:sp>
+    </p:spTree>
+    <p:extLst>
+      <p:ext uri="{BB962C8B-B14F-4D97-AF65-F5344CB8AC3E}">
+        <p14:creationId xmlns:p14="http://schemas.microsoft.com/office/powerpoint/2010/main" val="1024086991"/>
+      </p:ext>
+    </p:extLst>
+  </p:cSld>
+  <p:clrMapOvr>
+    <a:masterClrMapping/>
+  </p:clrMapOvr>
+</p:notes>
+</file>
+
+<file path=ppt/notesSlides/notesSlide26.xml><?xml version="1.0" encoding="utf-8"?>
+<p:notes xmlns:a="http://schemas.openxmlformats.org/drawingml/2006/main" xmlns:r="http://schemas.openxmlformats.org/officeDocument/2006/relationships" xmlns:p="http://schemas.openxmlformats.org/presentationml/2006/main">
+  <p:cSld>
+    <p:spTree>
+      <p:nvGrpSpPr>
+        <p:cNvPr id="1" name=""/>
+        <p:cNvGrpSpPr/>
+        <p:nvPr/>
+      </p:nvGrpSpPr>
+      <p:grpSpPr>
+        <a:xfrm>
+          <a:off x="0" y="0"/>
+          <a:ext cx="0" cy="0"/>
+          <a:chOff x="0" y="0"/>
+          <a:chExt cx="0" cy="0"/>
+        </a:xfrm>
+      </p:grpSpPr>
+      <p:sp>
+        <p:nvSpPr>
+          <p:cNvPr id="2" name="Slide Image Placeholder 1"/>
+          <p:cNvSpPr>
+            <a:spLocks noGrp="1" noRot="1" noChangeAspect="1"/>
+          </p:cNvSpPr>
+          <p:nvPr>
+            <p:ph type="sldImg"/>
+          </p:nvPr>
+        </p:nvSpPr>
+        <p:spPr/>
+      </p:sp>
+      <p:sp>
+        <p:nvSpPr>
+          <p:cNvPr id="3" name="Notes Placeholder 2"/>
+          <p:cNvSpPr>
+            <a:spLocks noGrp="1"/>
+          </p:cNvSpPr>
+          <p:nvPr>
+            <p:ph type="body" idx="1"/>
+          </p:nvPr>
+        </p:nvSpPr>
+        <p:spPr/>
+        <p:txBody>
+          <a:bodyPr/>
+          <a:lstStyle/>
+          <a:p>
+            <a:r>
+              <a:rPr lang="en-US" dirty="0"/>
+              <a:t/>
+            </a:r>
+            <a:endParaRPr lang="en-US" dirty="0"/>
+          </a:p>
+        </p:txBody>
+      </p:sp>
+      <p:sp>
+        <p:nvSpPr>
+          <p:cNvPr id="4" name="Slide Number Placeholder 3"/>
+          <p:cNvSpPr>
+            <a:spLocks noGrp="1"/>
+          </p:cNvSpPr>
+          <p:nvPr>
+            <p:ph type="sldNum" sz="quarter" idx="10"/>
+          </p:nvPr>
+        </p:nvSpPr>
+        <p:spPr/>
+        <p:txBody>
+          <a:bodyPr/>
+          <a:lstStyle/>
+          <a:p>
+            <a:fld id="{F7021451-1387-4CA6-816F-3879F97B5CBC}" type="slidenum">
+              <a:rPr lang="en-US"/>
+              <a:t>26</a:t>
             </a:fld>
             <a:endParaRPr lang="en-US"/>
           </a:p>
@@ -2893,7 +3338,7 @@
                 <a:ea typeface="Calibri" pitchFamily="34" charset="-122"/>
                 <a:cs typeface="Calibri" pitchFamily="34" charset="-120"/>
               </a:rPr>
-              <a:t>PCR, FISH, Karyotype, and NGS — Choosing the Right Tool</a:t>
+              <a:t>PCR, Real-Time/Digital PCR, Sequencing &amp; Hybridization</a:t>
             </a:r>
             <a:endParaRPr lang="en-US" sz="1900" dirty="0"/>
           </a:p>
@@ -3124,7 +3569,7 @@
                 <a:ea typeface="Calibri" pitchFamily="34" charset="-122"/>
                 <a:cs typeface="Calibri" pitchFamily="34" charset="-120"/>
               </a:rPr>
-              <a:t>Next-Generation Sequencing Workflow</a:t>
+              <a:t>Sanger vs Next-Generation Sequencing</a:t>
             </a:r>
             <a:endParaRPr lang="en-US" sz="3000" dirty="0"/>
           </a:p>
@@ -3138,12 +3583,12 @@
         </p:nvSpPr>
         <p:spPr>
           <a:xfrm>
-            <a:off x="1066648" y="1481328"/>
-            <a:ext cx="10058400" cy="3483864"/>
+            <a:off x="975208" y="1481328"/>
+            <a:ext cx="10241280" cy="4261104"/>
           </a:xfrm>
           <a:prstGeom prst="roundRect">
             <a:avLst>
-              <a:gd name="adj" fmla="val 2362"/>
+              <a:gd name="adj" fmla="val 1931"/>
             </a:avLst>
           </a:prstGeom>
           <a:solidFill>
@@ -3180,8 +3625,8 @@
         </p:blipFill>
         <p:spPr>
           <a:xfrm>
-            <a:off x="1194664" y="1609344"/>
-            <a:ext cx="9802368" cy="3227832"/>
+            <a:off x="1103224" y="1609344"/>
+            <a:ext cx="9985248" cy="4005072"/>
           </a:xfrm>
           <a:prstGeom prst="rect">
             <a:avLst/>
@@ -3196,7 +3641,7 @@
         </p:nvSpPr>
         <p:spPr>
           <a:xfrm>
-            <a:off x="566928" y="5038344"/>
+            <a:off x="566928" y="5815584"/>
             <a:ext cx="11057839" cy="365760"/>
           </a:xfrm>
           <a:prstGeom prst="rect">
@@ -3221,7 +3666,7 @@
                 <a:ea typeface="Calibri" pitchFamily="34" charset="-122"/>
                 <a:cs typeface="Calibri" pitchFamily="34" charset="-120"/>
               </a:rPr>
-              <a:t>Original schematic. NGS sequences many targets in parallel; the bioinformatics pipeline is part of the assay.</a:t>
+              <a:t>Original schematic. Sanger reads one amplicon at high confidence; NGS reads millions of fragments in parallel.</a:t>
             </a:r>
             <a:endParaRPr lang="en-US" sz="1150" dirty="0"/>
           </a:p>
@@ -3437,7 +3882,7 @@
                 <a:ea typeface="Calibri" pitchFamily="34" charset="-122"/>
                 <a:cs typeface="Calibri" pitchFamily="34" charset="-120"/>
               </a:rPr>
-              <a:t>Sanger vs NGS and Choosing a Platform</a:t>
+              <a:t>Choosing a Sequencing Approach</a:t>
             </a:r>
             <a:endParaRPr lang="en-US" sz="3000" dirty="0"/>
           </a:p>
@@ -3505,7 +3950,7 @@
                 <a:ea typeface="Calibri" pitchFamily="34" charset="-122"/>
                 <a:cs typeface="Calibri" pitchFamily="34" charset="-120"/>
               </a:rPr>
-              <a:t>SANGER VS NGS</a:t>
+              <a:t>SANGER SEQUENCING</a:t>
             </a:r>
             <a:endParaRPr lang="en-US" sz="1200" dirty="0"/>
           </a:p>
@@ -3548,7 +3993,7 @@
                 <a:ea typeface="Calibri" pitchFamily="34" charset="-122"/>
                 <a:cs typeface="Calibri" pitchFamily="34" charset="-120"/>
               </a:rPr>
-              <a:t>Sanger sequencing: gold standard for single exons/variants; limited sensitivity (~15–20% variant fraction).</a:t>
+              <a:t>Gold standard for single amplicons; ~15–20% limit of detection for variants.</a:t>
             </a:r>
             <a:endParaRPr lang="en-US" sz="1250" dirty="0"/>
           </a:p>
@@ -3569,7 +4014,7 @@
                 <a:ea typeface="Calibri" pitchFamily="34" charset="-122"/>
                 <a:cs typeface="Calibri" pitchFamily="34" charset="-120"/>
               </a:rPr>
-              <a:t>NGS: massively parallel — panels, exomes, genomes; detects low-level variants with adequate depth.</a:t>
+              <a:t>Simple, fast for one target.</a:t>
             </a:r>
             <a:endParaRPr lang="en-US" sz="1250" dirty="0"/>
           </a:p>
@@ -3590,7 +4035,7 @@
                 <a:ea typeface="Calibri" pitchFamily="34" charset="-122"/>
                 <a:cs typeface="Calibri" pitchFamily="34" charset="-120"/>
               </a:rPr>
-              <a:t>NGS gives breadth (many genes) and depth (low allele fractions) in one run.</a:t>
+              <a:t>Often used to confirm NGS findings.</a:t>
             </a:r>
             <a:endParaRPr lang="en-US" sz="1250" dirty="0"/>
           </a:p>
@@ -3611,7 +4056,7 @@
                 <a:ea typeface="Calibri" pitchFamily="34" charset="-122"/>
                 <a:cs typeface="Calibri" pitchFamily="34" charset="-120"/>
               </a:rPr>
-              <a:t>Sanger still used to confirm select variants.</a:t>
+              <a:t>Not suited to many targets or low-level variants.</a:t>
             </a:r>
             <a:endParaRPr lang="en-US" sz="1250" dirty="0"/>
           </a:p>
@@ -3634,7 +4079,7 @@
             </a:avLst>
           </a:prstGeom>
           <a:solidFill>
-            <a:srgbClr val="E0F2F4"/>
+            <a:srgbClr val="DDF0EF"/>
           </a:solidFill>
           <a:ln/>
           <a:effectLst>
@@ -3679,7 +4124,7 @@
                 <a:ea typeface="Calibri" pitchFamily="34" charset="-122"/>
                 <a:cs typeface="Calibri" pitchFamily="34" charset="-120"/>
               </a:rPr>
-              <a:t>MATCH METHOD TO QUESTION</a:t>
+              <a:t>NEXT-GENERATION SEQUENCING</a:t>
             </a:r>
             <a:endParaRPr lang="en-US" sz="1200" dirty="0"/>
           </a:p>
@@ -3722,7 +4167,7 @@
                 <a:ea typeface="Calibri" pitchFamily="34" charset="-122"/>
                 <a:cs typeface="Calibri" pitchFamily="34" charset="-120"/>
               </a:rPr>
-              <a:t>Known single target → PCR/FISH; genome-wide structure → karyotype/microarray; many genes → NGS.</a:t>
+              <a:t>Massively parallel; panels, exomes, or genomes; detects low variant allele fractions.</a:t>
             </a:r>
             <a:endParaRPr lang="en-US" sz="1250" dirty="0"/>
           </a:p>
@@ -3743,7 +4188,7 @@
                 <a:ea typeface="Calibri" pitchFamily="34" charset="-122"/>
                 <a:cs typeface="Calibri" pitchFamily="34" charset="-120"/>
               </a:rPr>
-              <a:t>Fusion transcript → RT-PCR or RNA-based NGS.</a:t>
+              <a:t>Depth of coverage governs sensitivity.</a:t>
             </a:r>
             <a:endParaRPr lang="en-US" sz="1250" dirty="0"/>
           </a:p>
@@ -3764,7 +4209,7 @@
                 <a:ea typeface="Calibri" pitchFamily="34" charset="-122"/>
                 <a:cs typeface="Calibri" pitchFamily="34" charset="-120"/>
               </a:rPr>
-              <a:t>Copy-number / microdeletion → chromosomal microarray.</a:t>
+              <a:t>Generates large bioinformatic output (alignment, variant calling).</a:t>
             </a:r>
             <a:endParaRPr lang="en-US" sz="1250" dirty="0"/>
           </a:p>
@@ -3785,7 +4230,7 @@
                 <a:ea typeface="Calibri" pitchFamily="34" charset="-122"/>
                 <a:cs typeface="Calibri" pitchFamily="34" charset="-120"/>
               </a:rPr>
-              <a:t>Consider turnaround, tissue adequacy, and cost.</a:t>
+              <a:t>Ideal for multi-gene panels and discovery.</a:t>
             </a:r>
             <a:endParaRPr lang="en-US" sz="1250" dirty="0"/>
           </a:p>
@@ -3908,6 +4353,570 @@
 <file path=ppt/slides/slide12.xml><?xml version="1.0" encoding="utf-8"?>
 <p:sld xmlns:a="http://schemas.openxmlformats.org/drawingml/2006/main" xmlns:r="http://schemas.openxmlformats.org/officeDocument/2006/relationships" xmlns:p="http://schemas.openxmlformats.org/presentationml/2006/main">
   <p:cSld name="Slide 12">
+    <p:bg>
+      <p:bgPr>
+        <a:solidFill>
+          <a:srgbClr val="FFFFFF"/>
+        </a:solidFill>
+      </p:bgPr>
+    </p:bg>
+    <p:spTree>
+      <p:nvGrpSpPr>
+        <p:cNvPr id="1" name=""/>
+        <p:cNvGrpSpPr/>
+        <p:nvPr/>
+      </p:nvGrpSpPr>
+      <p:grpSpPr>
+        <a:xfrm>
+          <a:off x="0" y="0"/>
+          <a:ext cx="0" cy="0"/>
+          <a:chOff x="0" y="0"/>
+          <a:chExt cx="0" cy="0"/>
+        </a:xfrm>
+      </p:grpSpPr>
+      <p:sp>
+        <p:nvSpPr>
+          <p:cNvPr id="2" name="Text 0"/>
+          <p:cNvSpPr/>
+          <p:nvPr/>
+        </p:nvSpPr>
+        <p:spPr>
+          <a:xfrm>
+            <a:off x="566928" y="329184"/>
+            <a:ext cx="10515600" cy="310896"/>
+          </a:xfrm>
+          <a:prstGeom prst="rect">
+            <a:avLst/>
+          </a:prstGeom>
+          <a:noFill/>
+          <a:ln/>
+        </p:spPr>
+        <p:txBody>
+          <a:bodyPr wrap="square" lIns="0" tIns="0" rIns="0" bIns="0" rtlCol="0" anchor="ctr"/>
+          <a:lstStyle/>
+          <a:p>
+            <a:pPr algn="l" indent="0" marL="0">
+              <a:buNone/>
+            </a:pPr>
+            <a:r>
+              <a:rPr lang="en-US" sz="1100" b="1" spc="150" kern="0" dirty="0">
+                <a:solidFill>
+                  <a:srgbClr val="00838F"/>
+                </a:solidFill>
+                <a:latin typeface="Calibri" pitchFamily="34" charset="0"/>
+                <a:ea typeface="Calibri" pitchFamily="34" charset="-122"/>
+                <a:cs typeface="Calibri" pitchFamily="34" charset="-120"/>
+              </a:rPr>
+              <a:t>MOLECULAR &amp; CYTOGENETICS   ·   HYBRIDIZATION</a:t>
+            </a:r>
+            <a:endParaRPr lang="en-US" sz="1100" dirty="0"/>
+          </a:p>
+        </p:txBody>
+      </p:sp>
+      <p:sp>
+        <p:nvSpPr>
+          <p:cNvPr id="3" name="Text 1"/>
+          <p:cNvSpPr/>
+          <p:nvPr/>
+        </p:nvSpPr>
+        <p:spPr>
+          <a:xfrm>
+            <a:off x="566928" y="713232"/>
+            <a:ext cx="11064240" cy="749808"/>
+          </a:xfrm>
+          <a:prstGeom prst="rect">
+            <a:avLst/>
+          </a:prstGeom>
+          <a:noFill/>
+          <a:ln/>
+        </p:spPr>
+        <p:txBody>
+          <a:bodyPr wrap="square" lIns="0" tIns="0" rIns="0" bIns="0" rtlCol="0" anchor="ctr"/>
+          <a:lstStyle/>
+          <a:p>
+            <a:pPr algn="l" indent="0" marL="0">
+              <a:buNone/>
+            </a:pPr>
+            <a:r>
+              <a:rPr lang="en-US" sz="3000" b="1" dirty="0">
+                <a:solidFill>
+                  <a:srgbClr val="0E3A5F"/>
+                </a:solidFill>
+                <a:latin typeface="Calibri" pitchFamily="34" charset="0"/>
+                <a:ea typeface="Calibri" pitchFamily="34" charset="-122"/>
+                <a:cs typeface="Calibri" pitchFamily="34" charset="-120"/>
+              </a:rPr>
+              <a:t>FISH &amp; Microarrays</a:t>
+            </a:r>
+            <a:endParaRPr lang="en-US" sz="3000" dirty="0"/>
+          </a:p>
+        </p:txBody>
+      </p:sp>
+      <p:sp>
+        <p:nvSpPr>
+          <p:cNvPr id="4" name="Shape 2"/>
+          <p:cNvSpPr/>
+          <p:nvPr/>
+        </p:nvSpPr>
+        <p:spPr>
+          <a:xfrm>
+            <a:off x="566928" y="1517904"/>
+            <a:ext cx="5346040" cy="4114800"/>
+          </a:xfrm>
+          <a:prstGeom prst="roundRect">
+            <a:avLst>
+              <a:gd name="adj" fmla="val 2000"/>
+            </a:avLst>
+          </a:prstGeom>
+          <a:solidFill>
+            <a:srgbClr val="E0F2F4"/>
+          </a:solidFill>
+          <a:ln/>
+          <a:effectLst>
+            <a:outerShdw sx="100000" sy="100000" kx="0" ky="0" algn="bl" rotWithShape="0" blurRad="88900" dist="25400" dir="5400000">
+              <a:srgbClr val="22303C">
+                <a:alpha val="12000"/>
+              </a:srgbClr>
+            </a:outerShdw>
+          </a:effectLst>
+        </p:spPr>
+      </p:sp>
+      <p:sp>
+        <p:nvSpPr>
+          <p:cNvPr id="5" name="Text 3"/>
+          <p:cNvSpPr/>
+          <p:nvPr/>
+        </p:nvSpPr>
+        <p:spPr>
+          <a:xfrm>
+            <a:off x="804672" y="1682496"/>
+            <a:ext cx="4888840" cy="274320"/>
+          </a:xfrm>
+          <a:prstGeom prst="rect">
+            <a:avLst/>
+          </a:prstGeom>
+          <a:noFill/>
+          <a:ln/>
+        </p:spPr>
+        <p:txBody>
+          <a:bodyPr wrap="square" lIns="0" tIns="0" rIns="0" bIns="0" rtlCol="0" anchor="ctr"/>
+          <a:lstStyle/>
+          <a:p>
+            <a:pPr indent="0" marL="0">
+              <a:buNone/>
+            </a:pPr>
+            <a:r>
+              <a:rPr lang="en-US" sz="1200" b="1" spc="100" kern="0" dirty="0">
+                <a:solidFill>
+                  <a:srgbClr val="005A63"/>
+                </a:solidFill>
+                <a:latin typeface="Calibri" pitchFamily="34" charset="0"/>
+                <a:ea typeface="Calibri" pitchFamily="34" charset="-122"/>
+                <a:cs typeface="Calibri" pitchFamily="34" charset="-120"/>
+              </a:rPr>
+              <a:t>FISH</a:t>
+            </a:r>
+            <a:endParaRPr lang="en-US" sz="1200" dirty="0"/>
+          </a:p>
+        </p:txBody>
+      </p:sp>
+      <p:sp>
+        <p:nvSpPr>
+          <p:cNvPr id="6" name="Text 4"/>
+          <p:cNvSpPr/>
+          <p:nvPr/>
+        </p:nvSpPr>
+        <p:spPr>
+          <a:xfrm>
+            <a:off x="804672" y="2029968"/>
+            <a:ext cx="4870552" cy="3474720"/>
+          </a:xfrm>
+          <a:prstGeom prst="rect">
+            <a:avLst/>
+          </a:prstGeom>
+          <a:noFill/>
+          <a:ln/>
+        </p:spPr>
+        <p:txBody>
+          <a:bodyPr wrap="square" lIns="0" tIns="0" rIns="0" bIns="0" rtlCol="0" anchor="t"/>
+          <a:lstStyle/>
+          <a:p>
+            <a:pPr algn="l" marL="177800" indent="-177800">
+              <a:spcAft>
+                <a:spcPts val="900"/>
+              </a:spcAft>
+              <a:buSzPct val="100000"/>
+              <a:buChar char="•"/>
+            </a:pPr>
+            <a:r>
+              <a:rPr lang="en-US" sz="1250" b="1" dirty="0">
+                <a:solidFill>
+                  <a:srgbClr val="1B2A38"/>
+                </a:solidFill>
+                <a:latin typeface="Calibri" pitchFamily="34" charset="0"/>
+                <a:ea typeface="Calibri" pitchFamily="34" charset="-122"/>
+                <a:cs typeface="Calibri" pitchFamily="34" charset="-120"/>
+              </a:rPr>
+              <a:t>Fluorescent probes detect specific fusions, deletions, or amplifications in situ.</a:t>
+            </a:r>
+            <a:endParaRPr lang="en-US" sz="1250" dirty="0"/>
+          </a:p>
+          <a:p>
+            <a:pPr algn="l" marL="177800" indent="-177800">
+              <a:spcAft>
+                <a:spcPts val="900"/>
+              </a:spcAft>
+              <a:buSzPct val="100000"/>
+              <a:buChar char="•"/>
+            </a:pPr>
+            <a:r>
+              <a:rPr lang="en-US" sz="1250" dirty="0">
+                <a:solidFill>
+                  <a:srgbClr val="33444F"/>
+                </a:solidFill>
+                <a:latin typeface="Calibri" pitchFamily="34" charset="0"/>
+                <a:ea typeface="Calibri" pitchFamily="34" charset="-122"/>
+                <a:cs typeface="Calibri" pitchFamily="34" charset="-120"/>
+              </a:rPr>
+              <a:t>Works on interphase or metaphase cells.</a:t>
+            </a:r>
+            <a:endParaRPr lang="en-US" sz="1250" dirty="0"/>
+          </a:p>
+          <a:p>
+            <a:pPr algn="l" marL="177800" indent="-177800">
+              <a:spcAft>
+                <a:spcPts val="900"/>
+              </a:spcAft>
+              <a:buSzPct val="100000"/>
+              <a:buChar char="•"/>
+            </a:pPr>
+            <a:r>
+              <a:rPr lang="en-US" sz="1250" dirty="0">
+                <a:solidFill>
+                  <a:srgbClr val="33444F"/>
+                </a:solidFill>
+                <a:latin typeface="Calibri" pitchFamily="34" charset="0"/>
+                <a:ea typeface="Calibri" pitchFamily="34" charset="-122"/>
+                <a:cs typeface="Calibri" pitchFamily="34" charset="-120"/>
+              </a:rPr>
+              <a:t>Targeted — you must know what to look for.</a:t>
+            </a:r>
+            <a:endParaRPr lang="en-US" sz="1250" dirty="0"/>
+          </a:p>
+          <a:p>
+            <a:pPr algn="l" marL="177800" indent="-177800">
+              <a:spcAft>
+                <a:spcPts val="900"/>
+              </a:spcAft>
+              <a:buSzPct val="100000"/>
+              <a:buChar char="•"/>
+            </a:pPr>
+            <a:r>
+              <a:rPr lang="en-US" sz="1250" dirty="0">
+                <a:solidFill>
+                  <a:srgbClr val="33444F"/>
+                </a:solidFill>
+                <a:latin typeface="Calibri" pitchFamily="34" charset="0"/>
+                <a:ea typeface="Calibri" pitchFamily="34" charset="-122"/>
+                <a:cs typeface="Calibri" pitchFamily="34" charset="-120"/>
+              </a:rPr>
+              <a:t>Rapid for known rearrangements (e.g., fusions).</a:t>
+            </a:r>
+            <a:endParaRPr lang="en-US" sz="1250" dirty="0"/>
+          </a:p>
+        </p:txBody>
+      </p:sp>
+      <p:sp>
+        <p:nvSpPr>
+          <p:cNvPr id="7" name="Shape 5"/>
+          <p:cNvSpPr/>
+          <p:nvPr/>
+        </p:nvSpPr>
+        <p:spPr>
+          <a:xfrm>
+            <a:off x="6278728" y="1517904"/>
+            <a:ext cx="5346040" cy="4114800"/>
+          </a:xfrm>
+          <a:prstGeom prst="roundRect">
+            <a:avLst>
+              <a:gd name="adj" fmla="val 2000"/>
+            </a:avLst>
+          </a:prstGeom>
+          <a:solidFill>
+            <a:srgbClr val="DDF0EF"/>
+          </a:solidFill>
+          <a:ln/>
+          <a:effectLst>
+            <a:outerShdw sx="100000" sy="100000" kx="0" ky="0" algn="bl" rotWithShape="0" blurRad="88900" dist="25400" dir="5400000">
+              <a:srgbClr val="22303C">
+                <a:alpha val="12000"/>
+              </a:srgbClr>
+            </a:outerShdw>
+          </a:effectLst>
+        </p:spPr>
+      </p:sp>
+      <p:sp>
+        <p:nvSpPr>
+          <p:cNvPr id="8" name="Text 6"/>
+          <p:cNvSpPr/>
+          <p:nvPr/>
+        </p:nvSpPr>
+        <p:spPr>
+          <a:xfrm>
+            <a:off x="6516472" y="1682496"/>
+            <a:ext cx="4888840" cy="274320"/>
+          </a:xfrm>
+          <a:prstGeom prst="rect">
+            <a:avLst/>
+          </a:prstGeom>
+          <a:noFill/>
+          <a:ln/>
+        </p:spPr>
+        <p:txBody>
+          <a:bodyPr wrap="square" lIns="0" tIns="0" rIns="0" bIns="0" rtlCol="0" anchor="ctr"/>
+          <a:lstStyle/>
+          <a:p>
+            <a:pPr indent="0" marL="0">
+              <a:buNone/>
+            </a:pPr>
+            <a:r>
+              <a:rPr lang="en-US" sz="1200" b="1" spc="100" kern="0" dirty="0">
+                <a:solidFill>
+                  <a:srgbClr val="005A63"/>
+                </a:solidFill>
+                <a:latin typeface="Calibri" pitchFamily="34" charset="0"/>
+                <a:ea typeface="Calibri" pitchFamily="34" charset="-122"/>
+                <a:cs typeface="Calibri" pitchFamily="34" charset="-120"/>
+              </a:rPr>
+              <a:t>MICROARRAYS</a:t>
+            </a:r>
+            <a:endParaRPr lang="en-US" sz="1200" dirty="0"/>
+          </a:p>
+        </p:txBody>
+      </p:sp>
+      <p:sp>
+        <p:nvSpPr>
+          <p:cNvPr id="9" name="Text 7"/>
+          <p:cNvSpPr/>
+          <p:nvPr/>
+        </p:nvSpPr>
+        <p:spPr>
+          <a:xfrm>
+            <a:off x="6516472" y="2029968"/>
+            <a:ext cx="4870552" cy="3474720"/>
+          </a:xfrm>
+          <a:prstGeom prst="rect">
+            <a:avLst/>
+          </a:prstGeom>
+          <a:noFill/>
+          <a:ln/>
+        </p:spPr>
+        <p:txBody>
+          <a:bodyPr wrap="square" lIns="0" tIns="0" rIns="0" bIns="0" rtlCol="0" anchor="t"/>
+          <a:lstStyle/>
+          <a:p>
+            <a:pPr algn="l" marL="177800" indent="-177800">
+              <a:spcAft>
+                <a:spcPts val="900"/>
+              </a:spcAft>
+              <a:buSzPct val="100000"/>
+              <a:buChar char="•"/>
+            </a:pPr>
+            <a:r>
+              <a:rPr lang="en-US" sz="1250" b="1" dirty="0">
+                <a:solidFill>
+                  <a:srgbClr val="1B2A38"/>
+                </a:solidFill>
+                <a:latin typeface="Calibri" pitchFamily="34" charset="0"/>
+                <a:ea typeface="Calibri" pitchFamily="34" charset="-122"/>
+                <a:cs typeface="Calibri" pitchFamily="34" charset="-120"/>
+              </a:rPr>
+              <a:t>Genome-wide copy-number and (with SNPs) loss of heterozygosity.</a:t>
+            </a:r>
+            <a:endParaRPr lang="en-US" sz="1250" dirty="0"/>
+          </a:p>
+          <a:p>
+            <a:pPr algn="l" marL="177800" indent="-177800">
+              <a:spcAft>
+                <a:spcPts val="900"/>
+              </a:spcAft>
+              <a:buSzPct val="100000"/>
+              <a:buChar char="•"/>
+            </a:pPr>
+            <a:r>
+              <a:rPr lang="en-US" sz="1250" dirty="0">
+                <a:solidFill>
+                  <a:srgbClr val="33444F"/>
+                </a:solidFill>
+                <a:latin typeface="Calibri" pitchFamily="34" charset="0"/>
+                <a:ea typeface="Calibri" pitchFamily="34" charset="-122"/>
+                <a:cs typeface="Calibri" pitchFamily="34" charset="-120"/>
+              </a:rPr>
+              <a:t>Detects microdeletions/duplications beyond karyotype resolution.</a:t>
+            </a:r>
+            <a:endParaRPr lang="en-US" sz="1250" dirty="0"/>
+          </a:p>
+          <a:p>
+            <a:pPr algn="l" marL="177800" indent="-177800">
+              <a:spcAft>
+                <a:spcPts val="900"/>
+              </a:spcAft>
+              <a:buSzPct val="100000"/>
+              <a:buChar char="•"/>
+            </a:pPr>
+            <a:r>
+              <a:rPr lang="en-US" sz="1250" dirty="0">
+                <a:solidFill>
+                  <a:srgbClr val="33444F"/>
+                </a:solidFill>
+                <a:latin typeface="Calibri" pitchFamily="34" charset="0"/>
+                <a:ea typeface="Calibri" pitchFamily="34" charset="-122"/>
+                <a:cs typeface="Calibri" pitchFamily="34" charset="-120"/>
+              </a:rPr>
+              <a:t>Cannot detect balanced rearrangements.</a:t>
+            </a:r>
+            <a:endParaRPr lang="en-US" sz="1250" dirty="0"/>
+          </a:p>
+          <a:p>
+            <a:pPr algn="l" marL="177800" indent="-177800">
+              <a:spcAft>
+                <a:spcPts val="900"/>
+              </a:spcAft>
+              <a:buSzPct val="100000"/>
+              <a:buChar char="•"/>
+            </a:pPr>
+            <a:r>
+              <a:rPr lang="en-US" sz="1250" dirty="0">
+                <a:solidFill>
+                  <a:srgbClr val="33444F"/>
+                </a:solidFill>
+                <a:latin typeface="Calibri" pitchFamily="34" charset="0"/>
+                <a:ea typeface="Calibri" pitchFamily="34" charset="-122"/>
+                <a:cs typeface="Calibri" pitchFamily="34" charset="-120"/>
+              </a:rPr>
+              <a:t>Complements sequencing and FISH.</a:t>
+            </a:r>
+            <a:endParaRPr lang="en-US" sz="1250" dirty="0"/>
+          </a:p>
+        </p:txBody>
+      </p:sp>
+      <p:sp>
+        <p:nvSpPr>
+          <p:cNvPr id="10" name="Text 8"/>
+          <p:cNvSpPr/>
+          <p:nvPr/>
+        </p:nvSpPr>
+        <p:spPr>
+          <a:xfrm>
+            <a:off x="566928" y="6473952"/>
+            <a:ext cx="7772400" cy="274320"/>
+          </a:xfrm>
+          <a:prstGeom prst="rect">
+            <a:avLst/>
+          </a:prstGeom>
+          <a:noFill/>
+          <a:ln/>
+        </p:spPr>
+        <p:txBody>
+          <a:bodyPr wrap="square" lIns="0" tIns="0" rIns="0" bIns="0" rtlCol="0" anchor="ctr"/>
+          <a:lstStyle/>
+          <a:p>
+            <a:pPr algn="l" indent="0" marL="0">
+              <a:buNone/>
+            </a:pPr>
+            <a:r>
+              <a:rPr lang="en-US" sz="850" dirty="0">
+                <a:solidFill>
+                  <a:srgbClr val="9AA8B4"/>
+                </a:solidFill>
+                <a:latin typeface="Calibri" pitchFamily="34" charset="0"/>
+                <a:ea typeface="Calibri" pitchFamily="34" charset="-122"/>
+                <a:cs typeface="Calibri" pitchFamily="34" charset="-120"/>
+              </a:rPr>
+              <a:t>Makassed General Hospital  ·  Department of Laboratory Medicine</a:t>
+            </a:r>
+            <a:endParaRPr lang="en-US" sz="850" dirty="0"/>
+          </a:p>
+        </p:txBody>
+      </p:sp>
+      <p:sp>
+        <p:nvSpPr>
+          <p:cNvPr id="11" name="Text 9"/>
+          <p:cNvSpPr/>
+          <p:nvPr/>
+        </p:nvSpPr>
+        <p:spPr>
+          <a:xfrm>
+            <a:off x="9814255" y="6473952"/>
+            <a:ext cx="1828800" cy="274320"/>
+          </a:xfrm>
+          <a:prstGeom prst="rect">
+            <a:avLst/>
+          </a:prstGeom>
+          <a:noFill/>
+          <a:ln/>
+        </p:spPr>
+        <p:txBody>
+          <a:bodyPr wrap="square" lIns="0" tIns="0" rIns="0" bIns="0" rtlCol="0" anchor="ctr"/>
+          <a:lstStyle/>
+          <a:p>
+            <a:pPr algn="r" indent="0" marL="0">
+              <a:buNone/>
+            </a:pPr>
+            <a:r>
+              <a:rPr lang="en-US" sz="850" dirty="0">
+                <a:solidFill>
+                  <a:srgbClr val="9AA8B4"/>
+                </a:solidFill>
+                <a:latin typeface="Calibri" pitchFamily="34" charset="0"/>
+                <a:ea typeface="Calibri" pitchFamily="34" charset="-122"/>
+                <a:cs typeface="Calibri" pitchFamily="34" charset="-120"/>
+              </a:rPr>
+              <a:t>CP Lecture Series</a:t>
+            </a:r>
+            <a:pPr algn="r" indent="0" marL="0">
+              <a:buNone/>
+            </a:pPr>
+            <a:r>
+              <a:rPr lang="en-US" sz="850" dirty="0">
+                <a:solidFill>
+                  <a:srgbClr val="DCE4EC"/>
+                </a:solidFill>
+                <a:latin typeface="Calibri" pitchFamily="34" charset="0"/>
+                <a:ea typeface="Calibri" pitchFamily="34" charset="-122"/>
+                <a:cs typeface="Calibri" pitchFamily="34" charset="-120"/>
+              </a:rPr>
+              <a:t>   ·   </a:t>
+            </a:r>
+            <a:pPr algn="r" indent="0" marL="0">
+              <a:buNone/>
+            </a:pPr>
+            <a:r>
+              <a:rPr lang="en-US" sz="850" b="1" dirty="0">
+                <a:solidFill>
+                  <a:srgbClr val="00838F"/>
+                </a:solidFill>
+                <a:latin typeface="Calibri" pitchFamily="34" charset="0"/>
+                <a:ea typeface="Calibri" pitchFamily="34" charset="-122"/>
+                <a:cs typeface="Calibri" pitchFamily="34" charset="-120"/>
+              </a:rPr>
+              <a:t>10</a:t>
+            </a:r>
+            <a:endParaRPr lang="en-US" sz="850" dirty="0"/>
+          </a:p>
+        </p:txBody>
+      </p:sp>
+    </p:spTree>
+  </p:cSld>
+  <p:clrMapOvr>
+    <a:masterClrMapping/>
+  </p:clrMapOvr>
+</p:sld>
+</file>
+
+<file path=ppt/slides/slide13.xml><?xml version="1.0" encoding="utf-8"?>
+<p:sld xmlns:a="http://schemas.openxmlformats.org/drawingml/2006/main" xmlns:r="http://schemas.openxmlformats.org/officeDocument/2006/relationships" xmlns:p="http://schemas.openxmlformats.org/presentationml/2006/main">
+  <p:cSld name="Slide 13">
     <p:bg>
       <p:bgPr>
         <a:solidFill>
@@ -4084,442 +5093,9 @@
                 <a:ea typeface="Calibri" pitchFamily="34" charset="-122"/>
                 <a:cs typeface="Calibri" pitchFamily="34" charset="-120"/>
               </a:rPr>
-              <a:t>Cases &amp; Board Review</a:t>
+              <a:t>Pitfalls, Cases &amp; Board</a:t>
             </a:r>
             <a:endParaRPr lang="en-US" sz="3800" dirty="0"/>
-          </a:p>
-        </p:txBody>
-      </p:sp>
-    </p:spTree>
-  </p:cSld>
-  <p:clrMapOvr>
-    <a:masterClrMapping/>
-  </p:clrMapOvr>
-</p:sld>
-</file>
-
-<file path=ppt/slides/slide13.xml><?xml version="1.0" encoding="utf-8"?>
-<p:sld xmlns:a="http://schemas.openxmlformats.org/drawingml/2006/main" xmlns:r="http://schemas.openxmlformats.org/officeDocument/2006/relationships" xmlns:p="http://schemas.openxmlformats.org/presentationml/2006/main">
-  <p:cSld name="Slide 13">
-    <p:bg>
-      <p:bgPr>
-        <a:solidFill>
-          <a:srgbClr val="FFFFFF"/>
-        </a:solidFill>
-      </p:bgPr>
-    </p:bg>
-    <p:spTree>
-      <p:nvGrpSpPr>
-        <p:cNvPr id="1" name=""/>
-        <p:cNvGrpSpPr/>
-        <p:nvPr/>
-      </p:nvGrpSpPr>
-      <p:grpSpPr>
-        <a:xfrm>
-          <a:off x="0" y="0"/>
-          <a:ext cx="0" cy="0"/>
-          <a:chOff x="0" y="0"/>
-          <a:chExt cx="0" cy="0"/>
-        </a:xfrm>
-      </p:grpSpPr>
-      <p:sp>
-        <p:nvSpPr>
-          <p:cNvPr id="2" name="Text 0"/>
-          <p:cNvSpPr/>
-          <p:nvPr/>
-        </p:nvSpPr>
-        <p:spPr>
-          <a:xfrm>
-            <a:off x="566928" y="329184"/>
-            <a:ext cx="10515600" cy="310896"/>
-          </a:xfrm>
-          <a:prstGeom prst="rect">
-            <a:avLst/>
-          </a:prstGeom>
-          <a:noFill/>
-          <a:ln/>
-        </p:spPr>
-        <p:txBody>
-          <a:bodyPr wrap="square" lIns="0" tIns="0" rIns="0" bIns="0" rtlCol="0" anchor="ctr"/>
-          <a:lstStyle/>
-          <a:p>
-            <a:pPr algn="l" indent="0" marL="0">
-              <a:buNone/>
-            </a:pPr>
-            <a:r>
-              <a:rPr lang="en-US" sz="1100" b="1" spc="150" kern="0" dirty="0">
-                <a:solidFill>
-                  <a:srgbClr val="00838F"/>
-                </a:solidFill>
-                <a:latin typeface="Calibri" pitchFamily="34" charset="0"/>
-                <a:ea typeface="Calibri" pitchFamily="34" charset="-122"/>
-                <a:cs typeface="Calibri" pitchFamily="34" charset="-120"/>
-              </a:rPr>
-              <a:t>MOLECULAR &amp; CYTOGENETICS   ·   CASE 1</a:t>
-            </a:r>
-            <a:endParaRPr lang="en-US" sz="1100" dirty="0"/>
-          </a:p>
-        </p:txBody>
-      </p:sp>
-      <p:sp>
-        <p:nvSpPr>
-          <p:cNvPr id="3" name="Text 1"/>
-          <p:cNvSpPr/>
-          <p:nvPr/>
-        </p:nvSpPr>
-        <p:spPr>
-          <a:xfrm>
-            <a:off x="566928" y="713232"/>
-            <a:ext cx="11064240" cy="749808"/>
-          </a:xfrm>
-          <a:prstGeom prst="rect">
-            <a:avLst/>
-          </a:prstGeom>
-          <a:noFill/>
-          <a:ln/>
-        </p:spPr>
-        <p:txBody>
-          <a:bodyPr wrap="square" lIns="0" tIns="0" rIns="0" bIns="0" rtlCol="0" anchor="ctr"/>
-          <a:lstStyle/>
-          <a:p>
-            <a:pPr algn="l" indent="0" marL="0">
-              <a:buNone/>
-            </a:pPr>
-            <a:r>
-              <a:rPr lang="en-US" sz="3000" b="1" dirty="0">
-                <a:solidFill>
-                  <a:srgbClr val="0E3A5F"/>
-                </a:solidFill>
-                <a:latin typeface="Calibri" pitchFamily="34" charset="0"/>
-                <a:ea typeface="Calibri" pitchFamily="34" charset="-122"/>
-                <a:cs typeface="Calibri" pitchFamily="34" charset="-120"/>
-              </a:rPr>
-              <a:t>Case 1</a:t>
-            </a:r>
-            <a:endParaRPr lang="en-US" sz="3000" dirty="0"/>
-          </a:p>
-        </p:txBody>
-      </p:sp>
-      <p:sp>
-        <p:nvSpPr>
-          <p:cNvPr id="4" name="Shape 2"/>
-          <p:cNvSpPr/>
-          <p:nvPr/>
-        </p:nvSpPr>
-        <p:spPr>
-          <a:xfrm>
-            <a:off x="566928" y="1517904"/>
-            <a:ext cx="11057839" cy="2788920"/>
-          </a:xfrm>
-          <a:prstGeom prst="roundRect">
-            <a:avLst>
-              <a:gd name="adj" fmla="val 2951"/>
-            </a:avLst>
-          </a:prstGeom>
-          <a:solidFill>
-            <a:srgbClr val="E0F2F4"/>
-          </a:solidFill>
-          <a:ln/>
-          <a:effectLst>
-            <a:outerShdw sx="100000" sy="100000" kx="0" ky="0" algn="bl" rotWithShape="0" blurRad="88900" dist="25400" dir="5400000">
-              <a:srgbClr val="22303C">
-                <a:alpha val="12000"/>
-              </a:srgbClr>
-            </a:outerShdw>
-          </a:effectLst>
-        </p:spPr>
-      </p:sp>
-      <p:sp>
-        <p:nvSpPr>
-          <p:cNvPr id="5" name="Text 3"/>
-          <p:cNvSpPr/>
-          <p:nvPr/>
-        </p:nvSpPr>
-        <p:spPr>
-          <a:xfrm>
-            <a:off x="841248" y="1700784"/>
-            <a:ext cx="5486400" cy="292608"/>
-          </a:xfrm>
-          <a:prstGeom prst="rect">
-            <a:avLst/>
-          </a:prstGeom>
-          <a:noFill/>
-          <a:ln/>
-        </p:spPr>
-        <p:txBody>
-          <a:bodyPr wrap="square" lIns="0" tIns="0" rIns="0" bIns="0" rtlCol="0" anchor="ctr"/>
-          <a:lstStyle/>
-          <a:p>
-            <a:pPr indent="0" marL="0">
-              <a:buNone/>
-            </a:pPr>
-            <a:r>
-              <a:rPr lang="en-US" sz="1100" b="1" spc="150" kern="0" dirty="0">
-                <a:solidFill>
-                  <a:srgbClr val="00838F"/>
-                </a:solidFill>
-                <a:latin typeface="Calibri" pitchFamily="34" charset="0"/>
-                <a:ea typeface="Calibri" pitchFamily="34" charset="-122"/>
-                <a:cs typeface="Calibri" pitchFamily="34" charset="-120"/>
-              </a:rPr>
-              <a:t>CLINICAL VIGNETTE</a:t>
-            </a:r>
-            <a:endParaRPr lang="en-US" sz="1100" dirty="0"/>
-          </a:p>
-        </p:txBody>
-      </p:sp>
-      <p:sp>
-        <p:nvSpPr>
-          <p:cNvPr id="6" name="Text 4"/>
-          <p:cNvSpPr/>
-          <p:nvPr/>
-        </p:nvSpPr>
-        <p:spPr>
-          <a:xfrm>
-            <a:off x="841248" y="2029968"/>
-            <a:ext cx="10509199" cy="2148840"/>
-          </a:xfrm>
-          <a:prstGeom prst="rect">
-            <a:avLst/>
-          </a:prstGeom>
-          <a:noFill/>
-          <a:ln/>
-        </p:spPr>
-        <p:txBody>
-          <a:bodyPr wrap="square" lIns="0" tIns="0" rIns="0" bIns="0" rtlCol="0" anchor="t"/>
-          <a:lstStyle/>
-          <a:p>
-            <a:pPr algn="l" indent="0" marL="0">
-              <a:lnSpc>
-                <a:spcPct val="108000"/>
-              </a:lnSpc>
-              <a:buNone/>
-            </a:pPr>
-            <a:r>
-              <a:rPr lang="en-US" sz="1450" dirty="0">
-                <a:solidFill>
-                  <a:srgbClr val="33444F"/>
-                </a:solidFill>
-                <a:latin typeface="Calibri" pitchFamily="34" charset="0"/>
-                <a:ea typeface="Calibri" pitchFamily="34" charset="-122"/>
-                <a:cs typeface="Calibri" pitchFamily="34" charset="-120"/>
-              </a:rPr>
-              <a:t>A CML patient on therapy needs sensitive monitoring of residual BCR-ABL1 transcript over time, reported on an international scale.</a:t>
-            </a:r>
-            <a:endParaRPr lang="en-US" sz="1450" dirty="0"/>
-          </a:p>
-        </p:txBody>
-      </p:sp>
-      <p:sp>
-        <p:nvSpPr>
-          <p:cNvPr id="7" name="Shape 5"/>
-          <p:cNvSpPr/>
-          <p:nvPr/>
-        </p:nvSpPr>
-        <p:spPr>
-          <a:xfrm>
-            <a:off x="566928" y="4553712"/>
-            <a:ext cx="11057839" cy="1325880"/>
-          </a:xfrm>
-          <a:prstGeom prst="roundRect">
-            <a:avLst>
-              <a:gd name="adj" fmla="val 6207"/>
-            </a:avLst>
-          </a:prstGeom>
-          <a:solidFill>
-            <a:srgbClr val="0E3A5F"/>
-          </a:solidFill>
-          <a:ln/>
-          <a:effectLst>
-            <a:outerShdw sx="100000" sy="100000" kx="0" ky="0" algn="bl" rotWithShape="0" blurRad="88900" dist="25400" dir="5400000">
-              <a:srgbClr val="22303C">
-                <a:alpha val="12000"/>
-              </a:srgbClr>
-            </a:outerShdw>
-          </a:effectLst>
-        </p:spPr>
-      </p:sp>
-      <p:sp>
-        <p:nvSpPr>
-          <p:cNvPr id="8" name="Text 6"/>
-          <p:cNvSpPr/>
-          <p:nvPr/>
-        </p:nvSpPr>
-        <p:spPr>
-          <a:xfrm>
-            <a:off x="822960" y="4681728"/>
-            <a:ext cx="640080" cy="960120"/>
-          </a:xfrm>
-          <a:prstGeom prst="rect">
-            <a:avLst/>
-          </a:prstGeom>
-          <a:noFill/>
-          <a:ln/>
-        </p:spPr>
-        <p:txBody>
-          <a:bodyPr wrap="square" lIns="0" tIns="0" rIns="0" bIns="0" rtlCol="0" anchor="ctr"/>
-          <a:lstStyle/>
-          <a:p>
-            <a:pPr algn="ctr" indent="0" marL="0">
-              <a:buNone/>
-            </a:pPr>
-            <a:r>
-              <a:rPr lang="en-US" sz="4000" b="1" dirty="0">
-                <a:solidFill>
-                  <a:srgbClr val="00838F"/>
-                </a:solidFill>
-                <a:latin typeface="Calibri" pitchFamily="34" charset="0"/>
-                <a:ea typeface="Calibri" pitchFamily="34" charset="-122"/>
-                <a:cs typeface="Calibri" pitchFamily="34" charset="-120"/>
-              </a:rPr>
-              <a:t>?</a:t>
-            </a:r>
-            <a:endParaRPr lang="en-US" sz="4000" dirty="0"/>
-          </a:p>
-        </p:txBody>
-      </p:sp>
-      <p:sp>
-        <p:nvSpPr>
-          <p:cNvPr id="9" name="Text 7"/>
-          <p:cNvSpPr/>
-          <p:nvPr/>
-        </p:nvSpPr>
-        <p:spPr>
-          <a:xfrm>
-            <a:off x="1618488" y="4553712"/>
-            <a:ext cx="9686239" cy="1325880"/>
-          </a:xfrm>
-          <a:prstGeom prst="rect">
-            <a:avLst/>
-          </a:prstGeom>
-          <a:noFill/>
-          <a:ln/>
-        </p:spPr>
-        <p:txBody>
-          <a:bodyPr wrap="square" lIns="0" tIns="0" rIns="0" bIns="0" rtlCol="0" anchor="ctr"/>
-          <a:lstStyle/>
-          <a:p>
-            <a:pPr algn="l" indent="0" marL="0">
-              <a:buNone/>
-            </a:pPr>
-            <a:r>
-              <a:rPr lang="en-US" sz="1500" b="1" dirty="0">
-                <a:solidFill>
-                  <a:srgbClr val="FFFFFF"/>
-                </a:solidFill>
-                <a:latin typeface="Calibri" pitchFamily="34" charset="0"/>
-                <a:ea typeface="Calibri" pitchFamily="34" charset="-122"/>
-                <a:cs typeface="Calibri" pitchFamily="34" charset="-120"/>
-              </a:rPr>
-              <a:t>Which molecular method is appropriate, and why?</a:t>
-            </a:r>
-            <a:endParaRPr lang="en-US" sz="1500" dirty="0"/>
-          </a:p>
-        </p:txBody>
-      </p:sp>
-      <p:sp>
-        <p:nvSpPr>
-          <p:cNvPr id="10" name="Text 8"/>
-          <p:cNvSpPr/>
-          <p:nvPr/>
-        </p:nvSpPr>
-        <p:spPr>
-          <a:xfrm>
-            <a:off x="566928" y="6473952"/>
-            <a:ext cx="7772400" cy="274320"/>
-          </a:xfrm>
-          <a:prstGeom prst="rect">
-            <a:avLst/>
-          </a:prstGeom>
-          <a:noFill/>
-          <a:ln/>
-        </p:spPr>
-        <p:txBody>
-          <a:bodyPr wrap="square" lIns="0" tIns="0" rIns="0" bIns="0" rtlCol="0" anchor="ctr"/>
-          <a:lstStyle/>
-          <a:p>
-            <a:pPr algn="l" indent="0" marL="0">
-              <a:buNone/>
-            </a:pPr>
-            <a:r>
-              <a:rPr lang="en-US" sz="850" dirty="0">
-                <a:solidFill>
-                  <a:srgbClr val="9AA8B4"/>
-                </a:solidFill>
-                <a:latin typeface="Calibri" pitchFamily="34" charset="0"/>
-                <a:ea typeface="Calibri" pitchFamily="34" charset="-122"/>
-                <a:cs typeface="Calibri" pitchFamily="34" charset="-120"/>
-              </a:rPr>
-              <a:t>Makassed General Hospital  ·  Department of Laboratory Medicine</a:t>
-            </a:r>
-            <a:endParaRPr lang="en-US" sz="850" dirty="0"/>
-          </a:p>
-        </p:txBody>
-      </p:sp>
-      <p:sp>
-        <p:nvSpPr>
-          <p:cNvPr id="11" name="Text 9"/>
-          <p:cNvSpPr/>
-          <p:nvPr/>
-        </p:nvSpPr>
-        <p:spPr>
-          <a:xfrm>
-            <a:off x="9814255" y="6473952"/>
-            <a:ext cx="1828800" cy="274320"/>
-          </a:xfrm>
-          <a:prstGeom prst="rect">
-            <a:avLst/>
-          </a:prstGeom>
-          <a:noFill/>
-          <a:ln/>
-        </p:spPr>
-        <p:txBody>
-          <a:bodyPr wrap="square" lIns="0" tIns="0" rIns="0" bIns="0" rtlCol="0" anchor="ctr"/>
-          <a:lstStyle/>
-          <a:p>
-            <a:pPr algn="r" indent="0" marL="0">
-              <a:buNone/>
-            </a:pPr>
-            <a:r>
-              <a:rPr lang="en-US" sz="850" dirty="0">
-                <a:solidFill>
-                  <a:srgbClr val="9AA8B4"/>
-                </a:solidFill>
-                <a:latin typeface="Calibri" pitchFamily="34" charset="0"/>
-                <a:ea typeface="Calibri" pitchFamily="34" charset="-122"/>
-                <a:cs typeface="Calibri" pitchFamily="34" charset="-120"/>
-              </a:rPr>
-              <a:t>CP Lecture Series</a:t>
-            </a:r>
-            <a:pPr algn="r" indent="0" marL="0">
-              <a:buNone/>
-            </a:pPr>
-            <a:r>
-              <a:rPr lang="en-US" sz="850" dirty="0">
-                <a:solidFill>
-                  <a:srgbClr val="DCE4EC"/>
-                </a:solidFill>
-                <a:latin typeface="Calibri" pitchFamily="34" charset="0"/>
-                <a:ea typeface="Calibri" pitchFamily="34" charset="-122"/>
-                <a:cs typeface="Calibri" pitchFamily="34" charset="-120"/>
-              </a:rPr>
-              <a:t>   ·   </a:t>
-            </a:r>
-            <a:pPr algn="r" indent="0" marL="0">
-              <a:buNone/>
-            </a:pPr>
-            <a:r>
-              <a:rPr lang="en-US" sz="850" b="1" dirty="0">
-                <a:solidFill>
-                  <a:srgbClr val="00838F"/>
-                </a:solidFill>
-                <a:latin typeface="Calibri" pitchFamily="34" charset="0"/>
-                <a:ea typeface="Calibri" pitchFamily="34" charset="-122"/>
-                <a:cs typeface="Calibri" pitchFamily="34" charset="-120"/>
-              </a:rPr>
-              <a:t>10</a:t>
-            </a:r>
-            <a:endParaRPr lang="en-US" sz="850" dirty="0"/>
           </a:p>
         </p:txBody>
       </p:sp>
@@ -4588,7 +5164,7 @@
                 <a:ea typeface="Calibri" pitchFamily="34" charset="-122"/>
                 <a:cs typeface="Calibri" pitchFamily="34" charset="-120"/>
               </a:rPr>
-              <a:t>MOLECULAR &amp; CYTOGENETICS   ·   CASE 1  ·  RESOLUTION</a:t>
+              <a:t>MOLECULAR &amp; CYTOGENETICS   ·   PITFALLS</a:t>
             </a:r>
             <a:endParaRPr lang="en-US" sz="1100" dirty="0"/>
           </a:p>
@@ -4627,7 +5203,7 @@
                 <a:ea typeface="Calibri" pitchFamily="34" charset="-122"/>
                 <a:cs typeface="Calibri" pitchFamily="34" charset="-120"/>
               </a:rPr>
-              <a:t>Case 1: Quantitative RT-PCR for MRD</a:t>
+              <a:t>Contamination &amp; Pre-Analytics</a:t>
             </a:r>
             <a:endParaRPr lang="en-US" sz="3000" dirty="0"/>
           </a:p>
@@ -4635,124 +5211,18 @@
       </p:sp>
       <p:sp>
         <p:nvSpPr>
-          <p:cNvPr id="4" name="Text 2"/>
-          <p:cNvSpPr/>
-          <p:nvPr/>
-        </p:nvSpPr>
-        <p:spPr>
-          <a:xfrm>
-            <a:off x="566928" y="1554480"/>
-            <a:ext cx="6413547" cy="4023360"/>
-          </a:xfrm>
-          <a:prstGeom prst="rect">
-            <a:avLst/>
-          </a:prstGeom>
-          <a:noFill/>
-          <a:ln/>
-        </p:spPr>
-        <p:txBody>
-          <a:bodyPr wrap="square" lIns="0" tIns="0" rIns="0" bIns="0" rtlCol="0" anchor="t"/>
-          <a:lstStyle/>
-          <a:p>
-            <a:pPr algn="l" marL="177800" indent="-177800">
-              <a:spcAft>
-                <a:spcPts val="900"/>
-              </a:spcAft>
-              <a:buSzPct val="100000"/>
-              <a:buChar char="•"/>
-            </a:pPr>
-            <a:r>
-              <a:rPr lang="en-US" sz="1400" b="1" dirty="0">
-                <a:solidFill>
-                  <a:srgbClr val="1B2A38"/>
-                </a:solidFill>
-                <a:latin typeface="Calibri" pitchFamily="34" charset="0"/>
-                <a:ea typeface="Calibri" pitchFamily="34" charset="-122"/>
-                <a:cs typeface="Calibri" pitchFamily="34" charset="-120"/>
-              </a:rPr>
-              <a:t>Quantitative RT-PCR of the BCR-ABL1 fusion TRANSCRIPT is the standard for monitoring.</a:t>
-            </a:r>
-            <a:endParaRPr lang="en-US" sz="1400" dirty="0"/>
-          </a:p>
-          <a:p>
-            <a:pPr algn="l" marL="177800" indent="-177800">
-              <a:spcAft>
-                <a:spcPts val="900"/>
-              </a:spcAft>
-              <a:buSzPct val="100000"/>
-              <a:buChar char="•"/>
-            </a:pPr>
-            <a:r>
-              <a:rPr lang="en-US" sz="1400" dirty="0">
-                <a:solidFill>
-                  <a:srgbClr val="33444F"/>
-                </a:solidFill>
-                <a:latin typeface="Calibri" pitchFamily="34" charset="0"/>
-                <a:ea typeface="Calibri" pitchFamily="34" charset="-122"/>
-                <a:cs typeface="Calibri" pitchFamily="34" charset="-120"/>
-              </a:rPr>
-              <a:t>RT-PCR is needed because the target is an RNA fusion transcript.</a:t>
-            </a:r>
-            <a:endParaRPr lang="en-US" sz="1400" dirty="0"/>
-          </a:p>
-          <a:p>
-            <a:pPr algn="l" marL="177800" indent="-177800">
-              <a:spcAft>
-                <a:spcPts val="900"/>
-              </a:spcAft>
-              <a:buSzPct val="100000"/>
-              <a:buChar char="•"/>
-            </a:pPr>
-            <a:r>
-              <a:rPr lang="en-US" sz="1400" dirty="0">
-                <a:solidFill>
-                  <a:srgbClr val="33444F"/>
-                </a:solidFill>
-                <a:latin typeface="Calibri" pitchFamily="34" charset="0"/>
-                <a:ea typeface="Calibri" pitchFamily="34" charset="-122"/>
-                <a:cs typeface="Calibri" pitchFamily="34" charset="-120"/>
-              </a:rPr>
-              <a:t>Real-time quantitation tracks log reductions on the International Scale.</a:t>
-            </a:r>
-            <a:endParaRPr lang="en-US" sz="1400" dirty="0"/>
-          </a:p>
-          <a:p>
-            <a:pPr algn="l" marL="177800" indent="-177800">
-              <a:spcAft>
-                <a:spcPts val="900"/>
-              </a:spcAft>
-              <a:buSzPct val="100000"/>
-              <a:buChar char="•"/>
-            </a:pPr>
-            <a:r>
-              <a:rPr lang="en-US" sz="1400" dirty="0">
-                <a:solidFill>
-                  <a:srgbClr val="33444F"/>
-                </a:solidFill>
-                <a:latin typeface="Calibri" pitchFamily="34" charset="0"/>
-                <a:ea typeface="Calibri" pitchFamily="34" charset="-122"/>
-                <a:cs typeface="Calibri" pitchFamily="34" charset="-120"/>
-              </a:rPr>
-              <a:t>FISH/karyotype lack the sensitivity for deep molecular response.</a:t>
-            </a:r>
-            <a:endParaRPr lang="en-US" sz="1400" dirty="0"/>
-          </a:p>
-        </p:txBody>
-      </p:sp>
-      <p:sp>
-        <p:nvSpPr>
-          <p:cNvPr id="5" name="Shape 3"/>
-          <p:cNvSpPr/>
-          <p:nvPr/>
-        </p:nvSpPr>
-        <p:spPr>
-          <a:xfrm>
-            <a:off x="7422788" y="1554480"/>
-            <a:ext cx="4201979" cy="3977640"/>
+          <p:cNvPr id="4" name="Shape 2"/>
+          <p:cNvSpPr/>
+          <p:nvPr/>
+        </p:nvSpPr>
+        <p:spPr>
+          <a:xfrm>
+            <a:off x="566928" y="1517904"/>
+            <a:ext cx="5346040" cy="4114800"/>
           </a:xfrm>
           <a:prstGeom prst="roundRect">
             <a:avLst>
-              <a:gd name="adj" fmla="val 2069"/>
+              <a:gd name="adj" fmla="val 2000"/>
             </a:avLst>
           </a:prstGeom>
           <a:solidFill>
@@ -4770,14 +5240,188 @@
       </p:sp>
       <p:sp>
         <p:nvSpPr>
+          <p:cNvPr id="5" name="Text 3"/>
+          <p:cNvSpPr/>
+          <p:nvPr/>
+        </p:nvSpPr>
+        <p:spPr>
+          <a:xfrm>
+            <a:off x="804672" y="1682496"/>
+            <a:ext cx="4888840" cy="274320"/>
+          </a:xfrm>
+          <a:prstGeom prst="rect">
+            <a:avLst/>
+          </a:prstGeom>
+          <a:noFill/>
+          <a:ln/>
+        </p:spPr>
+        <p:txBody>
+          <a:bodyPr wrap="square" lIns="0" tIns="0" rIns="0" bIns="0" rtlCol="0" anchor="ctr"/>
+          <a:lstStyle/>
+          <a:p>
+            <a:pPr indent="0" marL="0">
+              <a:buNone/>
+            </a:pPr>
+            <a:r>
+              <a:rPr lang="en-US" sz="1200" b="1" spc="100" kern="0" dirty="0">
+                <a:solidFill>
+                  <a:srgbClr val="005A63"/>
+                </a:solidFill>
+                <a:latin typeface="Calibri" pitchFamily="34" charset="0"/>
+                <a:ea typeface="Calibri" pitchFamily="34" charset="-122"/>
+                <a:cs typeface="Calibri" pitchFamily="34" charset="-120"/>
+              </a:rPr>
+              <a:t>CONTAMINATION CONTROL</a:t>
+            </a:r>
+            <a:endParaRPr lang="en-US" sz="1200" dirty="0"/>
+          </a:p>
+        </p:txBody>
+      </p:sp>
+      <p:sp>
+        <p:nvSpPr>
           <p:cNvPr id="6" name="Text 4"/>
           <p:cNvSpPr/>
           <p:nvPr/>
         </p:nvSpPr>
         <p:spPr>
           <a:xfrm>
-            <a:off x="7660532" y="1755648"/>
-            <a:ext cx="3744779" cy="310896"/>
+            <a:off x="804672" y="2029968"/>
+            <a:ext cx="4870552" cy="3474720"/>
+          </a:xfrm>
+          <a:prstGeom prst="rect">
+            <a:avLst/>
+          </a:prstGeom>
+          <a:noFill/>
+          <a:ln/>
+        </p:spPr>
+        <p:txBody>
+          <a:bodyPr wrap="square" lIns="0" tIns="0" rIns="0" bIns="0" rtlCol="0" anchor="t"/>
+          <a:lstStyle/>
+          <a:p>
+            <a:pPr algn="l" marL="177800" indent="-177800">
+              <a:spcAft>
+                <a:spcPts val="900"/>
+              </a:spcAft>
+              <a:buSzPct val="100000"/>
+              <a:buChar char="•"/>
+            </a:pPr>
+            <a:r>
+              <a:rPr lang="en-US" sz="1250" b="1" dirty="0">
+                <a:solidFill>
+                  <a:srgbClr val="1B2A38"/>
+                </a:solidFill>
+                <a:latin typeface="Calibri" pitchFamily="34" charset="0"/>
+                <a:ea typeface="Calibri" pitchFamily="34" charset="-122"/>
+                <a:cs typeface="Calibri" pitchFamily="34" charset="-120"/>
+              </a:rPr>
+              <a:t>Amplicon carryover and cross-contamination cause false positives — separate pre/post-PCR areas.</a:t>
+            </a:r>
+            <a:endParaRPr lang="en-US" sz="1250" dirty="0"/>
+          </a:p>
+          <a:p>
+            <a:pPr algn="l" marL="177800" indent="-177800">
+              <a:spcAft>
+                <a:spcPts val="900"/>
+              </a:spcAft>
+              <a:buSzPct val="100000"/>
+              <a:buChar char="•"/>
+            </a:pPr>
+            <a:r>
+              <a:rPr lang="en-US" sz="1250" dirty="0">
+                <a:solidFill>
+                  <a:srgbClr val="33444F"/>
+                </a:solidFill>
+                <a:latin typeface="Calibri" pitchFamily="34" charset="0"/>
+                <a:ea typeface="Calibri" pitchFamily="34" charset="-122"/>
+                <a:cs typeface="Calibri" pitchFamily="34" charset="-120"/>
+              </a:rPr>
+              <a:t>Use unidirectional workflow and controls.</a:t>
+            </a:r>
+            <a:endParaRPr lang="en-US" sz="1250" dirty="0"/>
+          </a:p>
+          <a:p>
+            <a:pPr algn="l" marL="177800" indent="-177800">
+              <a:spcAft>
+                <a:spcPts val="900"/>
+              </a:spcAft>
+              <a:buSzPct val="100000"/>
+              <a:buChar char="•"/>
+            </a:pPr>
+            <a:r>
+              <a:rPr lang="en-US" sz="1250" dirty="0">
+                <a:solidFill>
+                  <a:srgbClr val="33444F"/>
+                </a:solidFill>
+                <a:latin typeface="Calibri" pitchFamily="34" charset="0"/>
+                <a:ea typeface="Calibri" pitchFamily="34" charset="-122"/>
+                <a:cs typeface="Calibri" pitchFamily="34" charset="-120"/>
+              </a:rPr>
+              <a:t>No-template controls detect contamination.</a:t>
+            </a:r>
+            <a:endParaRPr lang="en-US" sz="1250" dirty="0"/>
+          </a:p>
+          <a:p>
+            <a:pPr algn="l" marL="177800" indent="-177800">
+              <a:spcAft>
+                <a:spcPts val="900"/>
+              </a:spcAft>
+              <a:buSzPct val="100000"/>
+              <a:buChar char="•"/>
+            </a:pPr>
+            <a:r>
+              <a:rPr lang="en-US" sz="1250" dirty="0">
+                <a:solidFill>
+                  <a:srgbClr val="33444F"/>
+                </a:solidFill>
+                <a:latin typeface="Calibri" pitchFamily="34" charset="0"/>
+                <a:ea typeface="Calibri" pitchFamily="34" charset="-122"/>
+                <a:cs typeface="Calibri" pitchFamily="34" charset="-120"/>
+              </a:rPr>
+              <a:t>dUTP/UNG systems reduce carryover.</a:t>
+            </a:r>
+            <a:endParaRPr lang="en-US" sz="1250" dirty="0"/>
+          </a:p>
+        </p:txBody>
+      </p:sp>
+      <p:sp>
+        <p:nvSpPr>
+          <p:cNvPr id="7" name="Shape 5"/>
+          <p:cNvSpPr/>
+          <p:nvPr/>
+        </p:nvSpPr>
+        <p:spPr>
+          <a:xfrm>
+            <a:off x="6278728" y="1517904"/>
+            <a:ext cx="5346040" cy="4114800"/>
+          </a:xfrm>
+          <a:prstGeom prst="roundRect">
+            <a:avLst>
+              <a:gd name="adj" fmla="val 2000"/>
+            </a:avLst>
+          </a:prstGeom>
+          <a:solidFill>
+            <a:srgbClr val="DDF0EF"/>
+          </a:solidFill>
+          <a:ln/>
+          <a:effectLst>
+            <a:outerShdw sx="100000" sy="100000" kx="0" ky="0" algn="bl" rotWithShape="0" blurRad="88900" dist="25400" dir="5400000">
+              <a:srgbClr val="22303C">
+                <a:alpha val="12000"/>
+              </a:srgbClr>
+            </a:outerShdw>
+          </a:effectLst>
+        </p:spPr>
+      </p:sp>
+      <p:sp>
+        <p:nvSpPr>
+          <p:cNvPr id="8" name="Text 6"/>
+          <p:cNvSpPr/>
+          <p:nvPr/>
+        </p:nvSpPr>
+        <p:spPr>
+          <a:xfrm>
+            <a:off x="6516472" y="1682496"/>
+            <a:ext cx="4888840" cy="274320"/>
           </a:xfrm>
           <a:prstGeom prst="rect">
             <a:avLst/>
@@ -4793,30 +5437,30 @@
               <a:buNone/>
             </a:pPr>
             <a:r>
-              <a:rPr lang="en-US" sz="1100" b="1" spc="140" kern="0" dirty="0">
-                <a:solidFill>
-                  <a:srgbClr val="00838F"/>
-                </a:solidFill>
-                <a:latin typeface="Calibri" pitchFamily="34" charset="0"/>
-                <a:ea typeface="Calibri" pitchFamily="34" charset="-122"/>
-                <a:cs typeface="Calibri" pitchFamily="34" charset="-120"/>
-              </a:rPr>
-              <a:t>TEACHING POINT</a:t>
-            </a:r>
-            <a:endParaRPr lang="en-US" sz="1100" dirty="0"/>
-          </a:p>
-        </p:txBody>
-      </p:sp>
-      <p:sp>
-        <p:nvSpPr>
-          <p:cNvPr id="7" name="Text 5"/>
-          <p:cNvSpPr/>
-          <p:nvPr/>
-        </p:nvSpPr>
-        <p:spPr>
-          <a:xfrm>
-            <a:off x="7660532" y="2121408"/>
-            <a:ext cx="3726491" cy="3291840"/>
+              <a:rPr lang="en-US" sz="1200" b="1" spc="100" kern="0" dirty="0">
+                <a:solidFill>
+                  <a:srgbClr val="005A63"/>
+                </a:solidFill>
+                <a:latin typeface="Calibri" pitchFamily="34" charset="0"/>
+                <a:ea typeface="Calibri" pitchFamily="34" charset="-122"/>
+                <a:cs typeface="Calibri" pitchFamily="34" charset="-120"/>
+              </a:rPr>
+              <a:t>PRE-ANALYTIC INTEGRITY</a:t>
+            </a:r>
+            <a:endParaRPr lang="en-US" sz="1200" dirty="0"/>
+          </a:p>
+        </p:txBody>
+      </p:sp>
+      <p:sp>
+        <p:nvSpPr>
+          <p:cNvPr id="9" name="Text 7"/>
+          <p:cNvSpPr/>
+          <p:nvPr/>
+        </p:nvSpPr>
+        <p:spPr>
+          <a:xfrm>
+            <a:off x="6516472" y="2029968"/>
+            <a:ext cx="4870552" cy="3474720"/>
           </a:xfrm>
           <a:prstGeom prst="rect">
             <a:avLst/>
@@ -4828,14 +5472,36 @@
           <a:bodyPr wrap="square" lIns="0" tIns="0" rIns="0" bIns="0" rtlCol="0" anchor="t"/>
           <a:lstStyle/>
           <a:p>
-            <a:pPr algn="l" indent="0" marL="0">
-              <a:lnSpc>
-                <a:spcPct val="110000"/>
-              </a:lnSpc>
-              <a:buNone/>
-            </a:pPr>
-            <a:r>
-              <a:rPr lang="en-US" sz="1350" dirty="0">
+            <a:pPr algn="l" marL="177800" indent="-177800">
+              <a:spcAft>
+                <a:spcPts val="900"/>
+              </a:spcAft>
+              <a:buSzPct val="100000"/>
+              <a:buChar char="•"/>
+            </a:pPr>
+            <a:r>
+              <a:rPr lang="en-US" sz="1250" b="1" dirty="0">
+                <a:solidFill>
+                  <a:srgbClr val="1B2A38"/>
+                </a:solidFill>
+                <a:latin typeface="Calibri" pitchFamily="34" charset="0"/>
+                <a:ea typeface="Calibri" pitchFamily="34" charset="-122"/>
+                <a:cs typeface="Calibri" pitchFamily="34" charset="-120"/>
+              </a:rPr>
+              <a:t>Nucleic acid quality depends on specimen type, fixation, and storage.</a:t>
+            </a:r>
+            <a:endParaRPr lang="en-US" sz="1250" dirty="0"/>
+          </a:p>
+          <a:p>
+            <a:pPr algn="l" marL="177800" indent="-177800">
+              <a:spcAft>
+                <a:spcPts val="900"/>
+              </a:spcAft>
+              <a:buSzPct val="100000"/>
+              <a:buChar char="•"/>
+            </a:pPr>
+            <a:r>
+              <a:rPr lang="en-US" sz="1250" dirty="0">
                 <a:solidFill>
                   <a:srgbClr val="33444F"/>
                 </a:solidFill>
@@ -4843,15 +5509,57 @@
                 <a:ea typeface="Calibri" pitchFamily="34" charset="-122"/>
                 <a:cs typeface="Calibri" pitchFamily="34" charset="-120"/>
               </a:rPr>
-              <a:t>Monitoring residual disease in CML uses quantitative RT-PCR — RNA-based and sensitive enough to follow deep molecular responses.</a:t>
-            </a:r>
-            <a:endParaRPr lang="en-US" sz="1350" dirty="0"/>
-          </a:p>
-        </p:txBody>
-      </p:sp>
-      <p:sp>
-        <p:nvSpPr>
-          <p:cNvPr id="8" name="Text 6"/>
+              <a:t>FFPE degrades and chemically damages DNA.</a:t>
+            </a:r>
+            <a:endParaRPr lang="en-US" sz="1250" dirty="0"/>
+          </a:p>
+          <a:p>
+            <a:pPr algn="l" marL="177800" indent="-177800">
+              <a:spcAft>
+                <a:spcPts val="900"/>
+              </a:spcAft>
+              <a:buSzPct val="100000"/>
+              <a:buChar char="•"/>
+            </a:pPr>
+            <a:r>
+              <a:rPr lang="en-US" sz="1250" dirty="0">
+                <a:solidFill>
+                  <a:srgbClr val="33444F"/>
+                </a:solidFill>
+                <a:latin typeface="Calibri" pitchFamily="34" charset="0"/>
+                <a:ea typeface="Calibri" pitchFamily="34" charset="-122"/>
+                <a:cs typeface="Calibri" pitchFamily="34" charset="-120"/>
+              </a:rPr>
+              <a:t>Heparin inhibits PCR; use appropriate tubes.</a:t>
+            </a:r>
+            <a:endParaRPr lang="en-US" sz="1250" dirty="0"/>
+          </a:p>
+          <a:p>
+            <a:pPr algn="l" marL="177800" indent="-177800">
+              <a:spcAft>
+                <a:spcPts val="900"/>
+              </a:spcAft>
+              <a:buSzPct val="100000"/>
+              <a:buChar char="•"/>
+            </a:pPr>
+            <a:r>
+              <a:rPr lang="en-US" sz="1250" dirty="0">
+                <a:solidFill>
+                  <a:srgbClr val="33444F"/>
+                </a:solidFill>
+                <a:latin typeface="Calibri" pitchFamily="34" charset="0"/>
+                <a:ea typeface="Calibri" pitchFamily="34" charset="-122"/>
+                <a:cs typeface="Calibri" pitchFamily="34" charset="-120"/>
+              </a:rPr>
+              <a:t>RNA is labile — handle and store carefully.</a:t>
+            </a:r>
+            <a:endParaRPr lang="en-US" sz="1250" dirty="0"/>
+          </a:p>
+        </p:txBody>
+      </p:sp>
+      <p:sp>
+        <p:nvSpPr>
+          <p:cNvPr id="10" name="Text 8"/>
           <p:cNvSpPr/>
           <p:nvPr/>
         </p:nvSpPr>
@@ -4890,7 +5598,7 @@
       </p:sp>
       <p:sp>
         <p:nvSpPr>
-          <p:cNvPr id="9" name="Text 7"/>
+          <p:cNvPr id="11" name="Text 9"/>
           <p:cNvSpPr/>
           <p:nvPr/>
         </p:nvSpPr>
@@ -5020,7 +5728,7 @@
                 <a:ea typeface="Calibri" pitchFamily="34" charset="-122"/>
                 <a:cs typeface="Calibri" pitchFamily="34" charset="-120"/>
               </a:rPr>
-              <a:t>MOLECULAR &amp; CYTOGENETICS   ·   CASE 2</a:t>
+              <a:t>MOLECULAR &amp; CYTOGENETICS   ·   CASE 1</a:t>
             </a:r>
             <a:endParaRPr lang="en-US" sz="1100" dirty="0"/>
           </a:p>
@@ -5059,7 +5767,7 @@
                 <a:ea typeface="Calibri" pitchFamily="34" charset="-122"/>
                 <a:cs typeface="Calibri" pitchFamily="34" charset="-120"/>
               </a:rPr>
-              <a:t>Case 2</a:t>
+              <a:t>Case 1</a:t>
             </a:r>
             <a:endParaRPr lang="en-US" sz="3000" dirty="0"/>
           </a:p>
@@ -5169,7 +5877,7 @@
                 <a:ea typeface="Calibri" pitchFamily="34" charset="-122"/>
                 <a:cs typeface="Calibri" pitchFamily="34" charset="-120"/>
               </a:rPr>
-              <a:t>A patient with a suspected microdeletion syndrome has a normal routine karyotype, but clinical suspicion remains high for a submicroscopic copy-number change.</a:t>
+              <a:t>A qualitative PCR for a viral target is negative, but clinical suspicion is high and the internal control failed to amplify.</a:t>
             </a:r>
             <a:endParaRPr lang="en-US" sz="1450" dirty="0"/>
           </a:p>
@@ -5276,7 +5984,7 @@
                 <a:ea typeface="Calibri" pitchFamily="34" charset="-122"/>
                 <a:cs typeface="Calibri" pitchFamily="34" charset="-120"/>
               </a:rPr>
-              <a:t>What is the most appropriate next test and why?</a:t>
+              <a:t>How do you interpret this result?</a:t>
             </a:r>
             <a:endParaRPr lang="en-US" sz="1500" dirty="0"/>
           </a:p>
@@ -5453,7 +6161,7 @@
                 <a:ea typeface="Calibri" pitchFamily="34" charset="-122"/>
                 <a:cs typeface="Calibri" pitchFamily="34" charset="-120"/>
               </a:rPr>
-              <a:t>MOLECULAR &amp; CYTOGENETICS   ·   CASE 2  ·  RESOLUTION</a:t>
+              <a:t>MOLECULAR &amp; CYTOGENETICS   ·   CASE 1  ·  RESOLUTION</a:t>
             </a:r>
             <a:endParaRPr lang="en-US" sz="1100" dirty="0"/>
           </a:p>
@@ -5492,7 +6200,7 @@
                 <a:ea typeface="Calibri" pitchFamily="34" charset="-122"/>
                 <a:cs typeface="Calibri" pitchFamily="34" charset="-120"/>
               </a:rPr>
-              <a:t>Case 2: Chromosomal Microarray</a:t>
+              <a:t>Case 1: PCR Inhibition</a:t>
             </a:r>
             <a:endParaRPr lang="en-US" sz="3000" dirty="0"/>
           </a:p>
@@ -5535,7 +6243,7 @@
                 <a:ea typeface="Calibri" pitchFamily="34" charset="-122"/>
                 <a:cs typeface="Calibri" pitchFamily="34" charset="-120"/>
               </a:rPr>
-              <a:t>Chromosomal microarray (CMA) detects submicroscopic copy-number variants below karyotype resolution.</a:t>
+              <a:t>A failed internal control indicates inhibition — the negative result is uninterpretable, not truly negative.</a:t>
             </a:r>
             <a:endParaRPr lang="en-US" sz="1400" dirty="0"/>
           </a:p>
@@ -5556,7 +6264,7 @@
                 <a:ea typeface="Calibri" pitchFamily="34" charset="-122"/>
                 <a:cs typeface="Calibri" pitchFamily="34" charset="-120"/>
               </a:rPr>
-              <a:t>Karyotype only sees large (&gt;5–10 Mb) changes.</a:t>
+              <a:t>Inhibitors (heparin, hemoglobin) or poor extraction may be responsible.</a:t>
             </a:r>
             <a:endParaRPr lang="en-US" sz="1400" dirty="0"/>
           </a:p>
@@ -5577,7 +6285,7 @@
                 <a:ea typeface="Calibri" pitchFamily="34" charset="-122"/>
                 <a:cs typeface="Calibri" pitchFamily="34" charset="-120"/>
               </a:rPr>
-              <a:t>CMA is first-line for unexplained developmental/congenital anomalies.</a:t>
+              <a:t>Repeat after dilution or re-extraction.</a:t>
             </a:r>
             <a:endParaRPr lang="en-US" sz="1400" dirty="0"/>
           </a:p>
@@ -5598,7 +6306,7 @@
                 <a:ea typeface="Calibri" pitchFamily="34" charset="-122"/>
                 <a:cs typeface="Calibri" pitchFamily="34" charset="-120"/>
               </a:rPr>
-              <a:t>CMA does not detect balanced rearrangements (use karyotype/FISH for those).</a:t>
+              <a:t>Never report a 'negative' when controls fail.</a:t>
             </a:r>
             <a:endParaRPr lang="en-US" sz="1400" dirty="0"/>
           </a:p>
@@ -5708,7 +6416,7 @@
                 <a:ea typeface="Calibri" pitchFamily="34" charset="-122"/>
                 <a:cs typeface="Calibri" pitchFamily="34" charset="-120"/>
               </a:rPr>
-              <a:t>For submicroscopic copy-number changes, microarray exceeds karyotype resolution — but it misses balanced translocations.</a:t>
+              <a:t>Always check amplification controls — a negative target with a failed control means inhibition, not absence of the target.</a:t>
             </a:r>
             <a:endParaRPr lang="en-US" sz="1350" dirty="0"/>
           </a:p>
@@ -5885,7 +6593,7 @@
                 <a:ea typeface="Calibri" pitchFamily="34" charset="-122"/>
                 <a:cs typeface="Calibri" pitchFamily="34" charset="-120"/>
               </a:rPr>
-              <a:t>MOLECULAR &amp; CYTOGENETICS   ·   BOARD REVIEW  ·  Q1</a:t>
+              <a:t>MOLECULAR &amp; CYTOGENETICS   ·   CASE 2</a:t>
             </a:r>
             <a:endParaRPr lang="en-US" sz="1100" dirty="0"/>
           </a:p>
@@ -5916,7 +6624,7 @@
               <a:buNone/>
             </a:pPr>
             <a:r>
-              <a:rPr lang="en-US" sz="2600" b="1" dirty="0">
+              <a:rPr lang="en-US" sz="3000" b="1" dirty="0">
                 <a:solidFill>
                   <a:srgbClr val="0E3A5F"/>
                 </a:solidFill>
@@ -5924,190 +6632,26 @@
                 <a:ea typeface="Calibri" pitchFamily="34" charset="-122"/>
                 <a:cs typeface="Calibri" pitchFamily="34" charset="-120"/>
               </a:rPr>
-              <a:t>Board-Style Review</a:t>
-            </a:r>
-            <a:endParaRPr lang="en-US" sz="2600" dirty="0"/>
-          </a:p>
-        </p:txBody>
-      </p:sp>
-      <p:sp>
-        <p:nvSpPr>
-          <p:cNvPr id="4" name="Text 2"/>
-          <p:cNvSpPr/>
-          <p:nvPr/>
-        </p:nvSpPr>
-        <p:spPr>
-          <a:xfrm>
-            <a:off x="566928" y="1417320"/>
-            <a:ext cx="11057839" cy="914400"/>
-          </a:xfrm>
-          <a:prstGeom prst="rect">
-            <a:avLst/>
-          </a:prstGeom>
-          <a:noFill/>
-          <a:ln/>
-        </p:spPr>
-        <p:txBody>
-          <a:bodyPr wrap="square" lIns="0" tIns="0" rIns="0" bIns="0" rtlCol="0" anchor="t"/>
-          <a:lstStyle/>
-          <a:p>
-            <a:pPr algn="l" indent="0" marL="0">
-              <a:lnSpc>
-                <a:spcPct val="105000"/>
-              </a:lnSpc>
-              <a:buNone/>
-            </a:pPr>
-            <a:r>
-              <a:rPr lang="en-US" sz="1450" b="1" dirty="0">
-                <a:solidFill>
-                  <a:srgbClr val="1B2A38"/>
-                </a:solidFill>
-                <a:latin typeface="Calibri" pitchFamily="34" charset="0"/>
-                <a:ea typeface="Calibri" pitchFamily="34" charset="-122"/>
-                <a:cs typeface="Calibri" pitchFamily="34" charset="-120"/>
-              </a:rPr>
-              <a:t>Which method is best to detect a known balanced translocation in non-dividing (interphase) cells?</a:t>
-            </a:r>
-            <a:endParaRPr lang="en-US" sz="1450" dirty="0"/>
-          </a:p>
-        </p:txBody>
-      </p:sp>
-      <p:sp>
-        <p:nvSpPr>
-          <p:cNvPr id="5" name="Text 3"/>
-          <p:cNvSpPr/>
-          <p:nvPr/>
-        </p:nvSpPr>
-        <p:spPr>
-          <a:xfrm>
-            <a:off x="658368" y="2395728"/>
-            <a:ext cx="6192390" cy="3017520"/>
-          </a:xfrm>
-          <a:prstGeom prst="rect">
-            <a:avLst/>
-          </a:prstGeom>
-          <a:noFill/>
-          <a:ln/>
-        </p:spPr>
-        <p:txBody>
-          <a:bodyPr wrap="square" lIns="0" tIns="0" rIns="0" bIns="0" rtlCol="0" anchor="t"/>
-          <a:lstStyle/>
-          <a:p>
-            <a:pPr algn="l" indent="0" marL="0">
-              <a:spcAft>
-                <a:spcPts val="600"/>
-              </a:spcAft>
-              <a:buNone/>
-            </a:pPr>
-            <a:r>
-              <a:rPr lang="en-US" sz="1350" dirty="0">
-                <a:solidFill>
-                  <a:srgbClr val="33444F"/>
-                </a:solidFill>
-                <a:latin typeface="Calibri" pitchFamily="34" charset="0"/>
-                <a:ea typeface="Calibri" pitchFamily="34" charset="-122"/>
-                <a:cs typeface="Calibri" pitchFamily="34" charset="-120"/>
-              </a:rPr>
-              <a:t>A. Karyotype</a:t>
-            </a:r>
-            <a:endParaRPr lang="en-US" sz="1350" dirty="0"/>
-          </a:p>
-          <a:p>
-            <a:pPr algn="l" indent="0" marL="0">
-              <a:spcAft>
-                <a:spcPts val="600"/>
-              </a:spcAft>
-              <a:buNone/>
-            </a:pPr>
-            <a:r>
-              <a:rPr lang="en-US" sz="1350" b="1" dirty="0">
-                <a:solidFill>
-                  <a:srgbClr val="005A63"/>
-                </a:solidFill>
-                <a:latin typeface="Calibri" pitchFamily="34" charset="0"/>
-                <a:ea typeface="Calibri" pitchFamily="34" charset="-122"/>
-                <a:cs typeface="Calibri" pitchFamily="34" charset="-120"/>
-              </a:rPr>
-              <a:t>B. Interphase FISH</a:t>
-            </a:r>
-            <a:endParaRPr lang="en-US" sz="1350" dirty="0"/>
-          </a:p>
-          <a:p>
-            <a:pPr algn="l" indent="0" marL="0">
-              <a:spcAft>
-                <a:spcPts val="600"/>
-              </a:spcAft>
-              <a:buNone/>
-            </a:pPr>
-            <a:r>
-              <a:rPr lang="en-US" sz="1350" dirty="0">
-                <a:solidFill>
-                  <a:srgbClr val="33444F"/>
-                </a:solidFill>
-                <a:latin typeface="Calibri" pitchFamily="34" charset="0"/>
-                <a:ea typeface="Calibri" pitchFamily="34" charset="-122"/>
-                <a:cs typeface="Calibri" pitchFamily="34" charset="-120"/>
-              </a:rPr>
-              <a:t>C. Sanger sequencing</a:t>
-            </a:r>
-            <a:endParaRPr lang="en-US" sz="1350" dirty="0"/>
-          </a:p>
-          <a:p>
-            <a:pPr algn="l" indent="0" marL="0">
-              <a:spcAft>
-                <a:spcPts val="600"/>
-              </a:spcAft>
-              <a:buNone/>
-            </a:pPr>
-            <a:r>
-              <a:rPr lang="en-US" sz="1350" dirty="0">
-                <a:solidFill>
-                  <a:srgbClr val="33444F"/>
-                </a:solidFill>
-                <a:latin typeface="Calibri" pitchFamily="34" charset="0"/>
-                <a:ea typeface="Calibri" pitchFamily="34" charset="-122"/>
-                <a:cs typeface="Calibri" pitchFamily="34" charset="-120"/>
-              </a:rPr>
-              <a:t>D. Chromosomal microarray</a:t>
-            </a:r>
-            <a:endParaRPr lang="en-US" sz="1350" dirty="0"/>
-          </a:p>
-          <a:p>
-            <a:pPr algn="l" indent="0" marL="0">
-              <a:spcAft>
-                <a:spcPts val="600"/>
-              </a:spcAft>
-              <a:buNone/>
-            </a:pPr>
-            <a:r>
-              <a:rPr lang="en-US" sz="1350" dirty="0">
-                <a:solidFill>
-                  <a:srgbClr val="33444F"/>
-                </a:solidFill>
-                <a:latin typeface="Calibri" pitchFamily="34" charset="0"/>
-                <a:ea typeface="Calibri" pitchFamily="34" charset="-122"/>
-                <a:cs typeface="Calibri" pitchFamily="34" charset="-120"/>
-              </a:rPr>
-              <a:t>E. Western blot</a:t>
-            </a:r>
-            <a:endParaRPr lang="en-US" sz="1350" dirty="0"/>
-          </a:p>
-        </p:txBody>
-      </p:sp>
-      <p:sp>
-        <p:nvSpPr>
-          <p:cNvPr id="6" name="Shape 4"/>
-          <p:cNvSpPr/>
-          <p:nvPr/>
-        </p:nvSpPr>
-        <p:spPr>
-          <a:xfrm>
-            <a:off x="7201632" y="2395728"/>
-            <a:ext cx="4423136" cy="3246120"/>
+              <a:t>Case 2</a:t>
+            </a:r>
+            <a:endParaRPr lang="en-US" sz="3000" dirty="0"/>
+          </a:p>
+        </p:txBody>
+      </p:sp>
+      <p:sp>
+        <p:nvSpPr>
+          <p:cNvPr id="4" name="Shape 2"/>
+          <p:cNvSpPr/>
+          <p:nvPr/>
+        </p:nvSpPr>
+        <p:spPr>
+          <a:xfrm>
+            <a:off x="566928" y="1517904"/>
+            <a:ext cx="11057839" cy="2788920"/>
           </a:xfrm>
           <a:prstGeom prst="roundRect">
             <a:avLst>
-              <a:gd name="adj" fmla="val 2535"/>
+              <a:gd name="adj" fmla="val 2951"/>
             </a:avLst>
           </a:prstGeom>
           <a:solidFill>
@@ -6125,14 +6669,14 @@
       </p:sp>
       <p:sp>
         <p:nvSpPr>
-          <p:cNvPr id="7" name="Text 5"/>
-          <p:cNvSpPr/>
-          <p:nvPr/>
-        </p:nvSpPr>
-        <p:spPr>
-          <a:xfrm>
-            <a:off x="7439376" y="2578608"/>
-            <a:ext cx="3965936" cy="457200"/>
+          <p:cNvPr id="5" name="Text 3"/>
+          <p:cNvSpPr/>
+          <p:nvPr/>
+        </p:nvSpPr>
+        <p:spPr>
+          <a:xfrm>
+            <a:off x="841248" y="1700784"/>
+            <a:ext cx="5486400" cy="292608"/>
           </a:xfrm>
           <a:prstGeom prst="rect">
             <a:avLst/>
@@ -6148,7 +6692,7 @@
               <a:buNone/>
             </a:pPr>
             <a:r>
-              <a:rPr lang="en-US" sz="1500" b="1" dirty="0">
+              <a:rPr lang="en-US" sz="1100" b="1" spc="150" kern="0" dirty="0">
                 <a:solidFill>
                   <a:srgbClr val="00838F"/>
                 </a:solidFill>
@@ -6156,36 +6700,22 @@
                 <a:ea typeface="Calibri" pitchFamily="34" charset="-122"/>
                 <a:cs typeface="Calibri" pitchFamily="34" charset="-120"/>
               </a:rPr>
-              <a:t>ANSWER  </a:t>
-            </a:r>
-            <a:pPr indent="0" marL="0">
-              <a:buNone/>
-            </a:pPr>
-            <a:r>
-              <a:rPr lang="en-US" sz="1500" b="1" dirty="0">
-                <a:solidFill>
-                  <a:srgbClr val="1B2A38"/>
-                </a:solidFill>
-                <a:latin typeface="Calibri" pitchFamily="34" charset="0"/>
-                <a:ea typeface="Calibri" pitchFamily="34" charset="-122"/>
-                <a:cs typeface="Calibri" pitchFamily="34" charset="-120"/>
-              </a:rPr>
-              <a:t>B — Interphase FISH</a:t>
-            </a:r>
-            <a:endParaRPr lang="en-US" sz="1500" dirty="0"/>
-          </a:p>
-        </p:txBody>
-      </p:sp>
-      <p:sp>
-        <p:nvSpPr>
-          <p:cNvPr id="8" name="Text 6"/>
-          <p:cNvSpPr/>
-          <p:nvPr/>
-        </p:nvSpPr>
-        <p:spPr>
-          <a:xfrm>
-            <a:off x="7439376" y="3127248"/>
-            <a:ext cx="3947648" cy="2377440"/>
+              <a:t>CLINICAL VIGNETTE</a:t>
+            </a:r>
+            <a:endParaRPr lang="en-US" sz="1100" dirty="0"/>
+          </a:p>
+        </p:txBody>
+      </p:sp>
+      <p:sp>
+        <p:nvSpPr>
+          <p:cNvPr id="6" name="Text 4"/>
+          <p:cNvSpPr/>
+          <p:nvPr/>
+        </p:nvSpPr>
+        <p:spPr>
+          <a:xfrm>
+            <a:off x="841248" y="2029968"/>
+            <a:ext cx="10509199" cy="2148840"/>
           </a:xfrm>
           <a:prstGeom prst="rect">
             <a:avLst/>
@@ -6204,7 +6734,7 @@
               <a:buNone/>
             </a:pPr>
             <a:r>
-              <a:rPr lang="en-US" sz="1250" dirty="0">
+              <a:rPr lang="en-US" sz="1450" dirty="0">
                 <a:solidFill>
                   <a:srgbClr val="33444F"/>
                 </a:solidFill>
@@ -6212,15 +6742,122 @@
                 <a:ea typeface="Calibri" pitchFamily="34" charset="-122"/>
                 <a:cs typeface="Calibri" pitchFamily="34" charset="-120"/>
               </a:rPr>
-              <a:t>FISH detects specific rearrangements in interphase (non-dividing) cells; karyotype needs dividing cells, and microarray misses balanced rearrangements.</a:t>
-            </a:r>
-            <a:endParaRPr lang="en-US" sz="1250" dirty="0"/>
+              <a:t>A low-level variant suspected at ~5% allele fraction is not seen on Sanger sequencing.</a:t>
+            </a:r>
+            <a:endParaRPr lang="en-US" sz="1450" dirty="0"/>
+          </a:p>
+        </p:txBody>
+      </p:sp>
+      <p:sp>
+        <p:nvSpPr>
+          <p:cNvPr id="7" name="Shape 5"/>
+          <p:cNvSpPr/>
+          <p:nvPr/>
+        </p:nvSpPr>
+        <p:spPr>
+          <a:xfrm>
+            <a:off x="566928" y="4553712"/>
+            <a:ext cx="11057839" cy="1325880"/>
+          </a:xfrm>
+          <a:prstGeom prst="roundRect">
+            <a:avLst>
+              <a:gd name="adj" fmla="val 6207"/>
+            </a:avLst>
+          </a:prstGeom>
+          <a:solidFill>
+            <a:srgbClr val="0E3A5F"/>
+          </a:solidFill>
+          <a:ln/>
+          <a:effectLst>
+            <a:outerShdw sx="100000" sy="100000" kx="0" ky="0" algn="bl" rotWithShape="0" blurRad="88900" dist="25400" dir="5400000">
+              <a:srgbClr val="22303C">
+                <a:alpha val="12000"/>
+              </a:srgbClr>
+            </a:outerShdw>
+          </a:effectLst>
+        </p:spPr>
+      </p:sp>
+      <p:sp>
+        <p:nvSpPr>
+          <p:cNvPr id="8" name="Text 6"/>
+          <p:cNvSpPr/>
+          <p:nvPr/>
+        </p:nvSpPr>
+        <p:spPr>
+          <a:xfrm>
+            <a:off x="822960" y="4681728"/>
+            <a:ext cx="640080" cy="960120"/>
+          </a:xfrm>
+          <a:prstGeom prst="rect">
+            <a:avLst/>
+          </a:prstGeom>
+          <a:noFill/>
+          <a:ln/>
+        </p:spPr>
+        <p:txBody>
+          <a:bodyPr wrap="square" lIns="0" tIns="0" rIns="0" bIns="0" rtlCol="0" anchor="ctr"/>
+          <a:lstStyle/>
+          <a:p>
+            <a:pPr algn="ctr" indent="0" marL="0">
+              <a:buNone/>
+            </a:pPr>
+            <a:r>
+              <a:rPr lang="en-US" sz="4000" b="1" dirty="0">
+                <a:solidFill>
+                  <a:srgbClr val="00838F"/>
+                </a:solidFill>
+                <a:latin typeface="Calibri" pitchFamily="34" charset="0"/>
+                <a:ea typeface="Calibri" pitchFamily="34" charset="-122"/>
+                <a:cs typeface="Calibri" pitchFamily="34" charset="-120"/>
+              </a:rPr>
+              <a:t>?</a:t>
+            </a:r>
+            <a:endParaRPr lang="en-US" sz="4000" dirty="0"/>
           </a:p>
         </p:txBody>
       </p:sp>
       <p:sp>
         <p:nvSpPr>
           <p:cNvPr id="9" name="Text 7"/>
+          <p:cNvSpPr/>
+          <p:nvPr/>
+        </p:nvSpPr>
+        <p:spPr>
+          <a:xfrm>
+            <a:off x="1618488" y="4553712"/>
+            <a:ext cx="9686239" cy="1325880"/>
+          </a:xfrm>
+          <a:prstGeom prst="rect">
+            <a:avLst/>
+          </a:prstGeom>
+          <a:noFill/>
+          <a:ln/>
+        </p:spPr>
+        <p:txBody>
+          <a:bodyPr wrap="square" lIns="0" tIns="0" rIns="0" bIns="0" rtlCol="0" anchor="ctr"/>
+          <a:lstStyle/>
+          <a:p>
+            <a:pPr algn="l" indent="0" marL="0">
+              <a:buNone/>
+            </a:pPr>
+            <a:r>
+              <a:rPr lang="en-US" sz="1500" b="1" dirty="0">
+                <a:solidFill>
+                  <a:srgbClr val="FFFFFF"/>
+                </a:solidFill>
+                <a:latin typeface="Calibri" pitchFamily="34" charset="0"/>
+                <a:ea typeface="Calibri" pitchFamily="34" charset="-122"/>
+                <a:cs typeface="Calibri" pitchFamily="34" charset="-120"/>
+              </a:rPr>
+              <a:t>Why, and what method would detect it?</a:t>
+            </a:r>
+            <a:endParaRPr lang="en-US" sz="1500" dirty="0"/>
+          </a:p>
+        </p:txBody>
+      </p:sp>
+      <p:sp>
+        <p:nvSpPr>
+          <p:cNvPr id="10" name="Text 8"/>
           <p:cNvSpPr/>
           <p:nvPr/>
         </p:nvSpPr>
@@ -6259,7 +6896,7 @@
       </p:sp>
       <p:sp>
         <p:nvSpPr>
-          <p:cNvPr id="10" name="Text 8"/>
+          <p:cNvPr id="11" name="Text 9"/>
           <p:cNvSpPr/>
           <p:nvPr/>
         </p:nvSpPr>
@@ -6389,7 +7026,7 @@
                 <a:ea typeface="Calibri" pitchFamily="34" charset="-122"/>
                 <a:cs typeface="Calibri" pitchFamily="34" charset="-120"/>
               </a:rPr>
-              <a:t>MOLECULAR &amp; CYTOGENETICS   ·   BOARD REVIEW  ·  Q2</a:t>
+              <a:t>MOLECULAR &amp; CYTOGENETICS   ·   CASE 2  ·  RESOLUTION</a:t>
             </a:r>
             <a:endParaRPr lang="en-US" sz="1100" dirty="0"/>
           </a:p>
@@ -6420,7 +7057,7 @@
               <a:buNone/>
             </a:pPr>
             <a:r>
-              <a:rPr lang="en-US" sz="2600" b="1" dirty="0">
+              <a:rPr lang="en-US" sz="3000" b="1" dirty="0">
                 <a:solidFill>
                   <a:srgbClr val="0E3A5F"/>
                 </a:solidFill>
@@ -6428,9 +7065,9 @@
                 <a:ea typeface="Calibri" pitchFamily="34" charset="-122"/>
                 <a:cs typeface="Calibri" pitchFamily="34" charset="-120"/>
               </a:rPr>
-              <a:t>Board-Style Review</a:t>
-            </a:r>
-            <a:endParaRPr lang="en-US" sz="2600" dirty="0"/>
+              <a:t>Case 2: Limit of Detection</a:t>
+            </a:r>
+            <a:endParaRPr lang="en-US" sz="3000" dirty="0"/>
           </a:p>
         </p:txBody>
       </p:sp>
@@ -6442,8 +7079,8 @@
         </p:nvSpPr>
         <p:spPr>
           <a:xfrm>
-            <a:off x="566928" y="1417320"/>
-            <a:ext cx="11057839" cy="914400"/>
+            <a:off x="566928" y="1554480"/>
+            <a:ext cx="6413547" cy="4023360"/>
           </a:xfrm>
           <a:prstGeom prst="rect">
             <a:avLst/>
@@ -6455,14 +7092,15 @@
           <a:bodyPr wrap="square" lIns="0" tIns="0" rIns="0" bIns="0" rtlCol="0" anchor="t"/>
           <a:lstStyle/>
           <a:p>
-            <a:pPr algn="l" indent="0" marL="0">
-              <a:lnSpc>
-                <a:spcPct val="105000"/>
-              </a:lnSpc>
-              <a:buNone/>
-            </a:pPr>
-            <a:r>
-              <a:rPr lang="en-US" sz="1450" b="1" dirty="0">
+            <a:pPr algn="l" marL="177800" indent="-177800">
+              <a:spcAft>
+                <a:spcPts val="900"/>
+              </a:spcAft>
+              <a:buSzPct val="100000"/>
+              <a:buChar char="•"/>
+            </a:pPr>
+            <a:r>
+              <a:rPr lang="en-US" sz="1400" b="1" dirty="0">
                 <a:solidFill>
                   <a:srgbClr val="1B2A38"/>
                 </a:solidFill>
@@ -6470,41 +7108,20 @@
                 <a:ea typeface="Calibri" pitchFamily="34" charset="-122"/>
                 <a:cs typeface="Calibri" pitchFamily="34" charset="-120"/>
               </a:rPr>
-              <a:t>Detecting a fusion TRANSCRIPT (e.g., BCR-ABL1) for monitoring requires:</a:t>
-            </a:r>
-            <a:endParaRPr lang="en-US" sz="1450" dirty="0"/>
-          </a:p>
-        </p:txBody>
-      </p:sp>
-      <p:sp>
-        <p:nvSpPr>
-          <p:cNvPr id="5" name="Text 3"/>
-          <p:cNvSpPr/>
-          <p:nvPr/>
-        </p:nvSpPr>
-        <p:spPr>
-          <a:xfrm>
-            <a:off x="658368" y="2395728"/>
-            <a:ext cx="6192390" cy="3017520"/>
-          </a:xfrm>
-          <a:prstGeom prst="rect">
-            <a:avLst/>
-          </a:prstGeom>
-          <a:noFill/>
-          <a:ln/>
-        </p:spPr>
-        <p:txBody>
-          <a:bodyPr wrap="square" lIns="0" tIns="0" rIns="0" bIns="0" rtlCol="0" anchor="t"/>
-          <a:lstStyle/>
-          <a:p>
-            <a:pPr algn="l" indent="0" marL="0">
+              <a:t>Sanger’s detection limit (~15–20%) is above a 5% variant, so it can miss low-level variants.</a:t>
+            </a:r>
+            <a:endParaRPr lang="en-US" sz="1400" dirty="0"/>
+          </a:p>
+          <a:p>
+            <a:pPr algn="l" marL="177800" indent="-177800">
               <a:spcAft>
-                <a:spcPts val="600"/>
+                <a:spcPts val="900"/>
               </a:spcAft>
-              <a:buNone/>
-            </a:pPr>
-            <a:r>
-              <a:rPr lang="en-US" sz="1350" dirty="0">
+              <a:buSzPct val="100000"/>
+              <a:buChar char="•"/>
+            </a:pPr>
+            <a:r>
+              <a:rPr lang="en-US" sz="1400" dirty="0">
                 <a:solidFill>
                   <a:srgbClr val="33444F"/>
                 </a:solidFill>
@@ -6512,39 +7129,41 @@
                 <a:ea typeface="Calibri" pitchFamily="34" charset="-122"/>
                 <a:cs typeface="Calibri" pitchFamily="34" charset="-120"/>
               </a:rPr>
-              <a:t>A. DNA PCR</a:t>
-            </a:r>
-            <a:endParaRPr lang="en-US" sz="1350" dirty="0"/>
-          </a:p>
-          <a:p>
-            <a:pPr algn="l" indent="0" marL="0">
+              <a:t>NGS with adequate depth or digital PCR detects low allele fractions.</a:t>
+            </a:r>
+            <a:endParaRPr lang="en-US" sz="1400" dirty="0"/>
+          </a:p>
+          <a:p>
+            <a:pPr algn="l" marL="177800" indent="-177800">
               <a:spcAft>
-                <a:spcPts val="600"/>
+                <a:spcPts val="900"/>
               </a:spcAft>
-              <a:buNone/>
-            </a:pPr>
-            <a:r>
-              <a:rPr lang="en-US" sz="1350" b="1" dirty="0">
-                <a:solidFill>
-                  <a:srgbClr val="005A63"/>
-                </a:solidFill>
-                <a:latin typeface="Calibri" pitchFamily="34" charset="0"/>
-                <a:ea typeface="Calibri" pitchFamily="34" charset="-122"/>
-                <a:cs typeface="Calibri" pitchFamily="34" charset="-120"/>
-              </a:rPr>
-              <a:t>B. RT-PCR (RNA-based)</a:t>
-            </a:r>
-            <a:endParaRPr lang="en-US" sz="1350" dirty="0"/>
-          </a:p>
-          <a:p>
-            <a:pPr algn="l" indent="0" marL="0">
+              <a:buSzPct val="100000"/>
+              <a:buChar char="•"/>
+            </a:pPr>
+            <a:r>
+              <a:rPr lang="en-US" sz="1400" dirty="0">
+                <a:solidFill>
+                  <a:srgbClr val="33444F"/>
+                </a:solidFill>
+                <a:latin typeface="Calibri" pitchFamily="34" charset="0"/>
+                <a:ea typeface="Calibri" pitchFamily="34" charset="-122"/>
+                <a:cs typeface="Calibri" pitchFamily="34" charset="-120"/>
+              </a:rPr>
+              <a:t>Choose the method by the expected variant level.</a:t>
+            </a:r>
+            <a:endParaRPr lang="en-US" sz="1400" dirty="0"/>
+          </a:p>
+          <a:p>
+            <a:pPr algn="l" marL="177800" indent="-177800">
               <a:spcAft>
-                <a:spcPts val="600"/>
+                <a:spcPts val="900"/>
               </a:spcAft>
-              <a:buNone/>
-            </a:pPr>
-            <a:r>
-              <a:rPr lang="en-US" sz="1350" dirty="0">
+              <a:buSzPct val="100000"/>
+              <a:buChar char="•"/>
+            </a:pPr>
+            <a:r>
+              <a:rPr lang="en-US" sz="1400" dirty="0">
                 <a:solidFill>
                   <a:srgbClr val="33444F"/>
                 </a:solidFill>
@@ -6552,66 +7171,26 @@
                 <a:ea typeface="Calibri" pitchFamily="34" charset="-122"/>
                 <a:cs typeface="Calibri" pitchFamily="34" charset="-120"/>
               </a:rPr>
-              <a:t>C. Karyotype</a:t>
-            </a:r>
-            <a:endParaRPr lang="en-US" sz="1350" dirty="0"/>
-          </a:p>
-          <a:p>
-            <a:pPr algn="l" indent="0" marL="0">
-              <a:spcAft>
-                <a:spcPts val="600"/>
-              </a:spcAft>
-              <a:buNone/>
-            </a:pPr>
-            <a:r>
-              <a:rPr lang="en-US" sz="1350" dirty="0">
-                <a:solidFill>
-                  <a:srgbClr val="33444F"/>
-                </a:solidFill>
-                <a:latin typeface="Calibri" pitchFamily="34" charset="0"/>
-                <a:ea typeface="Calibri" pitchFamily="34" charset="-122"/>
-                <a:cs typeface="Calibri" pitchFamily="34" charset="-120"/>
-              </a:rPr>
-              <a:t>D. Microarray</a:t>
-            </a:r>
-            <a:endParaRPr lang="en-US" sz="1350" dirty="0"/>
-          </a:p>
-          <a:p>
-            <a:pPr algn="l" indent="0" marL="0">
-              <a:spcAft>
-                <a:spcPts val="600"/>
-              </a:spcAft>
-              <a:buNone/>
-            </a:pPr>
-            <a:r>
-              <a:rPr lang="en-US" sz="1350" dirty="0">
-                <a:solidFill>
-                  <a:srgbClr val="33444F"/>
-                </a:solidFill>
-                <a:latin typeface="Calibri" pitchFamily="34" charset="0"/>
-                <a:ea typeface="Calibri" pitchFamily="34" charset="-122"/>
-                <a:cs typeface="Calibri" pitchFamily="34" charset="-120"/>
-              </a:rPr>
-              <a:t>E. Sanger of genomic DNA</a:t>
-            </a:r>
-            <a:endParaRPr lang="en-US" sz="1350" dirty="0"/>
-          </a:p>
-        </p:txBody>
-      </p:sp>
-      <p:sp>
-        <p:nvSpPr>
-          <p:cNvPr id="6" name="Shape 4"/>
-          <p:cNvSpPr/>
-          <p:nvPr/>
-        </p:nvSpPr>
-        <p:spPr>
-          <a:xfrm>
-            <a:off x="7201632" y="2395728"/>
-            <a:ext cx="4423136" cy="3246120"/>
+              <a:t>Confirm critical low-level calls appropriately.</a:t>
+            </a:r>
+            <a:endParaRPr lang="en-US" sz="1400" dirty="0"/>
+          </a:p>
+        </p:txBody>
+      </p:sp>
+      <p:sp>
+        <p:nvSpPr>
+          <p:cNvPr id="5" name="Shape 3"/>
+          <p:cNvSpPr/>
+          <p:nvPr/>
+        </p:nvSpPr>
+        <p:spPr>
+          <a:xfrm>
+            <a:off x="7422788" y="1554480"/>
+            <a:ext cx="4201979" cy="3977640"/>
           </a:xfrm>
           <a:prstGeom prst="roundRect">
             <a:avLst>
-              <a:gd name="adj" fmla="val 2535"/>
+              <a:gd name="adj" fmla="val 2069"/>
             </a:avLst>
           </a:prstGeom>
           <a:solidFill>
@@ -6629,67 +7208,53 @@
       </p:sp>
       <p:sp>
         <p:nvSpPr>
+          <p:cNvPr id="6" name="Text 4"/>
+          <p:cNvSpPr/>
+          <p:nvPr/>
+        </p:nvSpPr>
+        <p:spPr>
+          <a:xfrm>
+            <a:off x="7660532" y="1755648"/>
+            <a:ext cx="3744779" cy="310896"/>
+          </a:xfrm>
+          <a:prstGeom prst="rect">
+            <a:avLst/>
+          </a:prstGeom>
+          <a:noFill/>
+          <a:ln/>
+        </p:spPr>
+        <p:txBody>
+          <a:bodyPr wrap="square" lIns="0" tIns="0" rIns="0" bIns="0" rtlCol="0" anchor="ctr"/>
+          <a:lstStyle/>
+          <a:p>
+            <a:pPr indent="0" marL="0">
+              <a:buNone/>
+            </a:pPr>
+            <a:r>
+              <a:rPr lang="en-US" sz="1100" b="1" spc="140" kern="0" dirty="0">
+                <a:solidFill>
+                  <a:srgbClr val="00838F"/>
+                </a:solidFill>
+                <a:latin typeface="Calibri" pitchFamily="34" charset="0"/>
+                <a:ea typeface="Calibri" pitchFamily="34" charset="-122"/>
+                <a:cs typeface="Calibri" pitchFamily="34" charset="-120"/>
+              </a:rPr>
+              <a:t>TEACHING POINT</a:t>
+            </a:r>
+            <a:endParaRPr lang="en-US" sz="1100" dirty="0"/>
+          </a:p>
+        </p:txBody>
+      </p:sp>
+      <p:sp>
+        <p:nvSpPr>
           <p:cNvPr id="7" name="Text 5"/>
           <p:cNvSpPr/>
           <p:nvPr/>
         </p:nvSpPr>
         <p:spPr>
           <a:xfrm>
-            <a:off x="7439376" y="2578608"/>
-            <a:ext cx="3965936" cy="457200"/>
-          </a:xfrm>
-          <a:prstGeom prst="rect">
-            <a:avLst/>
-          </a:prstGeom>
-          <a:noFill/>
-          <a:ln/>
-        </p:spPr>
-        <p:txBody>
-          <a:bodyPr wrap="square" lIns="0" tIns="0" rIns="0" bIns="0" rtlCol="0" anchor="ctr"/>
-          <a:lstStyle/>
-          <a:p>
-            <a:pPr indent="0" marL="0">
-              <a:buNone/>
-            </a:pPr>
-            <a:r>
-              <a:rPr lang="en-US" sz="1500" b="1" dirty="0">
-                <a:solidFill>
-                  <a:srgbClr val="00838F"/>
-                </a:solidFill>
-                <a:latin typeface="Calibri" pitchFamily="34" charset="0"/>
-                <a:ea typeface="Calibri" pitchFamily="34" charset="-122"/>
-                <a:cs typeface="Calibri" pitchFamily="34" charset="-120"/>
-              </a:rPr>
-              <a:t>ANSWER  </a:t>
-            </a:r>
-            <a:pPr indent="0" marL="0">
-              <a:buNone/>
-            </a:pPr>
-            <a:r>
-              <a:rPr lang="en-US" sz="1500" b="1" dirty="0">
-                <a:solidFill>
-                  <a:srgbClr val="1B2A38"/>
-                </a:solidFill>
-                <a:latin typeface="Calibri" pitchFamily="34" charset="0"/>
-                <a:ea typeface="Calibri" pitchFamily="34" charset="-122"/>
-                <a:cs typeface="Calibri" pitchFamily="34" charset="-120"/>
-              </a:rPr>
-              <a:t>B — RT-PCR (RNA-based)</a:t>
-            </a:r>
-            <a:endParaRPr lang="en-US" sz="1500" dirty="0"/>
-          </a:p>
-        </p:txBody>
-      </p:sp>
-      <p:sp>
-        <p:nvSpPr>
-          <p:cNvPr id="8" name="Text 6"/>
-          <p:cNvSpPr/>
-          <p:nvPr/>
-        </p:nvSpPr>
-        <p:spPr>
-          <a:xfrm>
-            <a:off x="7439376" y="3127248"/>
-            <a:ext cx="3947648" cy="2377440"/>
+            <a:off x="7660532" y="2121408"/>
+            <a:ext cx="3726491" cy="3291840"/>
           </a:xfrm>
           <a:prstGeom prst="rect">
             <a:avLst/>
@@ -6703,12 +7268,12 @@
           <a:p>
             <a:pPr algn="l" indent="0" marL="0">
               <a:lnSpc>
-                <a:spcPct val="108000"/>
+                <a:spcPct val="110000"/>
               </a:lnSpc>
               <a:buNone/>
             </a:pPr>
             <a:r>
-              <a:rPr lang="en-US" sz="1250" dirty="0">
+              <a:rPr lang="en-US" sz="1350" dirty="0">
                 <a:solidFill>
                   <a:srgbClr val="33444F"/>
                 </a:solidFill>
@@ -6716,15 +7281,15 @@
                 <a:ea typeface="Calibri" pitchFamily="34" charset="-122"/>
                 <a:cs typeface="Calibri" pitchFamily="34" charset="-120"/>
               </a:rPr>
-              <a:t>Fusion transcripts are RNA; RT-PCR converts RNA to cDNA for amplification and quantitation, enabling sensitive monitoring.</a:t>
-            </a:r>
-            <a:endParaRPr lang="en-US" sz="1250" dirty="0"/>
-          </a:p>
-        </p:txBody>
-      </p:sp>
-      <p:sp>
-        <p:nvSpPr>
-          <p:cNvPr id="9" name="Text 7"/>
+              <a:t>Match method sensitivity to the question — Sanger misses low-fraction variants that NGS or digital PCR can detect.</a:t>
+            </a:r>
+            <a:endParaRPr lang="en-US" sz="1350" dirty="0"/>
+          </a:p>
+        </p:txBody>
+      </p:sp>
+      <p:sp>
+        <p:nvSpPr>
+          <p:cNvPr id="8" name="Text 6"/>
           <p:cNvSpPr/>
           <p:nvPr/>
         </p:nvSpPr>
@@ -6763,7 +7328,7 @@
       </p:sp>
       <p:sp>
         <p:nvSpPr>
-          <p:cNvPr id="10" name="Text 8"/>
+          <p:cNvPr id="9" name="Text 7"/>
           <p:cNvSpPr/>
           <p:nvPr/>
         </p:nvSpPr>
@@ -6893,7 +7458,7 @@
                 <a:ea typeface="Calibri" pitchFamily="34" charset="-122"/>
                 <a:cs typeface="Calibri" pitchFamily="34" charset="-120"/>
               </a:rPr>
-              <a:t>MOLECULAR &amp; CYTOGENETICS   ·   BOARD REVIEW  ·  Q3</a:t>
+              <a:t>MOLECULAR &amp; CYTOGENETICS   ·   CASE 3</a:t>
             </a:r>
             <a:endParaRPr lang="en-US" sz="1100" dirty="0"/>
           </a:p>
@@ -6924,7 +7489,7 @@
               <a:buNone/>
             </a:pPr>
             <a:r>
-              <a:rPr lang="en-US" sz="2600" b="1" dirty="0">
+              <a:rPr lang="en-US" sz="3000" b="1" dirty="0">
                 <a:solidFill>
                   <a:srgbClr val="0E3A5F"/>
                 </a:solidFill>
@@ -6932,190 +7497,26 @@
                 <a:ea typeface="Calibri" pitchFamily="34" charset="-122"/>
                 <a:cs typeface="Calibri" pitchFamily="34" charset="-120"/>
               </a:rPr>
-              <a:t>Board-Style Review</a:t>
-            </a:r>
-            <a:endParaRPr lang="en-US" sz="2600" dirty="0"/>
-          </a:p>
-        </p:txBody>
-      </p:sp>
-      <p:sp>
-        <p:nvSpPr>
-          <p:cNvPr id="4" name="Text 2"/>
-          <p:cNvSpPr/>
-          <p:nvPr/>
-        </p:nvSpPr>
-        <p:spPr>
-          <a:xfrm>
-            <a:off x="566928" y="1417320"/>
-            <a:ext cx="11057839" cy="914400"/>
-          </a:xfrm>
-          <a:prstGeom prst="rect">
-            <a:avLst/>
-          </a:prstGeom>
-          <a:noFill/>
-          <a:ln/>
-        </p:spPr>
-        <p:txBody>
-          <a:bodyPr wrap="square" lIns="0" tIns="0" rIns="0" bIns="0" rtlCol="0" anchor="t"/>
-          <a:lstStyle/>
-          <a:p>
-            <a:pPr algn="l" indent="0" marL="0">
-              <a:lnSpc>
-                <a:spcPct val="105000"/>
-              </a:lnSpc>
-              <a:buNone/>
-            </a:pPr>
-            <a:r>
-              <a:rPr lang="en-US" sz="1450" b="1" dirty="0">
-                <a:solidFill>
-                  <a:srgbClr val="1B2A38"/>
-                </a:solidFill>
-                <a:latin typeface="Calibri" pitchFamily="34" charset="0"/>
-                <a:ea typeface="Calibri" pitchFamily="34" charset="-122"/>
-                <a:cs typeface="Calibri" pitchFamily="34" charset="-120"/>
-              </a:rPr>
-              <a:t>Compared with Sanger sequencing, a key advantage of NGS is:</a:t>
-            </a:r>
-            <a:endParaRPr lang="en-US" sz="1450" dirty="0"/>
-          </a:p>
-        </p:txBody>
-      </p:sp>
-      <p:sp>
-        <p:nvSpPr>
-          <p:cNvPr id="5" name="Text 3"/>
-          <p:cNvSpPr/>
-          <p:nvPr/>
-        </p:nvSpPr>
-        <p:spPr>
-          <a:xfrm>
-            <a:off x="658368" y="2395728"/>
-            <a:ext cx="6192390" cy="3017520"/>
-          </a:xfrm>
-          <a:prstGeom prst="rect">
-            <a:avLst/>
-          </a:prstGeom>
-          <a:noFill/>
-          <a:ln/>
-        </p:spPr>
-        <p:txBody>
-          <a:bodyPr wrap="square" lIns="0" tIns="0" rIns="0" bIns="0" rtlCol="0" anchor="t"/>
-          <a:lstStyle/>
-          <a:p>
-            <a:pPr algn="l" indent="0" marL="0">
-              <a:spcAft>
-                <a:spcPts val="600"/>
-              </a:spcAft>
-              <a:buNone/>
-            </a:pPr>
-            <a:r>
-              <a:rPr lang="en-US" sz="1350" dirty="0">
-                <a:solidFill>
-                  <a:srgbClr val="33444F"/>
-                </a:solidFill>
-                <a:latin typeface="Calibri" pitchFamily="34" charset="0"/>
-                <a:ea typeface="Calibri" pitchFamily="34" charset="-122"/>
-                <a:cs typeface="Calibri" pitchFamily="34" charset="-120"/>
-              </a:rPr>
-              <a:t>A. Lower cost per single variant</a:t>
-            </a:r>
-            <a:endParaRPr lang="en-US" sz="1350" dirty="0"/>
-          </a:p>
-          <a:p>
-            <a:pPr algn="l" indent="0" marL="0">
-              <a:spcAft>
-                <a:spcPts val="600"/>
-              </a:spcAft>
-              <a:buNone/>
-            </a:pPr>
-            <a:r>
-              <a:rPr lang="en-US" sz="1350" b="1" dirty="0">
-                <a:solidFill>
-                  <a:srgbClr val="005A63"/>
-                </a:solidFill>
-                <a:latin typeface="Calibri" pitchFamily="34" charset="0"/>
-                <a:ea typeface="Calibri" pitchFamily="34" charset="-122"/>
-                <a:cs typeface="Calibri" pitchFamily="34" charset="-120"/>
-              </a:rPr>
-              <a:t>B. Ability to detect low-level variants across many genes simultaneously</a:t>
-            </a:r>
-            <a:endParaRPr lang="en-US" sz="1350" dirty="0"/>
-          </a:p>
-          <a:p>
-            <a:pPr algn="l" indent="0" marL="0">
-              <a:spcAft>
-                <a:spcPts val="600"/>
-              </a:spcAft>
-              <a:buNone/>
-            </a:pPr>
-            <a:r>
-              <a:rPr lang="en-US" sz="1350" dirty="0">
-                <a:solidFill>
-                  <a:srgbClr val="33444F"/>
-                </a:solidFill>
-                <a:latin typeface="Calibri" pitchFamily="34" charset="0"/>
-                <a:ea typeface="Calibri" pitchFamily="34" charset="-122"/>
-                <a:cs typeface="Calibri" pitchFamily="34" charset="-120"/>
-              </a:rPr>
-              <a:t>C. No need for bioinformatics</a:t>
-            </a:r>
-            <a:endParaRPr lang="en-US" sz="1350" dirty="0"/>
-          </a:p>
-          <a:p>
-            <a:pPr algn="l" indent="0" marL="0">
-              <a:spcAft>
-                <a:spcPts val="600"/>
-              </a:spcAft>
-              <a:buNone/>
-            </a:pPr>
-            <a:r>
-              <a:rPr lang="en-US" sz="1350" dirty="0">
-                <a:solidFill>
-                  <a:srgbClr val="33444F"/>
-                </a:solidFill>
-                <a:latin typeface="Calibri" pitchFamily="34" charset="0"/>
-                <a:ea typeface="Calibri" pitchFamily="34" charset="-122"/>
-                <a:cs typeface="Calibri" pitchFamily="34" charset="-120"/>
-              </a:rPr>
-              <a:t>D. It cannot detect indels</a:t>
-            </a:r>
-            <a:endParaRPr lang="en-US" sz="1350" dirty="0"/>
-          </a:p>
-          <a:p>
-            <a:pPr algn="l" indent="0" marL="0">
-              <a:spcAft>
-                <a:spcPts val="600"/>
-              </a:spcAft>
-              <a:buNone/>
-            </a:pPr>
-            <a:r>
-              <a:rPr lang="en-US" sz="1350" dirty="0">
-                <a:solidFill>
-                  <a:srgbClr val="33444F"/>
-                </a:solidFill>
-                <a:latin typeface="Calibri" pitchFamily="34" charset="0"/>
-                <a:ea typeface="Calibri" pitchFamily="34" charset="-122"/>
-                <a:cs typeface="Calibri" pitchFamily="34" charset="-120"/>
-              </a:rPr>
-              <a:t>E. It requires dividing cells</a:t>
-            </a:r>
-            <a:endParaRPr lang="en-US" sz="1350" dirty="0"/>
-          </a:p>
-        </p:txBody>
-      </p:sp>
-      <p:sp>
-        <p:nvSpPr>
-          <p:cNvPr id="6" name="Shape 4"/>
-          <p:cNvSpPr/>
-          <p:nvPr/>
-        </p:nvSpPr>
-        <p:spPr>
-          <a:xfrm>
-            <a:off x="7201632" y="2395728"/>
-            <a:ext cx="4423136" cy="3246120"/>
+              <a:t>Case 3</a:t>
+            </a:r>
+            <a:endParaRPr lang="en-US" sz="3000" dirty="0"/>
+          </a:p>
+        </p:txBody>
+      </p:sp>
+      <p:sp>
+        <p:nvSpPr>
+          <p:cNvPr id="4" name="Shape 2"/>
+          <p:cNvSpPr/>
+          <p:nvPr/>
+        </p:nvSpPr>
+        <p:spPr>
+          <a:xfrm>
+            <a:off x="566928" y="1517904"/>
+            <a:ext cx="11057839" cy="2788920"/>
           </a:xfrm>
           <a:prstGeom prst="roundRect">
             <a:avLst>
-              <a:gd name="adj" fmla="val 2535"/>
+              <a:gd name="adj" fmla="val 2951"/>
             </a:avLst>
           </a:prstGeom>
           <a:solidFill>
@@ -7133,14 +7534,14 @@
       </p:sp>
       <p:sp>
         <p:nvSpPr>
-          <p:cNvPr id="7" name="Text 5"/>
-          <p:cNvSpPr/>
-          <p:nvPr/>
-        </p:nvSpPr>
-        <p:spPr>
-          <a:xfrm>
-            <a:off x="7439376" y="2578608"/>
-            <a:ext cx="3965936" cy="457200"/>
+          <p:cNvPr id="5" name="Text 3"/>
+          <p:cNvSpPr/>
+          <p:nvPr/>
+        </p:nvSpPr>
+        <p:spPr>
+          <a:xfrm>
+            <a:off x="841248" y="1700784"/>
+            <a:ext cx="5486400" cy="292608"/>
           </a:xfrm>
           <a:prstGeom prst="rect">
             <a:avLst/>
@@ -7156,7 +7557,7 @@
               <a:buNone/>
             </a:pPr>
             <a:r>
-              <a:rPr lang="en-US" sz="1500" b="1" dirty="0">
+              <a:rPr lang="en-US" sz="1100" b="1" spc="150" kern="0" dirty="0">
                 <a:solidFill>
                   <a:srgbClr val="00838F"/>
                 </a:solidFill>
@@ -7164,36 +7565,22 @@
                 <a:ea typeface="Calibri" pitchFamily="34" charset="-122"/>
                 <a:cs typeface="Calibri" pitchFamily="34" charset="-120"/>
               </a:rPr>
-              <a:t>ANSWER  </a:t>
-            </a:r>
-            <a:pPr indent="0" marL="0">
-              <a:buNone/>
-            </a:pPr>
-            <a:r>
-              <a:rPr lang="en-US" sz="1500" b="1" dirty="0">
-                <a:solidFill>
-                  <a:srgbClr val="1B2A38"/>
-                </a:solidFill>
-                <a:latin typeface="Calibri" pitchFamily="34" charset="0"/>
-                <a:ea typeface="Calibri" pitchFamily="34" charset="-122"/>
-                <a:cs typeface="Calibri" pitchFamily="34" charset="-120"/>
-              </a:rPr>
-              <a:t>B — Low-level variants across many genes</a:t>
-            </a:r>
-            <a:endParaRPr lang="en-US" sz="1500" dirty="0"/>
-          </a:p>
-        </p:txBody>
-      </p:sp>
-      <p:sp>
-        <p:nvSpPr>
-          <p:cNvPr id="8" name="Text 6"/>
-          <p:cNvSpPr/>
-          <p:nvPr/>
-        </p:nvSpPr>
-        <p:spPr>
-          <a:xfrm>
-            <a:off x="7439376" y="3127248"/>
-            <a:ext cx="3947648" cy="2377440"/>
+              <a:t>CLINICAL VIGNETTE</a:t>
+            </a:r>
+            <a:endParaRPr lang="en-US" sz="1100" dirty="0"/>
+          </a:p>
+        </p:txBody>
+      </p:sp>
+      <p:sp>
+        <p:nvSpPr>
+          <p:cNvPr id="6" name="Text 4"/>
+          <p:cNvSpPr/>
+          <p:nvPr/>
+        </p:nvSpPr>
+        <p:spPr>
+          <a:xfrm>
+            <a:off x="841248" y="2029968"/>
+            <a:ext cx="10509199" cy="2148840"/>
           </a:xfrm>
           <a:prstGeom prst="rect">
             <a:avLst/>
@@ -7212,7 +7599,7 @@
               <a:buNone/>
             </a:pPr>
             <a:r>
-              <a:rPr lang="en-US" sz="1250" dirty="0">
+              <a:rPr lang="en-US" sz="1450" dirty="0">
                 <a:solidFill>
                   <a:srgbClr val="33444F"/>
                 </a:solidFill>
@@ -7220,15 +7607,122 @@
                 <a:ea typeface="Calibri" pitchFamily="34" charset="-122"/>
                 <a:cs typeface="Calibri" pitchFamily="34" charset="-120"/>
               </a:rPr>
-              <a:t>NGS provides breadth (many genes) and depth (low allele fractions) in parallel; Sanger is limited in sensitivity and throughput.</a:t>
-            </a:r>
-            <a:endParaRPr lang="en-US" sz="1250" dirty="0"/>
+              <a:t>A run shows amplification in the no-template control.</a:t>
+            </a:r>
+            <a:endParaRPr lang="en-US" sz="1450" dirty="0"/>
+          </a:p>
+        </p:txBody>
+      </p:sp>
+      <p:sp>
+        <p:nvSpPr>
+          <p:cNvPr id="7" name="Shape 5"/>
+          <p:cNvSpPr/>
+          <p:nvPr/>
+        </p:nvSpPr>
+        <p:spPr>
+          <a:xfrm>
+            <a:off x="566928" y="4553712"/>
+            <a:ext cx="11057839" cy="1325880"/>
+          </a:xfrm>
+          <a:prstGeom prst="roundRect">
+            <a:avLst>
+              <a:gd name="adj" fmla="val 6207"/>
+            </a:avLst>
+          </a:prstGeom>
+          <a:solidFill>
+            <a:srgbClr val="0E3A5F"/>
+          </a:solidFill>
+          <a:ln/>
+          <a:effectLst>
+            <a:outerShdw sx="100000" sy="100000" kx="0" ky="0" algn="bl" rotWithShape="0" blurRad="88900" dist="25400" dir="5400000">
+              <a:srgbClr val="22303C">
+                <a:alpha val="12000"/>
+              </a:srgbClr>
+            </a:outerShdw>
+          </a:effectLst>
+        </p:spPr>
+      </p:sp>
+      <p:sp>
+        <p:nvSpPr>
+          <p:cNvPr id="8" name="Text 6"/>
+          <p:cNvSpPr/>
+          <p:nvPr/>
+        </p:nvSpPr>
+        <p:spPr>
+          <a:xfrm>
+            <a:off x="822960" y="4681728"/>
+            <a:ext cx="640080" cy="960120"/>
+          </a:xfrm>
+          <a:prstGeom prst="rect">
+            <a:avLst/>
+          </a:prstGeom>
+          <a:noFill/>
+          <a:ln/>
+        </p:spPr>
+        <p:txBody>
+          <a:bodyPr wrap="square" lIns="0" tIns="0" rIns="0" bIns="0" rtlCol="0" anchor="ctr"/>
+          <a:lstStyle/>
+          <a:p>
+            <a:pPr algn="ctr" indent="0" marL="0">
+              <a:buNone/>
+            </a:pPr>
+            <a:r>
+              <a:rPr lang="en-US" sz="4000" b="1" dirty="0">
+                <a:solidFill>
+                  <a:srgbClr val="00838F"/>
+                </a:solidFill>
+                <a:latin typeface="Calibri" pitchFamily="34" charset="0"/>
+                <a:ea typeface="Calibri" pitchFamily="34" charset="-122"/>
+                <a:cs typeface="Calibri" pitchFamily="34" charset="-120"/>
+              </a:rPr>
+              <a:t>?</a:t>
+            </a:r>
+            <a:endParaRPr lang="en-US" sz="4000" dirty="0"/>
           </a:p>
         </p:txBody>
       </p:sp>
       <p:sp>
         <p:nvSpPr>
           <p:cNvPr id="9" name="Text 7"/>
+          <p:cNvSpPr/>
+          <p:nvPr/>
+        </p:nvSpPr>
+        <p:spPr>
+          <a:xfrm>
+            <a:off x="1618488" y="4553712"/>
+            <a:ext cx="9686239" cy="1325880"/>
+          </a:xfrm>
+          <a:prstGeom prst="rect">
+            <a:avLst/>
+          </a:prstGeom>
+          <a:noFill/>
+          <a:ln/>
+        </p:spPr>
+        <p:txBody>
+          <a:bodyPr wrap="square" lIns="0" tIns="0" rIns="0" bIns="0" rtlCol="0" anchor="ctr"/>
+          <a:lstStyle/>
+          <a:p>
+            <a:pPr algn="l" indent="0" marL="0">
+              <a:buNone/>
+            </a:pPr>
+            <a:r>
+              <a:rPr lang="en-US" sz="1500" b="1" dirty="0">
+                <a:solidFill>
+                  <a:srgbClr val="FFFFFF"/>
+                </a:solidFill>
+                <a:latin typeface="Calibri" pitchFamily="34" charset="0"/>
+                <a:ea typeface="Calibri" pitchFamily="34" charset="-122"/>
+                <a:cs typeface="Calibri" pitchFamily="34" charset="-120"/>
+              </a:rPr>
+              <a:t>What does this indicate and what must be done?</a:t>
+            </a:r>
+            <a:endParaRPr lang="en-US" sz="1500" dirty="0"/>
+          </a:p>
+        </p:txBody>
+      </p:sp>
+      <p:sp>
+        <p:nvSpPr>
+          <p:cNvPr id="10" name="Text 8"/>
           <p:cNvSpPr/>
           <p:nvPr/>
         </p:nvSpPr>
@@ -7267,7 +7761,7 @@
       </p:sp>
       <p:sp>
         <p:nvSpPr>
-          <p:cNvPr id="10" name="Text 8"/>
+          <p:cNvPr id="11" name="Text 9"/>
           <p:cNvSpPr/>
           <p:nvPr/>
         </p:nvSpPr>
@@ -7543,7 +8037,7 @@
                 <a:ea typeface="Calibri" pitchFamily="34" charset="-122"/>
                 <a:cs typeface="Calibri" pitchFamily="34" charset="-120"/>
               </a:rPr>
-              <a:t>Targeted, sensitive, fast — the workhorse of molecular diagnostics</a:t>
+              <a:t>Amplifies a target sequence exponentially</a:t>
             </a:r>
             <a:endParaRPr lang="en-US" sz="1150" dirty="0"/>
           </a:p>
@@ -7611,7 +8105,7 @@
                 <a:ea typeface="Calibri" pitchFamily="34" charset="-122"/>
                 <a:cs typeface="Calibri" pitchFamily="34" charset="-120"/>
               </a:rPr>
-              <a:t>FISH</a:t>
+              <a:t>qPCR</a:t>
             </a:r>
             <a:endParaRPr lang="en-US" sz="3600" dirty="0"/>
           </a:p>
@@ -7650,7 +8144,7 @@
                 <a:ea typeface="Calibri" pitchFamily="34" charset="-122"/>
                 <a:cs typeface="Calibri" pitchFamily="34" charset="-120"/>
               </a:rPr>
-              <a:t>Sees specific rearrangements that a karyotype or PCR may miss</a:t>
+              <a:t>Quantifies in real time via cycle threshold</a:t>
             </a:r>
             <a:endParaRPr lang="en-US" sz="1150" dirty="0"/>
           </a:p>
@@ -7757,7 +8251,7 @@
                 <a:ea typeface="Calibri" pitchFamily="34" charset="-122"/>
                 <a:cs typeface="Calibri" pitchFamily="34" charset="-120"/>
               </a:rPr>
-              <a:t>Breadth across many genes in one assay</a:t>
+              <a:t>Massively parallel sequencing reads millions of fragments</a:t>
             </a:r>
             <a:endParaRPr lang="en-US" sz="1150" dirty="0"/>
           </a:p>
@@ -7828,7 +8322,7 @@
                 <a:ea typeface="Calibri" pitchFamily="34" charset="-122"/>
                 <a:cs typeface="Calibri" pitchFamily="34" charset="-120"/>
               </a:rPr>
-              <a:t>Each molecular platform answers a different question. Matching method to the clinical question — known target vs genome-wide discovery, single cell vs bulk, DNA vs RNA — is the core skill before any result is interpreted.</a:t>
+              <a:t>Molecular diagnostics rests on a handful of core methods. Knowing what each technique measures — and its limits — lets you choose the right test and interpret it correctly.</a:t>
             </a:r>
             <a:endParaRPr lang="en-US" sz="1450" dirty="0"/>
           </a:p>
@@ -7871,7 +8365,7 @@
                 <a:ea typeface="Calibri" pitchFamily="34" charset="-122"/>
                 <a:cs typeface="Calibri" pitchFamily="34" charset="-120"/>
               </a:rPr>
-              <a:t>The first question is never 'what did the test show?' but 'is this the right test for the question?'</a:t>
+              <a:t>Match the method to the question: known target vs discovery, qualitative vs quantitative, single locus vs genome-wide.</a:t>
             </a:r>
             <a:endParaRPr lang="en-US" sz="1300" dirty="0"/>
           </a:p>
@@ -7997,7 +8491,7 @@
     <p:bg>
       <p:bgPr>
         <a:solidFill>
-          <a:srgbClr val="0A2A45"/>
+          <a:srgbClr val="FFFFFF"/>
         </a:solidFill>
       </p:bgPr>
     </p:bg>
@@ -8024,7 +8518,7 @@
         <p:spPr>
           <a:xfrm>
             <a:off x="566928" y="329184"/>
-            <a:ext cx="10058400" cy="310896"/>
+            <a:ext cx="10515600" cy="310896"/>
           </a:xfrm>
           <a:prstGeom prst="rect">
             <a:avLst/>
@@ -8036,7 +8530,7 @@
           <a:bodyPr wrap="square" lIns="0" tIns="0" rIns="0" bIns="0" rtlCol="0" anchor="ctr"/>
           <a:lstStyle/>
           <a:p>
-            <a:pPr indent="0" marL="0">
+            <a:pPr algn="l" indent="0" marL="0">
               <a:buNone/>
             </a:pPr>
             <a:r>
@@ -8048,7 +8542,7 @@
                 <a:ea typeface="Calibri" pitchFamily="34" charset="-122"/>
                 <a:cs typeface="Calibri" pitchFamily="34" charset="-120"/>
               </a:rPr>
-              <a:t>MOLECULAR &amp; CYTOGENETICS</a:t>
+              <a:t>MOLECULAR &amp; CYTOGENETICS   ·   CASE 3  ·  RESOLUTION</a:t>
             </a:r>
             <a:endParaRPr lang="en-US" sz="1100" dirty="0"/>
           </a:p>
@@ -8062,8 +8556,8 @@
         </p:nvSpPr>
         <p:spPr>
           <a:xfrm>
-            <a:off x="566928" y="676656"/>
-            <a:ext cx="10972800" cy="749808"/>
+            <a:off x="566928" y="713232"/>
+            <a:ext cx="11064240" cy="749808"/>
           </a:xfrm>
           <a:prstGeom prst="rect">
             <a:avLst/>
@@ -8075,19 +8569,19 @@
           <a:bodyPr wrap="square" lIns="0" tIns="0" rIns="0" bIns="0" rtlCol="0" anchor="ctr"/>
           <a:lstStyle/>
           <a:p>
-            <a:pPr indent="0" marL="0">
+            <a:pPr algn="l" indent="0" marL="0">
               <a:buNone/>
             </a:pPr>
             <a:r>
               <a:rPr lang="en-US" sz="3000" b="1" dirty="0">
                 <a:solidFill>
-                  <a:srgbClr val="FFFFFF"/>
-                </a:solidFill>
-                <a:latin typeface="Calibri" pitchFamily="34" charset="0"/>
-                <a:ea typeface="Calibri" pitchFamily="34" charset="-122"/>
-                <a:cs typeface="Calibri" pitchFamily="34" charset="-120"/>
-              </a:rPr>
-              <a:t>Key Take-Home Points</a:t>
+                  <a:srgbClr val="0E3A5F"/>
+                </a:solidFill>
+                <a:latin typeface="Calibri" pitchFamily="34" charset="0"/>
+                <a:ea typeface="Calibri" pitchFamily="34" charset="-122"/>
+                <a:cs typeface="Calibri" pitchFamily="34" charset="-120"/>
+              </a:rPr>
+              <a:t>Case 3: Contaminated Run</a:t>
             </a:r>
             <a:endParaRPr lang="en-US" sz="3000" dirty="0"/>
           </a:p>
@@ -8095,42 +8589,128 @@
       </p:sp>
       <p:sp>
         <p:nvSpPr>
-          <p:cNvPr id="4" name="Shape 2"/>
-          <p:cNvSpPr/>
-          <p:nvPr/>
-        </p:nvSpPr>
-        <p:spPr>
-          <a:xfrm>
-            <a:off x="566928" y="1517904"/>
-            <a:ext cx="11057839" cy="841248"/>
+          <p:cNvPr id="4" name="Text 2"/>
+          <p:cNvSpPr/>
+          <p:nvPr/>
+        </p:nvSpPr>
+        <p:spPr>
+          <a:xfrm>
+            <a:off x="566928" y="1554480"/>
+            <a:ext cx="6413547" cy="4023360"/>
+          </a:xfrm>
+          <a:prstGeom prst="rect">
+            <a:avLst/>
+          </a:prstGeom>
+          <a:noFill/>
+          <a:ln/>
+        </p:spPr>
+        <p:txBody>
+          <a:bodyPr wrap="square" lIns="0" tIns="0" rIns="0" bIns="0" rtlCol="0" anchor="t"/>
+          <a:lstStyle/>
+          <a:p>
+            <a:pPr algn="l" marL="177800" indent="-177800">
+              <a:spcAft>
+                <a:spcPts val="900"/>
+              </a:spcAft>
+              <a:buSzPct val="100000"/>
+              <a:buChar char="•"/>
+            </a:pPr>
+            <a:r>
+              <a:rPr lang="en-US" sz="1400" b="1" dirty="0">
+                <a:solidFill>
+                  <a:srgbClr val="1B2A38"/>
+                </a:solidFill>
+                <a:latin typeface="Calibri" pitchFamily="34" charset="0"/>
+                <a:ea typeface="Calibri" pitchFamily="34" charset="-122"/>
+                <a:cs typeface="Calibri" pitchFamily="34" charset="-120"/>
+              </a:rPr>
+              <a:t>Amplification in the no-template control indicates contamination — results from that run are invalid.</a:t>
+            </a:r>
+            <a:endParaRPr lang="en-US" sz="1400" dirty="0"/>
+          </a:p>
+          <a:p>
+            <a:pPr algn="l" marL="177800" indent="-177800">
+              <a:spcAft>
+                <a:spcPts val="900"/>
+              </a:spcAft>
+              <a:buSzPct val="100000"/>
+              <a:buChar char="•"/>
+            </a:pPr>
+            <a:r>
+              <a:rPr lang="en-US" sz="1400" dirty="0">
+                <a:solidFill>
+                  <a:srgbClr val="33444F"/>
+                </a:solidFill>
+                <a:latin typeface="Calibri" pitchFamily="34" charset="0"/>
+                <a:ea typeface="Calibri" pitchFamily="34" charset="-122"/>
+                <a:cs typeface="Calibri" pitchFamily="34" charset="-120"/>
+              </a:rPr>
+              <a:t>Investigate and remediate (workflow separation, reagents, surfaces).</a:t>
+            </a:r>
+            <a:endParaRPr lang="en-US" sz="1400" dirty="0"/>
+          </a:p>
+          <a:p>
+            <a:pPr algn="l" marL="177800" indent="-177800">
+              <a:spcAft>
+                <a:spcPts val="900"/>
+              </a:spcAft>
+              <a:buSzPct val="100000"/>
+              <a:buChar char="•"/>
+            </a:pPr>
+            <a:r>
+              <a:rPr lang="en-US" sz="1400" dirty="0">
+                <a:solidFill>
+                  <a:srgbClr val="33444F"/>
+                </a:solidFill>
+                <a:latin typeface="Calibri" pitchFamily="34" charset="0"/>
+                <a:ea typeface="Calibri" pitchFamily="34" charset="-122"/>
+                <a:cs typeface="Calibri" pitchFamily="34" charset="-120"/>
+              </a:rPr>
+              <a:t>Repeat testing after decontamination.</a:t>
+            </a:r>
+            <a:endParaRPr lang="en-US" sz="1400" dirty="0"/>
+          </a:p>
+          <a:p>
+            <a:pPr algn="l" marL="177800" indent="-177800">
+              <a:spcAft>
+                <a:spcPts val="900"/>
+              </a:spcAft>
+              <a:buSzPct val="100000"/>
+              <a:buChar char="•"/>
+            </a:pPr>
+            <a:r>
+              <a:rPr lang="en-US" sz="1400" dirty="0">
+                <a:solidFill>
+                  <a:srgbClr val="33444F"/>
+                </a:solidFill>
+                <a:latin typeface="Calibri" pitchFamily="34" charset="0"/>
+                <a:ea typeface="Calibri" pitchFamily="34" charset="-122"/>
+                <a:cs typeface="Calibri" pitchFamily="34" charset="-120"/>
+              </a:rPr>
+              <a:t>Document the corrective action.</a:t>
+            </a:r>
+            <a:endParaRPr lang="en-US" sz="1400" dirty="0"/>
+          </a:p>
+        </p:txBody>
+      </p:sp>
+      <p:sp>
+        <p:nvSpPr>
+          <p:cNvPr id="5" name="Shape 3"/>
+          <p:cNvSpPr/>
+          <p:nvPr/>
+        </p:nvSpPr>
+        <p:spPr>
+          <a:xfrm>
+            <a:off x="7422788" y="1554480"/>
+            <a:ext cx="4201979" cy="3977640"/>
           </a:xfrm>
           <a:prstGeom prst="roundRect">
             <a:avLst>
-              <a:gd name="adj" fmla="val 7609"/>
+              <a:gd name="adj" fmla="val 2069"/>
             </a:avLst>
           </a:prstGeom>
           <a:solidFill>
-            <a:srgbClr val="143651"/>
-          </a:solidFill>
-          <a:ln/>
-        </p:spPr>
-      </p:sp>
-      <p:sp>
-        <p:nvSpPr>
-          <p:cNvPr id="5" name="Shape 3"/>
-          <p:cNvSpPr/>
-          <p:nvPr/>
-        </p:nvSpPr>
-        <p:spPr>
-          <a:xfrm>
-            <a:off x="749808" y="1755648"/>
-            <a:ext cx="365760" cy="365760"/>
-          </a:xfrm>
-          <a:prstGeom prst="ellipse">
-            <a:avLst/>
-          </a:prstGeom>
-          <a:solidFill>
-            <a:srgbClr val="00838F"/>
+            <a:srgbClr val="E0F2F4"/>
           </a:solidFill>
           <a:ln/>
           <a:effectLst>
@@ -8150,8 +8730,8 @@
         </p:nvSpPr>
         <p:spPr>
           <a:xfrm>
-            <a:off x="749808" y="1755648"/>
-            <a:ext cx="365760" cy="365760"/>
+            <a:off x="7660532" y="1755648"/>
+            <a:ext cx="3744779" cy="310896"/>
           </a:xfrm>
           <a:prstGeom prst="rect">
             <a:avLst/>
@@ -8163,21 +8743,21 @@
           <a:bodyPr wrap="square" lIns="0" tIns="0" rIns="0" bIns="0" rtlCol="0" anchor="ctr"/>
           <a:lstStyle/>
           <a:p>
-            <a:pPr algn="ctr" indent="0" marL="0">
-              <a:buNone/>
-            </a:pPr>
-            <a:r>
-              <a:rPr lang="en-US" sz="1500" b="1" dirty="0">
-                <a:solidFill>
-                  <a:srgbClr val="FFFFFF"/>
-                </a:solidFill>
-                <a:latin typeface="Calibri" pitchFamily="34" charset="0"/>
-                <a:ea typeface="Calibri" pitchFamily="34" charset="-122"/>
-                <a:cs typeface="Calibri" pitchFamily="34" charset="-120"/>
-              </a:rPr>
-              <a:t>1</a:t>
-            </a:r>
-            <a:endParaRPr lang="en-US" sz="1500" dirty="0"/>
+            <a:pPr indent="0" marL="0">
+              <a:buNone/>
+            </a:pPr>
+            <a:r>
+              <a:rPr lang="en-US" sz="1100" b="1" spc="140" kern="0" dirty="0">
+                <a:solidFill>
+                  <a:srgbClr val="00838F"/>
+                </a:solidFill>
+                <a:latin typeface="Calibri" pitchFamily="34" charset="0"/>
+                <a:ea typeface="Calibri" pitchFamily="34" charset="-122"/>
+                <a:cs typeface="Calibri" pitchFamily="34" charset="-120"/>
+              </a:rPr>
+              <a:t>TEACHING POINT</a:t>
+            </a:r>
+            <a:endParaRPr lang="en-US" sz="1100" dirty="0"/>
           </a:p>
         </p:txBody>
       </p:sp>
@@ -8189,8 +8769,50 @@
         </p:nvSpPr>
         <p:spPr>
           <a:xfrm>
-            <a:off x="1280160" y="1517904"/>
-            <a:ext cx="10143439" cy="841248"/>
+            <a:off x="7660532" y="2121408"/>
+            <a:ext cx="3726491" cy="3291840"/>
+          </a:xfrm>
+          <a:prstGeom prst="rect">
+            <a:avLst/>
+          </a:prstGeom>
+          <a:noFill/>
+          <a:ln/>
+        </p:spPr>
+        <p:txBody>
+          <a:bodyPr wrap="square" lIns="0" tIns="0" rIns="0" bIns="0" rtlCol="0" anchor="t"/>
+          <a:lstStyle/>
+          <a:p>
+            <a:pPr algn="l" indent="0" marL="0">
+              <a:lnSpc>
+                <a:spcPct val="110000"/>
+              </a:lnSpc>
+              <a:buNone/>
+            </a:pPr>
+            <a:r>
+              <a:rPr lang="en-US" sz="1350" dirty="0">
+                <a:solidFill>
+                  <a:srgbClr val="33444F"/>
+                </a:solidFill>
+                <a:latin typeface="Calibri" pitchFamily="34" charset="0"/>
+                <a:ea typeface="Calibri" pitchFamily="34" charset="-122"/>
+                <a:cs typeface="Calibri" pitchFamily="34" charset="-120"/>
+              </a:rPr>
+              <a:t>A positive no-template control invalidates the run; molecular labs depend on rigorous contamination control and unidirectional workflow.</a:t>
+            </a:r>
+            <a:endParaRPr lang="en-US" sz="1350" dirty="0"/>
+          </a:p>
+        </p:txBody>
+      </p:sp>
+      <p:sp>
+        <p:nvSpPr>
+          <p:cNvPr id="8" name="Text 6"/>
+          <p:cNvSpPr/>
+          <p:nvPr/>
+        </p:nvSpPr>
+        <p:spPr>
+          <a:xfrm>
+            <a:off x="566928" y="6473952"/>
+            <a:ext cx="7772400" cy="274320"/>
           </a:xfrm>
           <a:prstGeom prst="rect">
             <a:avLst/>
@@ -8206,79 +8828,30 @@
               <a:buNone/>
             </a:pPr>
             <a:r>
-              <a:rPr lang="en-US" sz="1350" dirty="0">
-                <a:solidFill>
-                  <a:srgbClr val="E7EEF4"/>
-                </a:solidFill>
-                <a:latin typeface="Calibri" pitchFamily="34" charset="0"/>
-                <a:ea typeface="Calibri" pitchFamily="34" charset="-122"/>
-                <a:cs typeface="Calibri" pitchFamily="34" charset="-120"/>
-              </a:rPr>
-              <a:t>Match the method to the question: PCR/FISH for known targets, karyotype/microarray for genome-wide structure, NGS for many genes.</a:t>
-            </a:r>
-            <a:endParaRPr lang="en-US" sz="1350" dirty="0"/>
-          </a:p>
-        </p:txBody>
-      </p:sp>
-      <p:sp>
-        <p:nvSpPr>
-          <p:cNvPr id="8" name="Shape 6"/>
-          <p:cNvSpPr/>
-          <p:nvPr/>
-        </p:nvSpPr>
-        <p:spPr>
-          <a:xfrm>
-            <a:off x="566928" y="2505456"/>
-            <a:ext cx="11057839" cy="841248"/>
-          </a:xfrm>
-          <a:prstGeom prst="roundRect">
-            <a:avLst>
-              <a:gd name="adj" fmla="val 7609"/>
-            </a:avLst>
-          </a:prstGeom>
-          <a:solidFill>
-            <a:srgbClr val="143651"/>
-          </a:solidFill>
-          <a:ln/>
-        </p:spPr>
-      </p:sp>
-      <p:sp>
-        <p:nvSpPr>
-          <p:cNvPr id="9" name="Shape 7"/>
-          <p:cNvSpPr/>
-          <p:nvPr/>
-        </p:nvSpPr>
-        <p:spPr>
-          <a:xfrm>
-            <a:off x="749808" y="2743200"/>
-            <a:ext cx="365760" cy="365760"/>
-          </a:xfrm>
-          <a:prstGeom prst="ellipse">
-            <a:avLst/>
-          </a:prstGeom>
-          <a:solidFill>
-            <a:srgbClr val="00838F"/>
-          </a:solidFill>
-          <a:ln/>
-          <a:effectLst>
-            <a:outerShdw sx="100000" sy="100000" kx="0" ky="0" algn="bl" rotWithShape="0" blurRad="88900" dist="25400" dir="5400000">
-              <a:srgbClr val="22303C">
-                <a:alpha val="12000"/>
-              </a:srgbClr>
-            </a:outerShdw>
-          </a:effectLst>
-        </p:spPr>
-      </p:sp>
-      <p:sp>
-        <p:nvSpPr>
-          <p:cNvPr id="10" name="Text 8"/>
-          <p:cNvSpPr/>
-          <p:nvPr/>
-        </p:nvSpPr>
-        <p:spPr>
-          <a:xfrm>
-            <a:off x="749808" y="2743200"/>
-            <a:ext cx="365760" cy="365760"/>
+              <a:rPr lang="en-US" sz="850" dirty="0">
+                <a:solidFill>
+                  <a:srgbClr val="9AA8B4"/>
+                </a:solidFill>
+                <a:latin typeface="Calibri" pitchFamily="34" charset="0"/>
+                <a:ea typeface="Calibri" pitchFamily="34" charset="-122"/>
+                <a:cs typeface="Calibri" pitchFamily="34" charset="-120"/>
+              </a:rPr>
+              <a:t>Makassed General Hospital  ·  Department of Laboratory Medicine</a:t>
+            </a:r>
+            <a:endParaRPr lang="en-US" sz="850" dirty="0"/>
+          </a:p>
+        </p:txBody>
+      </p:sp>
+      <p:sp>
+        <p:nvSpPr>
+          <p:cNvPr id="9" name="Text 7"/>
+          <p:cNvSpPr/>
+          <p:nvPr/>
+        </p:nvSpPr>
+        <p:spPr>
+          <a:xfrm>
+            <a:off x="9814255" y="6473952"/>
+            <a:ext cx="1828800" cy="274320"/>
           </a:xfrm>
           <a:prstGeom prst="rect">
             <a:avLst/>
@@ -8290,504 +8863,34 @@
           <a:bodyPr wrap="square" lIns="0" tIns="0" rIns="0" bIns="0" rtlCol="0" anchor="ctr"/>
           <a:lstStyle/>
           <a:p>
-            <a:pPr algn="ctr" indent="0" marL="0">
-              <a:buNone/>
-            </a:pPr>
-            <a:r>
-              <a:rPr lang="en-US" sz="1500" b="1" dirty="0">
-                <a:solidFill>
-                  <a:srgbClr val="FFFFFF"/>
-                </a:solidFill>
-                <a:latin typeface="Calibri" pitchFamily="34" charset="0"/>
-                <a:ea typeface="Calibri" pitchFamily="34" charset="-122"/>
-                <a:cs typeface="Calibri" pitchFamily="34" charset="-120"/>
-              </a:rPr>
-              <a:t>2</a:t>
-            </a:r>
-            <a:endParaRPr lang="en-US" sz="1500" dirty="0"/>
-          </a:p>
-        </p:txBody>
-      </p:sp>
-      <p:sp>
-        <p:nvSpPr>
-          <p:cNvPr id="11" name="Text 9"/>
-          <p:cNvSpPr/>
-          <p:nvPr/>
-        </p:nvSpPr>
-        <p:spPr>
-          <a:xfrm>
-            <a:off x="1280160" y="2505456"/>
-            <a:ext cx="10143439" cy="841248"/>
-          </a:xfrm>
-          <a:prstGeom prst="rect">
-            <a:avLst/>
-          </a:prstGeom>
-          <a:noFill/>
-          <a:ln/>
-        </p:spPr>
-        <p:txBody>
-          <a:bodyPr wrap="square" lIns="0" tIns="0" rIns="0" bIns="0" rtlCol="0" anchor="ctr"/>
-          <a:lstStyle/>
-          <a:p>
-            <a:pPr algn="l" indent="0" marL="0">
-              <a:buNone/>
-            </a:pPr>
-            <a:r>
-              <a:rPr lang="en-US" sz="1350" dirty="0">
-                <a:solidFill>
-                  <a:srgbClr val="E7EEF4"/>
-                </a:solidFill>
-                <a:latin typeface="Calibri" pitchFamily="34" charset="0"/>
-                <a:ea typeface="Calibri" pitchFamily="34" charset="-122"/>
-                <a:cs typeface="Calibri" pitchFamily="34" charset="-120"/>
-              </a:rPr>
-              <a:t>Real-time PCR quantifies; RT-PCR is required for RNA targets (fusion transcripts, RNA viruses).</a:t>
-            </a:r>
-            <a:endParaRPr lang="en-US" sz="1350" dirty="0"/>
-          </a:p>
-        </p:txBody>
-      </p:sp>
-      <p:sp>
-        <p:nvSpPr>
-          <p:cNvPr id="12" name="Shape 10"/>
-          <p:cNvSpPr/>
-          <p:nvPr/>
-        </p:nvSpPr>
-        <p:spPr>
-          <a:xfrm>
-            <a:off x="566928" y="3493008"/>
-            <a:ext cx="11057839" cy="841248"/>
-          </a:xfrm>
-          <a:prstGeom prst="roundRect">
-            <a:avLst>
-              <a:gd name="adj" fmla="val 7609"/>
-            </a:avLst>
-          </a:prstGeom>
-          <a:solidFill>
-            <a:srgbClr val="143651"/>
-          </a:solidFill>
-          <a:ln/>
-        </p:spPr>
-      </p:sp>
-      <p:sp>
-        <p:nvSpPr>
-          <p:cNvPr id="13" name="Shape 11"/>
-          <p:cNvSpPr/>
-          <p:nvPr/>
-        </p:nvSpPr>
-        <p:spPr>
-          <a:xfrm>
-            <a:off x="749808" y="3730752"/>
-            <a:ext cx="365760" cy="365760"/>
-          </a:xfrm>
-          <a:prstGeom prst="ellipse">
-            <a:avLst/>
-          </a:prstGeom>
-          <a:solidFill>
-            <a:srgbClr val="00838F"/>
-          </a:solidFill>
-          <a:ln/>
-          <a:effectLst>
-            <a:outerShdw sx="100000" sy="100000" kx="0" ky="0" algn="bl" rotWithShape="0" blurRad="88900" dist="25400" dir="5400000">
-              <a:srgbClr val="22303C">
-                <a:alpha val="12000"/>
-              </a:srgbClr>
-            </a:outerShdw>
-          </a:effectLst>
-        </p:spPr>
-      </p:sp>
-      <p:sp>
-        <p:nvSpPr>
-          <p:cNvPr id="14" name="Text 12"/>
-          <p:cNvSpPr/>
-          <p:nvPr/>
-        </p:nvSpPr>
-        <p:spPr>
-          <a:xfrm>
-            <a:off x="749808" y="3730752"/>
-            <a:ext cx="365760" cy="365760"/>
-          </a:xfrm>
-          <a:prstGeom prst="rect">
-            <a:avLst/>
-          </a:prstGeom>
-          <a:noFill/>
-          <a:ln/>
-        </p:spPr>
-        <p:txBody>
-          <a:bodyPr wrap="square" lIns="0" tIns="0" rIns="0" bIns="0" rtlCol="0" anchor="ctr"/>
-          <a:lstStyle/>
-          <a:p>
-            <a:pPr algn="ctr" indent="0" marL="0">
-              <a:buNone/>
-            </a:pPr>
-            <a:r>
-              <a:rPr lang="en-US" sz="1500" b="1" dirty="0">
-                <a:solidFill>
-                  <a:srgbClr val="FFFFFF"/>
-                </a:solidFill>
-                <a:latin typeface="Calibri" pitchFamily="34" charset="0"/>
-                <a:ea typeface="Calibri" pitchFamily="34" charset="-122"/>
-                <a:cs typeface="Calibri" pitchFamily="34" charset="-120"/>
-              </a:rPr>
-              <a:t>3</a:t>
-            </a:r>
-            <a:endParaRPr lang="en-US" sz="1500" dirty="0"/>
-          </a:p>
-        </p:txBody>
-      </p:sp>
-      <p:sp>
-        <p:nvSpPr>
-          <p:cNvPr id="15" name="Text 13"/>
-          <p:cNvSpPr/>
-          <p:nvPr/>
-        </p:nvSpPr>
-        <p:spPr>
-          <a:xfrm>
-            <a:off x="1280160" y="3493008"/>
-            <a:ext cx="10143439" cy="841248"/>
-          </a:xfrm>
-          <a:prstGeom prst="rect">
-            <a:avLst/>
-          </a:prstGeom>
-          <a:noFill/>
-          <a:ln/>
-        </p:spPr>
-        <p:txBody>
-          <a:bodyPr wrap="square" lIns="0" tIns="0" rIns="0" bIns="0" rtlCol="0" anchor="ctr"/>
-          <a:lstStyle/>
-          <a:p>
-            <a:pPr algn="l" indent="0" marL="0">
-              <a:buNone/>
-            </a:pPr>
-            <a:r>
-              <a:rPr lang="en-US" sz="1350" dirty="0">
-                <a:solidFill>
-                  <a:srgbClr val="E7EEF4"/>
-                </a:solidFill>
-                <a:latin typeface="Calibri" pitchFamily="34" charset="0"/>
-                <a:ea typeface="Calibri" pitchFamily="34" charset="-122"/>
-                <a:cs typeface="Calibri" pitchFamily="34" charset="-120"/>
-              </a:rPr>
-              <a:t>FISH detects specific rearrangements in dividing or interphase cells; karyotype needs dividing cells; microarray misses balanced translocations.</a:t>
-            </a:r>
-            <a:endParaRPr lang="en-US" sz="1350" dirty="0"/>
-          </a:p>
-        </p:txBody>
-      </p:sp>
-      <p:sp>
-        <p:nvSpPr>
-          <p:cNvPr id="16" name="Shape 14"/>
-          <p:cNvSpPr/>
-          <p:nvPr/>
-        </p:nvSpPr>
-        <p:spPr>
-          <a:xfrm>
-            <a:off x="566928" y="4480560"/>
-            <a:ext cx="11057839" cy="841248"/>
-          </a:xfrm>
-          <a:prstGeom prst="roundRect">
-            <a:avLst>
-              <a:gd name="adj" fmla="val 7609"/>
-            </a:avLst>
-          </a:prstGeom>
-          <a:solidFill>
-            <a:srgbClr val="143651"/>
-          </a:solidFill>
-          <a:ln/>
-        </p:spPr>
-      </p:sp>
-      <p:sp>
-        <p:nvSpPr>
-          <p:cNvPr id="17" name="Shape 15"/>
-          <p:cNvSpPr/>
-          <p:nvPr/>
-        </p:nvSpPr>
-        <p:spPr>
-          <a:xfrm>
-            <a:off x="749808" y="4718304"/>
-            <a:ext cx="365760" cy="365760"/>
-          </a:xfrm>
-          <a:prstGeom prst="ellipse">
-            <a:avLst/>
-          </a:prstGeom>
-          <a:solidFill>
-            <a:srgbClr val="00838F"/>
-          </a:solidFill>
-          <a:ln/>
-          <a:effectLst>
-            <a:outerShdw sx="100000" sy="100000" kx="0" ky="0" algn="bl" rotWithShape="0" blurRad="88900" dist="25400" dir="5400000">
-              <a:srgbClr val="22303C">
-                <a:alpha val="12000"/>
-              </a:srgbClr>
-            </a:outerShdw>
-          </a:effectLst>
-        </p:spPr>
-      </p:sp>
-      <p:sp>
-        <p:nvSpPr>
-          <p:cNvPr id="18" name="Text 16"/>
-          <p:cNvSpPr/>
-          <p:nvPr/>
-        </p:nvSpPr>
-        <p:spPr>
-          <a:xfrm>
-            <a:off x="749808" y="4718304"/>
-            <a:ext cx="365760" cy="365760"/>
-          </a:xfrm>
-          <a:prstGeom prst="rect">
-            <a:avLst/>
-          </a:prstGeom>
-          <a:noFill/>
-          <a:ln/>
-        </p:spPr>
-        <p:txBody>
-          <a:bodyPr wrap="square" lIns="0" tIns="0" rIns="0" bIns="0" rtlCol="0" anchor="ctr"/>
-          <a:lstStyle/>
-          <a:p>
-            <a:pPr algn="ctr" indent="0" marL="0">
-              <a:buNone/>
-            </a:pPr>
-            <a:r>
-              <a:rPr lang="en-US" sz="1500" b="1" dirty="0">
-                <a:solidFill>
-                  <a:srgbClr val="FFFFFF"/>
-                </a:solidFill>
-                <a:latin typeface="Calibri" pitchFamily="34" charset="0"/>
-                <a:ea typeface="Calibri" pitchFamily="34" charset="-122"/>
-                <a:cs typeface="Calibri" pitchFamily="34" charset="-120"/>
-              </a:rPr>
-              <a:t>4</a:t>
-            </a:r>
-            <a:endParaRPr lang="en-US" sz="1500" dirty="0"/>
-          </a:p>
-        </p:txBody>
-      </p:sp>
-      <p:sp>
-        <p:nvSpPr>
-          <p:cNvPr id="19" name="Text 17"/>
-          <p:cNvSpPr/>
-          <p:nvPr/>
-        </p:nvSpPr>
-        <p:spPr>
-          <a:xfrm>
-            <a:off x="1280160" y="4480560"/>
-            <a:ext cx="10143439" cy="841248"/>
-          </a:xfrm>
-          <a:prstGeom prst="rect">
-            <a:avLst/>
-          </a:prstGeom>
-          <a:noFill/>
-          <a:ln/>
-        </p:spPr>
-        <p:txBody>
-          <a:bodyPr wrap="square" lIns="0" tIns="0" rIns="0" bIns="0" rtlCol="0" anchor="ctr"/>
-          <a:lstStyle/>
-          <a:p>
-            <a:pPr algn="l" indent="0" marL="0">
-              <a:buNone/>
-            </a:pPr>
-            <a:r>
-              <a:rPr lang="en-US" sz="1350" dirty="0">
-                <a:solidFill>
-                  <a:srgbClr val="E7EEF4"/>
-                </a:solidFill>
-                <a:latin typeface="Calibri" pitchFamily="34" charset="0"/>
-                <a:ea typeface="Calibri" pitchFamily="34" charset="-122"/>
-                <a:cs typeface="Calibri" pitchFamily="34" charset="-120"/>
-              </a:rPr>
-              <a:t>NGS offers breadth and depth but depends on a validated bioinformatics pipeline.</a:t>
-            </a:r>
-            <a:endParaRPr lang="en-US" sz="1350" dirty="0"/>
-          </a:p>
-        </p:txBody>
-      </p:sp>
-      <p:sp>
-        <p:nvSpPr>
-          <p:cNvPr id="20" name="Shape 18"/>
-          <p:cNvSpPr/>
-          <p:nvPr/>
-        </p:nvSpPr>
-        <p:spPr>
-          <a:xfrm>
-            <a:off x="566928" y="5468112"/>
-            <a:ext cx="11057839" cy="841248"/>
-          </a:xfrm>
-          <a:prstGeom prst="roundRect">
-            <a:avLst>
-              <a:gd name="adj" fmla="val 7609"/>
-            </a:avLst>
-          </a:prstGeom>
-          <a:solidFill>
-            <a:srgbClr val="143651"/>
-          </a:solidFill>
-          <a:ln/>
-        </p:spPr>
-      </p:sp>
-      <p:sp>
-        <p:nvSpPr>
-          <p:cNvPr id="21" name="Shape 19"/>
-          <p:cNvSpPr/>
-          <p:nvPr/>
-        </p:nvSpPr>
-        <p:spPr>
-          <a:xfrm>
-            <a:off x="749808" y="5705856"/>
-            <a:ext cx="365760" cy="365760"/>
-          </a:xfrm>
-          <a:prstGeom prst="ellipse">
-            <a:avLst/>
-          </a:prstGeom>
-          <a:solidFill>
-            <a:srgbClr val="00838F"/>
-          </a:solidFill>
-          <a:ln/>
-          <a:effectLst>
-            <a:outerShdw sx="100000" sy="100000" kx="0" ky="0" algn="bl" rotWithShape="0" blurRad="88900" dist="25400" dir="5400000">
-              <a:srgbClr val="22303C">
-                <a:alpha val="12000"/>
-              </a:srgbClr>
-            </a:outerShdw>
-          </a:effectLst>
-        </p:spPr>
-      </p:sp>
-      <p:sp>
-        <p:nvSpPr>
-          <p:cNvPr id="22" name="Text 20"/>
-          <p:cNvSpPr/>
-          <p:nvPr/>
-        </p:nvSpPr>
-        <p:spPr>
-          <a:xfrm>
-            <a:off x="749808" y="5705856"/>
-            <a:ext cx="365760" cy="365760"/>
-          </a:xfrm>
-          <a:prstGeom prst="rect">
-            <a:avLst/>
-          </a:prstGeom>
-          <a:noFill/>
-          <a:ln/>
-        </p:spPr>
-        <p:txBody>
-          <a:bodyPr wrap="square" lIns="0" tIns="0" rIns="0" bIns="0" rtlCol="0" anchor="ctr"/>
-          <a:lstStyle/>
-          <a:p>
-            <a:pPr algn="ctr" indent="0" marL="0">
-              <a:buNone/>
-            </a:pPr>
-            <a:r>
-              <a:rPr lang="en-US" sz="1500" b="1" dirty="0">
-                <a:solidFill>
-                  <a:srgbClr val="FFFFFF"/>
-                </a:solidFill>
-                <a:latin typeface="Calibri" pitchFamily="34" charset="0"/>
-                <a:ea typeface="Calibri" pitchFamily="34" charset="-122"/>
-                <a:cs typeface="Calibri" pitchFamily="34" charset="-120"/>
-              </a:rPr>
-              <a:t>5</a:t>
-            </a:r>
-            <a:endParaRPr lang="en-US" sz="1500" dirty="0"/>
-          </a:p>
-        </p:txBody>
-      </p:sp>
-      <p:sp>
-        <p:nvSpPr>
-          <p:cNvPr id="23" name="Text 21"/>
-          <p:cNvSpPr/>
-          <p:nvPr/>
-        </p:nvSpPr>
-        <p:spPr>
-          <a:xfrm>
-            <a:off x="1280160" y="5468112"/>
-            <a:ext cx="10143439" cy="841248"/>
-          </a:xfrm>
-          <a:prstGeom prst="rect">
-            <a:avLst/>
-          </a:prstGeom>
-          <a:noFill/>
-          <a:ln/>
-        </p:spPr>
-        <p:txBody>
-          <a:bodyPr wrap="square" lIns="0" tIns="0" rIns="0" bIns="0" rtlCol="0" anchor="ctr"/>
-          <a:lstStyle/>
-          <a:p>
-            <a:pPr algn="l" indent="0" marL="0">
-              <a:buNone/>
-            </a:pPr>
-            <a:r>
-              <a:rPr lang="en-US" sz="1350" dirty="0">
-                <a:solidFill>
-                  <a:srgbClr val="E7EEF4"/>
-                </a:solidFill>
-                <a:latin typeface="Calibri" pitchFamily="34" charset="0"/>
-                <a:ea typeface="Calibri" pitchFamily="34" charset="-122"/>
-                <a:cs typeface="Calibri" pitchFamily="34" charset="-120"/>
-              </a:rPr>
-              <a:t>Sanger remains useful for confirming single variants but is less sensitive than NGS.</a:t>
-            </a:r>
-            <a:endParaRPr lang="en-US" sz="1350" dirty="0"/>
-          </a:p>
-        </p:txBody>
-      </p:sp>
-      <p:sp>
-        <p:nvSpPr>
-          <p:cNvPr id="24" name="Text 22"/>
-          <p:cNvSpPr/>
-          <p:nvPr/>
-        </p:nvSpPr>
-        <p:spPr>
-          <a:xfrm>
-            <a:off x="566928" y="6473952"/>
-            <a:ext cx="8229600" cy="274320"/>
-          </a:xfrm>
-          <a:prstGeom prst="rect">
-            <a:avLst/>
-          </a:prstGeom>
-          <a:noFill/>
-          <a:ln/>
-        </p:spPr>
-        <p:txBody>
-          <a:bodyPr wrap="square" lIns="0" tIns="0" rIns="0" bIns="0" rtlCol="0" anchor="ctr"/>
-          <a:lstStyle/>
-          <a:p>
-            <a:pPr indent="0" marL="0">
+            <a:pPr algn="r" indent="0" marL="0">
               <a:buNone/>
             </a:pPr>
             <a:r>
               <a:rPr lang="en-US" sz="850" dirty="0">
                 <a:solidFill>
-                  <a:srgbClr val="5E7488"/>
-                </a:solidFill>
-                <a:latin typeface="Calibri" pitchFamily="34" charset="0"/>
-                <a:ea typeface="Calibri" pitchFamily="34" charset="-122"/>
-                <a:cs typeface="Calibri" pitchFamily="34" charset="-120"/>
-              </a:rPr>
-              <a:t>Makassed General Hospital  ·  Department of Laboratory Medicine</a:t>
-            </a:r>
-            <a:endParaRPr lang="en-US" sz="850" dirty="0"/>
-          </a:p>
-        </p:txBody>
-      </p:sp>
-      <p:sp>
-        <p:nvSpPr>
-          <p:cNvPr id="25" name="Text 23"/>
-          <p:cNvSpPr/>
-          <p:nvPr/>
-        </p:nvSpPr>
-        <p:spPr>
-          <a:xfrm>
-            <a:off x="11002975" y="6473952"/>
-            <a:ext cx="640080" cy="274320"/>
-          </a:xfrm>
-          <a:prstGeom prst="rect">
-            <a:avLst/>
-          </a:prstGeom>
-          <a:noFill/>
-          <a:ln/>
-        </p:spPr>
-        <p:txBody>
-          <a:bodyPr wrap="square" lIns="0" tIns="0" rIns="0" bIns="0" rtlCol="0" anchor="ctr"/>
-          <a:lstStyle/>
-          <a:p>
+                  <a:srgbClr val="9AA8B4"/>
+                </a:solidFill>
+                <a:latin typeface="Calibri" pitchFamily="34" charset="0"/>
+                <a:ea typeface="Calibri" pitchFamily="34" charset="-122"/>
+                <a:cs typeface="Calibri" pitchFamily="34" charset="-120"/>
+              </a:rPr>
+              <a:t>CP Lecture Series</a:t>
+            </a:r>
+            <a:pPr algn="r" indent="0" marL="0">
+              <a:buNone/>
+            </a:pPr>
+            <a:r>
+              <a:rPr lang="en-US" sz="850" dirty="0">
+                <a:solidFill>
+                  <a:srgbClr val="DCE4EC"/>
+                </a:solidFill>
+                <a:latin typeface="Calibri" pitchFamily="34" charset="0"/>
+                <a:ea typeface="Calibri" pitchFamily="34" charset="-122"/>
+                <a:cs typeface="Calibri" pitchFamily="34" charset="-120"/>
+              </a:rPr>
+              <a:t>   ·   </a:t>
+            </a:r>
             <a:pPr algn="r" indent="0" marL="0">
               <a:buNone/>
             </a:pPr>
@@ -8871,6 +8974,2845 @@
                 <a:ea typeface="Calibri" pitchFamily="34" charset="-122"/>
                 <a:cs typeface="Calibri" pitchFamily="34" charset="-120"/>
               </a:rPr>
+              <a:t>MOLECULAR &amp; CYTOGENETICS   ·   BOARD REVIEW  ·  Q1</a:t>
+            </a:r>
+            <a:endParaRPr lang="en-US" sz="1100" dirty="0"/>
+          </a:p>
+        </p:txBody>
+      </p:sp>
+      <p:sp>
+        <p:nvSpPr>
+          <p:cNvPr id="3" name="Text 1"/>
+          <p:cNvSpPr/>
+          <p:nvPr/>
+        </p:nvSpPr>
+        <p:spPr>
+          <a:xfrm>
+            <a:off x="566928" y="713232"/>
+            <a:ext cx="11064240" cy="749808"/>
+          </a:xfrm>
+          <a:prstGeom prst="rect">
+            <a:avLst/>
+          </a:prstGeom>
+          <a:noFill/>
+          <a:ln/>
+        </p:spPr>
+        <p:txBody>
+          <a:bodyPr wrap="square" lIns="0" tIns="0" rIns="0" bIns="0" rtlCol="0" anchor="ctr"/>
+          <a:lstStyle/>
+          <a:p>
+            <a:pPr algn="l" indent="0" marL="0">
+              <a:buNone/>
+            </a:pPr>
+            <a:r>
+              <a:rPr lang="en-US" sz="2600" b="1" dirty="0">
+                <a:solidFill>
+                  <a:srgbClr val="0E3A5F"/>
+                </a:solidFill>
+                <a:latin typeface="Calibri" pitchFamily="34" charset="0"/>
+                <a:ea typeface="Calibri" pitchFamily="34" charset="-122"/>
+                <a:cs typeface="Calibri" pitchFamily="34" charset="-120"/>
+              </a:rPr>
+              <a:t>Board-Style Review</a:t>
+            </a:r>
+            <a:endParaRPr lang="en-US" sz="2600" dirty="0"/>
+          </a:p>
+        </p:txBody>
+      </p:sp>
+      <p:sp>
+        <p:nvSpPr>
+          <p:cNvPr id="4" name="Text 2"/>
+          <p:cNvSpPr/>
+          <p:nvPr/>
+        </p:nvSpPr>
+        <p:spPr>
+          <a:xfrm>
+            <a:off x="566928" y="1417320"/>
+            <a:ext cx="11057839" cy="914400"/>
+          </a:xfrm>
+          <a:prstGeom prst="rect">
+            <a:avLst/>
+          </a:prstGeom>
+          <a:noFill/>
+          <a:ln/>
+        </p:spPr>
+        <p:txBody>
+          <a:bodyPr wrap="square" lIns="0" tIns="0" rIns="0" bIns="0" rtlCol="0" anchor="t"/>
+          <a:lstStyle/>
+          <a:p>
+            <a:pPr algn="l" indent="0" marL="0">
+              <a:lnSpc>
+                <a:spcPct val="105000"/>
+              </a:lnSpc>
+              <a:buNone/>
+            </a:pPr>
+            <a:r>
+              <a:rPr lang="en-US" sz="1450" b="1" dirty="0">
+                <a:solidFill>
+                  <a:srgbClr val="1B2A38"/>
+                </a:solidFill>
+                <a:latin typeface="Calibri" pitchFamily="34" charset="0"/>
+                <a:ea typeface="Calibri" pitchFamily="34" charset="-122"/>
+                <a:cs typeface="Calibri" pitchFamily="34" charset="-120"/>
+              </a:rPr>
+              <a:t>In qPCR, a lower cycle threshold (Ct) indicates:</a:t>
+            </a:r>
+            <a:endParaRPr lang="en-US" sz="1450" dirty="0"/>
+          </a:p>
+        </p:txBody>
+      </p:sp>
+      <p:sp>
+        <p:nvSpPr>
+          <p:cNvPr id="5" name="Text 3"/>
+          <p:cNvSpPr/>
+          <p:nvPr/>
+        </p:nvSpPr>
+        <p:spPr>
+          <a:xfrm>
+            <a:off x="658368" y="2395728"/>
+            <a:ext cx="6192390" cy="3017520"/>
+          </a:xfrm>
+          <a:prstGeom prst="rect">
+            <a:avLst/>
+          </a:prstGeom>
+          <a:noFill/>
+          <a:ln/>
+        </p:spPr>
+        <p:txBody>
+          <a:bodyPr wrap="square" lIns="0" tIns="0" rIns="0" bIns="0" rtlCol="0" anchor="t"/>
+          <a:lstStyle/>
+          <a:p>
+            <a:pPr algn="l" indent="0" marL="0">
+              <a:spcAft>
+                <a:spcPts val="600"/>
+              </a:spcAft>
+              <a:buNone/>
+            </a:pPr>
+            <a:r>
+              <a:rPr lang="en-US" sz="1350" dirty="0">
+                <a:solidFill>
+                  <a:srgbClr val="33444F"/>
+                </a:solidFill>
+                <a:latin typeface="Calibri" pitchFamily="34" charset="0"/>
+                <a:ea typeface="Calibri" pitchFamily="34" charset="-122"/>
+                <a:cs typeface="Calibri" pitchFamily="34" charset="-120"/>
+              </a:rPr>
+              <a:t>A. Less starting template</a:t>
+            </a:r>
+            <a:endParaRPr lang="en-US" sz="1350" dirty="0"/>
+          </a:p>
+          <a:p>
+            <a:pPr algn="l" indent="0" marL="0">
+              <a:spcAft>
+                <a:spcPts val="600"/>
+              </a:spcAft>
+              <a:buNone/>
+            </a:pPr>
+            <a:r>
+              <a:rPr lang="en-US" sz="1350" b="1" dirty="0">
+                <a:solidFill>
+                  <a:srgbClr val="005A63"/>
+                </a:solidFill>
+                <a:latin typeface="Calibri" pitchFamily="34" charset="0"/>
+                <a:ea typeface="Calibri" pitchFamily="34" charset="-122"/>
+                <a:cs typeface="Calibri" pitchFamily="34" charset="-120"/>
+              </a:rPr>
+              <a:t>B. More starting template</a:t>
+            </a:r>
+            <a:endParaRPr lang="en-US" sz="1350" dirty="0"/>
+          </a:p>
+          <a:p>
+            <a:pPr algn="l" indent="0" marL="0">
+              <a:spcAft>
+                <a:spcPts val="600"/>
+              </a:spcAft>
+              <a:buNone/>
+            </a:pPr>
+            <a:r>
+              <a:rPr lang="en-US" sz="1350" dirty="0">
+                <a:solidFill>
+                  <a:srgbClr val="33444F"/>
+                </a:solidFill>
+                <a:latin typeface="Calibri" pitchFamily="34" charset="0"/>
+                <a:ea typeface="Calibri" pitchFamily="34" charset="-122"/>
+                <a:cs typeface="Calibri" pitchFamily="34" charset="-120"/>
+              </a:rPr>
+              <a:t>C. Contamination</a:t>
+            </a:r>
+            <a:endParaRPr lang="en-US" sz="1350" dirty="0"/>
+          </a:p>
+          <a:p>
+            <a:pPr algn="l" indent="0" marL="0">
+              <a:spcAft>
+                <a:spcPts val="600"/>
+              </a:spcAft>
+              <a:buNone/>
+            </a:pPr>
+            <a:r>
+              <a:rPr lang="en-US" sz="1350" dirty="0">
+                <a:solidFill>
+                  <a:srgbClr val="33444F"/>
+                </a:solidFill>
+                <a:latin typeface="Calibri" pitchFamily="34" charset="0"/>
+                <a:ea typeface="Calibri" pitchFamily="34" charset="-122"/>
+                <a:cs typeface="Calibri" pitchFamily="34" charset="-120"/>
+              </a:rPr>
+              <a:t>D. Inhibition</a:t>
+            </a:r>
+            <a:endParaRPr lang="en-US" sz="1350" dirty="0"/>
+          </a:p>
+          <a:p>
+            <a:pPr algn="l" indent="0" marL="0">
+              <a:spcAft>
+                <a:spcPts val="600"/>
+              </a:spcAft>
+              <a:buNone/>
+            </a:pPr>
+            <a:r>
+              <a:rPr lang="en-US" sz="1350" dirty="0">
+                <a:solidFill>
+                  <a:srgbClr val="33444F"/>
+                </a:solidFill>
+                <a:latin typeface="Calibri" pitchFamily="34" charset="0"/>
+                <a:ea typeface="Calibri" pitchFamily="34" charset="-122"/>
+                <a:cs typeface="Calibri" pitchFamily="34" charset="-120"/>
+              </a:rPr>
+              <a:t>E. A failed run</a:t>
+            </a:r>
+            <a:endParaRPr lang="en-US" sz="1350" dirty="0"/>
+          </a:p>
+        </p:txBody>
+      </p:sp>
+      <p:sp>
+        <p:nvSpPr>
+          <p:cNvPr id="6" name="Shape 4"/>
+          <p:cNvSpPr/>
+          <p:nvPr/>
+        </p:nvSpPr>
+        <p:spPr>
+          <a:xfrm>
+            <a:off x="7201632" y="2395728"/>
+            <a:ext cx="4423136" cy="3246120"/>
+          </a:xfrm>
+          <a:prstGeom prst="roundRect">
+            <a:avLst>
+              <a:gd name="adj" fmla="val 2535"/>
+            </a:avLst>
+          </a:prstGeom>
+          <a:solidFill>
+            <a:srgbClr val="E0F2F4"/>
+          </a:solidFill>
+          <a:ln/>
+          <a:effectLst>
+            <a:outerShdw sx="100000" sy="100000" kx="0" ky="0" algn="bl" rotWithShape="0" blurRad="88900" dist="25400" dir="5400000">
+              <a:srgbClr val="22303C">
+                <a:alpha val="12000"/>
+              </a:srgbClr>
+            </a:outerShdw>
+          </a:effectLst>
+        </p:spPr>
+      </p:sp>
+      <p:sp>
+        <p:nvSpPr>
+          <p:cNvPr id="7" name="Text 5"/>
+          <p:cNvSpPr/>
+          <p:nvPr/>
+        </p:nvSpPr>
+        <p:spPr>
+          <a:xfrm>
+            <a:off x="7439376" y="2578608"/>
+            <a:ext cx="3965936" cy="457200"/>
+          </a:xfrm>
+          <a:prstGeom prst="rect">
+            <a:avLst/>
+          </a:prstGeom>
+          <a:noFill/>
+          <a:ln/>
+        </p:spPr>
+        <p:txBody>
+          <a:bodyPr wrap="square" lIns="0" tIns="0" rIns="0" bIns="0" rtlCol="0" anchor="ctr"/>
+          <a:lstStyle/>
+          <a:p>
+            <a:pPr indent="0" marL="0">
+              <a:buNone/>
+            </a:pPr>
+            <a:r>
+              <a:rPr lang="en-US" sz="1500" b="1" dirty="0">
+                <a:solidFill>
+                  <a:srgbClr val="00838F"/>
+                </a:solidFill>
+                <a:latin typeface="Calibri" pitchFamily="34" charset="0"/>
+                <a:ea typeface="Calibri" pitchFamily="34" charset="-122"/>
+                <a:cs typeface="Calibri" pitchFamily="34" charset="-120"/>
+              </a:rPr>
+              <a:t>ANSWER  </a:t>
+            </a:r>
+            <a:pPr indent="0" marL="0">
+              <a:buNone/>
+            </a:pPr>
+            <a:r>
+              <a:rPr lang="en-US" sz="1500" b="1" dirty="0">
+                <a:solidFill>
+                  <a:srgbClr val="1B2A38"/>
+                </a:solidFill>
+                <a:latin typeface="Calibri" pitchFamily="34" charset="0"/>
+                <a:ea typeface="Calibri" pitchFamily="34" charset="-122"/>
+                <a:cs typeface="Calibri" pitchFamily="34" charset="-120"/>
+              </a:rPr>
+              <a:t>B — More starting template</a:t>
+            </a:r>
+            <a:endParaRPr lang="en-US" sz="1500" dirty="0"/>
+          </a:p>
+        </p:txBody>
+      </p:sp>
+      <p:sp>
+        <p:nvSpPr>
+          <p:cNvPr id="8" name="Text 6"/>
+          <p:cNvSpPr/>
+          <p:nvPr/>
+        </p:nvSpPr>
+        <p:spPr>
+          <a:xfrm>
+            <a:off x="7439376" y="3127248"/>
+            <a:ext cx="3947648" cy="2377440"/>
+          </a:xfrm>
+          <a:prstGeom prst="rect">
+            <a:avLst/>
+          </a:prstGeom>
+          <a:noFill/>
+          <a:ln/>
+        </p:spPr>
+        <p:txBody>
+          <a:bodyPr wrap="square" lIns="0" tIns="0" rIns="0" bIns="0" rtlCol="0" anchor="t"/>
+          <a:lstStyle/>
+          <a:p>
+            <a:pPr algn="l" indent="0" marL="0">
+              <a:lnSpc>
+                <a:spcPct val="108000"/>
+              </a:lnSpc>
+              <a:buNone/>
+            </a:pPr>
+            <a:r>
+              <a:rPr lang="en-US" sz="1250" dirty="0">
+                <a:solidFill>
+                  <a:srgbClr val="33444F"/>
+                </a:solidFill>
+                <a:latin typeface="Calibri" pitchFamily="34" charset="0"/>
+                <a:ea typeface="Calibri" pitchFamily="34" charset="-122"/>
+                <a:cs typeface="Calibri" pitchFamily="34" charset="-120"/>
+              </a:rPr>
+              <a:t>Ct is inversely related to the amount of starting target; lower Ct means more template.</a:t>
+            </a:r>
+            <a:endParaRPr lang="en-US" sz="1250" dirty="0"/>
+          </a:p>
+        </p:txBody>
+      </p:sp>
+      <p:sp>
+        <p:nvSpPr>
+          <p:cNvPr id="9" name="Text 7"/>
+          <p:cNvSpPr/>
+          <p:nvPr/>
+        </p:nvSpPr>
+        <p:spPr>
+          <a:xfrm>
+            <a:off x="566928" y="6473952"/>
+            <a:ext cx="7772400" cy="274320"/>
+          </a:xfrm>
+          <a:prstGeom prst="rect">
+            <a:avLst/>
+          </a:prstGeom>
+          <a:noFill/>
+          <a:ln/>
+        </p:spPr>
+        <p:txBody>
+          <a:bodyPr wrap="square" lIns="0" tIns="0" rIns="0" bIns="0" rtlCol="0" anchor="ctr"/>
+          <a:lstStyle/>
+          <a:p>
+            <a:pPr algn="l" indent="0" marL="0">
+              <a:buNone/>
+            </a:pPr>
+            <a:r>
+              <a:rPr lang="en-US" sz="850" dirty="0">
+                <a:solidFill>
+                  <a:srgbClr val="9AA8B4"/>
+                </a:solidFill>
+                <a:latin typeface="Calibri" pitchFamily="34" charset="0"/>
+                <a:ea typeface="Calibri" pitchFamily="34" charset="-122"/>
+                <a:cs typeface="Calibri" pitchFamily="34" charset="-120"/>
+              </a:rPr>
+              <a:t>Makassed General Hospital  ·  Department of Laboratory Medicine</a:t>
+            </a:r>
+            <a:endParaRPr lang="en-US" sz="850" dirty="0"/>
+          </a:p>
+        </p:txBody>
+      </p:sp>
+      <p:sp>
+        <p:nvSpPr>
+          <p:cNvPr id="10" name="Text 8"/>
+          <p:cNvSpPr/>
+          <p:nvPr/>
+        </p:nvSpPr>
+        <p:spPr>
+          <a:xfrm>
+            <a:off x="9814255" y="6473952"/>
+            <a:ext cx="1828800" cy="274320"/>
+          </a:xfrm>
+          <a:prstGeom prst="rect">
+            <a:avLst/>
+          </a:prstGeom>
+          <a:noFill/>
+          <a:ln/>
+        </p:spPr>
+        <p:txBody>
+          <a:bodyPr wrap="square" lIns="0" tIns="0" rIns="0" bIns="0" rtlCol="0" anchor="ctr"/>
+          <a:lstStyle/>
+          <a:p>
+            <a:pPr algn="r" indent="0" marL="0">
+              <a:buNone/>
+            </a:pPr>
+            <a:r>
+              <a:rPr lang="en-US" sz="850" dirty="0">
+                <a:solidFill>
+                  <a:srgbClr val="9AA8B4"/>
+                </a:solidFill>
+                <a:latin typeface="Calibri" pitchFamily="34" charset="0"/>
+                <a:ea typeface="Calibri" pitchFamily="34" charset="-122"/>
+                <a:cs typeface="Calibri" pitchFamily="34" charset="-120"/>
+              </a:rPr>
+              <a:t>CP Lecture Series</a:t>
+            </a:r>
+            <a:pPr algn="r" indent="0" marL="0">
+              <a:buNone/>
+            </a:pPr>
+            <a:r>
+              <a:rPr lang="en-US" sz="850" dirty="0">
+                <a:solidFill>
+                  <a:srgbClr val="DCE4EC"/>
+                </a:solidFill>
+                <a:latin typeface="Calibri" pitchFamily="34" charset="0"/>
+                <a:ea typeface="Calibri" pitchFamily="34" charset="-122"/>
+                <a:cs typeface="Calibri" pitchFamily="34" charset="-120"/>
+              </a:rPr>
+              <a:t>   ·   </a:t>
+            </a:r>
+            <a:pPr algn="r" indent="0" marL="0">
+              <a:buNone/>
+            </a:pPr>
+            <a:r>
+              <a:rPr lang="en-US" sz="850" b="1" dirty="0">
+                <a:solidFill>
+                  <a:srgbClr val="00838F"/>
+                </a:solidFill>
+                <a:latin typeface="Calibri" pitchFamily="34" charset="0"/>
+                <a:ea typeface="Calibri" pitchFamily="34" charset="-122"/>
+                <a:cs typeface="Calibri" pitchFamily="34" charset="-120"/>
+              </a:rPr>
+              <a:t>18</a:t>
+            </a:r>
+            <a:endParaRPr lang="en-US" sz="850" dirty="0"/>
+          </a:p>
+        </p:txBody>
+      </p:sp>
+    </p:spTree>
+  </p:cSld>
+  <p:clrMapOvr>
+    <a:masterClrMapping/>
+  </p:clrMapOvr>
+</p:sld>
+</file>
+
+<file path=ppt/slides/slide22.xml><?xml version="1.0" encoding="utf-8"?>
+<p:sld xmlns:a="http://schemas.openxmlformats.org/drawingml/2006/main" xmlns:r="http://schemas.openxmlformats.org/officeDocument/2006/relationships" xmlns:p="http://schemas.openxmlformats.org/presentationml/2006/main">
+  <p:cSld name="Slide 22">
+    <p:bg>
+      <p:bgPr>
+        <a:solidFill>
+          <a:srgbClr val="FFFFFF"/>
+        </a:solidFill>
+      </p:bgPr>
+    </p:bg>
+    <p:spTree>
+      <p:nvGrpSpPr>
+        <p:cNvPr id="1" name=""/>
+        <p:cNvGrpSpPr/>
+        <p:nvPr/>
+      </p:nvGrpSpPr>
+      <p:grpSpPr>
+        <a:xfrm>
+          <a:off x="0" y="0"/>
+          <a:ext cx="0" cy="0"/>
+          <a:chOff x="0" y="0"/>
+          <a:chExt cx="0" cy="0"/>
+        </a:xfrm>
+      </p:grpSpPr>
+      <p:sp>
+        <p:nvSpPr>
+          <p:cNvPr id="2" name="Text 0"/>
+          <p:cNvSpPr/>
+          <p:nvPr/>
+        </p:nvSpPr>
+        <p:spPr>
+          <a:xfrm>
+            <a:off x="566928" y="329184"/>
+            <a:ext cx="10515600" cy="310896"/>
+          </a:xfrm>
+          <a:prstGeom prst="rect">
+            <a:avLst/>
+          </a:prstGeom>
+          <a:noFill/>
+          <a:ln/>
+        </p:spPr>
+        <p:txBody>
+          <a:bodyPr wrap="square" lIns="0" tIns="0" rIns="0" bIns="0" rtlCol="0" anchor="ctr"/>
+          <a:lstStyle/>
+          <a:p>
+            <a:pPr algn="l" indent="0" marL="0">
+              <a:buNone/>
+            </a:pPr>
+            <a:r>
+              <a:rPr lang="en-US" sz="1100" b="1" spc="150" kern="0" dirty="0">
+                <a:solidFill>
+                  <a:srgbClr val="00838F"/>
+                </a:solidFill>
+                <a:latin typeface="Calibri" pitchFamily="34" charset="0"/>
+                <a:ea typeface="Calibri" pitchFamily="34" charset="-122"/>
+                <a:cs typeface="Calibri" pitchFamily="34" charset="-120"/>
+              </a:rPr>
+              <a:t>MOLECULAR &amp; CYTOGENETICS   ·   BOARD REVIEW  ·  Q2</a:t>
+            </a:r>
+            <a:endParaRPr lang="en-US" sz="1100" dirty="0"/>
+          </a:p>
+        </p:txBody>
+      </p:sp>
+      <p:sp>
+        <p:nvSpPr>
+          <p:cNvPr id="3" name="Text 1"/>
+          <p:cNvSpPr/>
+          <p:nvPr/>
+        </p:nvSpPr>
+        <p:spPr>
+          <a:xfrm>
+            <a:off x="566928" y="713232"/>
+            <a:ext cx="11064240" cy="749808"/>
+          </a:xfrm>
+          <a:prstGeom prst="rect">
+            <a:avLst/>
+          </a:prstGeom>
+          <a:noFill/>
+          <a:ln/>
+        </p:spPr>
+        <p:txBody>
+          <a:bodyPr wrap="square" lIns="0" tIns="0" rIns="0" bIns="0" rtlCol="0" anchor="ctr"/>
+          <a:lstStyle/>
+          <a:p>
+            <a:pPr algn="l" indent="0" marL="0">
+              <a:buNone/>
+            </a:pPr>
+            <a:r>
+              <a:rPr lang="en-US" sz="2600" b="1" dirty="0">
+                <a:solidFill>
+                  <a:srgbClr val="0E3A5F"/>
+                </a:solidFill>
+                <a:latin typeface="Calibri" pitchFamily="34" charset="0"/>
+                <a:ea typeface="Calibri" pitchFamily="34" charset="-122"/>
+                <a:cs typeface="Calibri" pitchFamily="34" charset="-120"/>
+              </a:rPr>
+              <a:t>Board-Style Review</a:t>
+            </a:r>
+            <a:endParaRPr lang="en-US" sz="2600" dirty="0"/>
+          </a:p>
+        </p:txBody>
+      </p:sp>
+      <p:sp>
+        <p:nvSpPr>
+          <p:cNvPr id="4" name="Text 2"/>
+          <p:cNvSpPr/>
+          <p:nvPr/>
+        </p:nvSpPr>
+        <p:spPr>
+          <a:xfrm>
+            <a:off x="566928" y="1417320"/>
+            <a:ext cx="11057839" cy="914400"/>
+          </a:xfrm>
+          <a:prstGeom prst="rect">
+            <a:avLst/>
+          </a:prstGeom>
+          <a:noFill/>
+          <a:ln/>
+        </p:spPr>
+        <p:txBody>
+          <a:bodyPr wrap="square" lIns="0" tIns="0" rIns="0" bIns="0" rtlCol="0" anchor="t"/>
+          <a:lstStyle/>
+          <a:p>
+            <a:pPr algn="l" indent="0" marL="0">
+              <a:lnSpc>
+                <a:spcPct val="105000"/>
+              </a:lnSpc>
+              <a:buNone/>
+            </a:pPr>
+            <a:r>
+              <a:rPr lang="en-US" sz="1450" b="1" dirty="0">
+                <a:solidFill>
+                  <a:srgbClr val="1B2A38"/>
+                </a:solidFill>
+                <a:latin typeface="Calibri" pitchFamily="34" charset="0"/>
+                <a:ea typeface="Calibri" pitchFamily="34" charset="-122"/>
+                <a:cs typeface="Calibri" pitchFamily="34" charset="-120"/>
+              </a:rPr>
+              <a:t>Which method provides absolute quantitation without a standard curve?</a:t>
+            </a:r>
+            <a:endParaRPr lang="en-US" sz="1450" dirty="0"/>
+          </a:p>
+        </p:txBody>
+      </p:sp>
+      <p:sp>
+        <p:nvSpPr>
+          <p:cNvPr id="5" name="Text 3"/>
+          <p:cNvSpPr/>
+          <p:nvPr/>
+        </p:nvSpPr>
+        <p:spPr>
+          <a:xfrm>
+            <a:off x="658368" y="2395728"/>
+            <a:ext cx="6192390" cy="3017520"/>
+          </a:xfrm>
+          <a:prstGeom prst="rect">
+            <a:avLst/>
+          </a:prstGeom>
+          <a:noFill/>
+          <a:ln/>
+        </p:spPr>
+        <p:txBody>
+          <a:bodyPr wrap="square" lIns="0" tIns="0" rIns="0" bIns="0" rtlCol="0" anchor="t"/>
+          <a:lstStyle/>
+          <a:p>
+            <a:pPr algn="l" indent="0" marL="0">
+              <a:spcAft>
+                <a:spcPts val="600"/>
+              </a:spcAft>
+              <a:buNone/>
+            </a:pPr>
+            <a:r>
+              <a:rPr lang="en-US" sz="1350" dirty="0">
+                <a:solidFill>
+                  <a:srgbClr val="33444F"/>
+                </a:solidFill>
+                <a:latin typeface="Calibri" pitchFamily="34" charset="0"/>
+                <a:ea typeface="Calibri" pitchFamily="34" charset="-122"/>
+                <a:cs typeface="Calibri" pitchFamily="34" charset="-120"/>
+              </a:rPr>
+              <a:t>A. Conventional PCR</a:t>
+            </a:r>
+            <a:endParaRPr lang="en-US" sz="1350" dirty="0"/>
+          </a:p>
+          <a:p>
+            <a:pPr algn="l" indent="0" marL="0">
+              <a:spcAft>
+                <a:spcPts val="600"/>
+              </a:spcAft>
+              <a:buNone/>
+            </a:pPr>
+            <a:r>
+              <a:rPr lang="en-US" sz="1350" dirty="0">
+                <a:solidFill>
+                  <a:srgbClr val="33444F"/>
+                </a:solidFill>
+                <a:latin typeface="Calibri" pitchFamily="34" charset="0"/>
+                <a:ea typeface="Calibri" pitchFamily="34" charset="-122"/>
+                <a:cs typeface="Calibri" pitchFamily="34" charset="-120"/>
+              </a:rPr>
+              <a:t>B. Sanger sequencing</a:t>
+            </a:r>
+            <a:endParaRPr lang="en-US" sz="1350" dirty="0"/>
+          </a:p>
+          <a:p>
+            <a:pPr algn="l" indent="0" marL="0">
+              <a:spcAft>
+                <a:spcPts val="600"/>
+              </a:spcAft>
+              <a:buNone/>
+            </a:pPr>
+            <a:r>
+              <a:rPr lang="en-US" sz="1350" b="1" dirty="0">
+                <a:solidFill>
+                  <a:srgbClr val="005A63"/>
+                </a:solidFill>
+                <a:latin typeface="Calibri" pitchFamily="34" charset="0"/>
+                <a:ea typeface="Calibri" pitchFamily="34" charset="-122"/>
+                <a:cs typeface="Calibri" pitchFamily="34" charset="-120"/>
+              </a:rPr>
+              <a:t>C. Digital PCR</a:t>
+            </a:r>
+            <a:endParaRPr lang="en-US" sz="1350" dirty="0"/>
+          </a:p>
+          <a:p>
+            <a:pPr algn="l" indent="0" marL="0">
+              <a:spcAft>
+                <a:spcPts val="600"/>
+              </a:spcAft>
+              <a:buNone/>
+            </a:pPr>
+            <a:r>
+              <a:rPr lang="en-US" sz="1350" dirty="0">
+                <a:solidFill>
+                  <a:srgbClr val="33444F"/>
+                </a:solidFill>
+                <a:latin typeface="Calibri" pitchFamily="34" charset="0"/>
+                <a:ea typeface="Calibri" pitchFamily="34" charset="-122"/>
+                <a:cs typeface="Calibri" pitchFamily="34" charset="-120"/>
+              </a:rPr>
+              <a:t>D. FISH</a:t>
+            </a:r>
+            <a:endParaRPr lang="en-US" sz="1350" dirty="0"/>
+          </a:p>
+          <a:p>
+            <a:pPr algn="l" indent="0" marL="0">
+              <a:spcAft>
+                <a:spcPts val="600"/>
+              </a:spcAft>
+              <a:buNone/>
+            </a:pPr>
+            <a:r>
+              <a:rPr lang="en-US" sz="1350" dirty="0">
+                <a:solidFill>
+                  <a:srgbClr val="33444F"/>
+                </a:solidFill>
+                <a:latin typeface="Calibri" pitchFamily="34" charset="0"/>
+                <a:ea typeface="Calibri" pitchFamily="34" charset="-122"/>
+                <a:cs typeface="Calibri" pitchFamily="34" charset="-120"/>
+              </a:rPr>
+              <a:t>E. Microarray</a:t>
+            </a:r>
+            <a:endParaRPr lang="en-US" sz="1350" dirty="0"/>
+          </a:p>
+        </p:txBody>
+      </p:sp>
+      <p:sp>
+        <p:nvSpPr>
+          <p:cNvPr id="6" name="Shape 4"/>
+          <p:cNvSpPr/>
+          <p:nvPr/>
+        </p:nvSpPr>
+        <p:spPr>
+          <a:xfrm>
+            <a:off x="7201632" y="2395728"/>
+            <a:ext cx="4423136" cy="3246120"/>
+          </a:xfrm>
+          <a:prstGeom prst="roundRect">
+            <a:avLst>
+              <a:gd name="adj" fmla="val 2535"/>
+            </a:avLst>
+          </a:prstGeom>
+          <a:solidFill>
+            <a:srgbClr val="E0F2F4"/>
+          </a:solidFill>
+          <a:ln/>
+          <a:effectLst>
+            <a:outerShdw sx="100000" sy="100000" kx="0" ky="0" algn="bl" rotWithShape="0" blurRad="88900" dist="25400" dir="5400000">
+              <a:srgbClr val="22303C">
+                <a:alpha val="12000"/>
+              </a:srgbClr>
+            </a:outerShdw>
+          </a:effectLst>
+        </p:spPr>
+      </p:sp>
+      <p:sp>
+        <p:nvSpPr>
+          <p:cNvPr id="7" name="Text 5"/>
+          <p:cNvSpPr/>
+          <p:nvPr/>
+        </p:nvSpPr>
+        <p:spPr>
+          <a:xfrm>
+            <a:off x="7439376" y="2578608"/>
+            <a:ext cx="3965936" cy="457200"/>
+          </a:xfrm>
+          <a:prstGeom prst="rect">
+            <a:avLst/>
+          </a:prstGeom>
+          <a:noFill/>
+          <a:ln/>
+        </p:spPr>
+        <p:txBody>
+          <a:bodyPr wrap="square" lIns="0" tIns="0" rIns="0" bIns="0" rtlCol="0" anchor="ctr"/>
+          <a:lstStyle/>
+          <a:p>
+            <a:pPr indent="0" marL="0">
+              <a:buNone/>
+            </a:pPr>
+            <a:r>
+              <a:rPr lang="en-US" sz="1500" b="1" dirty="0">
+                <a:solidFill>
+                  <a:srgbClr val="00838F"/>
+                </a:solidFill>
+                <a:latin typeface="Calibri" pitchFamily="34" charset="0"/>
+                <a:ea typeface="Calibri" pitchFamily="34" charset="-122"/>
+                <a:cs typeface="Calibri" pitchFamily="34" charset="-120"/>
+              </a:rPr>
+              <a:t>ANSWER  </a:t>
+            </a:r>
+            <a:pPr indent="0" marL="0">
+              <a:buNone/>
+            </a:pPr>
+            <a:r>
+              <a:rPr lang="en-US" sz="1500" b="1" dirty="0">
+                <a:solidFill>
+                  <a:srgbClr val="1B2A38"/>
+                </a:solidFill>
+                <a:latin typeface="Calibri" pitchFamily="34" charset="0"/>
+                <a:ea typeface="Calibri" pitchFamily="34" charset="-122"/>
+                <a:cs typeface="Calibri" pitchFamily="34" charset="-120"/>
+              </a:rPr>
+              <a:t>C — Digital PCR</a:t>
+            </a:r>
+            <a:endParaRPr lang="en-US" sz="1500" dirty="0"/>
+          </a:p>
+        </p:txBody>
+      </p:sp>
+      <p:sp>
+        <p:nvSpPr>
+          <p:cNvPr id="8" name="Text 6"/>
+          <p:cNvSpPr/>
+          <p:nvPr/>
+        </p:nvSpPr>
+        <p:spPr>
+          <a:xfrm>
+            <a:off x="7439376" y="3127248"/>
+            <a:ext cx="3947648" cy="2377440"/>
+          </a:xfrm>
+          <a:prstGeom prst="rect">
+            <a:avLst/>
+          </a:prstGeom>
+          <a:noFill/>
+          <a:ln/>
+        </p:spPr>
+        <p:txBody>
+          <a:bodyPr wrap="square" lIns="0" tIns="0" rIns="0" bIns="0" rtlCol="0" anchor="t"/>
+          <a:lstStyle/>
+          <a:p>
+            <a:pPr algn="l" indent="0" marL="0">
+              <a:lnSpc>
+                <a:spcPct val="108000"/>
+              </a:lnSpc>
+              <a:buNone/>
+            </a:pPr>
+            <a:r>
+              <a:rPr lang="en-US" sz="1250" dirty="0">
+                <a:solidFill>
+                  <a:srgbClr val="33444F"/>
+                </a:solidFill>
+                <a:latin typeface="Calibri" pitchFamily="34" charset="0"/>
+                <a:ea typeface="Calibri" pitchFamily="34" charset="-122"/>
+                <a:cs typeface="Calibri" pitchFamily="34" charset="-120"/>
+              </a:rPr>
+              <a:t>Digital PCR partitions the reaction to count targets directly, giving absolute quantitation without a standard curve.</a:t>
+            </a:r>
+            <a:endParaRPr lang="en-US" sz="1250" dirty="0"/>
+          </a:p>
+        </p:txBody>
+      </p:sp>
+      <p:sp>
+        <p:nvSpPr>
+          <p:cNvPr id="9" name="Text 7"/>
+          <p:cNvSpPr/>
+          <p:nvPr/>
+        </p:nvSpPr>
+        <p:spPr>
+          <a:xfrm>
+            <a:off x="566928" y="6473952"/>
+            <a:ext cx="7772400" cy="274320"/>
+          </a:xfrm>
+          <a:prstGeom prst="rect">
+            <a:avLst/>
+          </a:prstGeom>
+          <a:noFill/>
+          <a:ln/>
+        </p:spPr>
+        <p:txBody>
+          <a:bodyPr wrap="square" lIns="0" tIns="0" rIns="0" bIns="0" rtlCol="0" anchor="ctr"/>
+          <a:lstStyle/>
+          <a:p>
+            <a:pPr algn="l" indent="0" marL="0">
+              <a:buNone/>
+            </a:pPr>
+            <a:r>
+              <a:rPr lang="en-US" sz="850" dirty="0">
+                <a:solidFill>
+                  <a:srgbClr val="9AA8B4"/>
+                </a:solidFill>
+                <a:latin typeface="Calibri" pitchFamily="34" charset="0"/>
+                <a:ea typeface="Calibri" pitchFamily="34" charset="-122"/>
+                <a:cs typeface="Calibri" pitchFamily="34" charset="-120"/>
+              </a:rPr>
+              <a:t>Makassed General Hospital  ·  Department of Laboratory Medicine</a:t>
+            </a:r>
+            <a:endParaRPr lang="en-US" sz="850" dirty="0"/>
+          </a:p>
+        </p:txBody>
+      </p:sp>
+      <p:sp>
+        <p:nvSpPr>
+          <p:cNvPr id="10" name="Text 8"/>
+          <p:cNvSpPr/>
+          <p:nvPr/>
+        </p:nvSpPr>
+        <p:spPr>
+          <a:xfrm>
+            <a:off x="9814255" y="6473952"/>
+            <a:ext cx="1828800" cy="274320"/>
+          </a:xfrm>
+          <a:prstGeom prst="rect">
+            <a:avLst/>
+          </a:prstGeom>
+          <a:noFill/>
+          <a:ln/>
+        </p:spPr>
+        <p:txBody>
+          <a:bodyPr wrap="square" lIns="0" tIns="0" rIns="0" bIns="0" rtlCol="0" anchor="ctr"/>
+          <a:lstStyle/>
+          <a:p>
+            <a:pPr algn="r" indent="0" marL="0">
+              <a:buNone/>
+            </a:pPr>
+            <a:r>
+              <a:rPr lang="en-US" sz="850" dirty="0">
+                <a:solidFill>
+                  <a:srgbClr val="9AA8B4"/>
+                </a:solidFill>
+                <a:latin typeface="Calibri" pitchFamily="34" charset="0"/>
+                <a:ea typeface="Calibri" pitchFamily="34" charset="-122"/>
+                <a:cs typeface="Calibri" pitchFamily="34" charset="-120"/>
+              </a:rPr>
+              <a:t>CP Lecture Series</a:t>
+            </a:r>
+            <a:pPr algn="r" indent="0" marL="0">
+              <a:buNone/>
+            </a:pPr>
+            <a:r>
+              <a:rPr lang="en-US" sz="850" dirty="0">
+                <a:solidFill>
+                  <a:srgbClr val="DCE4EC"/>
+                </a:solidFill>
+                <a:latin typeface="Calibri" pitchFamily="34" charset="0"/>
+                <a:ea typeface="Calibri" pitchFamily="34" charset="-122"/>
+                <a:cs typeface="Calibri" pitchFamily="34" charset="-120"/>
+              </a:rPr>
+              <a:t>   ·   </a:t>
+            </a:r>
+            <a:pPr algn="r" indent="0" marL="0">
+              <a:buNone/>
+            </a:pPr>
+            <a:r>
+              <a:rPr lang="en-US" sz="850" b="1" dirty="0">
+                <a:solidFill>
+                  <a:srgbClr val="00838F"/>
+                </a:solidFill>
+                <a:latin typeface="Calibri" pitchFamily="34" charset="0"/>
+                <a:ea typeface="Calibri" pitchFamily="34" charset="-122"/>
+                <a:cs typeface="Calibri" pitchFamily="34" charset="-120"/>
+              </a:rPr>
+              <a:t>19</a:t>
+            </a:r>
+            <a:endParaRPr lang="en-US" sz="850" dirty="0"/>
+          </a:p>
+        </p:txBody>
+      </p:sp>
+    </p:spTree>
+  </p:cSld>
+  <p:clrMapOvr>
+    <a:masterClrMapping/>
+  </p:clrMapOvr>
+</p:sld>
+</file>
+
+<file path=ppt/slides/slide23.xml><?xml version="1.0" encoding="utf-8"?>
+<p:sld xmlns:a="http://schemas.openxmlformats.org/drawingml/2006/main" xmlns:r="http://schemas.openxmlformats.org/officeDocument/2006/relationships" xmlns:p="http://schemas.openxmlformats.org/presentationml/2006/main">
+  <p:cSld name="Slide 23">
+    <p:bg>
+      <p:bgPr>
+        <a:solidFill>
+          <a:srgbClr val="FFFFFF"/>
+        </a:solidFill>
+      </p:bgPr>
+    </p:bg>
+    <p:spTree>
+      <p:nvGrpSpPr>
+        <p:cNvPr id="1" name=""/>
+        <p:cNvGrpSpPr/>
+        <p:nvPr/>
+      </p:nvGrpSpPr>
+      <p:grpSpPr>
+        <a:xfrm>
+          <a:off x="0" y="0"/>
+          <a:ext cx="0" cy="0"/>
+          <a:chOff x="0" y="0"/>
+          <a:chExt cx="0" cy="0"/>
+        </a:xfrm>
+      </p:grpSpPr>
+      <p:sp>
+        <p:nvSpPr>
+          <p:cNvPr id="2" name="Text 0"/>
+          <p:cNvSpPr/>
+          <p:nvPr/>
+        </p:nvSpPr>
+        <p:spPr>
+          <a:xfrm>
+            <a:off x="566928" y="329184"/>
+            <a:ext cx="10515600" cy="310896"/>
+          </a:xfrm>
+          <a:prstGeom prst="rect">
+            <a:avLst/>
+          </a:prstGeom>
+          <a:noFill/>
+          <a:ln/>
+        </p:spPr>
+        <p:txBody>
+          <a:bodyPr wrap="square" lIns="0" tIns="0" rIns="0" bIns="0" rtlCol="0" anchor="ctr"/>
+          <a:lstStyle/>
+          <a:p>
+            <a:pPr algn="l" indent="0" marL="0">
+              <a:buNone/>
+            </a:pPr>
+            <a:r>
+              <a:rPr lang="en-US" sz="1100" b="1" spc="150" kern="0" dirty="0">
+                <a:solidFill>
+                  <a:srgbClr val="00838F"/>
+                </a:solidFill>
+                <a:latin typeface="Calibri" pitchFamily="34" charset="0"/>
+                <a:ea typeface="Calibri" pitchFamily="34" charset="-122"/>
+                <a:cs typeface="Calibri" pitchFamily="34" charset="-120"/>
+              </a:rPr>
+              <a:t>MOLECULAR &amp; CYTOGENETICS   ·   BOARD REVIEW  ·  Q3</a:t>
+            </a:r>
+            <a:endParaRPr lang="en-US" sz="1100" dirty="0"/>
+          </a:p>
+        </p:txBody>
+      </p:sp>
+      <p:sp>
+        <p:nvSpPr>
+          <p:cNvPr id="3" name="Text 1"/>
+          <p:cNvSpPr/>
+          <p:nvPr/>
+        </p:nvSpPr>
+        <p:spPr>
+          <a:xfrm>
+            <a:off x="566928" y="713232"/>
+            <a:ext cx="11064240" cy="749808"/>
+          </a:xfrm>
+          <a:prstGeom prst="rect">
+            <a:avLst/>
+          </a:prstGeom>
+          <a:noFill/>
+          <a:ln/>
+        </p:spPr>
+        <p:txBody>
+          <a:bodyPr wrap="square" lIns="0" tIns="0" rIns="0" bIns="0" rtlCol="0" anchor="ctr"/>
+          <a:lstStyle/>
+          <a:p>
+            <a:pPr algn="l" indent="0" marL="0">
+              <a:buNone/>
+            </a:pPr>
+            <a:r>
+              <a:rPr lang="en-US" sz="2600" b="1" dirty="0">
+                <a:solidFill>
+                  <a:srgbClr val="0E3A5F"/>
+                </a:solidFill>
+                <a:latin typeface="Calibri" pitchFamily="34" charset="0"/>
+                <a:ea typeface="Calibri" pitchFamily="34" charset="-122"/>
+                <a:cs typeface="Calibri" pitchFamily="34" charset="-120"/>
+              </a:rPr>
+              <a:t>Board-Style Review</a:t>
+            </a:r>
+            <a:endParaRPr lang="en-US" sz="2600" dirty="0"/>
+          </a:p>
+        </p:txBody>
+      </p:sp>
+      <p:sp>
+        <p:nvSpPr>
+          <p:cNvPr id="4" name="Text 2"/>
+          <p:cNvSpPr/>
+          <p:nvPr/>
+        </p:nvSpPr>
+        <p:spPr>
+          <a:xfrm>
+            <a:off x="566928" y="1417320"/>
+            <a:ext cx="11057839" cy="914400"/>
+          </a:xfrm>
+          <a:prstGeom prst="rect">
+            <a:avLst/>
+          </a:prstGeom>
+          <a:noFill/>
+          <a:ln/>
+        </p:spPr>
+        <p:txBody>
+          <a:bodyPr wrap="square" lIns="0" tIns="0" rIns="0" bIns="0" rtlCol="0" anchor="t"/>
+          <a:lstStyle/>
+          <a:p>
+            <a:pPr algn="l" indent="0" marL="0">
+              <a:lnSpc>
+                <a:spcPct val="105000"/>
+              </a:lnSpc>
+              <a:buNone/>
+            </a:pPr>
+            <a:r>
+              <a:rPr lang="en-US" sz="1450" b="1" dirty="0">
+                <a:solidFill>
+                  <a:srgbClr val="1B2A38"/>
+                </a:solidFill>
+                <a:latin typeface="Calibri" pitchFamily="34" charset="0"/>
+                <a:ea typeface="Calibri" pitchFamily="34" charset="-122"/>
+                <a:cs typeface="Calibri" pitchFamily="34" charset="-120"/>
+              </a:rPr>
+              <a:t>A balanced (reciprocal) translocation is NOT detectable by:</a:t>
+            </a:r>
+            <a:endParaRPr lang="en-US" sz="1450" dirty="0"/>
+          </a:p>
+        </p:txBody>
+      </p:sp>
+      <p:sp>
+        <p:nvSpPr>
+          <p:cNvPr id="5" name="Text 3"/>
+          <p:cNvSpPr/>
+          <p:nvPr/>
+        </p:nvSpPr>
+        <p:spPr>
+          <a:xfrm>
+            <a:off x="658368" y="2395728"/>
+            <a:ext cx="6192390" cy="3017520"/>
+          </a:xfrm>
+          <a:prstGeom prst="rect">
+            <a:avLst/>
+          </a:prstGeom>
+          <a:noFill/>
+          <a:ln/>
+        </p:spPr>
+        <p:txBody>
+          <a:bodyPr wrap="square" lIns="0" tIns="0" rIns="0" bIns="0" rtlCol="0" anchor="t"/>
+          <a:lstStyle/>
+          <a:p>
+            <a:pPr algn="l" indent="0" marL="0">
+              <a:spcAft>
+                <a:spcPts val="600"/>
+              </a:spcAft>
+              <a:buNone/>
+            </a:pPr>
+            <a:r>
+              <a:rPr lang="en-US" sz="1350" dirty="0">
+                <a:solidFill>
+                  <a:srgbClr val="33444F"/>
+                </a:solidFill>
+                <a:latin typeface="Calibri" pitchFamily="34" charset="0"/>
+                <a:ea typeface="Calibri" pitchFamily="34" charset="-122"/>
+                <a:cs typeface="Calibri" pitchFamily="34" charset="-120"/>
+              </a:rPr>
+              <a:t>A. Karyotype</a:t>
+            </a:r>
+            <a:endParaRPr lang="en-US" sz="1350" dirty="0"/>
+          </a:p>
+          <a:p>
+            <a:pPr algn="l" indent="0" marL="0">
+              <a:spcAft>
+                <a:spcPts val="600"/>
+              </a:spcAft>
+              <a:buNone/>
+            </a:pPr>
+            <a:r>
+              <a:rPr lang="en-US" sz="1350" dirty="0">
+                <a:solidFill>
+                  <a:srgbClr val="33444F"/>
+                </a:solidFill>
+                <a:latin typeface="Calibri" pitchFamily="34" charset="0"/>
+                <a:ea typeface="Calibri" pitchFamily="34" charset="-122"/>
+                <a:cs typeface="Calibri" pitchFamily="34" charset="-120"/>
+              </a:rPr>
+              <a:t>B. FISH (break-apart probe)</a:t>
+            </a:r>
+            <a:endParaRPr lang="en-US" sz="1350" dirty="0"/>
+          </a:p>
+          <a:p>
+            <a:pPr algn="l" indent="0" marL="0">
+              <a:spcAft>
+                <a:spcPts val="600"/>
+              </a:spcAft>
+              <a:buNone/>
+            </a:pPr>
+            <a:r>
+              <a:rPr lang="en-US" sz="1350" b="1" dirty="0">
+                <a:solidFill>
+                  <a:srgbClr val="005A63"/>
+                </a:solidFill>
+                <a:latin typeface="Calibri" pitchFamily="34" charset="0"/>
+                <a:ea typeface="Calibri" pitchFamily="34" charset="-122"/>
+                <a:cs typeface="Calibri" pitchFamily="34" charset="-120"/>
+              </a:rPr>
+              <a:t>C. Chromosomal microarray</a:t>
+            </a:r>
+            <a:endParaRPr lang="en-US" sz="1350" dirty="0"/>
+          </a:p>
+          <a:p>
+            <a:pPr algn="l" indent="0" marL="0">
+              <a:spcAft>
+                <a:spcPts val="600"/>
+              </a:spcAft>
+              <a:buNone/>
+            </a:pPr>
+            <a:r>
+              <a:rPr lang="en-US" sz="1350" dirty="0">
+                <a:solidFill>
+                  <a:srgbClr val="33444F"/>
+                </a:solidFill>
+                <a:latin typeface="Calibri" pitchFamily="34" charset="0"/>
+                <a:ea typeface="Calibri" pitchFamily="34" charset="-122"/>
+                <a:cs typeface="Calibri" pitchFamily="34" charset="-120"/>
+              </a:rPr>
+              <a:t>D. RT-PCR for the fusion</a:t>
+            </a:r>
+            <a:endParaRPr lang="en-US" sz="1350" dirty="0"/>
+          </a:p>
+          <a:p>
+            <a:pPr algn="l" indent="0" marL="0">
+              <a:spcAft>
+                <a:spcPts val="600"/>
+              </a:spcAft>
+              <a:buNone/>
+            </a:pPr>
+            <a:r>
+              <a:rPr lang="en-US" sz="1350" dirty="0">
+                <a:solidFill>
+                  <a:srgbClr val="33444F"/>
+                </a:solidFill>
+                <a:latin typeface="Calibri" pitchFamily="34" charset="0"/>
+                <a:ea typeface="Calibri" pitchFamily="34" charset="-122"/>
+                <a:cs typeface="Calibri" pitchFamily="34" charset="-120"/>
+              </a:rPr>
+              <a:t>E. Metaphase analysis</a:t>
+            </a:r>
+            <a:endParaRPr lang="en-US" sz="1350" dirty="0"/>
+          </a:p>
+        </p:txBody>
+      </p:sp>
+      <p:sp>
+        <p:nvSpPr>
+          <p:cNvPr id="6" name="Shape 4"/>
+          <p:cNvSpPr/>
+          <p:nvPr/>
+        </p:nvSpPr>
+        <p:spPr>
+          <a:xfrm>
+            <a:off x="7201632" y="2395728"/>
+            <a:ext cx="4423136" cy="3246120"/>
+          </a:xfrm>
+          <a:prstGeom prst="roundRect">
+            <a:avLst>
+              <a:gd name="adj" fmla="val 2535"/>
+            </a:avLst>
+          </a:prstGeom>
+          <a:solidFill>
+            <a:srgbClr val="E0F2F4"/>
+          </a:solidFill>
+          <a:ln/>
+          <a:effectLst>
+            <a:outerShdw sx="100000" sy="100000" kx="0" ky="0" algn="bl" rotWithShape="0" blurRad="88900" dist="25400" dir="5400000">
+              <a:srgbClr val="22303C">
+                <a:alpha val="12000"/>
+              </a:srgbClr>
+            </a:outerShdw>
+          </a:effectLst>
+        </p:spPr>
+      </p:sp>
+      <p:sp>
+        <p:nvSpPr>
+          <p:cNvPr id="7" name="Text 5"/>
+          <p:cNvSpPr/>
+          <p:nvPr/>
+        </p:nvSpPr>
+        <p:spPr>
+          <a:xfrm>
+            <a:off x="7439376" y="2578608"/>
+            <a:ext cx="3965936" cy="457200"/>
+          </a:xfrm>
+          <a:prstGeom prst="rect">
+            <a:avLst/>
+          </a:prstGeom>
+          <a:noFill/>
+          <a:ln/>
+        </p:spPr>
+        <p:txBody>
+          <a:bodyPr wrap="square" lIns="0" tIns="0" rIns="0" bIns="0" rtlCol="0" anchor="ctr"/>
+          <a:lstStyle/>
+          <a:p>
+            <a:pPr indent="0" marL="0">
+              <a:buNone/>
+            </a:pPr>
+            <a:r>
+              <a:rPr lang="en-US" sz="1500" b="1" dirty="0">
+                <a:solidFill>
+                  <a:srgbClr val="00838F"/>
+                </a:solidFill>
+                <a:latin typeface="Calibri" pitchFamily="34" charset="0"/>
+                <a:ea typeface="Calibri" pitchFamily="34" charset="-122"/>
+                <a:cs typeface="Calibri" pitchFamily="34" charset="-120"/>
+              </a:rPr>
+              <a:t>ANSWER  </a:t>
+            </a:r>
+            <a:pPr indent="0" marL="0">
+              <a:buNone/>
+            </a:pPr>
+            <a:r>
+              <a:rPr lang="en-US" sz="1500" b="1" dirty="0">
+                <a:solidFill>
+                  <a:srgbClr val="1B2A38"/>
+                </a:solidFill>
+                <a:latin typeface="Calibri" pitchFamily="34" charset="0"/>
+                <a:ea typeface="Calibri" pitchFamily="34" charset="-122"/>
+                <a:cs typeface="Calibri" pitchFamily="34" charset="-120"/>
+              </a:rPr>
+              <a:t>C — Chromosomal microarray</a:t>
+            </a:r>
+            <a:endParaRPr lang="en-US" sz="1500" dirty="0"/>
+          </a:p>
+        </p:txBody>
+      </p:sp>
+      <p:sp>
+        <p:nvSpPr>
+          <p:cNvPr id="8" name="Text 6"/>
+          <p:cNvSpPr/>
+          <p:nvPr/>
+        </p:nvSpPr>
+        <p:spPr>
+          <a:xfrm>
+            <a:off x="7439376" y="3127248"/>
+            <a:ext cx="3947648" cy="2377440"/>
+          </a:xfrm>
+          <a:prstGeom prst="rect">
+            <a:avLst/>
+          </a:prstGeom>
+          <a:noFill/>
+          <a:ln/>
+        </p:spPr>
+        <p:txBody>
+          <a:bodyPr wrap="square" lIns="0" tIns="0" rIns="0" bIns="0" rtlCol="0" anchor="t"/>
+          <a:lstStyle/>
+          <a:p>
+            <a:pPr algn="l" indent="0" marL="0">
+              <a:lnSpc>
+                <a:spcPct val="108000"/>
+              </a:lnSpc>
+              <a:buNone/>
+            </a:pPr>
+            <a:r>
+              <a:rPr lang="en-US" sz="1250" dirty="0">
+                <a:solidFill>
+                  <a:srgbClr val="33444F"/>
+                </a:solidFill>
+                <a:latin typeface="Calibri" pitchFamily="34" charset="0"/>
+                <a:ea typeface="Calibri" pitchFamily="34" charset="-122"/>
+                <a:cs typeface="Calibri" pitchFamily="34" charset="-120"/>
+              </a:rPr>
+              <a:t>Arrays detect copy-number change; a balanced translocation has no net copy-number change and is missed.</a:t>
+            </a:r>
+            <a:endParaRPr lang="en-US" sz="1250" dirty="0"/>
+          </a:p>
+        </p:txBody>
+      </p:sp>
+      <p:sp>
+        <p:nvSpPr>
+          <p:cNvPr id="9" name="Text 7"/>
+          <p:cNvSpPr/>
+          <p:nvPr/>
+        </p:nvSpPr>
+        <p:spPr>
+          <a:xfrm>
+            <a:off x="566928" y="6473952"/>
+            <a:ext cx="7772400" cy="274320"/>
+          </a:xfrm>
+          <a:prstGeom prst="rect">
+            <a:avLst/>
+          </a:prstGeom>
+          <a:noFill/>
+          <a:ln/>
+        </p:spPr>
+        <p:txBody>
+          <a:bodyPr wrap="square" lIns="0" tIns="0" rIns="0" bIns="0" rtlCol="0" anchor="ctr"/>
+          <a:lstStyle/>
+          <a:p>
+            <a:pPr algn="l" indent="0" marL="0">
+              <a:buNone/>
+            </a:pPr>
+            <a:r>
+              <a:rPr lang="en-US" sz="850" dirty="0">
+                <a:solidFill>
+                  <a:srgbClr val="9AA8B4"/>
+                </a:solidFill>
+                <a:latin typeface="Calibri" pitchFamily="34" charset="0"/>
+                <a:ea typeface="Calibri" pitchFamily="34" charset="-122"/>
+                <a:cs typeface="Calibri" pitchFamily="34" charset="-120"/>
+              </a:rPr>
+              <a:t>Makassed General Hospital  ·  Department of Laboratory Medicine</a:t>
+            </a:r>
+            <a:endParaRPr lang="en-US" sz="850" dirty="0"/>
+          </a:p>
+        </p:txBody>
+      </p:sp>
+      <p:sp>
+        <p:nvSpPr>
+          <p:cNvPr id="10" name="Text 8"/>
+          <p:cNvSpPr/>
+          <p:nvPr/>
+        </p:nvSpPr>
+        <p:spPr>
+          <a:xfrm>
+            <a:off x="9814255" y="6473952"/>
+            <a:ext cx="1828800" cy="274320"/>
+          </a:xfrm>
+          <a:prstGeom prst="rect">
+            <a:avLst/>
+          </a:prstGeom>
+          <a:noFill/>
+          <a:ln/>
+        </p:spPr>
+        <p:txBody>
+          <a:bodyPr wrap="square" lIns="0" tIns="0" rIns="0" bIns="0" rtlCol="0" anchor="ctr"/>
+          <a:lstStyle/>
+          <a:p>
+            <a:pPr algn="r" indent="0" marL="0">
+              <a:buNone/>
+            </a:pPr>
+            <a:r>
+              <a:rPr lang="en-US" sz="850" dirty="0">
+                <a:solidFill>
+                  <a:srgbClr val="9AA8B4"/>
+                </a:solidFill>
+                <a:latin typeface="Calibri" pitchFamily="34" charset="0"/>
+                <a:ea typeface="Calibri" pitchFamily="34" charset="-122"/>
+                <a:cs typeface="Calibri" pitchFamily="34" charset="-120"/>
+              </a:rPr>
+              <a:t>CP Lecture Series</a:t>
+            </a:r>
+            <a:pPr algn="r" indent="0" marL="0">
+              <a:buNone/>
+            </a:pPr>
+            <a:r>
+              <a:rPr lang="en-US" sz="850" dirty="0">
+                <a:solidFill>
+                  <a:srgbClr val="DCE4EC"/>
+                </a:solidFill>
+                <a:latin typeface="Calibri" pitchFamily="34" charset="0"/>
+                <a:ea typeface="Calibri" pitchFamily="34" charset="-122"/>
+                <a:cs typeface="Calibri" pitchFamily="34" charset="-120"/>
+              </a:rPr>
+              <a:t>   ·   </a:t>
+            </a:r>
+            <a:pPr algn="r" indent="0" marL="0">
+              <a:buNone/>
+            </a:pPr>
+            <a:r>
+              <a:rPr lang="en-US" sz="850" b="1" dirty="0">
+                <a:solidFill>
+                  <a:srgbClr val="00838F"/>
+                </a:solidFill>
+                <a:latin typeface="Calibri" pitchFamily="34" charset="0"/>
+                <a:ea typeface="Calibri" pitchFamily="34" charset="-122"/>
+                <a:cs typeface="Calibri" pitchFamily="34" charset="-120"/>
+              </a:rPr>
+              <a:t>20</a:t>
+            </a:r>
+            <a:endParaRPr lang="en-US" sz="850" dirty="0"/>
+          </a:p>
+        </p:txBody>
+      </p:sp>
+    </p:spTree>
+  </p:cSld>
+  <p:clrMapOvr>
+    <a:masterClrMapping/>
+  </p:clrMapOvr>
+</p:sld>
+</file>
+
+<file path=ppt/slides/slide24.xml><?xml version="1.0" encoding="utf-8"?>
+<p:sld xmlns:a="http://schemas.openxmlformats.org/drawingml/2006/main" xmlns:r="http://schemas.openxmlformats.org/officeDocument/2006/relationships" xmlns:p="http://schemas.openxmlformats.org/presentationml/2006/main">
+  <p:cSld name="Slide 24">
+    <p:bg>
+      <p:bgPr>
+        <a:solidFill>
+          <a:srgbClr val="FFFFFF"/>
+        </a:solidFill>
+      </p:bgPr>
+    </p:bg>
+    <p:spTree>
+      <p:nvGrpSpPr>
+        <p:cNvPr id="1" name=""/>
+        <p:cNvGrpSpPr/>
+        <p:nvPr/>
+      </p:nvGrpSpPr>
+      <p:grpSpPr>
+        <a:xfrm>
+          <a:off x="0" y="0"/>
+          <a:ext cx="0" cy="0"/>
+          <a:chOff x="0" y="0"/>
+          <a:chExt cx="0" cy="0"/>
+        </a:xfrm>
+      </p:grpSpPr>
+      <p:sp>
+        <p:nvSpPr>
+          <p:cNvPr id="2" name="Text 0"/>
+          <p:cNvSpPr/>
+          <p:nvPr/>
+        </p:nvSpPr>
+        <p:spPr>
+          <a:xfrm>
+            <a:off x="566928" y="329184"/>
+            <a:ext cx="10515600" cy="310896"/>
+          </a:xfrm>
+          <a:prstGeom prst="rect">
+            <a:avLst/>
+          </a:prstGeom>
+          <a:noFill/>
+          <a:ln/>
+        </p:spPr>
+        <p:txBody>
+          <a:bodyPr wrap="square" lIns="0" tIns="0" rIns="0" bIns="0" rtlCol="0" anchor="ctr"/>
+          <a:lstStyle/>
+          <a:p>
+            <a:pPr algn="l" indent="0" marL="0">
+              <a:buNone/>
+            </a:pPr>
+            <a:r>
+              <a:rPr lang="en-US" sz="1100" b="1" spc="150" kern="0" dirty="0">
+                <a:solidFill>
+                  <a:srgbClr val="00838F"/>
+                </a:solidFill>
+                <a:latin typeface="Calibri" pitchFamily="34" charset="0"/>
+                <a:ea typeface="Calibri" pitchFamily="34" charset="-122"/>
+                <a:cs typeface="Calibri" pitchFamily="34" charset="-120"/>
+              </a:rPr>
+              <a:t>MOLECULAR &amp; CYTOGENETICS   ·   BOARD REVIEW  ·  Q4</a:t>
+            </a:r>
+            <a:endParaRPr lang="en-US" sz="1100" dirty="0"/>
+          </a:p>
+        </p:txBody>
+      </p:sp>
+      <p:sp>
+        <p:nvSpPr>
+          <p:cNvPr id="3" name="Text 1"/>
+          <p:cNvSpPr/>
+          <p:nvPr/>
+        </p:nvSpPr>
+        <p:spPr>
+          <a:xfrm>
+            <a:off x="566928" y="713232"/>
+            <a:ext cx="11064240" cy="749808"/>
+          </a:xfrm>
+          <a:prstGeom prst="rect">
+            <a:avLst/>
+          </a:prstGeom>
+          <a:noFill/>
+          <a:ln/>
+        </p:spPr>
+        <p:txBody>
+          <a:bodyPr wrap="square" lIns="0" tIns="0" rIns="0" bIns="0" rtlCol="0" anchor="ctr"/>
+          <a:lstStyle/>
+          <a:p>
+            <a:pPr algn="l" indent="0" marL="0">
+              <a:buNone/>
+            </a:pPr>
+            <a:r>
+              <a:rPr lang="en-US" sz="2600" b="1" dirty="0">
+                <a:solidFill>
+                  <a:srgbClr val="0E3A5F"/>
+                </a:solidFill>
+                <a:latin typeface="Calibri" pitchFamily="34" charset="0"/>
+                <a:ea typeface="Calibri" pitchFamily="34" charset="-122"/>
+                <a:cs typeface="Calibri" pitchFamily="34" charset="-120"/>
+              </a:rPr>
+              <a:t>Board-Style Review</a:t>
+            </a:r>
+            <a:endParaRPr lang="en-US" sz="2600" dirty="0"/>
+          </a:p>
+        </p:txBody>
+      </p:sp>
+      <p:sp>
+        <p:nvSpPr>
+          <p:cNvPr id="4" name="Text 2"/>
+          <p:cNvSpPr/>
+          <p:nvPr/>
+        </p:nvSpPr>
+        <p:spPr>
+          <a:xfrm>
+            <a:off x="566928" y="1417320"/>
+            <a:ext cx="11057839" cy="914400"/>
+          </a:xfrm>
+          <a:prstGeom prst="rect">
+            <a:avLst/>
+          </a:prstGeom>
+          <a:noFill/>
+          <a:ln/>
+        </p:spPr>
+        <p:txBody>
+          <a:bodyPr wrap="square" lIns="0" tIns="0" rIns="0" bIns="0" rtlCol="0" anchor="t"/>
+          <a:lstStyle/>
+          <a:p>
+            <a:pPr algn="l" indent="0" marL="0">
+              <a:lnSpc>
+                <a:spcPct val="105000"/>
+              </a:lnSpc>
+              <a:buNone/>
+            </a:pPr>
+            <a:r>
+              <a:rPr lang="en-US" sz="1450" b="1" dirty="0">
+                <a:solidFill>
+                  <a:srgbClr val="1B2A38"/>
+                </a:solidFill>
+                <a:latin typeface="Calibri" pitchFamily="34" charset="0"/>
+                <a:ea typeface="Calibri" pitchFamily="34" charset="-122"/>
+                <a:cs typeface="Calibri" pitchFamily="34" charset="-120"/>
+              </a:rPr>
+              <a:t>The main reason to separate pre- and post-PCR work areas is to:</a:t>
+            </a:r>
+            <a:endParaRPr lang="en-US" sz="1450" dirty="0"/>
+          </a:p>
+        </p:txBody>
+      </p:sp>
+      <p:sp>
+        <p:nvSpPr>
+          <p:cNvPr id="5" name="Text 3"/>
+          <p:cNvSpPr/>
+          <p:nvPr/>
+        </p:nvSpPr>
+        <p:spPr>
+          <a:xfrm>
+            <a:off x="658368" y="2395728"/>
+            <a:ext cx="6192390" cy="3017520"/>
+          </a:xfrm>
+          <a:prstGeom prst="rect">
+            <a:avLst/>
+          </a:prstGeom>
+          <a:noFill/>
+          <a:ln/>
+        </p:spPr>
+        <p:txBody>
+          <a:bodyPr wrap="square" lIns="0" tIns="0" rIns="0" bIns="0" rtlCol="0" anchor="t"/>
+          <a:lstStyle/>
+          <a:p>
+            <a:pPr algn="l" indent="0" marL="0">
+              <a:spcAft>
+                <a:spcPts val="600"/>
+              </a:spcAft>
+              <a:buNone/>
+            </a:pPr>
+            <a:r>
+              <a:rPr lang="en-US" sz="1350" dirty="0">
+                <a:solidFill>
+                  <a:srgbClr val="33444F"/>
+                </a:solidFill>
+                <a:latin typeface="Calibri" pitchFamily="34" charset="0"/>
+                <a:ea typeface="Calibri" pitchFamily="34" charset="-122"/>
+                <a:cs typeface="Calibri" pitchFamily="34" charset="-120"/>
+              </a:rPr>
+              <a:t>A. Improve sensitivity</a:t>
+            </a:r>
+            <a:endParaRPr lang="en-US" sz="1350" dirty="0"/>
+          </a:p>
+          <a:p>
+            <a:pPr algn="l" indent="0" marL="0">
+              <a:spcAft>
+                <a:spcPts val="600"/>
+              </a:spcAft>
+              <a:buNone/>
+            </a:pPr>
+            <a:r>
+              <a:rPr lang="en-US" sz="1350" b="1" dirty="0">
+                <a:solidFill>
+                  <a:srgbClr val="005A63"/>
+                </a:solidFill>
+                <a:latin typeface="Calibri" pitchFamily="34" charset="0"/>
+                <a:ea typeface="Calibri" pitchFamily="34" charset="-122"/>
+                <a:cs typeface="Calibri" pitchFamily="34" charset="-120"/>
+              </a:rPr>
+              <a:t>B. Prevent amplicon carryover contamination</a:t>
+            </a:r>
+            <a:endParaRPr lang="en-US" sz="1350" dirty="0"/>
+          </a:p>
+          <a:p>
+            <a:pPr algn="l" indent="0" marL="0">
+              <a:spcAft>
+                <a:spcPts val="600"/>
+              </a:spcAft>
+              <a:buNone/>
+            </a:pPr>
+            <a:r>
+              <a:rPr lang="en-US" sz="1350" dirty="0">
+                <a:solidFill>
+                  <a:srgbClr val="33444F"/>
+                </a:solidFill>
+                <a:latin typeface="Calibri" pitchFamily="34" charset="0"/>
+                <a:ea typeface="Calibri" pitchFamily="34" charset="-122"/>
+                <a:cs typeface="Calibri" pitchFamily="34" charset="-120"/>
+              </a:rPr>
+              <a:t>C. Speed up cycling</a:t>
+            </a:r>
+            <a:endParaRPr lang="en-US" sz="1350" dirty="0"/>
+          </a:p>
+          <a:p>
+            <a:pPr algn="l" indent="0" marL="0">
+              <a:spcAft>
+                <a:spcPts val="600"/>
+              </a:spcAft>
+              <a:buNone/>
+            </a:pPr>
+            <a:r>
+              <a:rPr lang="en-US" sz="1350" dirty="0">
+                <a:solidFill>
+                  <a:srgbClr val="33444F"/>
+                </a:solidFill>
+                <a:latin typeface="Calibri" pitchFamily="34" charset="0"/>
+                <a:ea typeface="Calibri" pitchFamily="34" charset="-122"/>
+                <a:cs typeface="Calibri" pitchFamily="34" charset="-120"/>
+              </a:rPr>
+              <a:t>D. Reduce reagent cost</a:t>
+            </a:r>
+            <a:endParaRPr lang="en-US" sz="1350" dirty="0"/>
+          </a:p>
+          <a:p>
+            <a:pPr algn="l" indent="0" marL="0">
+              <a:spcAft>
+                <a:spcPts val="600"/>
+              </a:spcAft>
+              <a:buNone/>
+            </a:pPr>
+            <a:r>
+              <a:rPr lang="en-US" sz="1350" dirty="0">
+                <a:solidFill>
+                  <a:srgbClr val="33444F"/>
+                </a:solidFill>
+                <a:latin typeface="Calibri" pitchFamily="34" charset="0"/>
+                <a:ea typeface="Calibri" pitchFamily="34" charset="-122"/>
+                <a:cs typeface="Calibri" pitchFamily="34" charset="-120"/>
+              </a:rPr>
+              <a:t>E. Increase Ct</a:t>
+            </a:r>
+            <a:endParaRPr lang="en-US" sz="1350" dirty="0"/>
+          </a:p>
+        </p:txBody>
+      </p:sp>
+      <p:sp>
+        <p:nvSpPr>
+          <p:cNvPr id="6" name="Shape 4"/>
+          <p:cNvSpPr/>
+          <p:nvPr/>
+        </p:nvSpPr>
+        <p:spPr>
+          <a:xfrm>
+            <a:off x="7201632" y="2395728"/>
+            <a:ext cx="4423136" cy="3246120"/>
+          </a:xfrm>
+          <a:prstGeom prst="roundRect">
+            <a:avLst>
+              <a:gd name="adj" fmla="val 2535"/>
+            </a:avLst>
+          </a:prstGeom>
+          <a:solidFill>
+            <a:srgbClr val="E0F2F4"/>
+          </a:solidFill>
+          <a:ln/>
+          <a:effectLst>
+            <a:outerShdw sx="100000" sy="100000" kx="0" ky="0" algn="bl" rotWithShape="0" blurRad="88900" dist="25400" dir="5400000">
+              <a:srgbClr val="22303C">
+                <a:alpha val="12000"/>
+              </a:srgbClr>
+            </a:outerShdw>
+          </a:effectLst>
+        </p:spPr>
+      </p:sp>
+      <p:sp>
+        <p:nvSpPr>
+          <p:cNvPr id="7" name="Text 5"/>
+          <p:cNvSpPr/>
+          <p:nvPr/>
+        </p:nvSpPr>
+        <p:spPr>
+          <a:xfrm>
+            <a:off x="7439376" y="2578608"/>
+            <a:ext cx="3965936" cy="457200"/>
+          </a:xfrm>
+          <a:prstGeom prst="rect">
+            <a:avLst/>
+          </a:prstGeom>
+          <a:noFill/>
+          <a:ln/>
+        </p:spPr>
+        <p:txBody>
+          <a:bodyPr wrap="square" lIns="0" tIns="0" rIns="0" bIns="0" rtlCol="0" anchor="ctr"/>
+          <a:lstStyle/>
+          <a:p>
+            <a:pPr indent="0" marL="0">
+              <a:buNone/>
+            </a:pPr>
+            <a:r>
+              <a:rPr lang="en-US" sz="1500" b="1" dirty="0">
+                <a:solidFill>
+                  <a:srgbClr val="00838F"/>
+                </a:solidFill>
+                <a:latin typeface="Calibri" pitchFamily="34" charset="0"/>
+                <a:ea typeface="Calibri" pitchFamily="34" charset="-122"/>
+                <a:cs typeface="Calibri" pitchFamily="34" charset="-120"/>
+              </a:rPr>
+              <a:t>ANSWER  </a:t>
+            </a:r>
+            <a:pPr indent="0" marL="0">
+              <a:buNone/>
+            </a:pPr>
+            <a:r>
+              <a:rPr lang="en-US" sz="1500" b="1" dirty="0">
+                <a:solidFill>
+                  <a:srgbClr val="1B2A38"/>
+                </a:solidFill>
+                <a:latin typeface="Calibri" pitchFamily="34" charset="0"/>
+                <a:ea typeface="Calibri" pitchFamily="34" charset="-122"/>
+                <a:cs typeface="Calibri" pitchFamily="34" charset="-120"/>
+              </a:rPr>
+              <a:t>B — Prevent amplicon carryover</a:t>
+            </a:r>
+            <a:endParaRPr lang="en-US" sz="1500" dirty="0"/>
+          </a:p>
+        </p:txBody>
+      </p:sp>
+      <p:sp>
+        <p:nvSpPr>
+          <p:cNvPr id="8" name="Text 6"/>
+          <p:cNvSpPr/>
+          <p:nvPr/>
+        </p:nvSpPr>
+        <p:spPr>
+          <a:xfrm>
+            <a:off x="7439376" y="3127248"/>
+            <a:ext cx="3947648" cy="2377440"/>
+          </a:xfrm>
+          <a:prstGeom prst="rect">
+            <a:avLst/>
+          </a:prstGeom>
+          <a:noFill/>
+          <a:ln/>
+        </p:spPr>
+        <p:txBody>
+          <a:bodyPr wrap="square" lIns="0" tIns="0" rIns="0" bIns="0" rtlCol="0" anchor="t"/>
+          <a:lstStyle/>
+          <a:p>
+            <a:pPr algn="l" indent="0" marL="0">
+              <a:lnSpc>
+                <a:spcPct val="108000"/>
+              </a:lnSpc>
+              <a:buNone/>
+            </a:pPr>
+            <a:r>
+              <a:rPr lang="en-US" sz="1250" dirty="0">
+                <a:solidFill>
+                  <a:srgbClr val="33444F"/>
+                </a:solidFill>
+                <a:latin typeface="Calibri" pitchFamily="34" charset="0"/>
+                <a:ea typeface="Calibri" pitchFamily="34" charset="-122"/>
+                <a:cs typeface="Calibri" pitchFamily="34" charset="-120"/>
+              </a:rPr>
+              <a:t>Post-PCR amplicons are a major contamination source; unidirectional workflow prevents false positives.</a:t>
+            </a:r>
+            <a:endParaRPr lang="en-US" sz="1250" dirty="0"/>
+          </a:p>
+        </p:txBody>
+      </p:sp>
+      <p:sp>
+        <p:nvSpPr>
+          <p:cNvPr id="9" name="Text 7"/>
+          <p:cNvSpPr/>
+          <p:nvPr/>
+        </p:nvSpPr>
+        <p:spPr>
+          <a:xfrm>
+            <a:off x="566928" y="6473952"/>
+            <a:ext cx="7772400" cy="274320"/>
+          </a:xfrm>
+          <a:prstGeom prst="rect">
+            <a:avLst/>
+          </a:prstGeom>
+          <a:noFill/>
+          <a:ln/>
+        </p:spPr>
+        <p:txBody>
+          <a:bodyPr wrap="square" lIns="0" tIns="0" rIns="0" bIns="0" rtlCol="0" anchor="ctr"/>
+          <a:lstStyle/>
+          <a:p>
+            <a:pPr algn="l" indent="0" marL="0">
+              <a:buNone/>
+            </a:pPr>
+            <a:r>
+              <a:rPr lang="en-US" sz="850" dirty="0">
+                <a:solidFill>
+                  <a:srgbClr val="9AA8B4"/>
+                </a:solidFill>
+                <a:latin typeface="Calibri" pitchFamily="34" charset="0"/>
+                <a:ea typeface="Calibri" pitchFamily="34" charset="-122"/>
+                <a:cs typeface="Calibri" pitchFamily="34" charset="-120"/>
+              </a:rPr>
+              <a:t>Makassed General Hospital  ·  Department of Laboratory Medicine</a:t>
+            </a:r>
+            <a:endParaRPr lang="en-US" sz="850" dirty="0"/>
+          </a:p>
+        </p:txBody>
+      </p:sp>
+      <p:sp>
+        <p:nvSpPr>
+          <p:cNvPr id="10" name="Text 8"/>
+          <p:cNvSpPr/>
+          <p:nvPr/>
+        </p:nvSpPr>
+        <p:spPr>
+          <a:xfrm>
+            <a:off x="9814255" y="6473952"/>
+            <a:ext cx="1828800" cy="274320"/>
+          </a:xfrm>
+          <a:prstGeom prst="rect">
+            <a:avLst/>
+          </a:prstGeom>
+          <a:noFill/>
+          <a:ln/>
+        </p:spPr>
+        <p:txBody>
+          <a:bodyPr wrap="square" lIns="0" tIns="0" rIns="0" bIns="0" rtlCol="0" anchor="ctr"/>
+          <a:lstStyle/>
+          <a:p>
+            <a:pPr algn="r" indent="0" marL="0">
+              <a:buNone/>
+            </a:pPr>
+            <a:r>
+              <a:rPr lang="en-US" sz="850" dirty="0">
+                <a:solidFill>
+                  <a:srgbClr val="9AA8B4"/>
+                </a:solidFill>
+                <a:latin typeface="Calibri" pitchFamily="34" charset="0"/>
+                <a:ea typeface="Calibri" pitchFamily="34" charset="-122"/>
+                <a:cs typeface="Calibri" pitchFamily="34" charset="-120"/>
+              </a:rPr>
+              <a:t>CP Lecture Series</a:t>
+            </a:r>
+            <a:pPr algn="r" indent="0" marL="0">
+              <a:buNone/>
+            </a:pPr>
+            <a:r>
+              <a:rPr lang="en-US" sz="850" dirty="0">
+                <a:solidFill>
+                  <a:srgbClr val="DCE4EC"/>
+                </a:solidFill>
+                <a:latin typeface="Calibri" pitchFamily="34" charset="0"/>
+                <a:ea typeface="Calibri" pitchFamily="34" charset="-122"/>
+                <a:cs typeface="Calibri" pitchFamily="34" charset="-120"/>
+              </a:rPr>
+              <a:t>   ·   </a:t>
+            </a:r>
+            <a:pPr algn="r" indent="0" marL="0">
+              <a:buNone/>
+            </a:pPr>
+            <a:r>
+              <a:rPr lang="en-US" sz="850" b="1" dirty="0">
+                <a:solidFill>
+                  <a:srgbClr val="00838F"/>
+                </a:solidFill>
+                <a:latin typeface="Calibri" pitchFamily="34" charset="0"/>
+                <a:ea typeface="Calibri" pitchFamily="34" charset="-122"/>
+                <a:cs typeface="Calibri" pitchFamily="34" charset="-120"/>
+              </a:rPr>
+              <a:t>21</a:t>
+            </a:r>
+            <a:endParaRPr lang="en-US" sz="850" dirty="0"/>
+          </a:p>
+        </p:txBody>
+      </p:sp>
+    </p:spTree>
+  </p:cSld>
+  <p:clrMapOvr>
+    <a:masterClrMapping/>
+  </p:clrMapOvr>
+</p:sld>
+</file>
+
+<file path=ppt/slides/slide25.xml><?xml version="1.0" encoding="utf-8"?>
+<p:sld xmlns:a="http://schemas.openxmlformats.org/drawingml/2006/main" xmlns:r="http://schemas.openxmlformats.org/officeDocument/2006/relationships" xmlns:p="http://schemas.openxmlformats.org/presentationml/2006/main">
+  <p:cSld name="Slide 25">
+    <p:bg>
+      <p:bgPr>
+        <a:solidFill>
+          <a:srgbClr val="0A2A45"/>
+        </a:solidFill>
+      </p:bgPr>
+    </p:bg>
+    <p:spTree>
+      <p:nvGrpSpPr>
+        <p:cNvPr id="1" name=""/>
+        <p:cNvGrpSpPr/>
+        <p:nvPr/>
+      </p:nvGrpSpPr>
+      <p:grpSpPr>
+        <a:xfrm>
+          <a:off x="0" y="0"/>
+          <a:ext cx="0" cy="0"/>
+          <a:chOff x="0" y="0"/>
+          <a:chExt cx="0" cy="0"/>
+        </a:xfrm>
+      </p:grpSpPr>
+      <p:sp>
+        <p:nvSpPr>
+          <p:cNvPr id="2" name="Text 0"/>
+          <p:cNvSpPr/>
+          <p:nvPr/>
+        </p:nvSpPr>
+        <p:spPr>
+          <a:xfrm>
+            <a:off x="566928" y="329184"/>
+            <a:ext cx="10058400" cy="310896"/>
+          </a:xfrm>
+          <a:prstGeom prst="rect">
+            <a:avLst/>
+          </a:prstGeom>
+          <a:noFill/>
+          <a:ln/>
+        </p:spPr>
+        <p:txBody>
+          <a:bodyPr wrap="square" lIns="0" tIns="0" rIns="0" bIns="0" rtlCol="0" anchor="ctr"/>
+          <a:lstStyle/>
+          <a:p>
+            <a:pPr indent="0" marL="0">
+              <a:buNone/>
+            </a:pPr>
+            <a:r>
+              <a:rPr lang="en-US" sz="1100" b="1" spc="150" kern="0" dirty="0">
+                <a:solidFill>
+                  <a:srgbClr val="00838F"/>
+                </a:solidFill>
+                <a:latin typeface="Calibri" pitchFamily="34" charset="0"/>
+                <a:ea typeface="Calibri" pitchFamily="34" charset="-122"/>
+                <a:cs typeface="Calibri" pitchFamily="34" charset="-120"/>
+              </a:rPr>
+              <a:t>MOLECULAR &amp; CYTOGENETICS</a:t>
+            </a:r>
+            <a:endParaRPr lang="en-US" sz="1100" dirty="0"/>
+          </a:p>
+        </p:txBody>
+      </p:sp>
+      <p:sp>
+        <p:nvSpPr>
+          <p:cNvPr id="3" name="Text 1"/>
+          <p:cNvSpPr/>
+          <p:nvPr/>
+        </p:nvSpPr>
+        <p:spPr>
+          <a:xfrm>
+            <a:off x="566928" y="676656"/>
+            <a:ext cx="10972800" cy="749808"/>
+          </a:xfrm>
+          <a:prstGeom prst="rect">
+            <a:avLst/>
+          </a:prstGeom>
+          <a:noFill/>
+          <a:ln/>
+        </p:spPr>
+        <p:txBody>
+          <a:bodyPr wrap="square" lIns="0" tIns="0" rIns="0" bIns="0" rtlCol="0" anchor="ctr"/>
+          <a:lstStyle/>
+          <a:p>
+            <a:pPr indent="0" marL="0">
+              <a:buNone/>
+            </a:pPr>
+            <a:r>
+              <a:rPr lang="en-US" sz="3000" b="1" dirty="0">
+                <a:solidFill>
+                  <a:srgbClr val="FFFFFF"/>
+                </a:solidFill>
+                <a:latin typeface="Calibri" pitchFamily="34" charset="0"/>
+                <a:ea typeface="Calibri" pitchFamily="34" charset="-122"/>
+                <a:cs typeface="Calibri" pitchFamily="34" charset="-120"/>
+              </a:rPr>
+              <a:t>Key Take-Home Points</a:t>
+            </a:r>
+            <a:endParaRPr lang="en-US" sz="3000" dirty="0"/>
+          </a:p>
+        </p:txBody>
+      </p:sp>
+      <p:sp>
+        <p:nvSpPr>
+          <p:cNvPr id="4" name="Shape 2"/>
+          <p:cNvSpPr/>
+          <p:nvPr/>
+        </p:nvSpPr>
+        <p:spPr>
+          <a:xfrm>
+            <a:off x="566928" y="1517904"/>
+            <a:ext cx="11057839" cy="841248"/>
+          </a:xfrm>
+          <a:prstGeom prst="roundRect">
+            <a:avLst>
+              <a:gd name="adj" fmla="val 7609"/>
+            </a:avLst>
+          </a:prstGeom>
+          <a:solidFill>
+            <a:srgbClr val="143651"/>
+          </a:solidFill>
+          <a:ln/>
+        </p:spPr>
+      </p:sp>
+      <p:sp>
+        <p:nvSpPr>
+          <p:cNvPr id="5" name="Shape 3"/>
+          <p:cNvSpPr/>
+          <p:nvPr/>
+        </p:nvSpPr>
+        <p:spPr>
+          <a:xfrm>
+            <a:off x="749808" y="1755648"/>
+            <a:ext cx="365760" cy="365760"/>
+          </a:xfrm>
+          <a:prstGeom prst="ellipse">
+            <a:avLst/>
+          </a:prstGeom>
+          <a:solidFill>
+            <a:srgbClr val="00838F"/>
+          </a:solidFill>
+          <a:ln/>
+          <a:effectLst>
+            <a:outerShdw sx="100000" sy="100000" kx="0" ky="0" algn="bl" rotWithShape="0" blurRad="88900" dist="25400" dir="5400000">
+              <a:srgbClr val="22303C">
+                <a:alpha val="12000"/>
+              </a:srgbClr>
+            </a:outerShdw>
+          </a:effectLst>
+        </p:spPr>
+      </p:sp>
+      <p:sp>
+        <p:nvSpPr>
+          <p:cNvPr id="6" name="Text 4"/>
+          <p:cNvSpPr/>
+          <p:nvPr/>
+        </p:nvSpPr>
+        <p:spPr>
+          <a:xfrm>
+            <a:off x="749808" y="1755648"/>
+            <a:ext cx="365760" cy="365760"/>
+          </a:xfrm>
+          <a:prstGeom prst="rect">
+            <a:avLst/>
+          </a:prstGeom>
+          <a:noFill/>
+          <a:ln/>
+        </p:spPr>
+        <p:txBody>
+          <a:bodyPr wrap="square" lIns="0" tIns="0" rIns="0" bIns="0" rtlCol="0" anchor="ctr"/>
+          <a:lstStyle/>
+          <a:p>
+            <a:pPr algn="ctr" indent="0" marL="0">
+              <a:buNone/>
+            </a:pPr>
+            <a:r>
+              <a:rPr lang="en-US" sz="1500" b="1" dirty="0">
+                <a:solidFill>
+                  <a:srgbClr val="FFFFFF"/>
+                </a:solidFill>
+                <a:latin typeface="Calibri" pitchFamily="34" charset="0"/>
+                <a:ea typeface="Calibri" pitchFamily="34" charset="-122"/>
+                <a:cs typeface="Calibri" pitchFamily="34" charset="-120"/>
+              </a:rPr>
+              <a:t>1</a:t>
+            </a:r>
+            <a:endParaRPr lang="en-US" sz="1500" dirty="0"/>
+          </a:p>
+        </p:txBody>
+      </p:sp>
+      <p:sp>
+        <p:nvSpPr>
+          <p:cNvPr id="7" name="Text 5"/>
+          <p:cNvSpPr/>
+          <p:nvPr/>
+        </p:nvSpPr>
+        <p:spPr>
+          <a:xfrm>
+            <a:off x="1280160" y="1517904"/>
+            <a:ext cx="10143439" cy="841248"/>
+          </a:xfrm>
+          <a:prstGeom prst="rect">
+            <a:avLst/>
+          </a:prstGeom>
+          <a:noFill/>
+          <a:ln/>
+        </p:spPr>
+        <p:txBody>
+          <a:bodyPr wrap="square" lIns="0" tIns="0" rIns="0" bIns="0" rtlCol="0" anchor="ctr"/>
+          <a:lstStyle/>
+          <a:p>
+            <a:pPr algn="l" indent="0" marL="0">
+              <a:buNone/>
+            </a:pPr>
+            <a:r>
+              <a:rPr lang="en-US" sz="1350" dirty="0">
+                <a:solidFill>
+                  <a:srgbClr val="E7EEF4"/>
+                </a:solidFill>
+                <a:latin typeface="Calibri" pitchFamily="34" charset="0"/>
+                <a:ea typeface="Calibri" pitchFamily="34" charset="-122"/>
+                <a:cs typeface="Calibri" pitchFamily="34" charset="-120"/>
+              </a:rPr>
+              <a:t>PCR amplifies a known target exponentially — highly sensitive, so contamination control is essential.</a:t>
+            </a:r>
+            <a:endParaRPr lang="en-US" sz="1350" dirty="0"/>
+          </a:p>
+        </p:txBody>
+      </p:sp>
+      <p:sp>
+        <p:nvSpPr>
+          <p:cNvPr id="8" name="Shape 6"/>
+          <p:cNvSpPr/>
+          <p:nvPr/>
+        </p:nvSpPr>
+        <p:spPr>
+          <a:xfrm>
+            <a:off x="566928" y="2505456"/>
+            <a:ext cx="11057839" cy="841248"/>
+          </a:xfrm>
+          <a:prstGeom prst="roundRect">
+            <a:avLst>
+              <a:gd name="adj" fmla="val 7609"/>
+            </a:avLst>
+          </a:prstGeom>
+          <a:solidFill>
+            <a:srgbClr val="143651"/>
+          </a:solidFill>
+          <a:ln/>
+        </p:spPr>
+      </p:sp>
+      <p:sp>
+        <p:nvSpPr>
+          <p:cNvPr id="9" name="Shape 7"/>
+          <p:cNvSpPr/>
+          <p:nvPr/>
+        </p:nvSpPr>
+        <p:spPr>
+          <a:xfrm>
+            <a:off x="749808" y="2743200"/>
+            <a:ext cx="365760" cy="365760"/>
+          </a:xfrm>
+          <a:prstGeom prst="ellipse">
+            <a:avLst/>
+          </a:prstGeom>
+          <a:solidFill>
+            <a:srgbClr val="00838F"/>
+          </a:solidFill>
+          <a:ln/>
+          <a:effectLst>
+            <a:outerShdw sx="100000" sy="100000" kx="0" ky="0" algn="bl" rotWithShape="0" blurRad="88900" dist="25400" dir="5400000">
+              <a:srgbClr val="22303C">
+                <a:alpha val="12000"/>
+              </a:srgbClr>
+            </a:outerShdw>
+          </a:effectLst>
+        </p:spPr>
+      </p:sp>
+      <p:sp>
+        <p:nvSpPr>
+          <p:cNvPr id="10" name="Text 8"/>
+          <p:cNvSpPr/>
+          <p:nvPr/>
+        </p:nvSpPr>
+        <p:spPr>
+          <a:xfrm>
+            <a:off x="749808" y="2743200"/>
+            <a:ext cx="365760" cy="365760"/>
+          </a:xfrm>
+          <a:prstGeom prst="rect">
+            <a:avLst/>
+          </a:prstGeom>
+          <a:noFill/>
+          <a:ln/>
+        </p:spPr>
+        <p:txBody>
+          <a:bodyPr wrap="square" lIns="0" tIns="0" rIns="0" bIns="0" rtlCol="0" anchor="ctr"/>
+          <a:lstStyle/>
+          <a:p>
+            <a:pPr algn="ctr" indent="0" marL="0">
+              <a:buNone/>
+            </a:pPr>
+            <a:r>
+              <a:rPr lang="en-US" sz="1500" b="1" dirty="0">
+                <a:solidFill>
+                  <a:srgbClr val="FFFFFF"/>
+                </a:solidFill>
+                <a:latin typeface="Calibri" pitchFamily="34" charset="0"/>
+                <a:ea typeface="Calibri" pitchFamily="34" charset="-122"/>
+                <a:cs typeface="Calibri" pitchFamily="34" charset="-120"/>
+              </a:rPr>
+              <a:t>2</a:t>
+            </a:r>
+            <a:endParaRPr lang="en-US" sz="1500" dirty="0"/>
+          </a:p>
+        </p:txBody>
+      </p:sp>
+      <p:sp>
+        <p:nvSpPr>
+          <p:cNvPr id="11" name="Text 9"/>
+          <p:cNvSpPr/>
+          <p:nvPr/>
+        </p:nvSpPr>
+        <p:spPr>
+          <a:xfrm>
+            <a:off x="1280160" y="2505456"/>
+            <a:ext cx="10143439" cy="841248"/>
+          </a:xfrm>
+          <a:prstGeom prst="rect">
+            <a:avLst/>
+          </a:prstGeom>
+          <a:noFill/>
+          <a:ln/>
+        </p:spPr>
+        <p:txBody>
+          <a:bodyPr wrap="square" lIns="0" tIns="0" rIns="0" bIns="0" rtlCol="0" anchor="ctr"/>
+          <a:lstStyle/>
+          <a:p>
+            <a:pPr algn="l" indent="0" marL="0">
+              <a:buNone/>
+            </a:pPr>
+            <a:r>
+              <a:rPr lang="en-US" sz="1350" dirty="0">
+                <a:solidFill>
+                  <a:srgbClr val="E7EEF4"/>
+                </a:solidFill>
+                <a:latin typeface="Calibri" pitchFamily="34" charset="0"/>
+                <a:ea typeface="Calibri" pitchFamily="34" charset="-122"/>
+                <a:cs typeface="Calibri" pitchFamily="34" charset="-120"/>
+              </a:rPr>
+              <a:t>qPCR quantifies via Ct (lower Ct = more template); digital PCR gives absolute counts and detects rare targets.</a:t>
+            </a:r>
+            <a:endParaRPr lang="en-US" sz="1350" dirty="0"/>
+          </a:p>
+        </p:txBody>
+      </p:sp>
+      <p:sp>
+        <p:nvSpPr>
+          <p:cNvPr id="12" name="Shape 10"/>
+          <p:cNvSpPr/>
+          <p:nvPr/>
+        </p:nvSpPr>
+        <p:spPr>
+          <a:xfrm>
+            <a:off x="566928" y="3493008"/>
+            <a:ext cx="11057839" cy="841248"/>
+          </a:xfrm>
+          <a:prstGeom prst="roundRect">
+            <a:avLst>
+              <a:gd name="adj" fmla="val 7609"/>
+            </a:avLst>
+          </a:prstGeom>
+          <a:solidFill>
+            <a:srgbClr val="143651"/>
+          </a:solidFill>
+          <a:ln/>
+        </p:spPr>
+      </p:sp>
+      <p:sp>
+        <p:nvSpPr>
+          <p:cNvPr id="13" name="Shape 11"/>
+          <p:cNvSpPr/>
+          <p:nvPr/>
+        </p:nvSpPr>
+        <p:spPr>
+          <a:xfrm>
+            <a:off x="749808" y="3730752"/>
+            <a:ext cx="365760" cy="365760"/>
+          </a:xfrm>
+          <a:prstGeom prst="ellipse">
+            <a:avLst/>
+          </a:prstGeom>
+          <a:solidFill>
+            <a:srgbClr val="00838F"/>
+          </a:solidFill>
+          <a:ln/>
+          <a:effectLst>
+            <a:outerShdw sx="100000" sy="100000" kx="0" ky="0" algn="bl" rotWithShape="0" blurRad="88900" dist="25400" dir="5400000">
+              <a:srgbClr val="22303C">
+                <a:alpha val="12000"/>
+              </a:srgbClr>
+            </a:outerShdw>
+          </a:effectLst>
+        </p:spPr>
+      </p:sp>
+      <p:sp>
+        <p:nvSpPr>
+          <p:cNvPr id="14" name="Text 12"/>
+          <p:cNvSpPr/>
+          <p:nvPr/>
+        </p:nvSpPr>
+        <p:spPr>
+          <a:xfrm>
+            <a:off x="749808" y="3730752"/>
+            <a:ext cx="365760" cy="365760"/>
+          </a:xfrm>
+          <a:prstGeom prst="rect">
+            <a:avLst/>
+          </a:prstGeom>
+          <a:noFill/>
+          <a:ln/>
+        </p:spPr>
+        <p:txBody>
+          <a:bodyPr wrap="square" lIns="0" tIns="0" rIns="0" bIns="0" rtlCol="0" anchor="ctr"/>
+          <a:lstStyle/>
+          <a:p>
+            <a:pPr algn="ctr" indent="0" marL="0">
+              <a:buNone/>
+            </a:pPr>
+            <a:r>
+              <a:rPr lang="en-US" sz="1500" b="1" dirty="0">
+                <a:solidFill>
+                  <a:srgbClr val="FFFFFF"/>
+                </a:solidFill>
+                <a:latin typeface="Calibri" pitchFamily="34" charset="0"/>
+                <a:ea typeface="Calibri" pitchFamily="34" charset="-122"/>
+                <a:cs typeface="Calibri" pitchFamily="34" charset="-120"/>
+              </a:rPr>
+              <a:t>3</a:t>
+            </a:r>
+            <a:endParaRPr lang="en-US" sz="1500" dirty="0"/>
+          </a:p>
+        </p:txBody>
+      </p:sp>
+      <p:sp>
+        <p:nvSpPr>
+          <p:cNvPr id="15" name="Text 13"/>
+          <p:cNvSpPr/>
+          <p:nvPr/>
+        </p:nvSpPr>
+        <p:spPr>
+          <a:xfrm>
+            <a:off x="1280160" y="3493008"/>
+            <a:ext cx="10143439" cy="841248"/>
+          </a:xfrm>
+          <a:prstGeom prst="rect">
+            <a:avLst/>
+          </a:prstGeom>
+          <a:noFill/>
+          <a:ln/>
+        </p:spPr>
+        <p:txBody>
+          <a:bodyPr wrap="square" lIns="0" tIns="0" rIns="0" bIns="0" rtlCol="0" anchor="ctr"/>
+          <a:lstStyle/>
+          <a:p>
+            <a:pPr algn="l" indent="0" marL="0">
+              <a:buNone/>
+            </a:pPr>
+            <a:r>
+              <a:rPr lang="en-US" sz="1350" dirty="0">
+                <a:solidFill>
+                  <a:srgbClr val="E7EEF4"/>
+                </a:solidFill>
+                <a:latin typeface="Calibri" pitchFamily="34" charset="0"/>
+                <a:ea typeface="Calibri" pitchFamily="34" charset="-122"/>
+                <a:cs typeface="Calibri" pitchFamily="34" charset="-120"/>
+              </a:rPr>
+              <a:t>Sanger is the single-amplicon gold standard (~15–20% LoD); NGS reads millions of fragments and detects low allele fractions.</a:t>
+            </a:r>
+            <a:endParaRPr lang="en-US" sz="1350" dirty="0"/>
+          </a:p>
+        </p:txBody>
+      </p:sp>
+      <p:sp>
+        <p:nvSpPr>
+          <p:cNvPr id="16" name="Shape 14"/>
+          <p:cNvSpPr/>
+          <p:nvPr/>
+        </p:nvSpPr>
+        <p:spPr>
+          <a:xfrm>
+            <a:off x="566928" y="4480560"/>
+            <a:ext cx="11057839" cy="841248"/>
+          </a:xfrm>
+          <a:prstGeom prst="roundRect">
+            <a:avLst>
+              <a:gd name="adj" fmla="val 7609"/>
+            </a:avLst>
+          </a:prstGeom>
+          <a:solidFill>
+            <a:srgbClr val="143651"/>
+          </a:solidFill>
+          <a:ln/>
+        </p:spPr>
+      </p:sp>
+      <p:sp>
+        <p:nvSpPr>
+          <p:cNvPr id="17" name="Shape 15"/>
+          <p:cNvSpPr/>
+          <p:nvPr/>
+        </p:nvSpPr>
+        <p:spPr>
+          <a:xfrm>
+            <a:off x="749808" y="4718304"/>
+            <a:ext cx="365760" cy="365760"/>
+          </a:xfrm>
+          <a:prstGeom prst="ellipse">
+            <a:avLst/>
+          </a:prstGeom>
+          <a:solidFill>
+            <a:srgbClr val="00838F"/>
+          </a:solidFill>
+          <a:ln/>
+          <a:effectLst>
+            <a:outerShdw sx="100000" sy="100000" kx="0" ky="0" algn="bl" rotWithShape="0" blurRad="88900" dist="25400" dir="5400000">
+              <a:srgbClr val="22303C">
+                <a:alpha val="12000"/>
+              </a:srgbClr>
+            </a:outerShdw>
+          </a:effectLst>
+        </p:spPr>
+      </p:sp>
+      <p:sp>
+        <p:nvSpPr>
+          <p:cNvPr id="18" name="Text 16"/>
+          <p:cNvSpPr/>
+          <p:nvPr/>
+        </p:nvSpPr>
+        <p:spPr>
+          <a:xfrm>
+            <a:off x="749808" y="4718304"/>
+            <a:ext cx="365760" cy="365760"/>
+          </a:xfrm>
+          <a:prstGeom prst="rect">
+            <a:avLst/>
+          </a:prstGeom>
+          <a:noFill/>
+          <a:ln/>
+        </p:spPr>
+        <p:txBody>
+          <a:bodyPr wrap="square" lIns="0" tIns="0" rIns="0" bIns="0" rtlCol="0" anchor="ctr"/>
+          <a:lstStyle/>
+          <a:p>
+            <a:pPr algn="ctr" indent="0" marL="0">
+              <a:buNone/>
+            </a:pPr>
+            <a:r>
+              <a:rPr lang="en-US" sz="1500" b="1" dirty="0">
+                <a:solidFill>
+                  <a:srgbClr val="FFFFFF"/>
+                </a:solidFill>
+                <a:latin typeface="Calibri" pitchFamily="34" charset="0"/>
+                <a:ea typeface="Calibri" pitchFamily="34" charset="-122"/>
+                <a:cs typeface="Calibri" pitchFamily="34" charset="-120"/>
+              </a:rPr>
+              <a:t>4</a:t>
+            </a:r>
+            <a:endParaRPr lang="en-US" sz="1500" dirty="0"/>
+          </a:p>
+        </p:txBody>
+      </p:sp>
+      <p:sp>
+        <p:nvSpPr>
+          <p:cNvPr id="19" name="Text 17"/>
+          <p:cNvSpPr/>
+          <p:nvPr/>
+        </p:nvSpPr>
+        <p:spPr>
+          <a:xfrm>
+            <a:off x="1280160" y="4480560"/>
+            <a:ext cx="10143439" cy="841248"/>
+          </a:xfrm>
+          <a:prstGeom prst="rect">
+            <a:avLst/>
+          </a:prstGeom>
+          <a:noFill/>
+          <a:ln/>
+        </p:spPr>
+        <p:txBody>
+          <a:bodyPr wrap="square" lIns="0" tIns="0" rIns="0" bIns="0" rtlCol="0" anchor="ctr"/>
+          <a:lstStyle/>
+          <a:p>
+            <a:pPr algn="l" indent="0" marL="0">
+              <a:buNone/>
+            </a:pPr>
+            <a:r>
+              <a:rPr lang="en-US" sz="1350" dirty="0">
+                <a:solidFill>
+                  <a:srgbClr val="E7EEF4"/>
+                </a:solidFill>
+                <a:latin typeface="Calibri" pitchFamily="34" charset="0"/>
+                <a:ea typeface="Calibri" pitchFamily="34" charset="-122"/>
+                <a:cs typeface="Calibri" pitchFamily="34" charset="-120"/>
+              </a:rPr>
+              <a:t>FISH targets known rearrangements; microarrays give genome-wide copy number but miss balanced rearrangements.</a:t>
+            </a:r>
+            <a:endParaRPr lang="en-US" sz="1350" dirty="0"/>
+          </a:p>
+        </p:txBody>
+      </p:sp>
+      <p:sp>
+        <p:nvSpPr>
+          <p:cNvPr id="20" name="Shape 18"/>
+          <p:cNvSpPr/>
+          <p:nvPr/>
+        </p:nvSpPr>
+        <p:spPr>
+          <a:xfrm>
+            <a:off x="566928" y="5468112"/>
+            <a:ext cx="11057839" cy="841248"/>
+          </a:xfrm>
+          <a:prstGeom prst="roundRect">
+            <a:avLst>
+              <a:gd name="adj" fmla="val 7609"/>
+            </a:avLst>
+          </a:prstGeom>
+          <a:solidFill>
+            <a:srgbClr val="143651"/>
+          </a:solidFill>
+          <a:ln/>
+        </p:spPr>
+      </p:sp>
+      <p:sp>
+        <p:nvSpPr>
+          <p:cNvPr id="21" name="Shape 19"/>
+          <p:cNvSpPr/>
+          <p:nvPr/>
+        </p:nvSpPr>
+        <p:spPr>
+          <a:xfrm>
+            <a:off x="749808" y="5705856"/>
+            <a:ext cx="365760" cy="365760"/>
+          </a:xfrm>
+          <a:prstGeom prst="ellipse">
+            <a:avLst/>
+          </a:prstGeom>
+          <a:solidFill>
+            <a:srgbClr val="00838F"/>
+          </a:solidFill>
+          <a:ln/>
+          <a:effectLst>
+            <a:outerShdw sx="100000" sy="100000" kx="0" ky="0" algn="bl" rotWithShape="0" blurRad="88900" dist="25400" dir="5400000">
+              <a:srgbClr val="22303C">
+                <a:alpha val="12000"/>
+              </a:srgbClr>
+            </a:outerShdw>
+          </a:effectLst>
+        </p:spPr>
+      </p:sp>
+      <p:sp>
+        <p:nvSpPr>
+          <p:cNvPr id="22" name="Text 20"/>
+          <p:cNvSpPr/>
+          <p:nvPr/>
+        </p:nvSpPr>
+        <p:spPr>
+          <a:xfrm>
+            <a:off x="749808" y="5705856"/>
+            <a:ext cx="365760" cy="365760"/>
+          </a:xfrm>
+          <a:prstGeom prst="rect">
+            <a:avLst/>
+          </a:prstGeom>
+          <a:noFill/>
+          <a:ln/>
+        </p:spPr>
+        <p:txBody>
+          <a:bodyPr wrap="square" lIns="0" tIns="0" rIns="0" bIns="0" rtlCol="0" anchor="ctr"/>
+          <a:lstStyle/>
+          <a:p>
+            <a:pPr algn="ctr" indent="0" marL="0">
+              <a:buNone/>
+            </a:pPr>
+            <a:r>
+              <a:rPr lang="en-US" sz="1500" b="1" dirty="0">
+                <a:solidFill>
+                  <a:srgbClr val="FFFFFF"/>
+                </a:solidFill>
+                <a:latin typeface="Calibri" pitchFamily="34" charset="0"/>
+                <a:ea typeface="Calibri" pitchFamily="34" charset="-122"/>
+                <a:cs typeface="Calibri" pitchFamily="34" charset="-120"/>
+              </a:rPr>
+              <a:t>5</a:t>
+            </a:r>
+            <a:endParaRPr lang="en-US" sz="1500" dirty="0"/>
+          </a:p>
+        </p:txBody>
+      </p:sp>
+      <p:sp>
+        <p:nvSpPr>
+          <p:cNvPr id="23" name="Text 21"/>
+          <p:cNvSpPr/>
+          <p:nvPr/>
+        </p:nvSpPr>
+        <p:spPr>
+          <a:xfrm>
+            <a:off x="1280160" y="5468112"/>
+            <a:ext cx="10143439" cy="841248"/>
+          </a:xfrm>
+          <a:prstGeom prst="rect">
+            <a:avLst/>
+          </a:prstGeom>
+          <a:noFill/>
+          <a:ln/>
+        </p:spPr>
+        <p:txBody>
+          <a:bodyPr wrap="square" lIns="0" tIns="0" rIns="0" bIns="0" rtlCol="0" anchor="ctr"/>
+          <a:lstStyle/>
+          <a:p>
+            <a:pPr algn="l" indent="0" marL="0">
+              <a:buNone/>
+            </a:pPr>
+            <a:r>
+              <a:rPr lang="en-US" sz="1350" dirty="0">
+                <a:solidFill>
+                  <a:srgbClr val="E7EEF4"/>
+                </a:solidFill>
+                <a:latin typeface="Calibri" pitchFamily="34" charset="0"/>
+                <a:ea typeface="Calibri" pitchFamily="34" charset="-122"/>
+                <a:cs typeface="Calibri" pitchFamily="34" charset="-120"/>
+              </a:rPr>
+              <a:t>Always interpret controls: failed internal control = inhibition; positive no-template control = contamination.</a:t>
+            </a:r>
+            <a:endParaRPr lang="en-US" sz="1350" dirty="0"/>
+          </a:p>
+        </p:txBody>
+      </p:sp>
+      <p:sp>
+        <p:nvSpPr>
+          <p:cNvPr id="24" name="Text 22"/>
+          <p:cNvSpPr/>
+          <p:nvPr/>
+        </p:nvSpPr>
+        <p:spPr>
+          <a:xfrm>
+            <a:off x="566928" y="6473952"/>
+            <a:ext cx="8229600" cy="274320"/>
+          </a:xfrm>
+          <a:prstGeom prst="rect">
+            <a:avLst/>
+          </a:prstGeom>
+          <a:noFill/>
+          <a:ln/>
+        </p:spPr>
+        <p:txBody>
+          <a:bodyPr wrap="square" lIns="0" tIns="0" rIns="0" bIns="0" rtlCol="0" anchor="ctr"/>
+          <a:lstStyle/>
+          <a:p>
+            <a:pPr indent="0" marL="0">
+              <a:buNone/>
+            </a:pPr>
+            <a:r>
+              <a:rPr lang="en-US" sz="850" dirty="0">
+                <a:solidFill>
+                  <a:srgbClr val="5E7488"/>
+                </a:solidFill>
+                <a:latin typeface="Calibri" pitchFamily="34" charset="0"/>
+                <a:ea typeface="Calibri" pitchFamily="34" charset="-122"/>
+                <a:cs typeface="Calibri" pitchFamily="34" charset="-120"/>
+              </a:rPr>
+              <a:t>Makassed General Hospital  ·  Department of Laboratory Medicine</a:t>
+            </a:r>
+            <a:endParaRPr lang="en-US" sz="850" dirty="0"/>
+          </a:p>
+        </p:txBody>
+      </p:sp>
+      <p:sp>
+        <p:nvSpPr>
+          <p:cNvPr id="25" name="Text 23"/>
+          <p:cNvSpPr/>
+          <p:nvPr/>
+        </p:nvSpPr>
+        <p:spPr>
+          <a:xfrm>
+            <a:off x="11002975" y="6473952"/>
+            <a:ext cx="640080" cy="274320"/>
+          </a:xfrm>
+          <a:prstGeom prst="rect">
+            <a:avLst/>
+          </a:prstGeom>
+          <a:noFill/>
+          <a:ln/>
+        </p:spPr>
+        <p:txBody>
+          <a:bodyPr wrap="square" lIns="0" tIns="0" rIns="0" bIns="0" rtlCol="0" anchor="ctr"/>
+          <a:lstStyle/>
+          <a:p>
+            <a:pPr algn="r" indent="0" marL="0">
+              <a:buNone/>
+            </a:pPr>
+            <a:r>
+              <a:rPr lang="en-US" sz="850" b="1" dirty="0">
+                <a:solidFill>
+                  <a:srgbClr val="00838F"/>
+                </a:solidFill>
+                <a:latin typeface="Calibri" pitchFamily="34" charset="0"/>
+                <a:ea typeface="Calibri" pitchFamily="34" charset="-122"/>
+                <a:cs typeface="Calibri" pitchFamily="34" charset="-120"/>
+              </a:rPr>
+              <a:t>22</a:t>
+            </a:r>
+            <a:endParaRPr lang="en-US" sz="850" dirty="0"/>
+          </a:p>
+        </p:txBody>
+      </p:sp>
+    </p:spTree>
+  </p:cSld>
+  <p:clrMapOvr>
+    <a:masterClrMapping/>
+  </p:clrMapOvr>
+</p:sld>
+</file>
+
+<file path=ppt/slides/slide26.xml><?xml version="1.0" encoding="utf-8"?>
+<p:sld xmlns:a="http://schemas.openxmlformats.org/drawingml/2006/main" xmlns:r="http://schemas.openxmlformats.org/officeDocument/2006/relationships" xmlns:p="http://schemas.openxmlformats.org/presentationml/2006/main">
+  <p:cSld name="Slide 26">
+    <p:bg>
+      <p:bgPr>
+        <a:solidFill>
+          <a:srgbClr val="FFFFFF"/>
+        </a:solidFill>
+      </p:bgPr>
+    </p:bg>
+    <p:spTree>
+      <p:nvGrpSpPr>
+        <p:cNvPr id="1" name=""/>
+        <p:cNvGrpSpPr/>
+        <p:nvPr/>
+      </p:nvGrpSpPr>
+      <p:grpSpPr>
+        <a:xfrm>
+          <a:off x="0" y="0"/>
+          <a:ext cx="0" cy="0"/>
+          <a:chOff x="0" y="0"/>
+          <a:chExt cx="0" cy="0"/>
+        </a:xfrm>
+      </p:grpSpPr>
+      <p:sp>
+        <p:nvSpPr>
+          <p:cNvPr id="2" name="Text 0"/>
+          <p:cNvSpPr/>
+          <p:nvPr/>
+        </p:nvSpPr>
+        <p:spPr>
+          <a:xfrm>
+            <a:off x="566928" y="329184"/>
+            <a:ext cx="10515600" cy="310896"/>
+          </a:xfrm>
+          <a:prstGeom prst="rect">
+            <a:avLst/>
+          </a:prstGeom>
+          <a:noFill/>
+          <a:ln/>
+        </p:spPr>
+        <p:txBody>
+          <a:bodyPr wrap="square" lIns="0" tIns="0" rIns="0" bIns="0" rtlCol="0" anchor="ctr"/>
+          <a:lstStyle/>
+          <a:p>
+            <a:pPr algn="l" indent="0" marL="0">
+              <a:buNone/>
+            </a:pPr>
+            <a:r>
+              <a:rPr lang="en-US" sz="1100" b="1" spc="150" kern="0" dirty="0">
+                <a:solidFill>
+                  <a:srgbClr val="00838F"/>
+                </a:solidFill>
+                <a:latin typeface="Calibri" pitchFamily="34" charset="0"/>
+                <a:ea typeface="Calibri" pitchFamily="34" charset="-122"/>
+                <a:cs typeface="Calibri" pitchFamily="34" charset="-120"/>
+              </a:rPr>
               <a:t>MOLECULAR &amp; CYTOGENETICS   ·   REFERENCES &amp; FURTHER READING</a:t>
             </a:r>
             <a:endParaRPr lang="en-US" sz="1100" dirty="0"/>
@@ -8952,7 +11894,7 @@
                 <a:ea typeface="Calibri" pitchFamily="34" charset="-122"/>
                 <a:cs typeface="Calibri" pitchFamily="34" charset="-120"/>
               </a:rPr>
-              <a:t>1.   Buckingham L. Molecular Diagnostics: Fundamentals, Methods, and Clinical Applications, 3rd ed. F.A. Davis, 2019.</a:t>
+              <a:t>1.   Buckingham L. Molecular Diagnostics, 3rd ed. F.A. Davis.</a:t>
             </a:r>
             <a:endParaRPr lang="en-US" sz="1150" dirty="0"/>
           </a:p>
@@ -8972,7 +11914,7 @@
                 <a:ea typeface="Calibri" pitchFamily="34" charset="-122"/>
                 <a:cs typeface="Calibri" pitchFamily="34" charset="-120"/>
               </a:rPr>
-              <a:t>2.   Coleman WB, Tsongalis GJ. Molecular Pathology, 2nd ed. Academic Press.</a:t>
+              <a:t>2.   Coleman WB, Tsongalis GJ. Molecular Diagnostics for the Clinical Laboratorian.</a:t>
             </a:r>
             <a:endParaRPr lang="en-US" sz="1150" dirty="0"/>
           </a:p>
@@ -8992,7 +11934,7 @@
                 <a:ea typeface="Calibri" pitchFamily="34" charset="-122"/>
                 <a:cs typeface="Calibri" pitchFamily="34" charset="-120"/>
               </a:rPr>
-              <a:t>3.   Gulley ML, et al. Clinical laboratory reports in molecular pathology. Arch Pathol Lab Med.</a:t>
+              <a:t>3.   CLSI MM01/MM09 (molecular methods).</a:t>
             </a:r>
             <a:endParaRPr lang="en-US" sz="1150" dirty="0"/>
           </a:p>
@@ -9012,7 +11954,7 @@
                 <a:ea typeface="Calibri" pitchFamily="34" charset="-122"/>
                 <a:cs typeface="Calibri" pitchFamily="34" charset="-120"/>
               </a:rPr>
-              <a:t>4.   CAP/AMP molecular methods guidance.</a:t>
+              <a:t>4.   Leonard DGB. Molecular Pathology in Clinical Practice, 2nd ed.</a:t>
             </a:r>
             <a:endParaRPr lang="en-US" sz="1150" dirty="0"/>
           </a:p>
@@ -9118,7 +12060,7 @@
                 <a:ea typeface="Calibri" pitchFamily="34" charset="-122"/>
                 <a:cs typeface="Calibri" pitchFamily="34" charset="-120"/>
               </a:rPr>
-              <a:t>18</a:t>
+              <a:t>23</a:t>
             </a:r>
             <a:endParaRPr lang="en-US" sz="850" dirty="0"/>
           </a:p>
@@ -9362,7 +12304,7 @@
                 <a:ea typeface="Calibri" pitchFamily="34" charset="-122"/>
                 <a:cs typeface="Calibri" pitchFamily="34" charset="-120"/>
               </a:rPr>
-              <a:t>Describe PCR, RT-PCR, FISH, karyotype, and NGS at a working level.</a:t>
+              <a:t>Explain conventional PCR and its components.</a:t>
             </a:r>
             <a:endParaRPr lang="en-US" sz="1350" dirty="0"/>
           </a:p>
@@ -9496,7 +12438,7 @@
                 <a:ea typeface="Calibri" pitchFamily="34" charset="-122"/>
                 <a:cs typeface="Calibri" pitchFamily="34" charset="-120"/>
               </a:rPr>
-              <a:t>Select the right platform for a given clinical question.</a:t>
+              <a:t>Describe real-time (quantitative) and digital PCR.</a:t>
             </a:r>
             <a:endParaRPr lang="en-US" sz="1350" dirty="0"/>
           </a:p>
@@ -9630,7 +12572,7 @@
                 <a:ea typeface="Calibri" pitchFamily="34" charset="-122"/>
                 <a:cs typeface="Calibri" pitchFamily="34" charset="-120"/>
               </a:rPr>
-              <a:t>Compare turnaround, sensitivity, and breadth across methods.</a:t>
+              <a:t>Contrast Sanger and next-generation sequencing.</a:t>
             </a:r>
             <a:endParaRPr lang="en-US" sz="1350" dirty="0"/>
           </a:p>
@@ -9764,7 +12706,7 @@
                 <a:ea typeface="Calibri" pitchFamily="34" charset="-122"/>
                 <a:cs typeface="Calibri" pitchFamily="34" charset="-120"/>
               </a:rPr>
-              <a:t>Recognize the limitations of each technique.</a:t>
+              <a:t>Describe hybridization methods (FISH, arrays) at a high level.</a:t>
             </a:r>
             <a:endParaRPr lang="en-US" sz="1350" dirty="0"/>
           </a:p>
@@ -9898,7 +12840,7 @@
                 <a:ea typeface="Calibri" pitchFamily="34" charset="-122"/>
                 <a:cs typeface="Calibri" pitchFamily="34" charset="-120"/>
               </a:rPr>
-              <a:t>Interpret basic molecular nomenclature.</a:t>
+              <a:t>Recognize contamination and pre-analytic pitfalls in molecular testing.</a:t>
             </a:r>
             <a:endParaRPr lang="en-US" sz="1350" dirty="0"/>
           </a:p>
@@ -10032,7 +12974,7 @@
                 <a:ea typeface="Calibri" pitchFamily="34" charset="-122"/>
                 <a:cs typeface="Calibri" pitchFamily="34" charset="-120"/>
               </a:rPr>
-              <a:t>Distinguish DNA- from RNA-based approaches.</a:t>
+              <a:t>Select the appropriate method for a clinical question.</a:t>
             </a:r>
             <a:endParaRPr lang="en-US" sz="1350" dirty="0"/>
           </a:p>
@@ -10382,7 +13324,7 @@
                 <a:ea typeface="Calibri" pitchFamily="34" charset="-122"/>
                 <a:cs typeface="Calibri" pitchFamily="34" charset="-120"/>
               </a:rPr>
-              <a:t>Amplification methods</a:t>
+              <a:t>PCR fundamentals</a:t>
             </a:r>
             <a:pPr algn="l" indent="0" marL="0">
               <a:buNone/>
@@ -10396,7 +13338,7 @@
                 <a:ea typeface="Calibri" pitchFamily="34" charset="-122"/>
                 <a:cs typeface="Calibri" pitchFamily="34" charset="-120"/>
               </a:rPr>
-              <a:t>   —  PCR and real-time / RT-PCR</a:t>
+              <a:t>   —  amplification and components</a:t>
             </a:r>
             <a:endParaRPr lang="en-US" sz="1400" dirty="0"/>
           </a:p>
@@ -10523,7 +13465,7 @@
                 <a:ea typeface="Calibri" pitchFamily="34" charset="-122"/>
                 <a:cs typeface="Calibri" pitchFamily="34" charset="-120"/>
               </a:rPr>
-              <a:t>Cytogenetic methods</a:t>
+              <a:t>Real-time &amp; digital PCR</a:t>
             </a:r>
             <a:pPr algn="l" indent="0" marL="0">
               <a:buNone/>
@@ -10537,7 +13479,7 @@
                 <a:ea typeface="Calibri" pitchFamily="34" charset="-122"/>
                 <a:cs typeface="Calibri" pitchFamily="34" charset="-120"/>
               </a:rPr>
-              <a:t>   —  karyotype and FISH</a:t>
+              <a:t>   —  quantitation</a:t>
             </a:r>
             <a:endParaRPr lang="en-US" sz="1400" dirty="0"/>
           </a:p>
@@ -10685,7 +13627,7 @@
                 <a:ea typeface="Calibri" pitchFamily="34" charset="-122"/>
                 <a:cs typeface="Calibri" pitchFamily="34" charset="-120"/>
               </a:rPr>
-              <a:t>   —  Sanger and NGS</a:t>
+              <a:t>   —  Sanger vs NGS</a:t>
             </a:r>
             <a:endParaRPr lang="en-US" sz="1400" dirty="0"/>
           </a:p>
@@ -10812,7 +13754,7 @@
                 <a:ea typeface="Calibri" pitchFamily="34" charset="-122"/>
                 <a:cs typeface="Calibri" pitchFamily="34" charset="-120"/>
               </a:rPr>
-              <a:t>Choosing the platform</a:t>
+              <a:t>Hybridization</a:t>
             </a:r>
             <a:pPr algn="l" indent="0" marL="0">
               <a:buNone/>
@@ -10826,7 +13768,7 @@
                 <a:ea typeface="Calibri" pitchFamily="34" charset="-122"/>
                 <a:cs typeface="Calibri" pitchFamily="34" charset="-120"/>
               </a:rPr>
-              <a:t>   —  by clinical question</a:t>
+              <a:t>   —  FISH, arrays</a:t>
             </a:r>
             <a:endParaRPr lang="en-US" sz="1400" dirty="0"/>
           </a:p>
@@ -10960,7 +13902,7 @@
                 <a:ea typeface="Calibri" pitchFamily="34" charset="-122"/>
                 <a:cs typeface="Calibri" pitchFamily="34" charset="-120"/>
               </a:rPr>
-              <a:t>Cases &amp; board</a:t>
+              <a:t>Cases &amp; board review</a:t>
             </a:r>
             <a:endParaRPr lang="en-US" sz="1400" dirty="0"/>
           </a:p>
@@ -11259,7 +14201,7 @@
                 <a:ea typeface="Calibri" pitchFamily="34" charset="-122"/>
                 <a:cs typeface="Calibri" pitchFamily="34" charset="-120"/>
               </a:rPr>
-              <a:t>Amplification &amp; Cytogenetic Methods</a:t>
+              <a:t>PCR &amp; Quantitation</a:t>
             </a:r>
             <a:endParaRPr lang="en-US" sz="3800" dirty="0"/>
           </a:p>
@@ -11369,7 +14311,7 @@
                 <a:ea typeface="Calibri" pitchFamily="34" charset="-122"/>
                 <a:cs typeface="Calibri" pitchFamily="34" charset="-120"/>
               </a:rPr>
-              <a:t>PCR: The Amplification Workhorse</a:t>
+              <a:t>The Polymerase Chain Reaction</a:t>
             </a:r>
             <a:endParaRPr lang="en-US" sz="3000" dirty="0"/>
           </a:p>
@@ -11384,11 +14326,11 @@
         <p:spPr>
           <a:xfrm>
             <a:off x="1066648" y="1481328"/>
-            <a:ext cx="10058400" cy="4023360"/>
+            <a:ext cx="10058400" cy="4187952"/>
           </a:xfrm>
           <a:prstGeom prst="roundRect">
             <a:avLst>
-              <a:gd name="adj" fmla="val 2045"/>
+              <a:gd name="adj" fmla="val 1965"/>
             </a:avLst>
           </a:prstGeom>
           <a:solidFill>
@@ -11426,7 +14368,7 @@
         <p:spPr>
           <a:xfrm>
             <a:off x="1194664" y="1609344"/>
-            <a:ext cx="9802368" cy="3767328"/>
+            <a:ext cx="9802368" cy="3931920"/>
           </a:xfrm>
           <a:prstGeom prst="rect">
             <a:avLst/>
@@ -11441,7 +14383,7 @@
         </p:nvSpPr>
         <p:spPr>
           <a:xfrm>
-            <a:off x="566928" y="5577840"/>
+            <a:off x="566928" y="5742432"/>
             <a:ext cx="11057839" cy="365760"/>
           </a:xfrm>
           <a:prstGeom prst="rect">
@@ -11466,7 +14408,7 @@
                 <a:ea typeface="Calibri" pitchFamily="34" charset="-122"/>
                 <a:cs typeface="Calibri" pitchFamily="34" charset="-120"/>
               </a:rPr>
-              <a:t>Original schematic. Cyclic denature-anneal-extend doubles the target each cycle; real-time PCR quantifies amplification.</a:t>
+              <a:t>Original schematic. Denature–anneal–extend cycling amplifies a defined target exponentially.</a:t>
             </a:r>
             <a:endParaRPr lang="en-US" sz="1150" dirty="0"/>
           </a:p>
@@ -11643,7 +14585,7 @@
                 <a:ea typeface="Calibri" pitchFamily="34" charset="-122"/>
                 <a:cs typeface="Calibri" pitchFamily="34" charset="-120"/>
               </a:rPr>
-              <a:t>MOLECULAR &amp; CYTOGENETICS   ·   AMPLIFICATION</a:t>
+              <a:t>MOLECULAR &amp; CYTOGENETICS   ·   PCR</a:t>
             </a:r>
             <a:endParaRPr lang="en-US" sz="1100" dirty="0"/>
           </a:p>
@@ -11682,7 +14624,7 @@
                 <a:ea typeface="Calibri" pitchFamily="34" charset="-122"/>
                 <a:cs typeface="Calibri" pitchFamily="34" charset="-120"/>
               </a:rPr>
-              <a:t>PCR Variants and Their Uses</a:t>
+              <a:t>Components &amp; Cycling</a:t>
             </a:r>
             <a:endParaRPr lang="en-US" sz="3000" dirty="0"/>
           </a:p>
@@ -11750,7 +14692,7 @@
                 <a:ea typeface="Calibri" pitchFamily="34" charset="-122"/>
                 <a:cs typeface="Calibri" pitchFamily="34" charset="-120"/>
               </a:rPr>
-              <a:t>CORE PCR METHODS</a:t>
+              <a:t>WHAT PCR NEEDS</a:t>
             </a:r>
             <a:endParaRPr lang="en-US" sz="1200" dirty="0"/>
           </a:p>
@@ -11793,7 +14735,7 @@
                 <a:ea typeface="Calibri" pitchFamily="34" charset="-122"/>
                 <a:cs typeface="Calibri" pitchFamily="34" charset="-120"/>
               </a:rPr>
-              <a:t>Conventional PCR amplifies a known target for detection.</a:t>
+              <a:t>Template, primers, dNTPs, thermostable polymerase, and buffer with magnesium.</a:t>
             </a:r>
             <a:endParaRPr lang="en-US" sz="1250" dirty="0"/>
           </a:p>
@@ -11814,7 +14756,7 @@
                 <a:ea typeface="Calibri" pitchFamily="34" charset="-122"/>
                 <a:cs typeface="Calibri" pitchFamily="34" charset="-120"/>
               </a:rPr>
-              <a:t>Real-time (quantitative) PCR measures product as it forms — used for viral loads and BCR-ABL1 monitoring.</a:t>
+              <a:t>Three steps per cycle: denaturation, annealing, extension.</a:t>
             </a:r>
             <a:endParaRPr lang="en-US" sz="1250" dirty="0"/>
           </a:p>
@@ -11835,7 +14777,7 @@
                 <a:ea typeface="Calibri" pitchFamily="34" charset="-122"/>
                 <a:cs typeface="Calibri" pitchFamily="34" charset="-120"/>
               </a:rPr>
-              <a:t>RT-PCR converts RNA to cDNA first — essential for fusion transcripts and RNA viruses.</a:t>
+              <a:t>Primer design and specificity determine performance.</a:t>
             </a:r>
             <a:endParaRPr lang="en-US" sz="1250" dirty="0"/>
           </a:p>
@@ -11856,7 +14798,7 @@
                 <a:ea typeface="Calibri" pitchFamily="34" charset="-122"/>
                 <a:cs typeface="Calibri" pitchFamily="34" charset="-120"/>
               </a:rPr>
-              <a:t>Digital PCR partitions the sample for absolute quantitation and rare-variant detection.</a:t>
+              <a:t>Reverse transcription (RT-PCR) converts RNA to cDNA first.</a:t>
             </a:r>
             <a:endParaRPr lang="en-US" sz="1250" dirty="0"/>
           </a:p>
@@ -11879,7 +14821,7 @@
             </a:avLst>
           </a:prstGeom>
           <a:solidFill>
-            <a:srgbClr val="E0F2F4"/>
+            <a:srgbClr val="DDF0EF"/>
           </a:solidFill>
           <a:ln/>
           <a:effectLst>
@@ -11967,7 +14909,7 @@
                 <a:ea typeface="Calibri" pitchFamily="34" charset="-122"/>
                 <a:cs typeface="Calibri" pitchFamily="34" charset="-120"/>
               </a:rPr>
-              <a:t>High analytic sensitivity and speed; targeted (you must know what you’re looking for).</a:t>
+              <a:t>Exquisitely sensitive — which makes contamination control critical.</a:t>
             </a:r>
             <a:endParaRPr lang="en-US" sz="1250" dirty="0"/>
           </a:p>
@@ -11988,7 +14930,7 @@
                 <a:ea typeface="Calibri" pitchFamily="34" charset="-122"/>
                 <a:cs typeface="Calibri" pitchFamily="34" charset="-120"/>
               </a:rPr>
-              <a:t>Contamination/carryover is the key risk — strict workflow separation.</a:t>
+              <a:t>Detects known targets, not unknown sequences.</a:t>
             </a:r>
             <a:endParaRPr lang="en-US" sz="1250" dirty="0"/>
           </a:p>
@@ -12009,7 +14951,7 @@
                 <a:ea typeface="Calibri" pitchFamily="34" charset="-122"/>
                 <a:cs typeface="Calibri" pitchFamily="34" charset="-120"/>
               </a:rPr>
-              <a:t>Primer design and sequence variation can cause failures.</a:t>
+              <a:t>Inhibitors (heparin, hemoglobin) can cause false negatives.</a:t>
             </a:r>
             <a:endParaRPr lang="en-US" sz="1250" dirty="0"/>
           </a:p>
@@ -12030,7 +14972,7 @@
                 <a:ea typeface="Calibri" pitchFamily="34" charset="-122"/>
                 <a:cs typeface="Calibri" pitchFamily="34" charset="-120"/>
               </a:rPr>
-              <a:t>Narrow scope: one or a few targets per reaction.</a:t>
+              <a:t>Use controls to detect inhibition and contamination.</a:t>
             </a:r>
             <a:endParaRPr lang="en-US" sz="1250" dirty="0"/>
           </a:p>
@@ -12207,7 +15149,7 @@
                 <a:ea typeface="Calibri" pitchFamily="34" charset="-122"/>
                 <a:cs typeface="Calibri" pitchFamily="34" charset="-120"/>
               </a:rPr>
-              <a:t>MOLECULAR &amp; CYTOGENETICS   ·   CYTOGENETICS</a:t>
+              <a:t>MOLECULAR &amp; CYTOGENETICS   ·   QUANTITATION</a:t>
             </a:r>
             <a:endParaRPr lang="en-US" sz="1100" dirty="0"/>
           </a:p>
@@ -12246,7 +15188,7 @@
                 <a:ea typeface="Calibri" pitchFamily="34" charset="-122"/>
                 <a:cs typeface="Calibri" pitchFamily="34" charset="-120"/>
               </a:rPr>
-              <a:t>Karyotype and FISH</a:t>
+              <a:t>Real-Time and Digital PCR</a:t>
             </a:r>
             <a:endParaRPr lang="en-US" sz="3000" dirty="0"/>
           </a:p>
@@ -12314,7 +15256,7 @@
                 <a:ea typeface="Calibri" pitchFamily="34" charset="-122"/>
                 <a:cs typeface="Calibri" pitchFamily="34" charset="-120"/>
               </a:rPr>
-              <a:t>KARYOTYPE</a:t>
+              <a:t>REAL-TIME (QPCR)</a:t>
             </a:r>
             <a:endParaRPr lang="en-US" sz="1200" dirty="0"/>
           </a:p>
@@ -12357,7 +15299,7 @@
                 <a:ea typeface="Calibri" pitchFamily="34" charset="-122"/>
                 <a:cs typeface="Calibri" pitchFamily="34" charset="-120"/>
               </a:rPr>
-              <a:t>Whole-genome view of chromosomes from dividing cells — detects balanced and unbalanced rearrangements, aneuploidy.</a:t>
+              <a:t>Fluorescence is measured each cycle; the cycle threshold (Ct) reflects starting target amount.</a:t>
             </a:r>
             <a:endParaRPr lang="en-US" sz="1250" dirty="0"/>
           </a:p>
@@ -12378,7 +15320,7 @@
                 <a:ea typeface="Calibri" pitchFamily="34" charset="-122"/>
                 <a:cs typeface="Calibri" pitchFamily="34" charset="-120"/>
               </a:rPr>
-              <a:t>Requires viable, dividing cells and is labor-intensive (days).</a:t>
+              <a:t>Lower Ct → more starting template.</a:t>
             </a:r>
             <a:endParaRPr lang="en-US" sz="1250" dirty="0"/>
           </a:p>
@@ -12399,7 +15341,7 @@
                 <a:ea typeface="Calibri" pitchFamily="34" charset="-122"/>
                 <a:cs typeface="Calibri" pitchFamily="34" charset="-120"/>
               </a:rPr>
-              <a:t>Limited resolution (large changes only).</a:t>
+              <a:t>Enables relative or absolute quantitation against standards.</a:t>
             </a:r>
             <a:endParaRPr lang="en-US" sz="1250" dirty="0"/>
           </a:p>
@@ -12420,7 +15362,7 @@
                 <a:ea typeface="Calibri" pitchFamily="34" charset="-122"/>
                 <a:cs typeface="Calibri" pitchFamily="34" charset="-120"/>
               </a:rPr>
-              <a:t>Still essential for a genome-wide structural overview in hematologic malignancy.</a:t>
+              <a:t>Melt-curve analysis checks amplicon specificity.</a:t>
             </a:r>
             <a:endParaRPr lang="en-US" sz="1250" dirty="0"/>
           </a:p>
@@ -12443,7 +15385,7 @@
             </a:avLst>
           </a:prstGeom>
           <a:solidFill>
-            <a:srgbClr val="E0F2F4"/>
+            <a:srgbClr val="DDF0EF"/>
           </a:solidFill>
           <a:ln/>
           <a:effectLst>
@@ -12488,7 +15430,7 @@
                 <a:ea typeface="Calibri" pitchFamily="34" charset="-122"/>
                 <a:cs typeface="Calibri" pitchFamily="34" charset="-120"/>
               </a:rPr>
-              <a:t>FISH</a:t>
+              <a:t>DIGITAL PCR</a:t>
             </a:r>
             <a:endParaRPr lang="en-US" sz="1200" dirty="0"/>
           </a:p>
@@ -12531,7 +15473,7 @@
                 <a:ea typeface="Calibri" pitchFamily="34" charset="-122"/>
                 <a:cs typeface="Calibri" pitchFamily="34" charset="-120"/>
               </a:rPr>
-              <a:t>Fluorescent probes detect specific sequences/rearrangements — on dividing OR non-dividing cells.</a:t>
+              <a:t>Partitions the sample into thousands of reactions for absolute quantitation without a standard curve.</a:t>
             </a:r>
             <a:endParaRPr lang="en-US" sz="1250" dirty="0"/>
           </a:p>
@@ -12552,7 +15494,7 @@
                 <a:ea typeface="Calibri" pitchFamily="34" charset="-122"/>
                 <a:cs typeface="Calibri" pitchFamily="34" charset="-120"/>
               </a:rPr>
-              <a:t>Faster and more sensitive than karyotype for known targets (e.g., t(9;22), HER2).</a:t>
+              <a:t>Excellent for low-level targets and small fold-changes.</a:t>
             </a:r>
             <a:endParaRPr lang="en-US" sz="1250" dirty="0"/>
           </a:p>
@@ -12573,7 +15515,7 @@
                 <a:ea typeface="Calibri" pitchFamily="34" charset="-122"/>
                 <a:cs typeface="Calibri" pitchFamily="34" charset="-120"/>
               </a:rPr>
-              <a:t>Targeted: only detects what the probe is designed for.</a:t>
+              <a:t>Useful for minimal residual disease and rare variants.</a:t>
             </a:r>
             <a:endParaRPr lang="en-US" sz="1250" dirty="0"/>
           </a:p>
@@ -12594,7 +15536,7 @@
                 <a:ea typeface="Calibri" pitchFamily="34" charset="-122"/>
                 <a:cs typeface="Calibri" pitchFamily="34" charset="-120"/>
               </a:rPr>
-              <a:t>Interphase FISH works on archived/fixed material.</a:t>
+              <a:t>More tolerant of some inhibitors.</a:t>
             </a:r>
             <a:endParaRPr lang="en-US" sz="1250" dirty="0"/>
           </a:p>
@@ -12893,7 +15835,7 @@
                 <a:ea typeface="Calibri" pitchFamily="34" charset="-122"/>
                 <a:cs typeface="Calibri" pitchFamily="34" charset="-120"/>
               </a:rPr>
-              <a:t>Sequencing &amp; Platform Choice</a:t>
+              <a:t>Sequencing &amp; Hybridization</a:t>
             </a:r>
             <a:endParaRPr lang="en-US" sz="3800" dirty="0"/>
           </a:p>

--- a/decks/Molecular_01_Molecular-Methods-for-Residents.pptx
+++ b/decks/Molecular_01_Molecular-Methods-for-Residents.pptx
@@ -26,9 +26,13 @@
     <p:sldId id="274" r:id="rId20"/>
     <p:sldId id="275" r:id="rId21"/>
     <p:sldId id="276" r:id="rId22"/>
+    <p:sldId id="285" r:id="rId36"/>
     <p:sldId id="277" r:id="rId23"/>
+    <p:sldId id="284" r:id="rId35"/>
     <p:sldId id="278" r:id="rId24"/>
+    <p:sldId id="283" r:id="rId34"/>
     <p:sldId id="279" r:id="rId25"/>
+    <p:sldId id="282" r:id="rId33"/>
     <p:sldId id="280" r:id="rId26"/>
     <p:sldId id="281" r:id="rId27"/>
   </p:sldIdLst>
@@ -3121,6 +3125,10 @@
           </a:solidFill>
           <a:ln/>
         </p:spPr>
+        <p:txBody>
+          <a:bodyPr/>
+          <a:p/>
+        </p:txBody>
       </p:sp>
       <p:sp>
         <p:nvSpPr>
@@ -3143,6 +3151,10 @@
           </a:solidFill>
           <a:ln/>
         </p:spPr>
+        <p:txBody>
+          <a:bodyPr/>
+          <a:p/>
+        </p:txBody>
       </p:sp>
       <p:sp>
         <p:nvSpPr>
@@ -3165,6 +3177,10 @@
           </a:solidFill>
           <a:ln/>
         </p:spPr>
+        <p:txBody>
+          <a:bodyPr/>
+          <a:p/>
+        </p:txBody>
       </p:sp>
       <p:sp>
         <p:nvSpPr>
@@ -3187,6 +3203,10 @@
           </a:solidFill>
           <a:ln/>
         </p:spPr>
+        <p:txBody>
+          <a:bodyPr/>
+          <a:p/>
+        </p:txBody>
       </p:sp>
       <p:sp>
         <p:nvSpPr>
@@ -3608,6 +3628,10 @@
             </a:outerShdw>
           </a:effectLst>
         </p:spPr>
+        <p:txBody>
+          <a:bodyPr/>
+          <a:p/>
+        </p:txBody>
       </p:sp>
       <p:pic>
         <p:nvPicPr>
@@ -3916,6 +3940,10 @@
             </a:outerShdw>
           </a:effectLst>
         </p:spPr>
+        <p:txBody>
+          <a:bodyPr/>
+          <a:p/>
+        </p:txBody>
       </p:sp>
       <p:sp>
         <p:nvSpPr>
@@ -4090,6 +4118,10 @@
             </a:outerShdw>
           </a:effectLst>
         </p:spPr>
+        <p:txBody>
+          <a:bodyPr/>
+          <a:p/>
+        </p:txBody>
       </p:sp>
       <p:sp>
         <p:nvSpPr>
@@ -4480,6 +4512,10 @@
             </a:outerShdw>
           </a:effectLst>
         </p:spPr>
+        <p:txBody>
+          <a:bodyPr/>
+          <a:p/>
+        </p:txBody>
       </p:sp>
       <p:sp>
         <p:nvSpPr>
@@ -4654,6 +4690,10 @@
             </a:outerShdw>
           </a:effectLst>
         </p:spPr>
+        <p:txBody>
+          <a:bodyPr/>
+          <a:p/>
+        </p:txBody>
       </p:sp>
       <p:sp>
         <p:nvSpPr>
@@ -4959,6 +4999,10 @@
           </a:solidFill>
           <a:ln/>
         </p:spPr>
+        <p:txBody>
+          <a:bodyPr/>
+          <a:p/>
+        </p:txBody>
       </p:sp>
       <p:sp>
         <p:nvSpPr>
@@ -4981,6 +5025,10 @@
           </a:solidFill>
           <a:ln/>
         </p:spPr>
+        <p:txBody>
+          <a:bodyPr/>
+          <a:p/>
+        </p:txBody>
       </p:sp>
       <p:sp>
         <p:nvSpPr>
@@ -5237,6 +5285,10 @@
             </a:outerShdw>
           </a:effectLst>
         </p:spPr>
+        <p:txBody>
+          <a:bodyPr/>
+          <a:p/>
+        </p:txBody>
       </p:sp>
       <p:sp>
         <p:nvSpPr>
@@ -5411,6 +5463,10 @@
             </a:outerShdw>
           </a:effectLst>
         </p:spPr>
+        <p:txBody>
+          <a:bodyPr/>
+          <a:p/>
+        </p:txBody>
       </p:sp>
       <p:sp>
         <p:nvSpPr>
@@ -5801,6 +5857,10 @@
             </a:outerShdw>
           </a:effectLst>
         </p:spPr>
+        <p:txBody>
+          <a:bodyPr/>
+          <a:p/>
+        </p:txBody>
       </p:sp>
       <p:sp>
         <p:nvSpPr>
@@ -5911,6 +5971,10 @@
             </a:outerShdw>
           </a:effectLst>
         </p:spPr>
+        <p:txBody>
+          <a:bodyPr/>
+          <a:p/>
+        </p:txBody>
       </p:sp>
       <p:sp>
         <p:nvSpPr>
@@ -6340,6 +6404,10 @@
             </a:outerShdw>
           </a:effectLst>
         </p:spPr>
+        <p:txBody>
+          <a:bodyPr/>
+          <a:p/>
+        </p:txBody>
       </p:sp>
       <p:sp>
         <p:nvSpPr>
@@ -6666,6 +6734,10 @@
             </a:outerShdw>
           </a:effectLst>
         </p:spPr>
+        <p:txBody>
+          <a:bodyPr/>
+          <a:p/>
+        </p:txBody>
       </p:sp>
       <p:sp>
         <p:nvSpPr>
@@ -6776,6 +6848,10 @@
             </a:outerShdw>
           </a:effectLst>
         </p:spPr>
+        <p:txBody>
+          <a:bodyPr/>
+          <a:p/>
+        </p:txBody>
       </p:sp>
       <p:sp>
         <p:nvSpPr>
@@ -7205,6 +7281,10 @@
             </a:outerShdw>
           </a:effectLst>
         </p:spPr>
+        <p:txBody>
+          <a:bodyPr/>
+          <a:p/>
+        </p:txBody>
       </p:sp>
       <p:sp>
         <p:nvSpPr>
@@ -7531,6 +7611,10 @@
             </a:outerShdw>
           </a:effectLst>
         </p:spPr>
+        <p:txBody>
+          <a:bodyPr/>
+          <a:p/>
+        </p:txBody>
       </p:sp>
       <p:sp>
         <p:nvSpPr>
@@ -7641,6 +7725,10 @@
             </a:outerShdw>
           </a:effectLst>
         </p:spPr>
+        <p:txBody>
+          <a:bodyPr/>
+          <a:p/>
+        </p:txBody>
       </p:sp>
       <p:sp>
         <p:nvSpPr>
@@ -7964,6 +8052,10 @@
             </a:outerShdw>
           </a:effectLst>
         </p:spPr>
+        <p:txBody>
+          <a:bodyPr/>
+          <a:p/>
+        </p:txBody>
       </p:sp>
       <p:sp>
         <p:nvSpPr>
@@ -8071,6 +8163,10 @@
             </a:outerShdw>
           </a:effectLst>
         </p:spPr>
+        <p:txBody>
+          <a:bodyPr/>
+          <a:p/>
+        </p:txBody>
       </p:sp>
       <p:sp>
         <p:nvSpPr>
@@ -8178,6 +8274,10 @@
             </a:outerShdw>
           </a:effectLst>
         </p:spPr>
+        <p:txBody>
+          <a:bodyPr/>
+          <a:p/>
+        </p:txBody>
       </p:sp>
       <p:sp>
         <p:nvSpPr>
@@ -8285,6 +8385,10 @@
             </a:outerShdw>
           </a:effectLst>
         </p:spPr>
+        <p:txBody>
+          <a:bodyPr/>
+          <a:p/>
+        </p:txBody>
       </p:sp>
       <p:sp>
         <p:nvSpPr>
@@ -8721,6 +8825,10 @@
             </a:outerShdw>
           </a:effectLst>
         </p:spPr>
+        <p:txBody>
+          <a:bodyPr/>
+          <a:p/>
+        </p:txBody>
       </p:sp>
       <p:sp>
         <p:nvSpPr>
@@ -9109,9 +9217,9 @@
               <a:buNone/>
             </a:pPr>
             <a:r>
-              <a:rPr lang="en-US" sz="1350" b="1" dirty="0">
-                <a:solidFill>
-                  <a:srgbClr val="005A63"/>
+              <a:rPr lang="en-US" sz="1350" b="0" dirty="0">
+                <a:solidFill>
+                  <a:srgbClr val="33444F"/>
                 </a:solidFill>
                 <a:latin typeface="Calibri" pitchFamily="34" charset="0"/>
                 <a:ea typeface="Calibri" pitchFamily="34" charset="-122"/>
@@ -9180,130 +9288,6 @@
               <a:t>E. A failed run</a:t>
             </a:r>
             <a:endParaRPr lang="en-US" sz="1350" dirty="0"/>
-          </a:p>
-        </p:txBody>
-      </p:sp>
-      <p:sp>
-        <p:nvSpPr>
-          <p:cNvPr id="6" name="Shape 4"/>
-          <p:cNvSpPr/>
-          <p:nvPr/>
-        </p:nvSpPr>
-        <p:spPr>
-          <a:xfrm>
-            <a:off x="7201632" y="2395728"/>
-            <a:ext cx="4423136" cy="3246120"/>
-          </a:xfrm>
-          <a:prstGeom prst="roundRect">
-            <a:avLst>
-              <a:gd name="adj" fmla="val 2535"/>
-            </a:avLst>
-          </a:prstGeom>
-          <a:solidFill>
-            <a:srgbClr val="E0F2F4"/>
-          </a:solidFill>
-          <a:ln/>
-          <a:effectLst>
-            <a:outerShdw sx="100000" sy="100000" kx="0" ky="0" algn="bl" rotWithShape="0" blurRad="88900" dist="25400" dir="5400000">
-              <a:srgbClr val="22303C">
-                <a:alpha val="12000"/>
-              </a:srgbClr>
-            </a:outerShdw>
-          </a:effectLst>
-        </p:spPr>
-      </p:sp>
-      <p:sp>
-        <p:nvSpPr>
-          <p:cNvPr id="7" name="Text 5"/>
-          <p:cNvSpPr/>
-          <p:nvPr/>
-        </p:nvSpPr>
-        <p:spPr>
-          <a:xfrm>
-            <a:off x="7439376" y="2578608"/>
-            <a:ext cx="3965936" cy="457200"/>
-          </a:xfrm>
-          <a:prstGeom prst="rect">
-            <a:avLst/>
-          </a:prstGeom>
-          <a:noFill/>
-          <a:ln/>
-        </p:spPr>
-        <p:txBody>
-          <a:bodyPr wrap="square" lIns="0" tIns="0" rIns="0" bIns="0" rtlCol="0" anchor="ctr"/>
-          <a:lstStyle/>
-          <a:p>
-            <a:pPr indent="0" marL="0">
-              <a:buNone/>
-            </a:pPr>
-            <a:r>
-              <a:rPr lang="en-US" sz="1500" b="1" dirty="0">
-                <a:solidFill>
-                  <a:srgbClr val="00838F"/>
-                </a:solidFill>
-                <a:latin typeface="Calibri" pitchFamily="34" charset="0"/>
-                <a:ea typeface="Calibri" pitchFamily="34" charset="-122"/>
-                <a:cs typeface="Calibri" pitchFamily="34" charset="-120"/>
-              </a:rPr>
-              <a:t>ANSWER  </a:t>
-            </a:r>
-            <a:pPr indent="0" marL="0">
-              <a:buNone/>
-            </a:pPr>
-            <a:r>
-              <a:rPr lang="en-US" sz="1500" b="1" dirty="0">
-                <a:solidFill>
-                  <a:srgbClr val="1B2A38"/>
-                </a:solidFill>
-                <a:latin typeface="Calibri" pitchFamily="34" charset="0"/>
-                <a:ea typeface="Calibri" pitchFamily="34" charset="-122"/>
-                <a:cs typeface="Calibri" pitchFamily="34" charset="-120"/>
-              </a:rPr>
-              <a:t>B — More starting template</a:t>
-            </a:r>
-            <a:endParaRPr lang="en-US" sz="1500" dirty="0"/>
-          </a:p>
-        </p:txBody>
-      </p:sp>
-      <p:sp>
-        <p:nvSpPr>
-          <p:cNvPr id="8" name="Text 6"/>
-          <p:cNvSpPr/>
-          <p:nvPr/>
-        </p:nvSpPr>
-        <p:spPr>
-          <a:xfrm>
-            <a:off x="7439376" y="3127248"/>
-            <a:ext cx="3947648" cy="2377440"/>
-          </a:xfrm>
-          <a:prstGeom prst="rect">
-            <a:avLst/>
-          </a:prstGeom>
-          <a:noFill/>
-          <a:ln/>
-        </p:spPr>
-        <p:txBody>
-          <a:bodyPr wrap="square" lIns="0" tIns="0" rIns="0" bIns="0" rtlCol="0" anchor="t"/>
-          <a:lstStyle/>
-          <a:p>
-            <a:pPr algn="l" indent="0" marL="0">
-              <a:lnSpc>
-                <a:spcPct val="108000"/>
-              </a:lnSpc>
-              <a:buNone/>
-            </a:pPr>
-            <a:r>
-              <a:rPr lang="en-US" sz="1250" dirty="0">
-                <a:solidFill>
-                  <a:srgbClr val="33444F"/>
-                </a:solidFill>
-                <a:latin typeface="Calibri" pitchFamily="34" charset="0"/>
-                <a:ea typeface="Calibri" pitchFamily="34" charset="-122"/>
-                <a:cs typeface="Calibri" pitchFamily="34" charset="-120"/>
-              </a:rPr>
-              <a:t>Ct is inversely related to the amount of starting target; lower Ct means more template.</a:t>
-            </a:r>
-            <a:endParaRPr lang="en-US" sz="1250" dirty="0"/>
           </a:p>
         </p:txBody>
       </p:sp>
@@ -9633,9 +9617,9 @@
               <a:buNone/>
             </a:pPr>
             <a:r>
-              <a:rPr lang="en-US" sz="1350" b="1" dirty="0">
-                <a:solidFill>
-                  <a:srgbClr val="005A63"/>
+              <a:rPr lang="en-US" sz="1350" b="0" dirty="0">
+                <a:solidFill>
+                  <a:srgbClr val="33444F"/>
                 </a:solidFill>
                 <a:latin typeface="Calibri" pitchFamily="34" charset="0"/>
                 <a:ea typeface="Calibri" pitchFamily="34" charset="-122"/>
@@ -9684,130 +9668,6 @@
               <a:t>E. Microarray</a:t>
             </a:r>
             <a:endParaRPr lang="en-US" sz="1350" dirty="0"/>
-          </a:p>
-        </p:txBody>
-      </p:sp>
-      <p:sp>
-        <p:nvSpPr>
-          <p:cNvPr id="6" name="Shape 4"/>
-          <p:cNvSpPr/>
-          <p:nvPr/>
-        </p:nvSpPr>
-        <p:spPr>
-          <a:xfrm>
-            <a:off x="7201632" y="2395728"/>
-            <a:ext cx="4423136" cy="3246120"/>
-          </a:xfrm>
-          <a:prstGeom prst="roundRect">
-            <a:avLst>
-              <a:gd name="adj" fmla="val 2535"/>
-            </a:avLst>
-          </a:prstGeom>
-          <a:solidFill>
-            <a:srgbClr val="E0F2F4"/>
-          </a:solidFill>
-          <a:ln/>
-          <a:effectLst>
-            <a:outerShdw sx="100000" sy="100000" kx="0" ky="0" algn="bl" rotWithShape="0" blurRad="88900" dist="25400" dir="5400000">
-              <a:srgbClr val="22303C">
-                <a:alpha val="12000"/>
-              </a:srgbClr>
-            </a:outerShdw>
-          </a:effectLst>
-        </p:spPr>
-      </p:sp>
-      <p:sp>
-        <p:nvSpPr>
-          <p:cNvPr id="7" name="Text 5"/>
-          <p:cNvSpPr/>
-          <p:nvPr/>
-        </p:nvSpPr>
-        <p:spPr>
-          <a:xfrm>
-            <a:off x="7439376" y="2578608"/>
-            <a:ext cx="3965936" cy="457200"/>
-          </a:xfrm>
-          <a:prstGeom prst="rect">
-            <a:avLst/>
-          </a:prstGeom>
-          <a:noFill/>
-          <a:ln/>
-        </p:spPr>
-        <p:txBody>
-          <a:bodyPr wrap="square" lIns="0" tIns="0" rIns="0" bIns="0" rtlCol="0" anchor="ctr"/>
-          <a:lstStyle/>
-          <a:p>
-            <a:pPr indent="0" marL="0">
-              <a:buNone/>
-            </a:pPr>
-            <a:r>
-              <a:rPr lang="en-US" sz="1500" b="1" dirty="0">
-                <a:solidFill>
-                  <a:srgbClr val="00838F"/>
-                </a:solidFill>
-                <a:latin typeface="Calibri" pitchFamily="34" charset="0"/>
-                <a:ea typeface="Calibri" pitchFamily="34" charset="-122"/>
-                <a:cs typeface="Calibri" pitchFamily="34" charset="-120"/>
-              </a:rPr>
-              <a:t>ANSWER  </a:t>
-            </a:r>
-            <a:pPr indent="0" marL="0">
-              <a:buNone/>
-            </a:pPr>
-            <a:r>
-              <a:rPr lang="en-US" sz="1500" b="1" dirty="0">
-                <a:solidFill>
-                  <a:srgbClr val="1B2A38"/>
-                </a:solidFill>
-                <a:latin typeface="Calibri" pitchFamily="34" charset="0"/>
-                <a:ea typeface="Calibri" pitchFamily="34" charset="-122"/>
-                <a:cs typeface="Calibri" pitchFamily="34" charset="-120"/>
-              </a:rPr>
-              <a:t>C — Digital PCR</a:t>
-            </a:r>
-            <a:endParaRPr lang="en-US" sz="1500" dirty="0"/>
-          </a:p>
-        </p:txBody>
-      </p:sp>
-      <p:sp>
-        <p:nvSpPr>
-          <p:cNvPr id="8" name="Text 6"/>
-          <p:cNvSpPr/>
-          <p:nvPr/>
-        </p:nvSpPr>
-        <p:spPr>
-          <a:xfrm>
-            <a:off x="7439376" y="3127248"/>
-            <a:ext cx="3947648" cy="2377440"/>
-          </a:xfrm>
-          <a:prstGeom prst="rect">
-            <a:avLst/>
-          </a:prstGeom>
-          <a:noFill/>
-          <a:ln/>
-        </p:spPr>
-        <p:txBody>
-          <a:bodyPr wrap="square" lIns="0" tIns="0" rIns="0" bIns="0" rtlCol="0" anchor="t"/>
-          <a:lstStyle/>
-          <a:p>
-            <a:pPr algn="l" indent="0" marL="0">
-              <a:lnSpc>
-                <a:spcPct val="108000"/>
-              </a:lnSpc>
-              <a:buNone/>
-            </a:pPr>
-            <a:r>
-              <a:rPr lang="en-US" sz="1250" dirty="0">
-                <a:solidFill>
-                  <a:srgbClr val="33444F"/>
-                </a:solidFill>
-                <a:latin typeface="Calibri" pitchFamily="34" charset="0"/>
-                <a:ea typeface="Calibri" pitchFamily="34" charset="-122"/>
-                <a:cs typeface="Calibri" pitchFamily="34" charset="-120"/>
-              </a:rPr>
-              <a:t>Digital PCR partitions the reaction to count targets directly, giving absolute quantitation without a standard curve.</a:t>
-            </a:r>
-            <a:endParaRPr lang="en-US" sz="1250" dirty="0"/>
           </a:p>
         </p:txBody>
       </p:sp>
@@ -10137,9 +9997,9 @@
               <a:buNone/>
             </a:pPr>
             <a:r>
-              <a:rPr lang="en-US" sz="1350" b="1" dirty="0">
-                <a:solidFill>
-                  <a:srgbClr val="005A63"/>
+              <a:rPr lang="en-US" sz="1350" b="0" dirty="0">
+                <a:solidFill>
+                  <a:srgbClr val="33444F"/>
                 </a:solidFill>
                 <a:latin typeface="Calibri" pitchFamily="34" charset="0"/>
                 <a:ea typeface="Calibri" pitchFamily="34" charset="-122"/>
@@ -10188,130 +10048,6 @@
               <a:t>E. Metaphase analysis</a:t>
             </a:r>
             <a:endParaRPr lang="en-US" sz="1350" dirty="0"/>
-          </a:p>
-        </p:txBody>
-      </p:sp>
-      <p:sp>
-        <p:nvSpPr>
-          <p:cNvPr id="6" name="Shape 4"/>
-          <p:cNvSpPr/>
-          <p:nvPr/>
-        </p:nvSpPr>
-        <p:spPr>
-          <a:xfrm>
-            <a:off x="7201632" y="2395728"/>
-            <a:ext cx="4423136" cy="3246120"/>
-          </a:xfrm>
-          <a:prstGeom prst="roundRect">
-            <a:avLst>
-              <a:gd name="adj" fmla="val 2535"/>
-            </a:avLst>
-          </a:prstGeom>
-          <a:solidFill>
-            <a:srgbClr val="E0F2F4"/>
-          </a:solidFill>
-          <a:ln/>
-          <a:effectLst>
-            <a:outerShdw sx="100000" sy="100000" kx="0" ky="0" algn="bl" rotWithShape="0" blurRad="88900" dist="25400" dir="5400000">
-              <a:srgbClr val="22303C">
-                <a:alpha val="12000"/>
-              </a:srgbClr>
-            </a:outerShdw>
-          </a:effectLst>
-        </p:spPr>
-      </p:sp>
-      <p:sp>
-        <p:nvSpPr>
-          <p:cNvPr id="7" name="Text 5"/>
-          <p:cNvSpPr/>
-          <p:nvPr/>
-        </p:nvSpPr>
-        <p:spPr>
-          <a:xfrm>
-            <a:off x="7439376" y="2578608"/>
-            <a:ext cx="3965936" cy="457200"/>
-          </a:xfrm>
-          <a:prstGeom prst="rect">
-            <a:avLst/>
-          </a:prstGeom>
-          <a:noFill/>
-          <a:ln/>
-        </p:spPr>
-        <p:txBody>
-          <a:bodyPr wrap="square" lIns="0" tIns="0" rIns="0" bIns="0" rtlCol="0" anchor="ctr"/>
-          <a:lstStyle/>
-          <a:p>
-            <a:pPr indent="0" marL="0">
-              <a:buNone/>
-            </a:pPr>
-            <a:r>
-              <a:rPr lang="en-US" sz="1500" b="1" dirty="0">
-                <a:solidFill>
-                  <a:srgbClr val="00838F"/>
-                </a:solidFill>
-                <a:latin typeface="Calibri" pitchFamily="34" charset="0"/>
-                <a:ea typeface="Calibri" pitchFamily="34" charset="-122"/>
-                <a:cs typeface="Calibri" pitchFamily="34" charset="-120"/>
-              </a:rPr>
-              <a:t>ANSWER  </a:t>
-            </a:r>
-            <a:pPr indent="0" marL="0">
-              <a:buNone/>
-            </a:pPr>
-            <a:r>
-              <a:rPr lang="en-US" sz="1500" b="1" dirty="0">
-                <a:solidFill>
-                  <a:srgbClr val="1B2A38"/>
-                </a:solidFill>
-                <a:latin typeface="Calibri" pitchFamily="34" charset="0"/>
-                <a:ea typeface="Calibri" pitchFamily="34" charset="-122"/>
-                <a:cs typeface="Calibri" pitchFamily="34" charset="-120"/>
-              </a:rPr>
-              <a:t>C — Chromosomal microarray</a:t>
-            </a:r>
-            <a:endParaRPr lang="en-US" sz="1500" dirty="0"/>
-          </a:p>
-        </p:txBody>
-      </p:sp>
-      <p:sp>
-        <p:nvSpPr>
-          <p:cNvPr id="8" name="Text 6"/>
-          <p:cNvSpPr/>
-          <p:nvPr/>
-        </p:nvSpPr>
-        <p:spPr>
-          <a:xfrm>
-            <a:off x="7439376" y="3127248"/>
-            <a:ext cx="3947648" cy="2377440"/>
-          </a:xfrm>
-          <a:prstGeom prst="rect">
-            <a:avLst/>
-          </a:prstGeom>
-          <a:noFill/>
-          <a:ln/>
-        </p:spPr>
-        <p:txBody>
-          <a:bodyPr wrap="square" lIns="0" tIns="0" rIns="0" bIns="0" rtlCol="0" anchor="t"/>
-          <a:lstStyle/>
-          <a:p>
-            <a:pPr algn="l" indent="0" marL="0">
-              <a:lnSpc>
-                <a:spcPct val="108000"/>
-              </a:lnSpc>
-              <a:buNone/>
-            </a:pPr>
-            <a:r>
-              <a:rPr lang="en-US" sz="1250" dirty="0">
-                <a:solidFill>
-                  <a:srgbClr val="33444F"/>
-                </a:solidFill>
-                <a:latin typeface="Calibri" pitchFamily="34" charset="0"/>
-                <a:ea typeface="Calibri" pitchFamily="34" charset="-122"/>
-                <a:cs typeface="Calibri" pitchFamily="34" charset="-120"/>
-              </a:rPr>
-              <a:t>Arrays detect copy-number change; a balanced translocation has no net copy-number change and is missed.</a:t>
-            </a:r>
-            <a:endParaRPr lang="en-US" sz="1250" dirty="0"/>
           </a:p>
         </p:txBody>
       </p:sp>
@@ -10621,9 +10357,9 @@
               <a:buNone/>
             </a:pPr>
             <a:r>
-              <a:rPr lang="en-US" sz="1350" b="1" dirty="0">
-                <a:solidFill>
-                  <a:srgbClr val="005A63"/>
+              <a:rPr lang="en-US" sz="1350" b="0" dirty="0">
+                <a:solidFill>
+                  <a:srgbClr val="33444F"/>
                 </a:solidFill>
                 <a:latin typeface="Calibri" pitchFamily="34" charset="0"/>
                 <a:ea typeface="Calibri" pitchFamily="34" charset="-122"/>
@@ -10692,130 +10428,6 @@
               <a:t>E. Increase Ct</a:t>
             </a:r>
             <a:endParaRPr lang="en-US" sz="1350" dirty="0"/>
-          </a:p>
-        </p:txBody>
-      </p:sp>
-      <p:sp>
-        <p:nvSpPr>
-          <p:cNvPr id="6" name="Shape 4"/>
-          <p:cNvSpPr/>
-          <p:nvPr/>
-        </p:nvSpPr>
-        <p:spPr>
-          <a:xfrm>
-            <a:off x="7201632" y="2395728"/>
-            <a:ext cx="4423136" cy="3246120"/>
-          </a:xfrm>
-          <a:prstGeom prst="roundRect">
-            <a:avLst>
-              <a:gd name="adj" fmla="val 2535"/>
-            </a:avLst>
-          </a:prstGeom>
-          <a:solidFill>
-            <a:srgbClr val="E0F2F4"/>
-          </a:solidFill>
-          <a:ln/>
-          <a:effectLst>
-            <a:outerShdw sx="100000" sy="100000" kx="0" ky="0" algn="bl" rotWithShape="0" blurRad="88900" dist="25400" dir="5400000">
-              <a:srgbClr val="22303C">
-                <a:alpha val="12000"/>
-              </a:srgbClr>
-            </a:outerShdw>
-          </a:effectLst>
-        </p:spPr>
-      </p:sp>
-      <p:sp>
-        <p:nvSpPr>
-          <p:cNvPr id="7" name="Text 5"/>
-          <p:cNvSpPr/>
-          <p:nvPr/>
-        </p:nvSpPr>
-        <p:spPr>
-          <a:xfrm>
-            <a:off x="7439376" y="2578608"/>
-            <a:ext cx="3965936" cy="457200"/>
-          </a:xfrm>
-          <a:prstGeom prst="rect">
-            <a:avLst/>
-          </a:prstGeom>
-          <a:noFill/>
-          <a:ln/>
-        </p:spPr>
-        <p:txBody>
-          <a:bodyPr wrap="square" lIns="0" tIns="0" rIns="0" bIns="0" rtlCol="0" anchor="ctr"/>
-          <a:lstStyle/>
-          <a:p>
-            <a:pPr indent="0" marL="0">
-              <a:buNone/>
-            </a:pPr>
-            <a:r>
-              <a:rPr lang="en-US" sz="1500" b="1" dirty="0">
-                <a:solidFill>
-                  <a:srgbClr val="00838F"/>
-                </a:solidFill>
-                <a:latin typeface="Calibri" pitchFamily="34" charset="0"/>
-                <a:ea typeface="Calibri" pitchFamily="34" charset="-122"/>
-                <a:cs typeface="Calibri" pitchFamily="34" charset="-120"/>
-              </a:rPr>
-              <a:t>ANSWER  </a:t>
-            </a:r>
-            <a:pPr indent="0" marL="0">
-              <a:buNone/>
-            </a:pPr>
-            <a:r>
-              <a:rPr lang="en-US" sz="1500" b="1" dirty="0">
-                <a:solidFill>
-                  <a:srgbClr val="1B2A38"/>
-                </a:solidFill>
-                <a:latin typeface="Calibri" pitchFamily="34" charset="0"/>
-                <a:ea typeface="Calibri" pitchFamily="34" charset="-122"/>
-                <a:cs typeface="Calibri" pitchFamily="34" charset="-120"/>
-              </a:rPr>
-              <a:t>B — Prevent amplicon carryover</a:t>
-            </a:r>
-            <a:endParaRPr lang="en-US" sz="1500" dirty="0"/>
-          </a:p>
-        </p:txBody>
-      </p:sp>
-      <p:sp>
-        <p:nvSpPr>
-          <p:cNvPr id="8" name="Text 6"/>
-          <p:cNvSpPr/>
-          <p:nvPr/>
-        </p:nvSpPr>
-        <p:spPr>
-          <a:xfrm>
-            <a:off x="7439376" y="3127248"/>
-            <a:ext cx="3947648" cy="2377440"/>
-          </a:xfrm>
-          <a:prstGeom prst="rect">
-            <a:avLst/>
-          </a:prstGeom>
-          <a:noFill/>
-          <a:ln/>
-        </p:spPr>
-        <p:txBody>
-          <a:bodyPr wrap="square" lIns="0" tIns="0" rIns="0" bIns="0" rtlCol="0" anchor="t"/>
-          <a:lstStyle/>
-          <a:p>
-            <a:pPr algn="l" indent="0" marL="0">
-              <a:lnSpc>
-                <a:spcPct val="108000"/>
-              </a:lnSpc>
-              <a:buNone/>
-            </a:pPr>
-            <a:r>
-              <a:rPr lang="en-US" sz="1250" dirty="0">
-                <a:solidFill>
-                  <a:srgbClr val="33444F"/>
-                </a:solidFill>
-                <a:latin typeface="Calibri" pitchFamily="34" charset="0"/>
-                <a:ea typeface="Calibri" pitchFamily="34" charset="-122"/>
-                <a:cs typeface="Calibri" pitchFamily="34" charset="-120"/>
-              </a:rPr>
-              <a:t>Post-PCR amplicons are a major contamination source; unidirectional workflow prevents false positives.</a:t>
-            </a:r>
-            <a:endParaRPr lang="en-US" sz="1250" dirty="0"/>
           </a:p>
         </p:txBody>
       </p:sp>
@@ -11056,6 +10668,10 @@
           </a:solidFill>
           <a:ln/>
         </p:spPr>
+        <p:txBody>
+          <a:bodyPr/>
+          <a:p/>
+        </p:txBody>
       </p:sp>
       <p:sp>
         <p:nvSpPr>
@@ -11083,6 +10699,10 @@
             </a:outerShdw>
           </a:effectLst>
         </p:spPr>
+        <p:txBody>
+          <a:bodyPr/>
+          <a:p/>
+        </p:txBody>
       </p:sp>
       <p:sp>
         <p:nvSpPr>
@@ -11183,6 +10803,10 @@
           </a:solidFill>
           <a:ln/>
         </p:spPr>
+        <p:txBody>
+          <a:bodyPr/>
+          <a:p/>
+        </p:txBody>
       </p:sp>
       <p:sp>
         <p:nvSpPr>
@@ -11210,6 +10834,10 @@
             </a:outerShdw>
           </a:effectLst>
         </p:spPr>
+        <p:txBody>
+          <a:bodyPr/>
+          <a:p/>
+        </p:txBody>
       </p:sp>
       <p:sp>
         <p:nvSpPr>
@@ -11310,6 +10938,10 @@
           </a:solidFill>
           <a:ln/>
         </p:spPr>
+        <p:txBody>
+          <a:bodyPr/>
+          <a:p/>
+        </p:txBody>
       </p:sp>
       <p:sp>
         <p:nvSpPr>
@@ -11337,6 +10969,10 @@
             </a:outerShdw>
           </a:effectLst>
         </p:spPr>
+        <p:txBody>
+          <a:bodyPr/>
+          <a:p/>
+        </p:txBody>
       </p:sp>
       <p:sp>
         <p:nvSpPr>
@@ -11437,6 +11073,10 @@
           </a:solidFill>
           <a:ln/>
         </p:spPr>
+        <p:txBody>
+          <a:bodyPr/>
+          <a:p/>
+        </p:txBody>
       </p:sp>
       <p:sp>
         <p:nvSpPr>
@@ -11464,6 +11104,10 @@
             </a:outerShdw>
           </a:effectLst>
         </p:spPr>
+        <p:txBody>
+          <a:bodyPr/>
+          <a:p/>
+        </p:txBody>
       </p:sp>
       <p:sp>
         <p:nvSpPr>
@@ -11564,6 +11208,10 @@
           </a:solidFill>
           <a:ln/>
         </p:spPr>
+        <p:txBody>
+          <a:bodyPr/>
+          <a:p/>
+        </p:txBody>
       </p:sp>
       <p:sp>
         <p:nvSpPr>
@@ -11591,6 +11239,10 @@
             </a:outerShdw>
           </a:effectLst>
         </p:spPr>
+        <p:txBody>
+          <a:bodyPr/>
+          <a:p/>
+        </p:txBody>
       </p:sp>
       <p:sp>
         <p:nvSpPr>
@@ -12074,6 +11726,1488 @@
 </p:sld>
 </file>
 
+<file path=ppt/slides/slide27.xml><?xml version="1.0" encoding="utf-8"?>
+<p:sld xmlns:a="http://schemas.openxmlformats.org/drawingml/2006/main" xmlns:p="http://schemas.openxmlformats.org/presentationml/2006/main" xmlns:r="http://schemas.openxmlformats.org/officeDocument/2006/relationships">
+  <p:cSld>
+    <p:spTree>
+      <p:nvGrpSpPr>
+        <p:cNvPr id="1" name=""/>
+        <p:cNvGrpSpPr/>
+        <p:nvPr/>
+      </p:nvGrpSpPr>
+      <p:grpSpPr/>
+      <p:sp>
+        <p:nvSpPr>
+          <p:cNvPr id="2" name="Text 0"/>
+          <p:cNvSpPr/>
+          <p:nvPr/>
+        </p:nvSpPr>
+        <p:spPr>
+          <a:xfrm>
+            <a:off x="566928" y="329184"/>
+            <a:ext cx="10515600" cy="310896"/>
+          </a:xfrm>
+          <a:prstGeom prst="rect">
+            <a:avLst/>
+          </a:prstGeom>
+          <a:noFill/>
+          <a:ln/>
+        </p:spPr>
+        <p:txBody>
+          <a:bodyPr wrap="square" lIns="0" tIns="0" rIns="0" bIns="0" rtlCol="0" anchor="ctr"/>
+          <a:lstStyle/>
+          <a:p>
+            <a:pPr algn="l" indent="0" marL="0">
+              <a:buNone/>
+            </a:pPr>
+            <a:r>
+              <a:rPr lang="en-US" sz="1100" b="1" spc="150" kern="0" dirty="0">
+                <a:solidFill>
+                  <a:srgbClr val="00838F"/>
+                </a:solidFill>
+                <a:latin typeface="Calibri" pitchFamily="34" charset="0"/>
+                <a:ea typeface="Calibri" pitchFamily="34" charset="-122"/>
+                <a:cs typeface="Calibri" pitchFamily="34" charset="-120"/>
+              </a:rPr>
+              <a:t>MOLECULAR &amp; CYTOGENETICS   ·   BOARD REVIEW  ·  Q4</a:t>
+            </a:r>
+            <a:endParaRPr lang="en-US" sz="1100" dirty="0"/>
+          </a:p>
+        </p:txBody>
+      </p:sp>
+      <p:sp>
+        <p:nvSpPr>
+          <p:cNvPr id="3" name="Text 1"/>
+          <p:cNvSpPr/>
+          <p:nvPr/>
+        </p:nvSpPr>
+        <p:spPr>
+          <a:xfrm>
+            <a:off x="566928" y="713232"/>
+            <a:ext cx="11064240" cy="749808"/>
+          </a:xfrm>
+          <a:prstGeom prst="rect">
+            <a:avLst/>
+          </a:prstGeom>
+          <a:noFill/>
+          <a:ln/>
+        </p:spPr>
+        <p:txBody>
+          <a:bodyPr wrap="square" lIns="0" tIns="0" rIns="0" bIns="0" rtlCol="0" anchor="ctr"/>
+          <a:lstStyle/>
+          <a:p>
+            <a:pPr algn="l" indent="0" marL="0">
+              <a:buNone/>
+            </a:pPr>
+            <a:r>
+              <a:rPr lang="en-US" sz="2600" b="1" dirty="0">
+                <a:solidFill>
+                  <a:srgbClr val="0E3A5F"/>
+                </a:solidFill>
+                <a:latin typeface="Calibri" pitchFamily="34" charset="0"/>
+                <a:ea typeface="Calibri" pitchFamily="34" charset="-122"/>
+                <a:cs typeface="Calibri" pitchFamily="34" charset="-120"/>
+              </a:rPr>
+              <a:t>Board-Style Review</a:t>
+            </a:r>
+            <a:endParaRPr lang="en-US" sz="2600" dirty="0"/>
+          </a:p>
+        </p:txBody>
+      </p:sp>
+      <p:sp>
+        <p:nvSpPr>
+          <p:cNvPr id="4" name="Text 2"/>
+          <p:cNvSpPr/>
+          <p:nvPr/>
+        </p:nvSpPr>
+        <p:spPr>
+          <a:xfrm>
+            <a:off x="566928" y="1417320"/>
+            <a:ext cx="11057839" cy="914400"/>
+          </a:xfrm>
+          <a:prstGeom prst="rect">
+            <a:avLst/>
+          </a:prstGeom>
+          <a:noFill/>
+          <a:ln/>
+        </p:spPr>
+        <p:txBody>
+          <a:bodyPr wrap="square" lIns="0" tIns="0" rIns="0" bIns="0" rtlCol="0" anchor="t"/>
+          <a:lstStyle/>
+          <a:p>
+            <a:pPr algn="l" indent="0" marL="0">
+              <a:lnSpc>
+                <a:spcPct val="105000"/>
+              </a:lnSpc>
+              <a:buNone/>
+            </a:pPr>
+            <a:r>
+              <a:rPr lang="en-US" sz="1450" b="1" dirty="0">
+                <a:solidFill>
+                  <a:srgbClr val="1B2A38"/>
+                </a:solidFill>
+                <a:latin typeface="Calibri" pitchFamily="34" charset="0"/>
+                <a:ea typeface="Calibri" pitchFamily="34" charset="-122"/>
+                <a:cs typeface="Calibri" pitchFamily="34" charset="-120"/>
+              </a:rPr>
+              <a:t>The main reason to separate pre- and post-PCR work areas is to:</a:t>
+            </a:r>
+            <a:endParaRPr lang="en-US" sz="1450" dirty="0"/>
+          </a:p>
+        </p:txBody>
+      </p:sp>
+      <p:sp>
+        <p:nvSpPr>
+          <p:cNvPr id="5" name="Text 3"/>
+          <p:cNvSpPr/>
+          <p:nvPr/>
+        </p:nvSpPr>
+        <p:spPr>
+          <a:xfrm>
+            <a:off x="658368" y="2395728"/>
+            <a:ext cx="6192390" cy="3017520"/>
+          </a:xfrm>
+          <a:prstGeom prst="rect">
+            <a:avLst/>
+          </a:prstGeom>
+          <a:noFill/>
+          <a:ln/>
+        </p:spPr>
+        <p:txBody>
+          <a:bodyPr wrap="square" lIns="0" tIns="0" rIns="0" bIns="0" rtlCol="0" anchor="t"/>
+          <a:lstStyle/>
+          <a:p>
+            <a:pPr algn="l" indent="0" marL="0">
+              <a:spcAft>
+                <a:spcPts val="600"/>
+              </a:spcAft>
+              <a:buNone/>
+            </a:pPr>
+            <a:r>
+              <a:rPr lang="en-US" sz="1350" dirty="0">
+                <a:solidFill>
+                  <a:srgbClr val="33444F"/>
+                </a:solidFill>
+                <a:latin typeface="Calibri" pitchFamily="34" charset="0"/>
+                <a:ea typeface="Calibri" pitchFamily="34" charset="-122"/>
+                <a:cs typeface="Calibri" pitchFamily="34" charset="-120"/>
+              </a:rPr>
+              <a:t>A. Improve sensitivity</a:t>
+            </a:r>
+            <a:endParaRPr lang="en-US" sz="1350" dirty="0"/>
+          </a:p>
+          <a:p>
+            <a:pPr algn="l" indent="0" marL="0">
+              <a:spcAft>
+                <a:spcPts val="600"/>
+              </a:spcAft>
+              <a:buNone/>
+            </a:pPr>
+            <a:r>
+              <a:rPr lang="en-US" sz="1350" b="1" dirty="0">
+                <a:solidFill>
+                  <a:srgbClr val="005A63"/>
+                </a:solidFill>
+                <a:latin typeface="Calibri" pitchFamily="34" charset="0"/>
+                <a:ea typeface="Calibri" pitchFamily="34" charset="-122"/>
+                <a:cs typeface="Calibri" pitchFamily="34" charset="-120"/>
+              </a:rPr>
+              <a:t>B. Prevent amplicon carryover contamination</a:t>
+            </a:r>
+            <a:endParaRPr lang="en-US" sz="1350" dirty="0"/>
+          </a:p>
+          <a:p>
+            <a:pPr algn="l" indent="0" marL="0">
+              <a:spcAft>
+                <a:spcPts val="600"/>
+              </a:spcAft>
+              <a:buNone/>
+            </a:pPr>
+            <a:r>
+              <a:rPr lang="en-US" sz="1350" dirty="0">
+                <a:solidFill>
+                  <a:srgbClr val="33444F"/>
+                </a:solidFill>
+                <a:latin typeface="Calibri" pitchFamily="34" charset="0"/>
+                <a:ea typeface="Calibri" pitchFamily="34" charset="-122"/>
+                <a:cs typeface="Calibri" pitchFamily="34" charset="-120"/>
+              </a:rPr>
+              <a:t>C. Speed up cycling</a:t>
+            </a:r>
+            <a:endParaRPr lang="en-US" sz="1350" dirty="0"/>
+          </a:p>
+          <a:p>
+            <a:pPr algn="l" indent="0" marL="0">
+              <a:spcAft>
+                <a:spcPts val="600"/>
+              </a:spcAft>
+              <a:buNone/>
+            </a:pPr>
+            <a:r>
+              <a:rPr lang="en-US" sz="1350" dirty="0">
+                <a:solidFill>
+                  <a:srgbClr val="33444F"/>
+                </a:solidFill>
+                <a:latin typeface="Calibri" pitchFamily="34" charset="0"/>
+                <a:ea typeface="Calibri" pitchFamily="34" charset="-122"/>
+                <a:cs typeface="Calibri" pitchFamily="34" charset="-120"/>
+              </a:rPr>
+              <a:t>D. Reduce reagent cost</a:t>
+            </a:r>
+            <a:endParaRPr lang="en-US" sz="1350" dirty="0"/>
+          </a:p>
+          <a:p>
+            <a:pPr algn="l" indent="0" marL="0">
+              <a:spcAft>
+                <a:spcPts val="600"/>
+              </a:spcAft>
+              <a:buNone/>
+            </a:pPr>
+            <a:r>
+              <a:rPr lang="en-US" sz="1350" dirty="0">
+                <a:solidFill>
+                  <a:srgbClr val="33444F"/>
+                </a:solidFill>
+                <a:latin typeface="Calibri" pitchFamily="34" charset="0"/>
+                <a:ea typeface="Calibri" pitchFamily="34" charset="-122"/>
+                <a:cs typeface="Calibri" pitchFamily="34" charset="-120"/>
+              </a:rPr>
+              <a:t>E. Increase Ct</a:t>
+            </a:r>
+            <a:endParaRPr lang="en-US" sz="1350" dirty="0"/>
+          </a:p>
+        </p:txBody>
+      </p:sp>
+      <p:sp>
+        <p:nvSpPr>
+          <p:cNvPr id="6" name="Shape 4"/>
+          <p:cNvSpPr/>
+          <p:nvPr/>
+        </p:nvSpPr>
+        <p:spPr>
+          <a:xfrm>
+            <a:off x="7201632" y="2395728"/>
+            <a:ext cx="4423136" cy="3246120"/>
+          </a:xfrm>
+          <a:prstGeom prst="roundRect">
+            <a:avLst>
+              <a:gd name="adj" fmla="val 2535"/>
+            </a:avLst>
+          </a:prstGeom>
+          <a:solidFill>
+            <a:srgbClr val="E0F2F4"/>
+          </a:solidFill>
+          <a:ln/>
+          <a:effectLst>
+            <a:outerShdw sx="100000" sy="100000" kx="0" ky="0" algn="bl" rotWithShape="0" blurRad="88900" dist="25400" dir="5400000">
+              <a:srgbClr val="22303C">
+                <a:alpha val="12000"/>
+              </a:srgbClr>
+            </a:outerShdw>
+          </a:effectLst>
+        </p:spPr>
+        <p:txBody>
+          <a:bodyPr/>
+          <a:p/>
+        </p:txBody>
+      </p:sp>
+      <p:sp>
+        <p:nvSpPr>
+          <p:cNvPr id="7" name="Text 5"/>
+          <p:cNvSpPr/>
+          <p:nvPr/>
+        </p:nvSpPr>
+        <p:spPr>
+          <a:xfrm>
+            <a:off x="7439376" y="2578608"/>
+            <a:ext cx="3965936" cy="457200"/>
+          </a:xfrm>
+          <a:prstGeom prst="rect">
+            <a:avLst/>
+          </a:prstGeom>
+          <a:noFill/>
+          <a:ln/>
+        </p:spPr>
+        <p:txBody>
+          <a:bodyPr wrap="square" lIns="0" tIns="0" rIns="0" bIns="0" rtlCol="0" anchor="ctr"/>
+          <a:lstStyle/>
+          <a:p>
+            <a:pPr indent="0" marL="0">
+              <a:buNone/>
+            </a:pPr>
+            <a:r>
+              <a:rPr lang="en-US" sz="1500" b="1" dirty="0">
+                <a:solidFill>
+                  <a:srgbClr val="00838F"/>
+                </a:solidFill>
+                <a:latin typeface="Calibri" pitchFamily="34" charset="0"/>
+                <a:ea typeface="Calibri" pitchFamily="34" charset="-122"/>
+                <a:cs typeface="Calibri" pitchFamily="34" charset="-120"/>
+              </a:rPr>
+              <a:t>ANSWER  </a:t>
+            </a:r>
+            <a:pPr indent="0" marL="0">
+              <a:buNone/>
+            </a:pPr>
+            <a:r>
+              <a:rPr lang="en-US" sz="1500" b="1" dirty="0">
+                <a:solidFill>
+                  <a:srgbClr val="1B2A38"/>
+                </a:solidFill>
+                <a:latin typeface="Calibri" pitchFamily="34" charset="0"/>
+                <a:ea typeface="Calibri" pitchFamily="34" charset="-122"/>
+                <a:cs typeface="Calibri" pitchFamily="34" charset="-120"/>
+              </a:rPr>
+              <a:t>B — Prevent amplicon carryover</a:t>
+            </a:r>
+            <a:endParaRPr lang="en-US" sz="1500" dirty="0"/>
+          </a:p>
+        </p:txBody>
+      </p:sp>
+      <p:sp>
+        <p:nvSpPr>
+          <p:cNvPr id="8" name="Text 6"/>
+          <p:cNvSpPr/>
+          <p:nvPr/>
+        </p:nvSpPr>
+        <p:spPr>
+          <a:xfrm>
+            <a:off x="7439376" y="3127248"/>
+            <a:ext cx="3947648" cy="2377440"/>
+          </a:xfrm>
+          <a:prstGeom prst="rect">
+            <a:avLst/>
+          </a:prstGeom>
+          <a:noFill/>
+          <a:ln/>
+        </p:spPr>
+        <p:txBody>
+          <a:bodyPr wrap="square" lIns="0" tIns="0" rIns="0" bIns="0" rtlCol="0" anchor="t"/>
+          <a:lstStyle/>
+          <a:p>
+            <a:pPr algn="l" indent="0" marL="0">
+              <a:lnSpc>
+                <a:spcPct val="108000"/>
+              </a:lnSpc>
+              <a:buNone/>
+            </a:pPr>
+            <a:r>
+              <a:rPr lang="en-US" sz="1250" dirty="0">
+                <a:solidFill>
+                  <a:srgbClr val="33444F"/>
+                </a:solidFill>
+                <a:latin typeface="Calibri" pitchFamily="34" charset="0"/>
+                <a:ea typeface="Calibri" pitchFamily="34" charset="-122"/>
+                <a:cs typeface="Calibri" pitchFamily="34" charset="-120"/>
+              </a:rPr>
+              <a:t>Post-PCR amplicons are a major contamination source; unidirectional workflow prevents false positives.</a:t>
+            </a:r>
+            <a:endParaRPr lang="en-US" sz="1250" dirty="0"/>
+          </a:p>
+        </p:txBody>
+      </p:sp>
+      <p:sp>
+        <p:nvSpPr>
+          <p:cNvPr id="9" name="Text 7"/>
+          <p:cNvSpPr/>
+          <p:nvPr/>
+        </p:nvSpPr>
+        <p:spPr>
+          <a:xfrm>
+            <a:off x="566928" y="6473952"/>
+            <a:ext cx="7772400" cy="274320"/>
+          </a:xfrm>
+          <a:prstGeom prst="rect">
+            <a:avLst/>
+          </a:prstGeom>
+          <a:noFill/>
+          <a:ln/>
+        </p:spPr>
+        <p:txBody>
+          <a:bodyPr wrap="square" lIns="0" tIns="0" rIns="0" bIns="0" rtlCol="0" anchor="ctr"/>
+          <a:lstStyle/>
+          <a:p>
+            <a:pPr algn="l" indent="0" marL="0">
+              <a:buNone/>
+            </a:pPr>
+            <a:r>
+              <a:rPr lang="en-US" sz="850" dirty="0">
+                <a:solidFill>
+                  <a:srgbClr val="9AA8B4"/>
+                </a:solidFill>
+                <a:latin typeface="Calibri" pitchFamily="34" charset="0"/>
+                <a:ea typeface="Calibri" pitchFamily="34" charset="-122"/>
+                <a:cs typeface="Calibri" pitchFamily="34" charset="-120"/>
+              </a:rPr>
+              <a:t>Makassed General Hospital  ·  Department of Laboratory Medicine</a:t>
+            </a:r>
+            <a:endParaRPr lang="en-US" sz="850" dirty="0"/>
+          </a:p>
+        </p:txBody>
+      </p:sp>
+      <p:sp>
+        <p:nvSpPr>
+          <p:cNvPr id="10" name="Text 8"/>
+          <p:cNvSpPr/>
+          <p:nvPr/>
+        </p:nvSpPr>
+        <p:spPr>
+          <a:xfrm>
+            <a:off x="9814255" y="6473952"/>
+            <a:ext cx="1828800" cy="274320"/>
+          </a:xfrm>
+          <a:prstGeom prst="rect">
+            <a:avLst/>
+          </a:prstGeom>
+          <a:noFill/>
+          <a:ln/>
+        </p:spPr>
+        <p:txBody>
+          <a:bodyPr wrap="square" lIns="0" tIns="0" rIns="0" bIns="0" rtlCol="0" anchor="ctr"/>
+          <a:lstStyle/>
+          <a:p>
+            <a:pPr algn="r" indent="0" marL="0">
+              <a:buNone/>
+            </a:pPr>
+            <a:r>
+              <a:rPr lang="en-US" sz="850" dirty="0">
+                <a:solidFill>
+                  <a:srgbClr val="9AA8B4"/>
+                </a:solidFill>
+                <a:latin typeface="Calibri" pitchFamily="34" charset="0"/>
+                <a:ea typeface="Calibri" pitchFamily="34" charset="-122"/>
+                <a:cs typeface="Calibri" pitchFamily="34" charset="-120"/>
+              </a:rPr>
+              <a:t>CP Lecture Series</a:t>
+            </a:r>
+            <a:pPr algn="r" indent="0" marL="0">
+              <a:buNone/>
+            </a:pPr>
+            <a:r>
+              <a:rPr lang="en-US" sz="850" dirty="0">
+                <a:solidFill>
+                  <a:srgbClr val="DCE4EC"/>
+                </a:solidFill>
+                <a:latin typeface="Calibri" pitchFamily="34" charset="0"/>
+                <a:ea typeface="Calibri" pitchFamily="34" charset="-122"/>
+                <a:cs typeface="Calibri" pitchFamily="34" charset="-120"/>
+              </a:rPr>
+              <a:t>   ·   </a:t>
+            </a:r>
+            <a:pPr algn="r" indent="0" marL="0">
+              <a:buNone/>
+            </a:pPr>
+            <a:r>
+              <a:rPr lang="en-US" sz="850" b="1" dirty="0">
+                <a:solidFill>
+                  <a:srgbClr val="00838F"/>
+                </a:solidFill>
+                <a:latin typeface="Calibri" pitchFamily="34" charset="0"/>
+                <a:ea typeface="Calibri" pitchFamily="34" charset="-122"/>
+                <a:cs typeface="Calibri" pitchFamily="34" charset="-120"/>
+              </a:rPr>
+              <a:t>21</a:t>
+            </a:r>
+            <a:endParaRPr lang="en-US" sz="850" dirty="0"/>
+          </a:p>
+        </p:txBody>
+      </p:sp>
+    </p:spTree>
+  </p:cSld>
+  <p:clrMapOvr>
+    <a:masterClrMapping/>
+  </p:clrMapOvr>
+</p:sld>
+</file>
+
+<file path=ppt/slides/slide28.xml><?xml version="1.0" encoding="utf-8"?>
+<p:sld xmlns:a="http://schemas.openxmlformats.org/drawingml/2006/main" xmlns:p="http://schemas.openxmlformats.org/presentationml/2006/main" xmlns:r="http://schemas.openxmlformats.org/officeDocument/2006/relationships">
+  <p:cSld>
+    <p:spTree>
+      <p:nvGrpSpPr>
+        <p:cNvPr id="1" name=""/>
+        <p:cNvGrpSpPr/>
+        <p:nvPr/>
+      </p:nvGrpSpPr>
+      <p:grpSpPr/>
+      <p:sp>
+        <p:nvSpPr>
+          <p:cNvPr id="2" name="Text 0"/>
+          <p:cNvSpPr/>
+          <p:nvPr/>
+        </p:nvSpPr>
+        <p:spPr>
+          <a:xfrm>
+            <a:off x="566928" y="329184"/>
+            <a:ext cx="10515600" cy="310896"/>
+          </a:xfrm>
+          <a:prstGeom prst="rect">
+            <a:avLst/>
+          </a:prstGeom>
+          <a:noFill/>
+          <a:ln/>
+        </p:spPr>
+        <p:txBody>
+          <a:bodyPr wrap="square" lIns="0" tIns="0" rIns="0" bIns="0" rtlCol="0" anchor="ctr"/>
+          <a:lstStyle/>
+          <a:p>
+            <a:pPr algn="l" indent="0" marL="0">
+              <a:buNone/>
+            </a:pPr>
+            <a:r>
+              <a:rPr lang="en-US" sz="1100" b="1" spc="150" kern="0" dirty="0">
+                <a:solidFill>
+                  <a:srgbClr val="00838F"/>
+                </a:solidFill>
+                <a:latin typeface="Calibri" pitchFamily="34" charset="0"/>
+                <a:ea typeface="Calibri" pitchFamily="34" charset="-122"/>
+                <a:cs typeface="Calibri" pitchFamily="34" charset="-120"/>
+              </a:rPr>
+              <a:t>MOLECULAR &amp; CYTOGENETICS   ·   BOARD REVIEW  ·  Q3</a:t>
+            </a:r>
+            <a:endParaRPr lang="en-US" sz="1100" dirty="0"/>
+          </a:p>
+        </p:txBody>
+      </p:sp>
+      <p:sp>
+        <p:nvSpPr>
+          <p:cNvPr id="3" name="Text 1"/>
+          <p:cNvSpPr/>
+          <p:nvPr/>
+        </p:nvSpPr>
+        <p:spPr>
+          <a:xfrm>
+            <a:off x="566928" y="713232"/>
+            <a:ext cx="11064240" cy="749808"/>
+          </a:xfrm>
+          <a:prstGeom prst="rect">
+            <a:avLst/>
+          </a:prstGeom>
+          <a:noFill/>
+          <a:ln/>
+        </p:spPr>
+        <p:txBody>
+          <a:bodyPr wrap="square" lIns="0" tIns="0" rIns="0" bIns="0" rtlCol="0" anchor="ctr"/>
+          <a:lstStyle/>
+          <a:p>
+            <a:pPr algn="l" indent="0" marL="0">
+              <a:buNone/>
+            </a:pPr>
+            <a:r>
+              <a:rPr lang="en-US" sz="2600" b="1" dirty="0">
+                <a:solidFill>
+                  <a:srgbClr val="0E3A5F"/>
+                </a:solidFill>
+                <a:latin typeface="Calibri" pitchFamily="34" charset="0"/>
+                <a:ea typeface="Calibri" pitchFamily="34" charset="-122"/>
+                <a:cs typeface="Calibri" pitchFamily="34" charset="-120"/>
+              </a:rPr>
+              <a:t>Board-Style Review</a:t>
+            </a:r>
+            <a:endParaRPr lang="en-US" sz="2600" dirty="0"/>
+          </a:p>
+        </p:txBody>
+      </p:sp>
+      <p:sp>
+        <p:nvSpPr>
+          <p:cNvPr id="4" name="Text 2"/>
+          <p:cNvSpPr/>
+          <p:nvPr/>
+        </p:nvSpPr>
+        <p:spPr>
+          <a:xfrm>
+            <a:off x="566928" y="1417320"/>
+            <a:ext cx="11057839" cy="914400"/>
+          </a:xfrm>
+          <a:prstGeom prst="rect">
+            <a:avLst/>
+          </a:prstGeom>
+          <a:noFill/>
+          <a:ln/>
+        </p:spPr>
+        <p:txBody>
+          <a:bodyPr wrap="square" lIns="0" tIns="0" rIns="0" bIns="0" rtlCol="0" anchor="t"/>
+          <a:lstStyle/>
+          <a:p>
+            <a:pPr algn="l" indent="0" marL="0">
+              <a:lnSpc>
+                <a:spcPct val="105000"/>
+              </a:lnSpc>
+              <a:buNone/>
+            </a:pPr>
+            <a:r>
+              <a:rPr lang="en-US" sz="1450" b="1" dirty="0">
+                <a:solidFill>
+                  <a:srgbClr val="1B2A38"/>
+                </a:solidFill>
+                <a:latin typeface="Calibri" pitchFamily="34" charset="0"/>
+                <a:ea typeface="Calibri" pitchFamily="34" charset="-122"/>
+                <a:cs typeface="Calibri" pitchFamily="34" charset="-120"/>
+              </a:rPr>
+              <a:t>A balanced (reciprocal) translocation is NOT detectable by:</a:t>
+            </a:r>
+            <a:endParaRPr lang="en-US" sz="1450" dirty="0"/>
+          </a:p>
+        </p:txBody>
+      </p:sp>
+      <p:sp>
+        <p:nvSpPr>
+          <p:cNvPr id="5" name="Text 3"/>
+          <p:cNvSpPr/>
+          <p:nvPr/>
+        </p:nvSpPr>
+        <p:spPr>
+          <a:xfrm>
+            <a:off x="658368" y="2395728"/>
+            <a:ext cx="6192390" cy="3017520"/>
+          </a:xfrm>
+          <a:prstGeom prst="rect">
+            <a:avLst/>
+          </a:prstGeom>
+          <a:noFill/>
+          <a:ln/>
+        </p:spPr>
+        <p:txBody>
+          <a:bodyPr wrap="square" lIns="0" tIns="0" rIns="0" bIns="0" rtlCol="0" anchor="t"/>
+          <a:lstStyle/>
+          <a:p>
+            <a:pPr algn="l" indent="0" marL="0">
+              <a:spcAft>
+                <a:spcPts val="600"/>
+              </a:spcAft>
+              <a:buNone/>
+            </a:pPr>
+            <a:r>
+              <a:rPr lang="en-US" sz="1350" dirty="0">
+                <a:solidFill>
+                  <a:srgbClr val="33444F"/>
+                </a:solidFill>
+                <a:latin typeface="Calibri" pitchFamily="34" charset="0"/>
+                <a:ea typeface="Calibri" pitchFamily="34" charset="-122"/>
+                <a:cs typeface="Calibri" pitchFamily="34" charset="-120"/>
+              </a:rPr>
+              <a:t>A. Karyotype</a:t>
+            </a:r>
+            <a:endParaRPr lang="en-US" sz="1350" dirty="0"/>
+          </a:p>
+          <a:p>
+            <a:pPr algn="l" indent="0" marL="0">
+              <a:spcAft>
+                <a:spcPts val="600"/>
+              </a:spcAft>
+              <a:buNone/>
+            </a:pPr>
+            <a:r>
+              <a:rPr lang="en-US" sz="1350" dirty="0">
+                <a:solidFill>
+                  <a:srgbClr val="33444F"/>
+                </a:solidFill>
+                <a:latin typeface="Calibri" pitchFamily="34" charset="0"/>
+                <a:ea typeface="Calibri" pitchFamily="34" charset="-122"/>
+                <a:cs typeface="Calibri" pitchFamily="34" charset="-120"/>
+              </a:rPr>
+              <a:t>B. FISH (break-apart probe)</a:t>
+            </a:r>
+            <a:endParaRPr lang="en-US" sz="1350" dirty="0"/>
+          </a:p>
+          <a:p>
+            <a:pPr algn="l" indent="0" marL="0">
+              <a:spcAft>
+                <a:spcPts val="600"/>
+              </a:spcAft>
+              <a:buNone/>
+            </a:pPr>
+            <a:r>
+              <a:rPr lang="en-US" sz="1350" b="1" dirty="0">
+                <a:solidFill>
+                  <a:srgbClr val="005A63"/>
+                </a:solidFill>
+                <a:latin typeface="Calibri" pitchFamily="34" charset="0"/>
+                <a:ea typeface="Calibri" pitchFamily="34" charset="-122"/>
+                <a:cs typeface="Calibri" pitchFamily="34" charset="-120"/>
+              </a:rPr>
+              <a:t>C. Chromosomal microarray</a:t>
+            </a:r>
+            <a:endParaRPr lang="en-US" sz="1350" dirty="0"/>
+          </a:p>
+          <a:p>
+            <a:pPr algn="l" indent="0" marL="0">
+              <a:spcAft>
+                <a:spcPts val="600"/>
+              </a:spcAft>
+              <a:buNone/>
+            </a:pPr>
+            <a:r>
+              <a:rPr lang="en-US" sz="1350" dirty="0">
+                <a:solidFill>
+                  <a:srgbClr val="33444F"/>
+                </a:solidFill>
+                <a:latin typeface="Calibri" pitchFamily="34" charset="0"/>
+                <a:ea typeface="Calibri" pitchFamily="34" charset="-122"/>
+                <a:cs typeface="Calibri" pitchFamily="34" charset="-120"/>
+              </a:rPr>
+              <a:t>D. RT-PCR for the fusion</a:t>
+            </a:r>
+            <a:endParaRPr lang="en-US" sz="1350" dirty="0"/>
+          </a:p>
+          <a:p>
+            <a:pPr algn="l" indent="0" marL="0">
+              <a:spcAft>
+                <a:spcPts val="600"/>
+              </a:spcAft>
+              <a:buNone/>
+            </a:pPr>
+            <a:r>
+              <a:rPr lang="en-US" sz="1350" dirty="0">
+                <a:solidFill>
+                  <a:srgbClr val="33444F"/>
+                </a:solidFill>
+                <a:latin typeface="Calibri" pitchFamily="34" charset="0"/>
+                <a:ea typeface="Calibri" pitchFamily="34" charset="-122"/>
+                <a:cs typeface="Calibri" pitchFamily="34" charset="-120"/>
+              </a:rPr>
+              <a:t>E. Metaphase analysis</a:t>
+            </a:r>
+            <a:endParaRPr lang="en-US" sz="1350" dirty="0"/>
+          </a:p>
+        </p:txBody>
+      </p:sp>
+      <p:sp>
+        <p:nvSpPr>
+          <p:cNvPr id="6" name="Shape 4"/>
+          <p:cNvSpPr/>
+          <p:nvPr/>
+        </p:nvSpPr>
+        <p:spPr>
+          <a:xfrm>
+            <a:off x="7201632" y="2395728"/>
+            <a:ext cx="4423136" cy="3246120"/>
+          </a:xfrm>
+          <a:prstGeom prst="roundRect">
+            <a:avLst>
+              <a:gd name="adj" fmla="val 2535"/>
+            </a:avLst>
+          </a:prstGeom>
+          <a:solidFill>
+            <a:srgbClr val="E0F2F4"/>
+          </a:solidFill>
+          <a:ln/>
+          <a:effectLst>
+            <a:outerShdw sx="100000" sy="100000" kx="0" ky="0" algn="bl" rotWithShape="0" blurRad="88900" dist="25400" dir="5400000">
+              <a:srgbClr val="22303C">
+                <a:alpha val="12000"/>
+              </a:srgbClr>
+            </a:outerShdw>
+          </a:effectLst>
+        </p:spPr>
+        <p:txBody>
+          <a:bodyPr/>
+          <a:p/>
+        </p:txBody>
+      </p:sp>
+      <p:sp>
+        <p:nvSpPr>
+          <p:cNvPr id="7" name="Text 5"/>
+          <p:cNvSpPr/>
+          <p:nvPr/>
+        </p:nvSpPr>
+        <p:spPr>
+          <a:xfrm>
+            <a:off x="7439376" y="2578608"/>
+            <a:ext cx="3965936" cy="457200"/>
+          </a:xfrm>
+          <a:prstGeom prst="rect">
+            <a:avLst/>
+          </a:prstGeom>
+          <a:noFill/>
+          <a:ln/>
+        </p:spPr>
+        <p:txBody>
+          <a:bodyPr wrap="square" lIns="0" tIns="0" rIns="0" bIns="0" rtlCol="0" anchor="ctr"/>
+          <a:lstStyle/>
+          <a:p>
+            <a:pPr indent="0" marL="0">
+              <a:buNone/>
+            </a:pPr>
+            <a:r>
+              <a:rPr lang="en-US" sz="1500" b="1" dirty="0">
+                <a:solidFill>
+                  <a:srgbClr val="00838F"/>
+                </a:solidFill>
+                <a:latin typeface="Calibri" pitchFamily="34" charset="0"/>
+                <a:ea typeface="Calibri" pitchFamily="34" charset="-122"/>
+                <a:cs typeface="Calibri" pitchFamily="34" charset="-120"/>
+              </a:rPr>
+              <a:t>ANSWER  </a:t>
+            </a:r>
+            <a:pPr indent="0" marL="0">
+              <a:buNone/>
+            </a:pPr>
+            <a:r>
+              <a:rPr lang="en-US" sz="1500" b="1" dirty="0">
+                <a:solidFill>
+                  <a:srgbClr val="1B2A38"/>
+                </a:solidFill>
+                <a:latin typeface="Calibri" pitchFamily="34" charset="0"/>
+                <a:ea typeface="Calibri" pitchFamily="34" charset="-122"/>
+                <a:cs typeface="Calibri" pitchFamily="34" charset="-120"/>
+              </a:rPr>
+              <a:t>C — Chromosomal microarray</a:t>
+            </a:r>
+            <a:endParaRPr lang="en-US" sz="1500" dirty="0"/>
+          </a:p>
+        </p:txBody>
+      </p:sp>
+      <p:sp>
+        <p:nvSpPr>
+          <p:cNvPr id="8" name="Text 6"/>
+          <p:cNvSpPr/>
+          <p:nvPr/>
+        </p:nvSpPr>
+        <p:spPr>
+          <a:xfrm>
+            <a:off x="7439376" y="3127248"/>
+            <a:ext cx="3947648" cy="2377440"/>
+          </a:xfrm>
+          <a:prstGeom prst="rect">
+            <a:avLst/>
+          </a:prstGeom>
+          <a:noFill/>
+          <a:ln/>
+        </p:spPr>
+        <p:txBody>
+          <a:bodyPr wrap="square" lIns="0" tIns="0" rIns="0" bIns="0" rtlCol="0" anchor="t"/>
+          <a:lstStyle/>
+          <a:p>
+            <a:pPr algn="l" indent="0" marL="0">
+              <a:lnSpc>
+                <a:spcPct val="108000"/>
+              </a:lnSpc>
+              <a:buNone/>
+            </a:pPr>
+            <a:r>
+              <a:rPr lang="en-US" sz="1250" dirty="0">
+                <a:solidFill>
+                  <a:srgbClr val="33444F"/>
+                </a:solidFill>
+                <a:latin typeface="Calibri" pitchFamily="34" charset="0"/>
+                <a:ea typeface="Calibri" pitchFamily="34" charset="-122"/>
+                <a:cs typeface="Calibri" pitchFamily="34" charset="-120"/>
+              </a:rPr>
+              <a:t>Arrays detect copy-number change; a balanced translocation has no net copy-number change and is missed.</a:t>
+            </a:r>
+            <a:endParaRPr lang="en-US" sz="1250" dirty="0"/>
+          </a:p>
+        </p:txBody>
+      </p:sp>
+      <p:sp>
+        <p:nvSpPr>
+          <p:cNvPr id="9" name="Text 7"/>
+          <p:cNvSpPr/>
+          <p:nvPr/>
+        </p:nvSpPr>
+        <p:spPr>
+          <a:xfrm>
+            <a:off x="566928" y="6473952"/>
+            <a:ext cx="7772400" cy="274320"/>
+          </a:xfrm>
+          <a:prstGeom prst="rect">
+            <a:avLst/>
+          </a:prstGeom>
+          <a:noFill/>
+          <a:ln/>
+        </p:spPr>
+        <p:txBody>
+          <a:bodyPr wrap="square" lIns="0" tIns="0" rIns="0" bIns="0" rtlCol="0" anchor="ctr"/>
+          <a:lstStyle/>
+          <a:p>
+            <a:pPr algn="l" indent="0" marL="0">
+              <a:buNone/>
+            </a:pPr>
+            <a:r>
+              <a:rPr lang="en-US" sz="850" dirty="0">
+                <a:solidFill>
+                  <a:srgbClr val="9AA8B4"/>
+                </a:solidFill>
+                <a:latin typeface="Calibri" pitchFamily="34" charset="0"/>
+                <a:ea typeface="Calibri" pitchFamily="34" charset="-122"/>
+                <a:cs typeface="Calibri" pitchFamily="34" charset="-120"/>
+              </a:rPr>
+              <a:t>Makassed General Hospital  ·  Department of Laboratory Medicine</a:t>
+            </a:r>
+            <a:endParaRPr lang="en-US" sz="850" dirty="0"/>
+          </a:p>
+        </p:txBody>
+      </p:sp>
+      <p:sp>
+        <p:nvSpPr>
+          <p:cNvPr id="10" name="Text 8"/>
+          <p:cNvSpPr/>
+          <p:nvPr/>
+        </p:nvSpPr>
+        <p:spPr>
+          <a:xfrm>
+            <a:off x="9814255" y="6473952"/>
+            <a:ext cx="1828800" cy="274320"/>
+          </a:xfrm>
+          <a:prstGeom prst="rect">
+            <a:avLst/>
+          </a:prstGeom>
+          <a:noFill/>
+          <a:ln/>
+        </p:spPr>
+        <p:txBody>
+          <a:bodyPr wrap="square" lIns="0" tIns="0" rIns="0" bIns="0" rtlCol="0" anchor="ctr"/>
+          <a:lstStyle/>
+          <a:p>
+            <a:pPr algn="r" indent="0" marL="0">
+              <a:buNone/>
+            </a:pPr>
+            <a:r>
+              <a:rPr lang="en-US" sz="850" dirty="0">
+                <a:solidFill>
+                  <a:srgbClr val="9AA8B4"/>
+                </a:solidFill>
+                <a:latin typeface="Calibri" pitchFamily="34" charset="0"/>
+                <a:ea typeface="Calibri" pitchFamily="34" charset="-122"/>
+                <a:cs typeface="Calibri" pitchFamily="34" charset="-120"/>
+              </a:rPr>
+              <a:t>CP Lecture Series</a:t>
+            </a:r>
+            <a:pPr algn="r" indent="0" marL="0">
+              <a:buNone/>
+            </a:pPr>
+            <a:r>
+              <a:rPr lang="en-US" sz="850" dirty="0">
+                <a:solidFill>
+                  <a:srgbClr val="DCE4EC"/>
+                </a:solidFill>
+                <a:latin typeface="Calibri" pitchFamily="34" charset="0"/>
+                <a:ea typeface="Calibri" pitchFamily="34" charset="-122"/>
+                <a:cs typeface="Calibri" pitchFamily="34" charset="-120"/>
+              </a:rPr>
+              <a:t>   ·   </a:t>
+            </a:r>
+            <a:pPr algn="r" indent="0" marL="0">
+              <a:buNone/>
+            </a:pPr>
+            <a:r>
+              <a:rPr lang="en-US" sz="850" b="1" dirty="0">
+                <a:solidFill>
+                  <a:srgbClr val="00838F"/>
+                </a:solidFill>
+                <a:latin typeface="Calibri" pitchFamily="34" charset="0"/>
+                <a:ea typeface="Calibri" pitchFamily="34" charset="-122"/>
+                <a:cs typeface="Calibri" pitchFamily="34" charset="-120"/>
+              </a:rPr>
+              <a:t>20</a:t>
+            </a:r>
+            <a:endParaRPr lang="en-US" sz="850" dirty="0"/>
+          </a:p>
+        </p:txBody>
+      </p:sp>
+    </p:spTree>
+  </p:cSld>
+  <p:clrMapOvr>
+    <a:masterClrMapping/>
+  </p:clrMapOvr>
+</p:sld>
+</file>
+
+<file path=ppt/slides/slide29.xml><?xml version="1.0" encoding="utf-8"?>
+<p:sld xmlns:a="http://schemas.openxmlformats.org/drawingml/2006/main" xmlns:p="http://schemas.openxmlformats.org/presentationml/2006/main" xmlns:r="http://schemas.openxmlformats.org/officeDocument/2006/relationships">
+  <p:cSld>
+    <p:spTree>
+      <p:nvGrpSpPr>
+        <p:cNvPr id="1" name=""/>
+        <p:cNvGrpSpPr/>
+        <p:nvPr/>
+      </p:nvGrpSpPr>
+      <p:grpSpPr/>
+      <p:sp>
+        <p:nvSpPr>
+          <p:cNvPr id="2" name="Text 0"/>
+          <p:cNvSpPr/>
+          <p:nvPr/>
+        </p:nvSpPr>
+        <p:spPr>
+          <a:xfrm>
+            <a:off x="566928" y="329184"/>
+            <a:ext cx="10515600" cy="310896"/>
+          </a:xfrm>
+          <a:prstGeom prst="rect">
+            <a:avLst/>
+          </a:prstGeom>
+          <a:noFill/>
+          <a:ln/>
+        </p:spPr>
+        <p:txBody>
+          <a:bodyPr wrap="square" lIns="0" tIns="0" rIns="0" bIns="0" rtlCol="0" anchor="ctr"/>
+          <a:lstStyle/>
+          <a:p>
+            <a:pPr algn="l" indent="0" marL="0">
+              <a:buNone/>
+            </a:pPr>
+            <a:r>
+              <a:rPr lang="en-US" sz="1100" b="1" spc="150" kern="0" dirty="0">
+                <a:solidFill>
+                  <a:srgbClr val="00838F"/>
+                </a:solidFill>
+                <a:latin typeface="Calibri" pitchFamily="34" charset="0"/>
+                <a:ea typeface="Calibri" pitchFamily="34" charset="-122"/>
+                <a:cs typeface="Calibri" pitchFamily="34" charset="-120"/>
+              </a:rPr>
+              <a:t>MOLECULAR &amp; CYTOGENETICS   ·   BOARD REVIEW  ·  Q2</a:t>
+            </a:r>
+            <a:endParaRPr lang="en-US" sz="1100" dirty="0"/>
+          </a:p>
+        </p:txBody>
+      </p:sp>
+      <p:sp>
+        <p:nvSpPr>
+          <p:cNvPr id="3" name="Text 1"/>
+          <p:cNvSpPr/>
+          <p:nvPr/>
+        </p:nvSpPr>
+        <p:spPr>
+          <a:xfrm>
+            <a:off x="566928" y="713232"/>
+            <a:ext cx="11064240" cy="749808"/>
+          </a:xfrm>
+          <a:prstGeom prst="rect">
+            <a:avLst/>
+          </a:prstGeom>
+          <a:noFill/>
+          <a:ln/>
+        </p:spPr>
+        <p:txBody>
+          <a:bodyPr wrap="square" lIns="0" tIns="0" rIns="0" bIns="0" rtlCol="0" anchor="ctr"/>
+          <a:lstStyle/>
+          <a:p>
+            <a:pPr algn="l" indent="0" marL="0">
+              <a:buNone/>
+            </a:pPr>
+            <a:r>
+              <a:rPr lang="en-US" sz="2600" b="1" dirty="0">
+                <a:solidFill>
+                  <a:srgbClr val="0E3A5F"/>
+                </a:solidFill>
+                <a:latin typeface="Calibri" pitchFamily="34" charset="0"/>
+                <a:ea typeface="Calibri" pitchFamily="34" charset="-122"/>
+                <a:cs typeface="Calibri" pitchFamily="34" charset="-120"/>
+              </a:rPr>
+              <a:t>Board-Style Review</a:t>
+            </a:r>
+            <a:endParaRPr lang="en-US" sz="2600" dirty="0"/>
+          </a:p>
+        </p:txBody>
+      </p:sp>
+      <p:sp>
+        <p:nvSpPr>
+          <p:cNvPr id="4" name="Text 2"/>
+          <p:cNvSpPr/>
+          <p:nvPr/>
+        </p:nvSpPr>
+        <p:spPr>
+          <a:xfrm>
+            <a:off x="566928" y="1417320"/>
+            <a:ext cx="11057839" cy="914400"/>
+          </a:xfrm>
+          <a:prstGeom prst="rect">
+            <a:avLst/>
+          </a:prstGeom>
+          <a:noFill/>
+          <a:ln/>
+        </p:spPr>
+        <p:txBody>
+          <a:bodyPr wrap="square" lIns="0" tIns="0" rIns="0" bIns="0" rtlCol="0" anchor="t"/>
+          <a:lstStyle/>
+          <a:p>
+            <a:pPr algn="l" indent="0" marL="0">
+              <a:lnSpc>
+                <a:spcPct val="105000"/>
+              </a:lnSpc>
+              <a:buNone/>
+            </a:pPr>
+            <a:r>
+              <a:rPr lang="en-US" sz="1450" b="1" dirty="0">
+                <a:solidFill>
+                  <a:srgbClr val="1B2A38"/>
+                </a:solidFill>
+                <a:latin typeface="Calibri" pitchFamily="34" charset="0"/>
+                <a:ea typeface="Calibri" pitchFamily="34" charset="-122"/>
+                <a:cs typeface="Calibri" pitchFamily="34" charset="-120"/>
+              </a:rPr>
+              <a:t>Which method provides absolute quantitation without a standard curve?</a:t>
+            </a:r>
+            <a:endParaRPr lang="en-US" sz="1450" dirty="0"/>
+          </a:p>
+        </p:txBody>
+      </p:sp>
+      <p:sp>
+        <p:nvSpPr>
+          <p:cNvPr id="5" name="Text 3"/>
+          <p:cNvSpPr/>
+          <p:nvPr/>
+        </p:nvSpPr>
+        <p:spPr>
+          <a:xfrm>
+            <a:off x="658368" y="2395728"/>
+            <a:ext cx="6192390" cy="3017520"/>
+          </a:xfrm>
+          <a:prstGeom prst="rect">
+            <a:avLst/>
+          </a:prstGeom>
+          <a:noFill/>
+          <a:ln/>
+        </p:spPr>
+        <p:txBody>
+          <a:bodyPr wrap="square" lIns="0" tIns="0" rIns="0" bIns="0" rtlCol="0" anchor="t"/>
+          <a:lstStyle/>
+          <a:p>
+            <a:pPr algn="l" indent="0" marL="0">
+              <a:spcAft>
+                <a:spcPts val="600"/>
+              </a:spcAft>
+              <a:buNone/>
+            </a:pPr>
+            <a:r>
+              <a:rPr lang="en-US" sz="1350" dirty="0">
+                <a:solidFill>
+                  <a:srgbClr val="33444F"/>
+                </a:solidFill>
+                <a:latin typeface="Calibri" pitchFamily="34" charset="0"/>
+                <a:ea typeface="Calibri" pitchFamily="34" charset="-122"/>
+                <a:cs typeface="Calibri" pitchFamily="34" charset="-120"/>
+              </a:rPr>
+              <a:t>A. Conventional PCR</a:t>
+            </a:r>
+            <a:endParaRPr lang="en-US" sz="1350" dirty="0"/>
+          </a:p>
+          <a:p>
+            <a:pPr algn="l" indent="0" marL="0">
+              <a:spcAft>
+                <a:spcPts val="600"/>
+              </a:spcAft>
+              <a:buNone/>
+            </a:pPr>
+            <a:r>
+              <a:rPr lang="en-US" sz="1350" dirty="0">
+                <a:solidFill>
+                  <a:srgbClr val="33444F"/>
+                </a:solidFill>
+                <a:latin typeface="Calibri" pitchFamily="34" charset="0"/>
+                <a:ea typeface="Calibri" pitchFamily="34" charset="-122"/>
+                <a:cs typeface="Calibri" pitchFamily="34" charset="-120"/>
+              </a:rPr>
+              <a:t>B. Sanger sequencing</a:t>
+            </a:r>
+            <a:endParaRPr lang="en-US" sz="1350" dirty="0"/>
+          </a:p>
+          <a:p>
+            <a:pPr algn="l" indent="0" marL="0">
+              <a:spcAft>
+                <a:spcPts val="600"/>
+              </a:spcAft>
+              <a:buNone/>
+            </a:pPr>
+            <a:r>
+              <a:rPr lang="en-US" sz="1350" b="1" dirty="0">
+                <a:solidFill>
+                  <a:srgbClr val="005A63"/>
+                </a:solidFill>
+                <a:latin typeface="Calibri" pitchFamily="34" charset="0"/>
+                <a:ea typeface="Calibri" pitchFamily="34" charset="-122"/>
+                <a:cs typeface="Calibri" pitchFamily="34" charset="-120"/>
+              </a:rPr>
+              <a:t>C. Digital PCR</a:t>
+            </a:r>
+            <a:endParaRPr lang="en-US" sz="1350" dirty="0"/>
+          </a:p>
+          <a:p>
+            <a:pPr algn="l" indent="0" marL="0">
+              <a:spcAft>
+                <a:spcPts val="600"/>
+              </a:spcAft>
+              <a:buNone/>
+            </a:pPr>
+            <a:r>
+              <a:rPr lang="en-US" sz="1350" dirty="0">
+                <a:solidFill>
+                  <a:srgbClr val="33444F"/>
+                </a:solidFill>
+                <a:latin typeface="Calibri" pitchFamily="34" charset="0"/>
+                <a:ea typeface="Calibri" pitchFamily="34" charset="-122"/>
+                <a:cs typeface="Calibri" pitchFamily="34" charset="-120"/>
+              </a:rPr>
+              <a:t>D. FISH</a:t>
+            </a:r>
+            <a:endParaRPr lang="en-US" sz="1350" dirty="0"/>
+          </a:p>
+          <a:p>
+            <a:pPr algn="l" indent="0" marL="0">
+              <a:spcAft>
+                <a:spcPts val="600"/>
+              </a:spcAft>
+              <a:buNone/>
+            </a:pPr>
+            <a:r>
+              <a:rPr lang="en-US" sz="1350" dirty="0">
+                <a:solidFill>
+                  <a:srgbClr val="33444F"/>
+                </a:solidFill>
+                <a:latin typeface="Calibri" pitchFamily="34" charset="0"/>
+                <a:ea typeface="Calibri" pitchFamily="34" charset="-122"/>
+                <a:cs typeface="Calibri" pitchFamily="34" charset="-120"/>
+              </a:rPr>
+              <a:t>E. Microarray</a:t>
+            </a:r>
+            <a:endParaRPr lang="en-US" sz="1350" dirty="0"/>
+          </a:p>
+        </p:txBody>
+      </p:sp>
+      <p:sp>
+        <p:nvSpPr>
+          <p:cNvPr id="6" name="Shape 4"/>
+          <p:cNvSpPr/>
+          <p:nvPr/>
+        </p:nvSpPr>
+        <p:spPr>
+          <a:xfrm>
+            <a:off x="7201632" y="2395728"/>
+            <a:ext cx="4423136" cy="3246120"/>
+          </a:xfrm>
+          <a:prstGeom prst="roundRect">
+            <a:avLst>
+              <a:gd name="adj" fmla="val 2535"/>
+            </a:avLst>
+          </a:prstGeom>
+          <a:solidFill>
+            <a:srgbClr val="E0F2F4"/>
+          </a:solidFill>
+          <a:ln/>
+          <a:effectLst>
+            <a:outerShdw sx="100000" sy="100000" kx="0" ky="0" algn="bl" rotWithShape="0" blurRad="88900" dist="25400" dir="5400000">
+              <a:srgbClr val="22303C">
+                <a:alpha val="12000"/>
+              </a:srgbClr>
+            </a:outerShdw>
+          </a:effectLst>
+        </p:spPr>
+        <p:txBody>
+          <a:bodyPr/>
+          <a:p/>
+        </p:txBody>
+      </p:sp>
+      <p:sp>
+        <p:nvSpPr>
+          <p:cNvPr id="7" name="Text 5"/>
+          <p:cNvSpPr/>
+          <p:nvPr/>
+        </p:nvSpPr>
+        <p:spPr>
+          <a:xfrm>
+            <a:off x="7439376" y="2578608"/>
+            <a:ext cx="3965936" cy="457200"/>
+          </a:xfrm>
+          <a:prstGeom prst="rect">
+            <a:avLst/>
+          </a:prstGeom>
+          <a:noFill/>
+          <a:ln/>
+        </p:spPr>
+        <p:txBody>
+          <a:bodyPr wrap="square" lIns="0" tIns="0" rIns="0" bIns="0" rtlCol="0" anchor="ctr"/>
+          <a:lstStyle/>
+          <a:p>
+            <a:pPr indent="0" marL="0">
+              <a:buNone/>
+            </a:pPr>
+            <a:r>
+              <a:rPr lang="en-US" sz="1500" b="1" dirty="0">
+                <a:solidFill>
+                  <a:srgbClr val="00838F"/>
+                </a:solidFill>
+                <a:latin typeface="Calibri" pitchFamily="34" charset="0"/>
+                <a:ea typeface="Calibri" pitchFamily="34" charset="-122"/>
+                <a:cs typeface="Calibri" pitchFamily="34" charset="-120"/>
+              </a:rPr>
+              <a:t>ANSWER  </a:t>
+            </a:r>
+            <a:pPr indent="0" marL="0">
+              <a:buNone/>
+            </a:pPr>
+            <a:r>
+              <a:rPr lang="en-US" sz="1500" b="1" dirty="0">
+                <a:solidFill>
+                  <a:srgbClr val="1B2A38"/>
+                </a:solidFill>
+                <a:latin typeface="Calibri" pitchFamily="34" charset="0"/>
+                <a:ea typeface="Calibri" pitchFamily="34" charset="-122"/>
+                <a:cs typeface="Calibri" pitchFamily="34" charset="-120"/>
+              </a:rPr>
+              <a:t>C — Digital PCR</a:t>
+            </a:r>
+            <a:endParaRPr lang="en-US" sz="1500" dirty="0"/>
+          </a:p>
+        </p:txBody>
+      </p:sp>
+      <p:sp>
+        <p:nvSpPr>
+          <p:cNvPr id="8" name="Text 6"/>
+          <p:cNvSpPr/>
+          <p:nvPr/>
+        </p:nvSpPr>
+        <p:spPr>
+          <a:xfrm>
+            <a:off x="7439376" y="3127248"/>
+            <a:ext cx="3947648" cy="2377440"/>
+          </a:xfrm>
+          <a:prstGeom prst="rect">
+            <a:avLst/>
+          </a:prstGeom>
+          <a:noFill/>
+          <a:ln/>
+        </p:spPr>
+        <p:txBody>
+          <a:bodyPr wrap="square" lIns="0" tIns="0" rIns="0" bIns="0" rtlCol="0" anchor="t"/>
+          <a:lstStyle/>
+          <a:p>
+            <a:pPr algn="l" indent="0" marL="0">
+              <a:lnSpc>
+                <a:spcPct val="108000"/>
+              </a:lnSpc>
+              <a:buNone/>
+            </a:pPr>
+            <a:r>
+              <a:rPr lang="en-US" sz="1250" dirty="0">
+                <a:solidFill>
+                  <a:srgbClr val="33444F"/>
+                </a:solidFill>
+                <a:latin typeface="Calibri" pitchFamily="34" charset="0"/>
+                <a:ea typeface="Calibri" pitchFamily="34" charset="-122"/>
+                <a:cs typeface="Calibri" pitchFamily="34" charset="-120"/>
+              </a:rPr>
+              <a:t>Digital PCR partitions the reaction to count targets directly, giving absolute quantitation without a standard curve.</a:t>
+            </a:r>
+            <a:endParaRPr lang="en-US" sz="1250" dirty="0"/>
+          </a:p>
+        </p:txBody>
+      </p:sp>
+      <p:sp>
+        <p:nvSpPr>
+          <p:cNvPr id="9" name="Text 7"/>
+          <p:cNvSpPr/>
+          <p:nvPr/>
+        </p:nvSpPr>
+        <p:spPr>
+          <a:xfrm>
+            <a:off x="566928" y="6473952"/>
+            <a:ext cx="7772400" cy="274320"/>
+          </a:xfrm>
+          <a:prstGeom prst="rect">
+            <a:avLst/>
+          </a:prstGeom>
+          <a:noFill/>
+          <a:ln/>
+        </p:spPr>
+        <p:txBody>
+          <a:bodyPr wrap="square" lIns="0" tIns="0" rIns="0" bIns="0" rtlCol="0" anchor="ctr"/>
+          <a:lstStyle/>
+          <a:p>
+            <a:pPr algn="l" indent="0" marL="0">
+              <a:buNone/>
+            </a:pPr>
+            <a:r>
+              <a:rPr lang="en-US" sz="850" dirty="0">
+                <a:solidFill>
+                  <a:srgbClr val="9AA8B4"/>
+                </a:solidFill>
+                <a:latin typeface="Calibri" pitchFamily="34" charset="0"/>
+                <a:ea typeface="Calibri" pitchFamily="34" charset="-122"/>
+                <a:cs typeface="Calibri" pitchFamily="34" charset="-120"/>
+              </a:rPr>
+              <a:t>Makassed General Hospital  ·  Department of Laboratory Medicine</a:t>
+            </a:r>
+            <a:endParaRPr lang="en-US" sz="850" dirty="0"/>
+          </a:p>
+        </p:txBody>
+      </p:sp>
+      <p:sp>
+        <p:nvSpPr>
+          <p:cNvPr id="10" name="Text 8"/>
+          <p:cNvSpPr/>
+          <p:nvPr/>
+        </p:nvSpPr>
+        <p:spPr>
+          <a:xfrm>
+            <a:off x="9814255" y="6473952"/>
+            <a:ext cx="1828800" cy="274320"/>
+          </a:xfrm>
+          <a:prstGeom prst="rect">
+            <a:avLst/>
+          </a:prstGeom>
+          <a:noFill/>
+          <a:ln/>
+        </p:spPr>
+        <p:txBody>
+          <a:bodyPr wrap="square" lIns="0" tIns="0" rIns="0" bIns="0" rtlCol="0" anchor="ctr"/>
+          <a:lstStyle/>
+          <a:p>
+            <a:pPr algn="r" indent="0" marL="0">
+              <a:buNone/>
+            </a:pPr>
+            <a:r>
+              <a:rPr lang="en-US" sz="850" dirty="0">
+                <a:solidFill>
+                  <a:srgbClr val="9AA8B4"/>
+                </a:solidFill>
+                <a:latin typeface="Calibri" pitchFamily="34" charset="0"/>
+                <a:ea typeface="Calibri" pitchFamily="34" charset="-122"/>
+                <a:cs typeface="Calibri" pitchFamily="34" charset="-120"/>
+              </a:rPr>
+              <a:t>CP Lecture Series</a:t>
+            </a:r>
+            <a:pPr algn="r" indent="0" marL="0">
+              <a:buNone/>
+            </a:pPr>
+            <a:r>
+              <a:rPr lang="en-US" sz="850" dirty="0">
+                <a:solidFill>
+                  <a:srgbClr val="DCE4EC"/>
+                </a:solidFill>
+                <a:latin typeface="Calibri" pitchFamily="34" charset="0"/>
+                <a:ea typeface="Calibri" pitchFamily="34" charset="-122"/>
+                <a:cs typeface="Calibri" pitchFamily="34" charset="-120"/>
+              </a:rPr>
+              <a:t>   ·   </a:t>
+            </a:r>
+            <a:pPr algn="r" indent="0" marL="0">
+              <a:buNone/>
+            </a:pPr>
+            <a:r>
+              <a:rPr lang="en-US" sz="850" b="1" dirty="0">
+                <a:solidFill>
+                  <a:srgbClr val="00838F"/>
+                </a:solidFill>
+                <a:latin typeface="Calibri" pitchFamily="34" charset="0"/>
+                <a:ea typeface="Calibri" pitchFamily="34" charset="-122"/>
+                <a:cs typeface="Calibri" pitchFamily="34" charset="-120"/>
+              </a:rPr>
+              <a:t>19</a:t>
+            </a:r>
+            <a:endParaRPr lang="en-US" sz="850" dirty="0"/>
+          </a:p>
+        </p:txBody>
+      </p:sp>
+    </p:spTree>
+  </p:cSld>
+  <p:clrMapOvr>
+    <a:masterClrMapping/>
+  </p:clrMapOvr>
+</p:sld>
+</file>
+
 <file path=ppt/slides/slide3.xml><?xml version="1.0" encoding="utf-8"?>
 <p:sld xmlns:a="http://schemas.openxmlformats.org/drawingml/2006/main" xmlns:r="http://schemas.openxmlformats.org/officeDocument/2006/relationships" xmlns:p="http://schemas.openxmlformats.org/presentationml/2006/main">
   <p:cSld name="Slide 3">
@@ -12204,6 +13338,10 @@
             </a:outerShdw>
           </a:effectLst>
         </p:spPr>
+        <p:txBody>
+          <a:bodyPr/>
+          <a:p/>
+        </p:txBody>
       </p:sp>
       <p:sp>
         <p:nvSpPr>
@@ -12231,6 +13369,10 @@
             </a:outerShdw>
           </a:effectLst>
         </p:spPr>
+        <p:txBody>
+          <a:bodyPr/>
+          <a:p/>
+        </p:txBody>
       </p:sp>
       <p:sp>
         <p:nvSpPr>
@@ -12338,6 +13480,10 @@
             </a:outerShdw>
           </a:effectLst>
         </p:spPr>
+        <p:txBody>
+          <a:bodyPr/>
+          <a:p/>
+        </p:txBody>
       </p:sp>
       <p:sp>
         <p:nvSpPr>
@@ -12365,6 +13511,10 @@
             </a:outerShdw>
           </a:effectLst>
         </p:spPr>
+        <p:txBody>
+          <a:bodyPr/>
+          <a:p/>
+        </p:txBody>
       </p:sp>
       <p:sp>
         <p:nvSpPr>
@@ -12472,6 +13622,10 @@
             </a:outerShdw>
           </a:effectLst>
         </p:spPr>
+        <p:txBody>
+          <a:bodyPr/>
+          <a:p/>
+        </p:txBody>
       </p:sp>
       <p:sp>
         <p:nvSpPr>
@@ -12499,6 +13653,10 @@
             </a:outerShdw>
           </a:effectLst>
         </p:spPr>
+        <p:txBody>
+          <a:bodyPr/>
+          <a:p/>
+        </p:txBody>
       </p:sp>
       <p:sp>
         <p:nvSpPr>
@@ -12606,6 +13764,10 @@
             </a:outerShdw>
           </a:effectLst>
         </p:spPr>
+        <p:txBody>
+          <a:bodyPr/>
+          <a:p/>
+        </p:txBody>
       </p:sp>
       <p:sp>
         <p:nvSpPr>
@@ -12633,6 +13795,10 @@
             </a:outerShdw>
           </a:effectLst>
         </p:spPr>
+        <p:txBody>
+          <a:bodyPr/>
+          <a:p/>
+        </p:txBody>
       </p:sp>
       <p:sp>
         <p:nvSpPr>
@@ -12740,6 +13906,10 @@
             </a:outerShdw>
           </a:effectLst>
         </p:spPr>
+        <p:txBody>
+          <a:bodyPr/>
+          <a:p/>
+        </p:txBody>
       </p:sp>
       <p:sp>
         <p:nvSpPr>
@@ -12767,6 +13937,10 @@
             </a:outerShdw>
           </a:effectLst>
         </p:spPr>
+        <p:txBody>
+          <a:bodyPr/>
+          <a:p/>
+        </p:txBody>
       </p:sp>
       <p:sp>
         <p:nvSpPr>
@@ -12874,6 +14048,10 @@
             </a:outerShdw>
           </a:effectLst>
         </p:spPr>
+        <p:txBody>
+          <a:bodyPr/>
+          <a:p/>
+        </p:txBody>
       </p:sp>
       <p:sp>
         <p:nvSpPr>
@@ -12901,6 +14079,10 @@
             </a:outerShdw>
           </a:effectLst>
         </p:spPr>
+        <p:txBody>
+          <a:bodyPr/>
+          <a:p/>
+        </p:txBody>
       </p:sp>
       <p:sp>
         <p:nvSpPr>
@@ -13081,6 +14263,500 @@
                 <a:cs typeface="Calibri" pitchFamily="34" charset="-120"/>
               </a:rPr>
               <a:t>3</a:t>
+            </a:r>
+            <a:endParaRPr lang="en-US" sz="850" dirty="0"/>
+          </a:p>
+        </p:txBody>
+      </p:sp>
+    </p:spTree>
+  </p:cSld>
+  <p:clrMapOvr>
+    <a:masterClrMapping/>
+  </p:clrMapOvr>
+</p:sld>
+</file>
+
+<file path=ppt/slides/slide30.xml><?xml version="1.0" encoding="utf-8"?>
+<p:sld xmlns:a="http://schemas.openxmlformats.org/drawingml/2006/main" xmlns:p="http://schemas.openxmlformats.org/presentationml/2006/main" xmlns:r="http://schemas.openxmlformats.org/officeDocument/2006/relationships">
+  <p:cSld>
+    <p:spTree>
+      <p:nvGrpSpPr>
+        <p:cNvPr id="1" name=""/>
+        <p:cNvGrpSpPr/>
+        <p:nvPr/>
+      </p:nvGrpSpPr>
+      <p:grpSpPr/>
+      <p:sp>
+        <p:nvSpPr>
+          <p:cNvPr id="2" name="Text 0"/>
+          <p:cNvSpPr/>
+          <p:nvPr/>
+        </p:nvSpPr>
+        <p:spPr>
+          <a:xfrm>
+            <a:off x="566928" y="329184"/>
+            <a:ext cx="10515600" cy="310896"/>
+          </a:xfrm>
+          <a:prstGeom prst="rect">
+            <a:avLst/>
+          </a:prstGeom>
+          <a:noFill/>
+          <a:ln/>
+        </p:spPr>
+        <p:txBody>
+          <a:bodyPr wrap="square" lIns="0" tIns="0" rIns="0" bIns="0" rtlCol="0" anchor="ctr"/>
+          <a:lstStyle/>
+          <a:p>
+            <a:pPr algn="l" indent="0" marL="0">
+              <a:buNone/>
+            </a:pPr>
+            <a:r>
+              <a:rPr lang="en-US" sz="1100" b="1" spc="150" kern="0" dirty="0">
+                <a:solidFill>
+                  <a:srgbClr val="00838F"/>
+                </a:solidFill>
+                <a:latin typeface="Calibri" pitchFamily="34" charset="0"/>
+                <a:ea typeface="Calibri" pitchFamily="34" charset="-122"/>
+                <a:cs typeface="Calibri" pitchFamily="34" charset="-120"/>
+              </a:rPr>
+              <a:t>MOLECULAR &amp; CYTOGENETICS   ·   BOARD REVIEW  ·  Q1</a:t>
+            </a:r>
+            <a:endParaRPr lang="en-US" sz="1100" dirty="0"/>
+          </a:p>
+        </p:txBody>
+      </p:sp>
+      <p:sp>
+        <p:nvSpPr>
+          <p:cNvPr id="3" name="Text 1"/>
+          <p:cNvSpPr/>
+          <p:nvPr/>
+        </p:nvSpPr>
+        <p:spPr>
+          <a:xfrm>
+            <a:off x="566928" y="713232"/>
+            <a:ext cx="11064240" cy="749808"/>
+          </a:xfrm>
+          <a:prstGeom prst="rect">
+            <a:avLst/>
+          </a:prstGeom>
+          <a:noFill/>
+          <a:ln/>
+        </p:spPr>
+        <p:txBody>
+          <a:bodyPr wrap="square" lIns="0" tIns="0" rIns="0" bIns="0" rtlCol="0" anchor="ctr"/>
+          <a:lstStyle/>
+          <a:p>
+            <a:pPr algn="l" indent="0" marL="0">
+              <a:buNone/>
+            </a:pPr>
+            <a:r>
+              <a:rPr lang="en-US" sz="2600" b="1" dirty="0">
+                <a:solidFill>
+                  <a:srgbClr val="0E3A5F"/>
+                </a:solidFill>
+                <a:latin typeface="Calibri" pitchFamily="34" charset="0"/>
+                <a:ea typeface="Calibri" pitchFamily="34" charset="-122"/>
+                <a:cs typeface="Calibri" pitchFamily="34" charset="-120"/>
+              </a:rPr>
+              <a:t>Board-Style Review</a:t>
+            </a:r>
+            <a:endParaRPr lang="en-US" sz="2600" dirty="0"/>
+          </a:p>
+        </p:txBody>
+      </p:sp>
+      <p:sp>
+        <p:nvSpPr>
+          <p:cNvPr id="4" name="Text 2"/>
+          <p:cNvSpPr/>
+          <p:nvPr/>
+        </p:nvSpPr>
+        <p:spPr>
+          <a:xfrm>
+            <a:off x="566928" y="1417320"/>
+            <a:ext cx="11057839" cy="914400"/>
+          </a:xfrm>
+          <a:prstGeom prst="rect">
+            <a:avLst/>
+          </a:prstGeom>
+          <a:noFill/>
+          <a:ln/>
+        </p:spPr>
+        <p:txBody>
+          <a:bodyPr wrap="square" lIns="0" tIns="0" rIns="0" bIns="0" rtlCol="0" anchor="t"/>
+          <a:lstStyle/>
+          <a:p>
+            <a:pPr algn="l" indent="0" marL="0">
+              <a:lnSpc>
+                <a:spcPct val="105000"/>
+              </a:lnSpc>
+              <a:buNone/>
+            </a:pPr>
+            <a:r>
+              <a:rPr lang="en-US" sz="1450" b="1" dirty="0">
+                <a:solidFill>
+                  <a:srgbClr val="1B2A38"/>
+                </a:solidFill>
+                <a:latin typeface="Calibri" pitchFamily="34" charset="0"/>
+                <a:ea typeface="Calibri" pitchFamily="34" charset="-122"/>
+                <a:cs typeface="Calibri" pitchFamily="34" charset="-120"/>
+              </a:rPr>
+              <a:t>In qPCR, a lower cycle threshold (Ct) indicates:</a:t>
+            </a:r>
+            <a:endParaRPr lang="en-US" sz="1450" dirty="0"/>
+          </a:p>
+        </p:txBody>
+      </p:sp>
+      <p:sp>
+        <p:nvSpPr>
+          <p:cNvPr id="5" name="Text 3"/>
+          <p:cNvSpPr/>
+          <p:nvPr/>
+        </p:nvSpPr>
+        <p:spPr>
+          <a:xfrm>
+            <a:off x="658368" y="2395728"/>
+            <a:ext cx="6192390" cy="3017520"/>
+          </a:xfrm>
+          <a:prstGeom prst="rect">
+            <a:avLst/>
+          </a:prstGeom>
+          <a:noFill/>
+          <a:ln/>
+        </p:spPr>
+        <p:txBody>
+          <a:bodyPr wrap="square" lIns="0" tIns="0" rIns="0" bIns="0" rtlCol="0" anchor="t"/>
+          <a:lstStyle/>
+          <a:p>
+            <a:pPr algn="l" indent="0" marL="0">
+              <a:spcAft>
+                <a:spcPts val="600"/>
+              </a:spcAft>
+              <a:buNone/>
+            </a:pPr>
+            <a:r>
+              <a:rPr lang="en-US" sz="1350" dirty="0">
+                <a:solidFill>
+                  <a:srgbClr val="33444F"/>
+                </a:solidFill>
+                <a:latin typeface="Calibri" pitchFamily="34" charset="0"/>
+                <a:ea typeface="Calibri" pitchFamily="34" charset="-122"/>
+                <a:cs typeface="Calibri" pitchFamily="34" charset="-120"/>
+              </a:rPr>
+              <a:t>A. Less starting template</a:t>
+            </a:r>
+            <a:endParaRPr lang="en-US" sz="1350" dirty="0"/>
+          </a:p>
+          <a:p>
+            <a:pPr algn="l" indent="0" marL="0">
+              <a:spcAft>
+                <a:spcPts val="600"/>
+              </a:spcAft>
+              <a:buNone/>
+            </a:pPr>
+            <a:r>
+              <a:rPr lang="en-US" sz="1350" b="1" dirty="0">
+                <a:solidFill>
+                  <a:srgbClr val="005A63"/>
+                </a:solidFill>
+                <a:latin typeface="Calibri" pitchFamily="34" charset="0"/>
+                <a:ea typeface="Calibri" pitchFamily="34" charset="-122"/>
+                <a:cs typeface="Calibri" pitchFamily="34" charset="-120"/>
+              </a:rPr>
+              <a:t>B. More starting template</a:t>
+            </a:r>
+            <a:endParaRPr lang="en-US" sz="1350" dirty="0"/>
+          </a:p>
+          <a:p>
+            <a:pPr algn="l" indent="0" marL="0">
+              <a:spcAft>
+                <a:spcPts val="600"/>
+              </a:spcAft>
+              <a:buNone/>
+            </a:pPr>
+            <a:r>
+              <a:rPr lang="en-US" sz="1350" dirty="0">
+                <a:solidFill>
+                  <a:srgbClr val="33444F"/>
+                </a:solidFill>
+                <a:latin typeface="Calibri" pitchFamily="34" charset="0"/>
+                <a:ea typeface="Calibri" pitchFamily="34" charset="-122"/>
+                <a:cs typeface="Calibri" pitchFamily="34" charset="-120"/>
+              </a:rPr>
+              <a:t>C. Contamination</a:t>
+            </a:r>
+            <a:endParaRPr lang="en-US" sz="1350" dirty="0"/>
+          </a:p>
+          <a:p>
+            <a:pPr algn="l" indent="0" marL="0">
+              <a:spcAft>
+                <a:spcPts val="600"/>
+              </a:spcAft>
+              <a:buNone/>
+            </a:pPr>
+            <a:r>
+              <a:rPr lang="en-US" sz="1350" dirty="0">
+                <a:solidFill>
+                  <a:srgbClr val="33444F"/>
+                </a:solidFill>
+                <a:latin typeface="Calibri" pitchFamily="34" charset="0"/>
+                <a:ea typeface="Calibri" pitchFamily="34" charset="-122"/>
+                <a:cs typeface="Calibri" pitchFamily="34" charset="-120"/>
+              </a:rPr>
+              <a:t>D. Inhibition</a:t>
+            </a:r>
+            <a:endParaRPr lang="en-US" sz="1350" dirty="0"/>
+          </a:p>
+          <a:p>
+            <a:pPr algn="l" indent="0" marL="0">
+              <a:spcAft>
+                <a:spcPts val="600"/>
+              </a:spcAft>
+              <a:buNone/>
+            </a:pPr>
+            <a:r>
+              <a:rPr lang="en-US" sz="1350" dirty="0">
+                <a:solidFill>
+                  <a:srgbClr val="33444F"/>
+                </a:solidFill>
+                <a:latin typeface="Calibri" pitchFamily="34" charset="0"/>
+                <a:ea typeface="Calibri" pitchFamily="34" charset="-122"/>
+                <a:cs typeface="Calibri" pitchFamily="34" charset="-120"/>
+              </a:rPr>
+              <a:t>E. A failed run</a:t>
+            </a:r>
+            <a:endParaRPr lang="en-US" sz="1350" dirty="0"/>
+          </a:p>
+        </p:txBody>
+      </p:sp>
+      <p:sp>
+        <p:nvSpPr>
+          <p:cNvPr id="6" name="Shape 4"/>
+          <p:cNvSpPr/>
+          <p:nvPr/>
+        </p:nvSpPr>
+        <p:spPr>
+          <a:xfrm>
+            <a:off x="7201632" y="2395728"/>
+            <a:ext cx="4423136" cy="3246120"/>
+          </a:xfrm>
+          <a:prstGeom prst="roundRect">
+            <a:avLst>
+              <a:gd name="adj" fmla="val 2535"/>
+            </a:avLst>
+          </a:prstGeom>
+          <a:solidFill>
+            <a:srgbClr val="E0F2F4"/>
+          </a:solidFill>
+          <a:ln/>
+          <a:effectLst>
+            <a:outerShdw sx="100000" sy="100000" kx="0" ky="0" algn="bl" rotWithShape="0" blurRad="88900" dist="25400" dir="5400000">
+              <a:srgbClr val="22303C">
+                <a:alpha val="12000"/>
+              </a:srgbClr>
+            </a:outerShdw>
+          </a:effectLst>
+        </p:spPr>
+        <p:txBody>
+          <a:bodyPr/>
+          <a:p/>
+        </p:txBody>
+      </p:sp>
+      <p:sp>
+        <p:nvSpPr>
+          <p:cNvPr id="7" name="Text 5"/>
+          <p:cNvSpPr/>
+          <p:nvPr/>
+        </p:nvSpPr>
+        <p:spPr>
+          <a:xfrm>
+            <a:off x="7439376" y="2578608"/>
+            <a:ext cx="3965936" cy="457200"/>
+          </a:xfrm>
+          <a:prstGeom prst="rect">
+            <a:avLst/>
+          </a:prstGeom>
+          <a:noFill/>
+          <a:ln/>
+        </p:spPr>
+        <p:txBody>
+          <a:bodyPr wrap="square" lIns="0" tIns="0" rIns="0" bIns="0" rtlCol="0" anchor="ctr"/>
+          <a:lstStyle/>
+          <a:p>
+            <a:pPr indent="0" marL="0">
+              <a:buNone/>
+            </a:pPr>
+            <a:r>
+              <a:rPr lang="en-US" sz="1500" b="1" dirty="0">
+                <a:solidFill>
+                  <a:srgbClr val="00838F"/>
+                </a:solidFill>
+                <a:latin typeface="Calibri" pitchFamily="34" charset="0"/>
+                <a:ea typeface="Calibri" pitchFamily="34" charset="-122"/>
+                <a:cs typeface="Calibri" pitchFamily="34" charset="-120"/>
+              </a:rPr>
+              <a:t>ANSWER  </a:t>
+            </a:r>
+            <a:pPr indent="0" marL="0">
+              <a:buNone/>
+            </a:pPr>
+            <a:r>
+              <a:rPr lang="en-US" sz="1500" b="1" dirty="0">
+                <a:solidFill>
+                  <a:srgbClr val="1B2A38"/>
+                </a:solidFill>
+                <a:latin typeface="Calibri" pitchFamily="34" charset="0"/>
+                <a:ea typeface="Calibri" pitchFamily="34" charset="-122"/>
+                <a:cs typeface="Calibri" pitchFamily="34" charset="-120"/>
+              </a:rPr>
+              <a:t>B — More starting template</a:t>
+            </a:r>
+            <a:endParaRPr lang="en-US" sz="1500" dirty="0"/>
+          </a:p>
+        </p:txBody>
+      </p:sp>
+      <p:sp>
+        <p:nvSpPr>
+          <p:cNvPr id="8" name="Text 6"/>
+          <p:cNvSpPr/>
+          <p:nvPr/>
+        </p:nvSpPr>
+        <p:spPr>
+          <a:xfrm>
+            <a:off x="7439376" y="3127248"/>
+            <a:ext cx="3947648" cy="2377440"/>
+          </a:xfrm>
+          <a:prstGeom prst="rect">
+            <a:avLst/>
+          </a:prstGeom>
+          <a:noFill/>
+          <a:ln/>
+        </p:spPr>
+        <p:txBody>
+          <a:bodyPr wrap="square" lIns="0" tIns="0" rIns="0" bIns="0" rtlCol="0" anchor="t"/>
+          <a:lstStyle/>
+          <a:p>
+            <a:pPr algn="l" indent="0" marL="0">
+              <a:lnSpc>
+                <a:spcPct val="108000"/>
+              </a:lnSpc>
+              <a:buNone/>
+            </a:pPr>
+            <a:r>
+              <a:rPr lang="en-US" sz="1250" dirty="0">
+                <a:solidFill>
+                  <a:srgbClr val="33444F"/>
+                </a:solidFill>
+                <a:latin typeface="Calibri" pitchFamily="34" charset="0"/>
+                <a:ea typeface="Calibri" pitchFamily="34" charset="-122"/>
+                <a:cs typeface="Calibri" pitchFamily="34" charset="-120"/>
+              </a:rPr>
+              <a:t>Ct is inversely related to the amount of starting target; lower Ct means more template.</a:t>
+            </a:r>
+            <a:endParaRPr lang="en-US" sz="1250" dirty="0"/>
+          </a:p>
+        </p:txBody>
+      </p:sp>
+      <p:sp>
+        <p:nvSpPr>
+          <p:cNvPr id="9" name="Text 7"/>
+          <p:cNvSpPr/>
+          <p:nvPr/>
+        </p:nvSpPr>
+        <p:spPr>
+          <a:xfrm>
+            <a:off x="566928" y="6473952"/>
+            <a:ext cx="7772400" cy="274320"/>
+          </a:xfrm>
+          <a:prstGeom prst="rect">
+            <a:avLst/>
+          </a:prstGeom>
+          <a:noFill/>
+          <a:ln/>
+        </p:spPr>
+        <p:txBody>
+          <a:bodyPr wrap="square" lIns="0" tIns="0" rIns="0" bIns="0" rtlCol="0" anchor="ctr"/>
+          <a:lstStyle/>
+          <a:p>
+            <a:pPr algn="l" indent="0" marL="0">
+              <a:buNone/>
+            </a:pPr>
+            <a:r>
+              <a:rPr lang="en-US" sz="850" dirty="0">
+                <a:solidFill>
+                  <a:srgbClr val="9AA8B4"/>
+                </a:solidFill>
+                <a:latin typeface="Calibri" pitchFamily="34" charset="0"/>
+                <a:ea typeface="Calibri" pitchFamily="34" charset="-122"/>
+                <a:cs typeface="Calibri" pitchFamily="34" charset="-120"/>
+              </a:rPr>
+              <a:t>Makassed General Hospital  ·  Department of Laboratory Medicine</a:t>
+            </a:r>
+            <a:endParaRPr lang="en-US" sz="850" dirty="0"/>
+          </a:p>
+        </p:txBody>
+      </p:sp>
+      <p:sp>
+        <p:nvSpPr>
+          <p:cNvPr id="10" name="Text 8"/>
+          <p:cNvSpPr/>
+          <p:nvPr/>
+        </p:nvSpPr>
+        <p:spPr>
+          <a:xfrm>
+            <a:off x="9814255" y="6473952"/>
+            <a:ext cx="1828800" cy="274320"/>
+          </a:xfrm>
+          <a:prstGeom prst="rect">
+            <a:avLst/>
+          </a:prstGeom>
+          <a:noFill/>
+          <a:ln/>
+        </p:spPr>
+        <p:txBody>
+          <a:bodyPr wrap="square" lIns="0" tIns="0" rIns="0" bIns="0" rtlCol="0" anchor="ctr"/>
+          <a:lstStyle/>
+          <a:p>
+            <a:pPr algn="r" indent="0" marL="0">
+              <a:buNone/>
+            </a:pPr>
+            <a:r>
+              <a:rPr lang="en-US" sz="850" dirty="0">
+                <a:solidFill>
+                  <a:srgbClr val="9AA8B4"/>
+                </a:solidFill>
+                <a:latin typeface="Calibri" pitchFamily="34" charset="0"/>
+                <a:ea typeface="Calibri" pitchFamily="34" charset="-122"/>
+                <a:cs typeface="Calibri" pitchFamily="34" charset="-120"/>
+              </a:rPr>
+              <a:t>CP Lecture Series</a:t>
+            </a:r>
+            <a:pPr algn="r" indent="0" marL="0">
+              <a:buNone/>
+            </a:pPr>
+            <a:r>
+              <a:rPr lang="en-US" sz="850" dirty="0">
+                <a:solidFill>
+                  <a:srgbClr val="DCE4EC"/>
+                </a:solidFill>
+                <a:latin typeface="Calibri" pitchFamily="34" charset="0"/>
+                <a:ea typeface="Calibri" pitchFamily="34" charset="-122"/>
+                <a:cs typeface="Calibri" pitchFamily="34" charset="-120"/>
+              </a:rPr>
+              <a:t>   ·   </a:t>
+            </a:r>
+            <a:pPr algn="r" indent="0" marL="0">
+              <a:buNone/>
+            </a:pPr>
+            <a:r>
+              <a:rPr lang="en-US" sz="850" b="1" dirty="0">
+                <a:solidFill>
+                  <a:srgbClr val="00838F"/>
+                </a:solidFill>
+                <a:latin typeface="Calibri" pitchFamily="34" charset="0"/>
+                <a:ea typeface="Calibri" pitchFamily="34" charset="-122"/>
+                <a:cs typeface="Calibri" pitchFamily="34" charset="-120"/>
+              </a:rPr>
+              <a:t>18</a:t>
             </a:r>
             <a:endParaRPr lang="en-US" sz="850" dirty="0"/>
           </a:p>
@@ -13224,6 +14900,10 @@
             </a:outerShdw>
           </a:effectLst>
         </p:spPr>
+        <p:txBody>
+          <a:bodyPr/>
+          <a:p/>
+        </p:txBody>
       </p:sp>
       <p:sp>
         <p:nvSpPr>
@@ -13251,6 +14931,10 @@
             </a:outerShdw>
           </a:effectLst>
         </p:spPr>
+        <p:txBody>
+          <a:bodyPr/>
+          <a:p/>
+        </p:txBody>
       </p:sp>
       <p:sp>
         <p:nvSpPr>
@@ -13365,6 +15049,10 @@
           </a:solidFill>
           <a:ln/>
         </p:spPr>
+        <p:txBody>
+          <a:bodyPr/>
+          <a:p/>
+        </p:txBody>
       </p:sp>
       <p:sp>
         <p:nvSpPr>
@@ -13392,6 +15080,10 @@
             </a:outerShdw>
           </a:effectLst>
         </p:spPr>
+        <p:txBody>
+          <a:bodyPr/>
+          <a:p/>
+        </p:txBody>
       </p:sp>
       <p:sp>
         <p:nvSpPr>
@@ -13513,6 +15205,10 @@
             </a:outerShdw>
           </a:effectLst>
         </p:spPr>
+        <p:txBody>
+          <a:bodyPr/>
+          <a:p/>
+        </p:txBody>
       </p:sp>
       <p:sp>
         <p:nvSpPr>
@@ -13540,6 +15236,10 @@
             </a:outerShdw>
           </a:effectLst>
         </p:spPr>
+        <p:txBody>
+          <a:bodyPr/>
+          <a:p/>
+        </p:txBody>
       </p:sp>
       <p:sp>
         <p:nvSpPr>
@@ -13654,6 +15354,10 @@
           </a:solidFill>
           <a:ln/>
         </p:spPr>
+        <p:txBody>
+          <a:bodyPr/>
+          <a:p/>
+        </p:txBody>
       </p:sp>
       <p:sp>
         <p:nvSpPr>
@@ -13681,6 +15385,10 @@
             </a:outerShdw>
           </a:effectLst>
         </p:spPr>
+        <p:txBody>
+          <a:bodyPr/>
+          <a:p/>
+        </p:txBody>
       </p:sp>
       <p:sp>
         <p:nvSpPr>
@@ -13802,6 +15510,10 @@
             </a:outerShdw>
           </a:effectLst>
         </p:spPr>
+        <p:txBody>
+          <a:bodyPr/>
+          <a:p/>
+        </p:txBody>
       </p:sp>
       <p:sp>
         <p:nvSpPr>
@@ -13829,6 +15541,10 @@
             </a:outerShdw>
           </a:effectLst>
         </p:spPr>
+        <p:txBody>
+          <a:bodyPr/>
+          <a:p/>
+        </p:txBody>
       </p:sp>
       <p:sp>
         <p:nvSpPr>
@@ -14067,6 +15783,10 @@
           </a:solidFill>
           <a:ln/>
         </p:spPr>
+        <p:txBody>
+          <a:bodyPr/>
+          <a:p/>
+        </p:txBody>
       </p:sp>
       <p:sp>
         <p:nvSpPr>
@@ -14089,6 +15809,10 @@
           </a:solidFill>
           <a:ln/>
         </p:spPr>
+        <p:txBody>
+          <a:bodyPr/>
+          <a:p/>
+        </p:txBody>
       </p:sp>
       <p:sp>
         <p:nvSpPr>
@@ -14350,6 +16074,10 @@
             </a:outerShdw>
           </a:effectLst>
         </p:spPr>
+        <p:txBody>
+          <a:bodyPr/>
+          <a:p/>
+        </p:txBody>
       </p:sp>
       <p:pic>
         <p:nvPicPr>
@@ -14658,6 +16386,10 @@
             </a:outerShdw>
           </a:effectLst>
         </p:spPr>
+        <p:txBody>
+          <a:bodyPr/>
+          <a:p/>
+        </p:txBody>
       </p:sp>
       <p:sp>
         <p:nvSpPr>
@@ -14832,6 +16564,10 @@
             </a:outerShdw>
           </a:effectLst>
         </p:spPr>
+        <p:txBody>
+          <a:bodyPr/>
+          <a:p/>
+        </p:txBody>
       </p:sp>
       <p:sp>
         <p:nvSpPr>
@@ -15222,6 +16958,10 @@
             </a:outerShdw>
           </a:effectLst>
         </p:spPr>
+        <p:txBody>
+          <a:bodyPr/>
+          <a:p/>
+        </p:txBody>
       </p:sp>
       <p:sp>
         <p:nvSpPr>
@@ -15396,6 +17136,10 @@
             </a:outerShdw>
           </a:effectLst>
         </p:spPr>
+        <p:txBody>
+          <a:bodyPr/>
+          <a:p/>
+        </p:txBody>
       </p:sp>
       <p:sp>
         <p:nvSpPr>
@@ -15701,6 +17445,10 @@
           </a:solidFill>
           <a:ln/>
         </p:spPr>
+        <p:txBody>
+          <a:bodyPr/>
+          <a:p/>
+        </p:txBody>
       </p:sp>
       <p:sp>
         <p:nvSpPr>
@@ -15723,6 +17471,10 @@
           </a:solidFill>
           <a:ln/>
         </p:spPr>
+        <p:txBody>
+          <a:bodyPr/>
+          <a:p/>
+        </p:txBody>
       </p:sp>
       <p:sp>
         <p:nvSpPr>
